--- a/docs/slides/第2組_海勤決策系統_期末簡報.pptx
+++ b/docs/slides/第2組_海勤決策系統_期末簡報.pptx
@@ -3165,7 +3165,6 @@
               <a:srgbClr val="C8922E"/>
             </a:solidFill>
           </a:ln>
-          <a:effectLst/>
         </p:spPr>
         <p:style>
           <a:lnRef idx="2">
@@ -3202,7 +3201,6 @@
           <a:ln>
             <a:noFill/>
           </a:ln>
-          <a:effectLst/>
         </p:spPr>
         <p:style>
           <a:lnRef idx="1">
@@ -3381,126 +3379,36 @@
       </p:sp>
       <p:sp>
         <p:nvSpPr>
-          <p:cNvPr id="7" name="Rounded Rectangle 6"/>
-          <p:cNvSpPr/>
-          <p:nvPr/>
-        </p:nvSpPr>
-        <p:spPr>
-          <a:xfrm>
-            <a:off x="640080" y="3794760"/>
-            <a:ext cx="8778240" cy="640080"/>
-          </a:xfrm>
-          <a:prstGeom prst="roundRect">
-            <a:avLst>
-              <a:gd name="adj" fmla="val 12000"/>
-            </a:avLst>
-          </a:prstGeom>
-          <a:solidFill>
-            <a:srgbClr val="F3F7F9"/>
-          </a:solidFill>
-          <a:ln>
-            <a:noFill/>
-          </a:ln>
-          <a:effectLst/>
-        </p:spPr>
-        <p:style>
-          <a:lnRef idx="1">
-            <a:schemeClr val="accent1"/>
-          </a:lnRef>
-          <a:fillRef idx="3">
-            <a:schemeClr val="accent1"/>
-          </a:fillRef>
-          <a:effectRef idx="2">
-            <a:schemeClr val="accent1"/>
-          </a:effectRef>
-          <a:fontRef idx="minor">
-            <a:schemeClr val="lt1"/>
-          </a:fontRef>
-        </p:style>
-        <p:txBody>
-          <a:bodyPr rtlCol="0" anchor="ctr"/>
-          <a:lstStyle/>
-          <a:p>
-            <a:pPr algn="ctr"/>
-          </a:p>
-        </p:txBody>
-      </p:sp>
-      <p:sp>
-        <p:nvSpPr>
-          <p:cNvPr id="8" name="Rectangle 7"/>
-          <p:cNvSpPr/>
-          <p:nvPr/>
-        </p:nvSpPr>
-        <p:spPr>
-          <a:xfrm>
-            <a:off x="640080" y="3794760"/>
-            <a:ext cx="73152" cy="640080"/>
-          </a:xfrm>
-          <a:prstGeom prst="rect">
-            <a:avLst/>
-          </a:prstGeom>
-          <a:solidFill>
-            <a:srgbClr val="C8922E"/>
-          </a:solidFill>
-          <a:ln>
-            <a:noFill/>
-          </a:ln>
-          <a:effectLst/>
-        </p:spPr>
-        <p:style>
-          <a:lnRef idx="1">
-            <a:schemeClr val="accent1"/>
-          </a:lnRef>
-          <a:fillRef idx="3">
-            <a:schemeClr val="accent1"/>
-          </a:fillRef>
-          <a:effectRef idx="2">
-            <a:schemeClr val="accent1"/>
-          </a:effectRef>
-          <a:fontRef idx="minor">
-            <a:schemeClr val="lt1"/>
-          </a:fontRef>
-        </p:style>
-        <p:txBody>
-          <a:bodyPr rtlCol="0" anchor="ctr"/>
-          <a:lstStyle/>
-          <a:p>
-            <a:pPr algn="ctr"/>
-          </a:p>
-        </p:txBody>
-      </p:sp>
-      <p:sp>
-        <p:nvSpPr>
-          <p:cNvPr id="9" name="TextBox 8"/>
-          <p:cNvSpPr txBox="1"/>
-          <p:nvPr/>
-        </p:nvSpPr>
-        <p:spPr>
-          <a:xfrm>
-            <a:off x="914400" y="3794760"/>
-            <a:ext cx="8412480" cy="640080"/>
-          </a:xfrm>
-          <a:prstGeom prst="rect">
-            <a:avLst/>
-          </a:prstGeom>
-          <a:noFill/>
-        </p:spPr>
-        <p:txBody>
-          <a:bodyPr wrap="square" anchor="ctr" lIns="0" rIns="0" tIns="0" bIns="0">
-            <a:spAutoFit/>
-          </a:bodyPr>
-          <a:lstStyle/>
-          <a:p>
-            <a:pPr algn="l">
-              <a:lnSpc>
-                <a:spcPct val="112000"/>
-              </a:lnSpc>
-              <a:spcAft>
-                <a:spcPts val="500"/>
-              </a:spcAft>
-            </a:pPr>
-            <a:r>
-              <a:rPr sz="1600" b="0" i="1">
+          <p:cNvPr id="7" name="TextBox 6"/>
+          <p:cNvSpPr txBox="1"/>
+          <p:nvPr/>
+        </p:nvSpPr>
+        <p:spPr>
+          <a:xfrm>
+            <a:off x="640080" y="3931920"/>
+            <a:ext cx="7315200" cy="822960"/>
+          </a:xfrm>
+          <a:prstGeom prst="rect">
+            <a:avLst/>
+          </a:prstGeom>
+          <a:noFill/>
+        </p:spPr>
+        <p:txBody>
+          <a:bodyPr wrap="square" anchor="t" lIns="0" rIns="0" tIns="0" bIns="0">
+            <a:spAutoFit/>
+          </a:bodyPr>
+          <a:lstStyle/>
+          <a:p>
+            <a:pPr algn="l">
+              <a:lnSpc>
+                <a:spcPct val="112000"/>
+              </a:lnSpc>
+              <a:spcAft>
+                <a:spcPts val="400"/>
+              </a:spcAft>
+            </a:pPr>
+            <a:r>
+              <a:rPr sz="1400" b="1" i="0">
                 <a:solidFill>
                   <a:srgbClr val="1C3D5A"/>
                 </a:solidFill>
@@ -3508,50 +3416,6 @@
                 <a:ea typeface="Microsoft JhengHei"/>
                 <a:cs typeface="Microsoft JhengHei"/>
               </a:rPr>
-              <a:t>「別人把海象畫成圖，我們把海象變成 — 明天誰上哪艘船。」</a:t>
-            </a:r>
-          </a:p>
-        </p:txBody>
-      </p:sp>
-      <p:sp>
-        <p:nvSpPr>
-          <p:cNvPr id="10" name="TextBox 9"/>
-          <p:cNvSpPr txBox="1"/>
-          <p:nvPr/>
-        </p:nvSpPr>
-        <p:spPr>
-          <a:xfrm>
-            <a:off x="640080" y="4800600"/>
-            <a:ext cx="7315200" cy="822960"/>
-          </a:xfrm>
-          <a:prstGeom prst="rect">
-            <a:avLst/>
-          </a:prstGeom>
-          <a:noFill/>
-        </p:spPr>
-        <p:txBody>
-          <a:bodyPr wrap="square" anchor="t" lIns="0" rIns="0" tIns="0" bIns="0">
-            <a:spAutoFit/>
-          </a:bodyPr>
-          <a:lstStyle/>
-          <a:p>
-            <a:pPr algn="l">
-              <a:lnSpc>
-                <a:spcPct val="112000"/>
-              </a:lnSpc>
-              <a:spcAft>
-                <a:spcPts val="400"/>
-              </a:spcAft>
-            </a:pPr>
-            <a:r>
-              <a:rPr sz="1400" b="1" i="0">
-                <a:solidFill>
-                  <a:srgbClr val="1C3D5A"/>
-                </a:solidFill>
-                <a:latin typeface="Microsoft JhengHei"/>
-                <a:ea typeface="Microsoft JhengHei"/>
-                <a:cs typeface="Microsoft JhengHei"/>
-              </a:rPr>
               <a:t>114-2 巨量資料與雲端運算　|　第 2 組</a:t>
             </a:r>
           </a:p>
@@ -3601,7 +3465,7 @@
       </p:sp>
       <p:sp>
         <p:nvSpPr>
-          <p:cNvPr id="11" name="TextBox 10"/>
+          <p:cNvPr id="8" name="TextBox 7"/>
           <p:cNvSpPr txBox="1"/>
           <p:nvPr/>
         </p:nvSpPr>
@@ -3645,7 +3509,7 @@
       </p:sp>
       <p:sp>
         <p:nvSpPr>
-          <p:cNvPr id="12" name="TextBox 11"/>
+          <p:cNvPr id="9" name="TextBox 8"/>
           <p:cNvSpPr txBox="1"/>
           <p:nvPr/>
         </p:nvSpPr>
@@ -3689,7 +3553,7 @@
       </p:sp>
       <p:cxnSp>
         <p:nvCxnSpPr>
-          <p:cNvPr id="13" name="Connector 12"/>
+          <p:cNvPr id="10" name="Connector 9"/>
           <p:cNvCxnSpPr/>
           <p:nvPr/>
         </p:nvCxnSpPr>
@@ -3706,7 +3570,6 @@
               <a:srgbClr val="D7E0E6"/>
             </a:solidFill>
           </a:ln>
-          <a:effectLst/>
         </p:spPr>
         <p:style>
           <a:lnRef idx="2">
@@ -3725,7 +3588,7 @@
       </p:cxnSp>
       <p:sp>
         <p:nvSpPr>
-          <p:cNvPr id="14" name="TextBox 13"/>
+          <p:cNvPr id="11" name="TextBox 10"/>
           <p:cNvSpPr txBox="1"/>
           <p:nvPr/>
         </p:nvSpPr>
@@ -3769,7 +3632,7 @@
       </p:sp>
       <p:sp>
         <p:nvSpPr>
-          <p:cNvPr id="15" name="TextBox 14"/>
+          <p:cNvPr id="12" name="TextBox 11"/>
           <p:cNvSpPr txBox="1"/>
           <p:nvPr/>
         </p:nvSpPr>
@@ -3813,7 +3676,7 @@
       </p:sp>
       <p:cxnSp>
         <p:nvCxnSpPr>
-          <p:cNvPr id="16" name="Connector 15"/>
+          <p:cNvPr id="13" name="Connector 12"/>
           <p:cNvCxnSpPr/>
           <p:nvPr/>
         </p:nvCxnSpPr>
@@ -3830,7 +3693,6 @@
               <a:srgbClr val="D7E0E6"/>
             </a:solidFill>
           </a:ln>
-          <a:effectLst/>
         </p:spPr>
         <p:style>
           <a:lnRef idx="2">
@@ -3849,7 +3711,7 @@
       </p:cxnSp>
       <p:sp>
         <p:nvSpPr>
-          <p:cNvPr id="17" name="TextBox 16"/>
+          <p:cNvPr id="14" name="TextBox 13"/>
           <p:cNvSpPr txBox="1"/>
           <p:nvPr/>
         </p:nvSpPr>
@@ -3893,7 +3755,7 @@
       </p:sp>
       <p:sp>
         <p:nvSpPr>
-          <p:cNvPr id="18" name="TextBox 17"/>
+          <p:cNvPr id="15" name="TextBox 14"/>
           <p:cNvSpPr txBox="1"/>
           <p:nvPr/>
         </p:nvSpPr>
@@ -3937,7 +3799,7 @@
       </p:sp>
       <p:cxnSp>
         <p:nvCxnSpPr>
-          <p:cNvPr id="19" name="Connector 18"/>
+          <p:cNvPr id="16" name="Connector 15"/>
           <p:cNvCxnSpPr/>
           <p:nvPr/>
         </p:nvCxnSpPr>
@@ -3954,7 +3816,6 @@
               <a:srgbClr val="D7E0E6"/>
             </a:solidFill>
           </a:ln>
-          <a:effectLst/>
         </p:spPr>
         <p:style>
           <a:lnRef idx="2">
@@ -3973,7 +3834,7 @@
       </p:cxnSp>
       <p:sp>
         <p:nvSpPr>
-          <p:cNvPr id="20" name="TextBox 19"/>
+          <p:cNvPr id="17" name="TextBox 16"/>
           <p:cNvSpPr txBox="1"/>
           <p:nvPr/>
         </p:nvSpPr>
@@ -4017,7 +3878,7 @@
       </p:sp>
       <p:sp>
         <p:nvSpPr>
-          <p:cNvPr id="21" name="TextBox 20"/>
+          <p:cNvPr id="18" name="TextBox 17"/>
           <p:cNvSpPr txBox="1"/>
           <p:nvPr/>
         </p:nvSpPr>
@@ -4061,7 +3922,7 @@
       </p:sp>
       <p:cxnSp>
         <p:nvCxnSpPr>
-          <p:cNvPr id="22" name="Connector 21"/>
+          <p:cNvPr id="19" name="Connector 18"/>
           <p:cNvCxnSpPr/>
           <p:nvPr/>
         </p:nvCxnSpPr>
@@ -4078,7 +3939,6 @@
               <a:srgbClr val="D7E0E6"/>
             </a:solidFill>
           </a:ln>
-          <a:effectLst/>
         </p:spPr>
         <p:style>
           <a:lnRef idx="2">
@@ -4097,7 +3957,7 @@
       </p:cxnSp>
       <p:sp>
         <p:nvSpPr>
-          <p:cNvPr id="23" name="TextBox 22"/>
+          <p:cNvPr id="20" name="TextBox 19"/>
           <p:cNvSpPr txBox="1"/>
           <p:nvPr/>
         </p:nvSpPr>
@@ -4272,7 +4132,6 @@
               <a:srgbClr val="C8922E"/>
             </a:solidFill>
           </a:ln>
-          <a:effectLst/>
         </p:spPr>
         <p:style>
           <a:lnRef idx="2">
@@ -4308,7 +4167,6 @@
               <a:srgbClr val="D7E0E6"/>
             </a:solidFill>
           </a:ln>
-          <a:effectLst/>
         </p:spPr>
         <p:style>
           <a:lnRef idx="2">
@@ -4433,7 +4291,6 @@
           <a:ln>
             <a:noFill/>
           </a:ln>
-          <a:effectLst/>
         </p:spPr>
         <p:style>
           <a:lnRef idx="1">
@@ -4521,7 +4378,6 @@
           <a:ln>
             <a:noFill/>
           </a:ln>
-          <a:effectLst/>
         </p:spPr>
         <p:style>
           <a:lnRef idx="1">
@@ -4609,7 +4465,6 @@
           <a:ln>
             <a:noFill/>
           </a:ln>
-          <a:effectLst/>
         </p:spPr>
         <p:style>
           <a:lnRef idx="1">
@@ -4697,7 +4552,6 @@
           <a:ln>
             <a:noFill/>
           </a:ln>
-          <a:effectLst/>
         </p:spPr>
         <p:style>
           <a:lnRef idx="1">
@@ -4873,7 +4727,6 @@
           <a:ln>
             <a:noFill/>
           </a:ln>
-          <a:effectLst/>
         </p:spPr>
         <p:style>
           <a:lnRef idx="1">
@@ -5049,7 +4902,6 @@
           <a:ln>
             <a:noFill/>
           </a:ln>
-          <a:effectLst/>
         </p:spPr>
         <p:style>
           <a:lnRef idx="1">
@@ -5225,7 +5077,6 @@
           <a:ln>
             <a:noFill/>
           </a:ln>
-          <a:effectLst/>
         </p:spPr>
         <p:style>
           <a:lnRef idx="1">
@@ -5401,7 +5252,6 @@
           <a:ln>
             <a:noFill/>
           </a:ln>
-          <a:effectLst/>
         </p:spPr>
         <p:style>
           <a:lnRef idx="1">
@@ -5577,7 +5427,6 @@
           <a:ln>
             <a:noFill/>
           </a:ln>
-          <a:effectLst/>
         </p:spPr>
         <p:style>
           <a:lnRef idx="1">
@@ -5753,7 +5602,6 @@
           <a:ln>
             <a:noFill/>
           </a:ln>
-          <a:effectLst/>
         </p:spPr>
         <p:style>
           <a:lnRef idx="1">
@@ -5929,7 +5777,6 @@
           <a:ln>
             <a:noFill/>
           </a:ln>
-          <a:effectLst/>
         </p:spPr>
         <p:style>
           <a:lnRef idx="1">
@@ -6105,7 +5952,6 @@
           <a:ln>
             <a:noFill/>
           </a:ln>
-          <a:effectLst/>
         </p:spPr>
         <p:style>
           <a:lnRef idx="1">
@@ -6281,7 +6127,6 @@
               <a:srgbClr val="D7E0E6"/>
             </a:solidFill>
           </a:ln>
-          <a:effectLst/>
         </p:spPr>
         <p:style>
           <a:lnRef idx="1">
@@ -6438,7 +6283,6 @@
               <a:srgbClr val="C8922E"/>
             </a:solidFill>
           </a:ln>
-          <a:effectLst/>
         </p:spPr>
         <p:style>
           <a:lnRef idx="2">
@@ -6474,7 +6318,6 @@
               <a:srgbClr val="D7E0E6"/>
             </a:solidFill>
           </a:ln>
-          <a:effectLst/>
         </p:spPr>
         <p:style>
           <a:lnRef idx="2">
@@ -6601,13 +6444,6 @@
           <a:ln>
             <a:noFill/>
           </a:ln>
-          <a:effectLst>
-            <a:outerShdw blurRad="88900" dist="44450" dir="5400000" rotWithShape="0">
-              <a:srgbClr val="1C3D5A">
-                <a:alpha val="20000"/>
-              </a:srgbClr>
-            </a:outerShdw>
-          </a:effectLst>
         </p:spPr>
         <p:style>
           <a:lnRef idx="1">
@@ -6651,7 +6487,6 @@
           <a:ln>
             <a:noFill/>
           </a:ln>
-          <a:effectLst/>
         </p:spPr>
         <p:style>
           <a:lnRef idx="1">
@@ -6695,7 +6530,6 @@
           <a:ln>
             <a:noFill/>
           </a:ln>
-          <a:effectLst/>
         </p:spPr>
         <p:style>
           <a:lnRef idx="1">
@@ -6739,7 +6573,6 @@
           <a:ln>
             <a:noFill/>
           </a:ln>
-          <a:effectLst/>
         </p:spPr>
         <p:style>
           <a:lnRef idx="1">
@@ -6783,7 +6616,6 @@
           <a:ln>
             <a:noFill/>
           </a:ln>
-          <a:effectLst/>
         </p:spPr>
         <p:style>
           <a:lnRef idx="1">
@@ -7460,13 +7292,6 @@
               <a:srgbClr val="D7E0E6"/>
             </a:solidFill>
           </a:ln>
-          <a:effectLst>
-            <a:outerShdw blurRad="88900" dist="44450" dir="5400000" rotWithShape="0">
-              <a:srgbClr val="1C3D5A">
-                <a:alpha val="20000"/>
-              </a:srgbClr>
-            </a:outerShdw>
-          </a:effectLst>
         </p:spPr>
         <p:style>
           <a:lnRef idx="1">
@@ -7602,13 +7427,6 @@
               <a:srgbClr val="D7E0E6"/>
             </a:solidFill>
           </a:ln>
-          <a:effectLst>
-            <a:outerShdw blurRad="88900" dist="44450" dir="5400000" rotWithShape="0">
-              <a:srgbClr val="1C3D5A">
-                <a:alpha val="20000"/>
-              </a:srgbClr>
-            </a:outerShdw>
-          </a:effectLst>
         </p:spPr>
         <p:style>
           <a:lnRef idx="1">
@@ -7744,13 +7562,6 @@
               <a:srgbClr val="D7E0E6"/>
             </a:solidFill>
           </a:ln>
-          <a:effectLst>
-            <a:outerShdw blurRad="88900" dist="44450" dir="5400000" rotWithShape="0">
-              <a:srgbClr val="1C3D5A">
-                <a:alpha val="20000"/>
-              </a:srgbClr>
-            </a:outerShdw>
-          </a:effectLst>
         </p:spPr>
         <p:style>
           <a:lnRef idx="1">
@@ -7886,13 +7697,6 @@
               <a:srgbClr val="D7E0E6"/>
             </a:solidFill>
           </a:ln>
-          <a:effectLst>
-            <a:outerShdw blurRad="88900" dist="44450" dir="5400000" rotWithShape="0">
-              <a:srgbClr val="1C3D5A">
-                <a:alpha val="20000"/>
-              </a:srgbClr>
-            </a:outerShdw>
-          </a:effectLst>
         </p:spPr>
         <p:style>
           <a:lnRef idx="1">
@@ -8137,7 +7941,6 @@
               <a:srgbClr val="C8922E"/>
             </a:solidFill>
           </a:ln>
-          <a:effectLst/>
         </p:spPr>
         <p:style>
           <a:lnRef idx="2">
@@ -8173,7 +7976,6 @@
               <a:srgbClr val="D7E0E6"/>
             </a:solidFill>
           </a:ln>
-          <a:effectLst/>
         </p:spPr>
         <p:style>
           <a:lnRef idx="2">
@@ -8305,13 +8107,6 @@
               <a:srgbClr val="C5D2DA"/>
             </a:solidFill>
           </a:ln>
-          <a:effectLst>
-            <a:outerShdw blurRad="114300" dist="50800" dir="5400000" rotWithShape="0">
-              <a:srgbClr val="1C3D5A">
-                <a:alpha val="16000"/>
-              </a:srgbClr>
-            </a:outerShdw>
-          </a:effectLst>
         </p:spPr>
       </p:pic>
       <p:sp>
@@ -8336,7 +8131,6 @@
           <a:ln>
             <a:noFill/>
           </a:ln>
-          <a:effectLst/>
         </p:spPr>
         <p:style>
           <a:lnRef idx="1">
@@ -8380,7 +8174,6 @@
           <a:ln>
             <a:noFill/>
           </a:ln>
-          <a:effectLst/>
         </p:spPr>
         <p:style>
           <a:lnRef idx="1">
@@ -8538,7 +8331,6 @@
           <a:ln>
             <a:noFill/>
           </a:ln>
-          <a:effectLst/>
         </p:spPr>
         <p:style>
           <a:lnRef idx="1">
@@ -8757,7 +8549,6 @@
               <a:srgbClr val="C8922E"/>
             </a:solidFill>
           </a:ln>
-          <a:effectLst/>
         </p:spPr>
         <p:style>
           <a:lnRef idx="2">
@@ -8837,7 +8628,6 @@
               <a:srgbClr val="D7E0E6"/>
             </a:solidFill>
           </a:ln>
-          <a:effectLst/>
         </p:spPr>
         <p:style>
           <a:lnRef idx="2">
@@ -9024,7 +8814,6 @@
               <a:srgbClr val="D7E0E6"/>
             </a:solidFill>
           </a:ln>
-          <a:effectLst/>
         </p:spPr>
         <p:style>
           <a:lnRef idx="2">
@@ -9218,7 +9007,6 @@
               <a:srgbClr val="C8922E"/>
             </a:solidFill>
           </a:ln>
-          <a:effectLst/>
         </p:spPr>
         <p:style>
           <a:lnRef idx="2">
@@ -9254,7 +9042,6 @@
               <a:srgbClr val="D7E0E6"/>
             </a:solidFill>
           </a:ln>
-          <a:effectLst/>
         </p:spPr>
         <p:style>
           <a:lnRef idx="2">
@@ -9383,13 +9170,6 @@
               <a:srgbClr val="D7E0E6"/>
             </a:solidFill>
           </a:ln>
-          <a:effectLst>
-            <a:outerShdw blurRad="88900" dist="44450" dir="5400000" rotWithShape="0">
-              <a:srgbClr val="1C3D5A">
-                <a:alpha val="20000"/>
-              </a:srgbClr>
-            </a:outerShdw>
-          </a:effectLst>
         </p:spPr>
         <p:style>
           <a:lnRef idx="1">
@@ -9433,7 +9213,6 @@
           <a:ln>
             <a:noFill/>
           </a:ln>
-          <a:effectLst/>
         </p:spPr>
         <p:style>
           <a:lnRef idx="1">
@@ -9613,13 +9392,6 @@
               <a:srgbClr val="D7E0E6"/>
             </a:solidFill>
           </a:ln>
-          <a:effectLst>
-            <a:outerShdw blurRad="88900" dist="44450" dir="5400000" rotWithShape="0">
-              <a:srgbClr val="1C3D5A">
-                <a:alpha val="20000"/>
-              </a:srgbClr>
-            </a:outerShdw>
-          </a:effectLst>
         </p:spPr>
         <p:style>
           <a:lnRef idx="1">
@@ -9663,7 +9435,6 @@
           <a:ln>
             <a:noFill/>
           </a:ln>
-          <a:effectLst/>
         </p:spPr>
         <p:style>
           <a:lnRef idx="1">
@@ -9843,13 +9614,6 @@
               <a:srgbClr val="D7E0E6"/>
             </a:solidFill>
           </a:ln>
-          <a:effectLst>
-            <a:outerShdw blurRad="88900" dist="44450" dir="5400000" rotWithShape="0">
-              <a:srgbClr val="1C3D5A">
-                <a:alpha val="20000"/>
-              </a:srgbClr>
-            </a:outerShdw>
-          </a:effectLst>
         </p:spPr>
         <p:style>
           <a:lnRef idx="1">
@@ -9893,7 +9657,6 @@
           <a:ln>
             <a:noFill/>
           </a:ln>
-          <a:effectLst/>
         </p:spPr>
         <p:style>
           <a:lnRef idx="1">
@@ -10073,13 +9836,6 @@
               <a:srgbClr val="D7E0E6"/>
             </a:solidFill>
           </a:ln>
-          <a:effectLst>
-            <a:outerShdw blurRad="88900" dist="44450" dir="5400000" rotWithShape="0">
-              <a:srgbClr val="1C3D5A">
-                <a:alpha val="20000"/>
-              </a:srgbClr>
-            </a:outerShdw>
-          </a:effectLst>
         </p:spPr>
         <p:style>
           <a:lnRef idx="1">
@@ -10123,7 +9879,6 @@
           <a:ln>
             <a:noFill/>
           </a:ln>
-          <a:effectLst/>
         </p:spPr>
         <p:style>
           <a:lnRef idx="1">
@@ -10303,13 +10058,6 @@
               <a:srgbClr val="D7E0E6"/>
             </a:solidFill>
           </a:ln>
-          <a:effectLst>
-            <a:outerShdw blurRad="88900" dist="44450" dir="5400000" rotWithShape="0">
-              <a:srgbClr val="1C3D5A">
-                <a:alpha val="20000"/>
-              </a:srgbClr>
-            </a:outerShdw>
-          </a:effectLst>
         </p:spPr>
         <p:style>
           <a:lnRef idx="1">
@@ -10353,7 +10101,6 @@
           <a:ln>
             <a:noFill/>
           </a:ln>
-          <a:effectLst/>
         </p:spPr>
         <p:style>
           <a:lnRef idx="1">
@@ -10533,13 +10280,6 @@
               <a:srgbClr val="D7E0E6"/>
             </a:solidFill>
           </a:ln>
-          <a:effectLst>
-            <a:outerShdw blurRad="88900" dist="44450" dir="5400000" rotWithShape="0">
-              <a:srgbClr val="1C3D5A">
-                <a:alpha val="20000"/>
-              </a:srgbClr>
-            </a:outerShdw>
-          </a:effectLst>
         </p:spPr>
         <p:style>
           <a:lnRef idx="1">
@@ -10583,7 +10323,6 @@
           <a:ln>
             <a:noFill/>
           </a:ln>
-          <a:effectLst/>
         </p:spPr>
         <p:style>
           <a:lnRef idx="1">
@@ -10763,13 +10502,6 @@
               <a:srgbClr val="D7E0E6"/>
             </a:solidFill>
           </a:ln>
-          <a:effectLst>
-            <a:outerShdw blurRad="88900" dist="44450" dir="5400000" rotWithShape="0">
-              <a:srgbClr val="1C3D5A">
-                <a:alpha val="20000"/>
-              </a:srgbClr>
-            </a:outerShdw>
-          </a:effectLst>
         </p:spPr>
         <p:style>
           <a:lnRef idx="1">
@@ -10813,7 +10545,6 @@
           <a:ln>
             <a:noFill/>
           </a:ln>
-          <a:effectLst/>
         </p:spPr>
         <p:style>
           <a:lnRef idx="1">
@@ -10993,13 +10724,6 @@
               <a:srgbClr val="D7E0E6"/>
             </a:solidFill>
           </a:ln>
-          <a:effectLst>
-            <a:outerShdw blurRad="88900" dist="44450" dir="5400000" rotWithShape="0">
-              <a:srgbClr val="1C3D5A">
-                <a:alpha val="20000"/>
-              </a:srgbClr>
-            </a:outerShdw>
-          </a:effectLst>
         </p:spPr>
         <p:style>
           <a:lnRef idx="1">
@@ -11043,7 +10767,6 @@
           <a:ln>
             <a:noFill/>
           </a:ln>
-          <a:effectLst/>
         </p:spPr>
         <p:style>
           <a:lnRef idx="1">
@@ -11223,13 +10946,6 @@
               <a:srgbClr val="C8922E"/>
             </a:solidFill>
           </a:ln>
-          <a:effectLst>
-            <a:outerShdw blurRad="88900" dist="44450" dir="5400000" rotWithShape="0">
-              <a:srgbClr val="1C3D5A">
-                <a:alpha val="20000"/>
-              </a:srgbClr>
-            </a:outerShdw>
-          </a:effectLst>
         </p:spPr>
         <p:style>
           <a:lnRef idx="1">
@@ -11273,7 +10989,6 @@
           <a:ln>
             <a:noFill/>
           </a:ln>
-          <a:effectLst/>
         </p:spPr>
         <p:style>
           <a:lnRef idx="1">
@@ -11453,13 +11168,6 @@
               <a:srgbClr val="D7E0E6"/>
             </a:solidFill>
           </a:ln>
-          <a:effectLst>
-            <a:outerShdw blurRad="88900" dist="44450" dir="5400000" rotWithShape="0">
-              <a:srgbClr val="1C3D5A">
-                <a:alpha val="20000"/>
-              </a:srgbClr>
-            </a:outerShdw>
-          </a:effectLst>
         </p:spPr>
         <p:style>
           <a:lnRef idx="1">
@@ -11503,7 +11211,6 @@
           <a:ln>
             <a:noFill/>
           </a:ln>
-          <a:effectLst/>
         </p:spPr>
         <p:style>
           <a:lnRef idx="1">
@@ -11683,13 +11390,6 @@
               <a:srgbClr val="D7E0E6"/>
             </a:solidFill>
           </a:ln>
-          <a:effectLst>
-            <a:outerShdw blurRad="88900" dist="44450" dir="5400000" rotWithShape="0">
-              <a:srgbClr val="1C3D5A">
-                <a:alpha val="20000"/>
-              </a:srgbClr>
-            </a:outerShdw>
-          </a:effectLst>
         </p:spPr>
         <p:style>
           <a:lnRef idx="1">
@@ -11733,7 +11433,6 @@
           <a:ln>
             <a:noFill/>
           </a:ln>
-          <a:effectLst/>
         </p:spPr>
         <p:style>
           <a:lnRef idx="1">
@@ -11913,13 +11612,6 @@
               <a:srgbClr val="D7E0E6"/>
             </a:solidFill>
           </a:ln>
-          <a:effectLst>
-            <a:outerShdw blurRad="88900" dist="44450" dir="5400000" rotWithShape="0">
-              <a:srgbClr val="1C3D5A">
-                <a:alpha val="20000"/>
-              </a:srgbClr>
-            </a:outerShdw>
-          </a:effectLst>
         </p:spPr>
         <p:style>
           <a:lnRef idx="1">
@@ -11963,7 +11655,6 @@
           <a:ln>
             <a:noFill/>
           </a:ln>
-          <a:effectLst/>
         </p:spPr>
         <p:style>
           <a:lnRef idx="1">
@@ -12252,7 +11943,6 @@
               <a:srgbClr val="C8922E"/>
             </a:solidFill>
           </a:ln>
-          <a:effectLst/>
         </p:spPr>
         <p:style>
           <a:lnRef idx="2">
@@ -12288,7 +11978,6 @@
               <a:srgbClr val="D7E0E6"/>
             </a:solidFill>
           </a:ln>
-          <a:effectLst/>
         </p:spPr>
         <p:style>
           <a:lnRef idx="2">
@@ -12420,13 +12109,6 @@
               <a:srgbClr val="C5D2DA"/>
             </a:solidFill>
           </a:ln>
-          <a:effectLst>
-            <a:outerShdw blurRad="114300" dist="50800" dir="5400000" rotWithShape="0">
-              <a:srgbClr val="1C3D5A">
-                <a:alpha val="16000"/>
-              </a:srgbClr>
-            </a:outerShdw>
-          </a:effectLst>
         </p:spPr>
       </p:pic>
       <p:pic>
@@ -12456,13 +12138,6 @@
               <a:srgbClr val="C5D2DA"/>
             </a:solidFill>
           </a:ln>
-          <a:effectLst>
-            <a:outerShdw blurRad="114300" dist="50800" dir="5400000" rotWithShape="0">
-              <a:srgbClr val="1C3D5A">
-                <a:alpha val="16000"/>
-              </a:srgbClr>
-            </a:outerShdw>
-          </a:effectLst>
         </p:spPr>
       </p:pic>
       <p:sp>
@@ -12575,7 +12250,6 @@
           <a:ln>
             <a:noFill/>
           </a:ln>
-          <a:effectLst/>
         </p:spPr>
         <p:style>
           <a:lnRef idx="1">
@@ -12619,7 +12293,6 @@
           <a:ln>
             <a:noFill/>
           </a:ln>
-          <a:effectLst/>
         </p:spPr>
         <p:style>
           <a:lnRef idx="1">
@@ -12864,7 +12537,6 @@
               <a:srgbClr val="C8922E"/>
             </a:solidFill>
           </a:ln>
-          <a:effectLst/>
         </p:spPr>
         <p:style>
           <a:lnRef idx="2">
@@ -12900,7 +12572,6 @@
               <a:srgbClr val="D7E0E6"/>
             </a:solidFill>
           </a:ln>
-          <a:effectLst/>
         </p:spPr>
         <p:style>
           <a:lnRef idx="2">
@@ -13032,13 +12703,6 @@
               <a:srgbClr val="C5D2DA"/>
             </a:solidFill>
           </a:ln>
-          <a:effectLst>
-            <a:outerShdw blurRad="114300" dist="50800" dir="5400000" rotWithShape="0">
-              <a:srgbClr val="1C3D5A">
-                <a:alpha val="16000"/>
-              </a:srgbClr>
-            </a:outerShdw>
-          </a:effectLst>
         </p:spPr>
       </p:pic>
       <p:sp>
@@ -13104,7 +12768,6 @@
               <a:srgbClr val="D7E0E6"/>
             </a:solidFill>
           </a:ln>
-          <a:effectLst/>
         </p:spPr>
         <p:style>
           <a:lnRef idx="2">
@@ -13382,7 +13045,6 @@
           <a:ln>
             <a:noFill/>
           </a:ln>
-          <a:effectLst/>
         </p:spPr>
         <p:style>
           <a:lnRef idx="1">
@@ -13601,7 +13263,6 @@
               <a:srgbClr val="C8922E"/>
             </a:solidFill>
           </a:ln>
-          <a:effectLst/>
         </p:spPr>
         <p:style>
           <a:lnRef idx="2">
@@ -13681,7 +13342,6 @@
               <a:srgbClr val="D7E0E6"/>
             </a:solidFill>
           </a:ln>
-          <a:effectLst/>
         </p:spPr>
         <p:style>
           <a:lnRef idx="2">
@@ -13964,7 +13624,6 @@
               <a:srgbClr val="D7E0E6"/>
             </a:solidFill>
           </a:ln>
-          <a:effectLst/>
         </p:spPr>
         <p:style>
           <a:lnRef idx="2">
@@ -14090,7 +13749,7 @@
                 <a:ea typeface="Microsoft JhengHei"/>
                 <a:cs typeface="Microsoft JhengHei"/>
               </a:rPr>
-              <a:t>排班引擎 · 差異化</a:t>
+              <a:t>排班引擎 · 核心功能</a:t>
             </a:r>
           </a:p>
         </p:txBody>
@@ -14134,7 +13793,7 @@
                 <a:ea typeface="Microsoft JhengHei"/>
                 <a:cs typeface="Microsoft JhengHei"/>
               </a:rPr>
-              <a:t>與第 5 組（海象視覺化）的結構性差異</a:t>
+              <a:t>四項純海象資料系統無法產出的決策輸出</a:t>
             </a:r>
           </a:p>
         </p:txBody>
@@ -14158,7 +13817,6 @@
               <a:srgbClr val="C8922E"/>
             </a:solidFill>
           </a:ln>
-          <a:effectLst/>
         </p:spPr>
         <p:style>
           <a:lnRef idx="2">
@@ -14194,7 +13852,6 @@
               <a:srgbClr val="D7E0E6"/>
             </a:solidFill>
           </a:ln>
-          <a:effectLst/>
         </p:spPr>
         <p:style>
           <a:lnRef idx="2">
@@ -14301,14 +13958,239 @@
       </p:sp>
       <p:sp>
         <p:nvSpPr>
-          <p:cNvPr id="8" name="Rectangle 7"/>
+          <p:cNvPr id="8" name="Rounded Rectangle 7"/>
           <p:cNvSpPr/>
           <p:nvPr/>
         </p:nvSpPr>
         <p:spPr>
           <a:xfrm>
-            <a:off x="640080" y="1874519"/>
-            <a:ext cx="2194560" cy="420624"/>
+            <a:off x="640080" y="1920240"/>
+            <a:ext cx="5669280" cy="1371600"/>
+          </a:xfrm>
+          <a:prstGeom prst="roundRect">
+            <a:avLst>
+              <a:gd name="adj" fmla="val 5000"/>
+            </a:avLst>
+          </a:prstGeom>
+          <a:solidFill>
+            <a:srgbClr val="FFFFFF"/>
+          </a:solidFill>
+          <a:ln w="9525">
+            <a:solidFill>
+              <a:srgbClr val="D7E0E6"/>
+            </a:solidFill>
+          </a:ln>
+        </p:spPr>
+        <p:style>
+          <a:lnRef idx="1">
+            <a:schemeClr val="accent1"/>
+          </a:lnRef>
+          <a:fillRef idx="3">
+            <a:schemeClr val="accent1"/>
+          </a:fillRef>
+          <a:effectRef idx="2">
+            <a:schemeClr val="accent1"/>
+          </a:effectRef>
+          <a:fontRef idx="minor">
+            <a:schemeClr val="lt1"/>
+          </a:fontRef>
+        </p:style>
+        <p:txBody>
+          <a:bodyPr rtlCol="0" anchor="ctr"/>
+          <a:lstStyle/>
+          <a:p>
+            <a:pPr algn="ctr"/>
+          </a:p>
+        </p:txBody>
+      </p:sp>
+      <p:sp>
+        <p:nvSpPr>
+          <p:cNvPr id="9" name="Rectangle 8"/>
+          <p:cNvSpPr/>
+          <p:nvPr/>
+        </p:nvSpPr>
+        <p:spPr>
+          <a:xfrm>
+            <a:off x="640080" y="1920240"/>
+            <a:ext cx="73152" cy="1371600"/>
+          </a:xfrm>
+          <a:prstGeom prst="rect">
+            <a:avLst/>
+          </a:prstGeom>
+          <a:solidFill>
+            <a:srgbClr val="C8922E"/>
+          </a:solidFill>
+          <a:ln>
+            <a:noFill/>
+          </a:ln>
+        </p:spPr>
+        <p:style>
+          <a:lnRef idx="1">
+            <a:schemeClr val="accent1"/>
+          </a:lnRef>
+          <a:fillRef idx="3">
+            <a:schemeClr val="accent1"/>
+          </a:fillRef>
+          <a:effectRef idx="2">
+            <a:schemeClr val="accent1"/>
+          </a:effectRef>
+          <a:fontRef idx="minor">
+            <a:schemeClr val="lt1"/>
+          </a:fontRef>
+        </p:style>
+        <p:txBody>
+          <a:bodyPr rtlCol="0" anchor="ctr"/>
+          <a:lstStyle/>
+          <a:p>
+            <a:pPr algn="ctr"/>
+          </a:p>
+        </p:txBody>
+      </p:sp>
+      <p:sp>
+        <p:nvSpPr>
+          <p:cNvPr id="10" name="TextBox 9"/>
+          <p:cNvSpPr txBox="1"/>
+          <p:nvPr/>
+        </p:nvSpPr>
+        <p:spPr>
+          <a:xfrm>
+            <a:off x="896112" y="2084832"/>
+            <a:ext cx="5212080" cy="347472"/>
+          </a:xfrm>
+          <a:prstGeom prst="rect">
+            <a:avLst/>
+          </a:prstGeom>
+          <a:noFill/>
+        </p:spPr>
+        <p:txBody>
+          <a:bodyPr wrap="square" anchor="t" lIns="0" rIns="0" tIns="0" bIns="0">
+            <a:spAutoFit/>
+          </a:bodyPr>
+          <a:lstStyle/>
+          <a:p>
+            <a:pPr algn="l">
+              <a:lnSpc>
+                <a:spcPct val="112000"/>
+              </a:lnSpc>
+              <a:spcAft>
+                <a:spcPts val="500"/>
+              </a:spcAft>
+            </a:pPr>
+            <a:r>
+              <a:rPr sz="1500" b="1" i="0">
+                <a:solidFill>
+                  <a:srgbClr val="1C3D5A"/>
+                </a:solidFill>
+                <a:latin typeface="Microsoft JhengHei"/>
+                <a:ea typeface="Microsoft JhengHei"/>
+                <a:cs typeface="Microsoft JhengHei"/>
+              </a:rPr>
+              <a:t>自動排班班表</a:t>
+            </a:r>
+          </a:p>
+        </p:txBody>
+      </p:sp>
+      <p:sp>
+        <p:nvSpPr>
+          <p:cNvPr id="11" name="TextBox 10"/>
+          <p:cNvSpPr txBox="1"/>
+          <p:nvPr/>
+        </p:nvSpPr>
+        <p:spPr>
+          <a:xfrm>
+            <a:off x="896112" y="2487168"/>
+            <a:ext cx="5212080" cy="731520"/>
+          </a:xfrm>
+          <a:prstGeom prst="rect">
+            <a:avLst/>
+          </a:prstGeom>
+          <a:noFill/>
+        </p:spPr>
+        <p:txBody>
+          <a:bodyPr wrap="square" anchor="t" lIns="0" rIns="0" tIns="0" bIns="0">
+            <a:spAutoFit/>
+          </a:bodyPr>
+          <a:lstStyle/>
+          <a:p>
+            <a:pPr algn="l">
+              <a:lnSpc>
+                <a:spcPct val="115000"/>
+              </a:lnSpc>
+              <a:spcAft>
+                <a:spcPts val="500"/>
+              </a:spcAft>
+            </a:pPr>
+            <a:r>
+              <a:rPr sz="1200" b="0" i="0">
+                <a:solidFill>
+                  <a:srgbClr val="3D4D5A"/>
+                </a:solidFill>
+                <a:latin typeface="Microsoft JhengHei"/>
+                <a:ea typeface="Microsoft JhengHei"/>
+                <a:cs typeface="Microsoft JhengHei"/>
+              </a:rPr>
+              <a:t>綜合海況風險、人員疲勞、外海暴露、船艦可用性四項因子，自動產出明日具名值勤班表。</a:t>
+            </a:r>
+          </a:p>
+        </p:txBody>
+      </p:sp>
+      <p:sp>
+        <p:nvSpPr>
+          <p:cNvPr id="12" name="Rounded Rectangle 11"/>
+          <p:cNvSpPr/>
+          <p:nvPr/>
+        </p:nvSpPr>
+        <p:spPr>
+          <a:xfrm>
+            <a:off x="6583680" y="1920240"/>
+            <a:ext cx="5669280" cy="1371600"/>
+          </a:xfrm>
+          <a:prstGeom prst="roundRect">
+            <a:avLst>
+              <a:gd name="adj" fmla="val 5000"/>
+            </a:avLst>
+          </a:prstGeom>
+          <a:solidFill>
+            <a:srgbClr val="FFFFFF"/>
+          </a:solidFill>
+          <a:ln w="9525">
+            <a:solidFill>
+              <a:srgbClr val="D7E0E6"/>
+            </a:solidFill>
+          </a:ln>
+        </p:spPr>
+        <p:style>
+          <a:lnRef idx="1">
+            <a:schemeClr val="accent1"/>
+          </a:lnRef>
+          <a:fillRef idx="3">
+            <a:schemeClr val="accent1"/>
+          </a:fillRef>
+          <a:effectRef idx="2">
+            <a:schemeClr val="accent1"/>
+          </a:effectRef>
+          <a:fontRef idx="minor">
+            <a:schemeClr val="lt1"/>
+          </a:fontRef>
+        </p:style>
+        <p:txBody>
+          <a:bodyPr rtlCol="0" anchor="ctr"/>
+          <a:lstStyle/>
+          <a:p>
+            <a:pPr algn="ctr"/>
+          </a:p>
+        </p:txBody>
+      </p:sp>
+      <p:sp>
+        <p:nvSpPr>
+          <p:cNvPr id="13" name="Rectangle 12"/>
+          <p:cNvSpPr/>
+          <p:nvPr/>
+        </p:nvSpPr>
+        <p:spPr>
+          <a:xfrm>
+            <a:off x="6583680" y="1920240"/>
+            <a:ext cx="73152" cy="1371600"/>
           </a:xfrm>
           <a:prstGeom prst="rect">
             <a:avLst/>
@@ -14319,7 +14201,6 @@
           <a:ln>
             <a:noFill/>
           </a:ln>
-          <a:effectLst/>
         </p:spPr>
         <p:style>
           <a:lnRef idx="1">
@@ -14345,69 +14226,116 @@
       </p:sp>
       <p:sp>
         <p:nvSpPr>
-          <p:cNvPr id="9" name="TextBox 8"/>
-          <p:cNvSpPr txBox="1"/>
-          <p:nvPr/>
-        </p:nvSpPr>
-        <p:spPr>
-          <a:xfrm>
-            <a:off x="749808" y="1874519"/>
-            <a:ext cx="2011680" cy="420624"/>
-          </a:xfrm>
-          <a:prstGeom prst="rect">
-            <a:avLst/>
-          </a:prstGeom>
-          <a:noFill/>
-        </p:spPr>
-        <p:txBody>
-          <a:bodyPr wrap="square" anchor="ctr" lIns="0" rIns="0" tIns="0" bIns="0">
-            <a:spAutoFit/>
-          </a:bodyPr>
-          <a:lstStyle/>
-          <a:p>
-            <a:pPr algn="l">
-              <a:lnSpc>
-                <a:spcPct val="112000"/>
-              </a:lnSpc>
-              <a:spcAft>
-                <a:spcPts val="500"/>
-              </a:spcAft>
-            </a:pPr>
-            <a:r>
-              <a:rPr sz="1250" b="1" i="0">
-                <a:solidFill>
-                  <a:srgbClr val="FFFFFF"/>
-                </a:solidFill>
-                <a:latin typeface="Microsoft JhengHei"/>
-                <a:ea typeface="Microsoft JhengHei"/>
-                <a:cs typeface="Microsoft JhengHei"/>
-              </a:rPr>
-              <a:t>比較維度</a:t>
-            </a:r>
-          </a:p>
-        </p:txBody>
-      </p:sp>
-      <p:sp>
-        <p:nvSpPr>
-          <p:cNvPr id="10" name="Rectangle 9"/>
+          <p:cNvPr id="14" name="TextBox 13"/>
+          <p:cNvSpPr txBox="1"/>
+          <p:nvPr/>
+        </p:nvSpPr>
+        <p:spPr>
+          <a:xfrm>
+            <a:off x="6839712" y="2084832"/>
+            <a:ext cx="5212080" cy="347472"/>
+          </a:xfrm>
+          <a:prstGeom prst="rect">
+            <a:avLst/>
+          </a:prstGeom>
+          <a:noFill/>
+        </p:spPr>
+        <p:txBody>
+          <a:bodyPr wrap="square" anchor="t" lIns="0" rIns="0" tIns="0" bIns="0">
+            <a:spAutoFit/>
+          </a:bodyPr>
+          <a:lstStyle/>
+          <a:p>
+            <a:pPr algn="l">
+              <a:lnSpc>
+                <a:spcPct val="112000"/>
+              </a:lnSpc>
+              <a:spcAft>
+                <a:spcPts val="500"/>
+              </a:spcAft>
+            </a:pPr>
+            <a:r>
+              <a:rPr sz="1500" b="1" i="0">
+                <a:solidFill>
+                  <a:srgbClr val="1C3D5A"/>
+                </a:solidFill>
+                <a:latin typeface="Microsoft JhengHei"/>
+                <a:ea typeface="Microsoft JhengHei"/>
+                <a:cs typeface="Microsoft JhengHei"/>
+              </a:rPr>
+              <a:t>人員疲勞指數</a:t>
+            </a:r>
+          </a:p>
+        </p:txBody>
+      </p:sp>
+      <p:sp>
+        <p:nvSpPr>
+          <p:cNvPr id="15" name="TextBox 14"/>
+          <p:cNvSpPr txBox="1"/>
+          <p:nvPr/>
+        </p:nvSpPr>
+        <p:spPr>
+          <a:xfrm>
+            <a:off x="6839712" y="2487168"/>
+            <a:ext cx="5212080" cy="731520"/>
+          </a:xfrm>
+          <a:prstGeom prst="rect">
+            <a:avLst/>
+          </a:prstGeom>
+          <a:noFill/>
+        </p:spPr>
+        <p:txBody>
+          <a:bodyPr wrap="square" anchor="t" lIns="0" rIns="0" tIns="0" bIns="0">
+            <a:spAutoFit/>
+          </a:bodyPr>
+          <a:lstStyle/>
+          <a:p>
+            <a:pPr algn="l">
+              <a:lnSpc>
+                <a:spcPct val="115000"/>
+              </a:lnSpc>
+              <a:spcAft>
+                <a:spcPts val="500"/>
+              </a:spcAft>
+            </a:pPr>
+            <a:r>
+              <a:rPr sz="1200" b="0" i="0">
+                <a:solidFill>
+                  <a:srgbClr val="3D4D5A"/>
+                </a:solidFill>
+                <a:latin typeface="Microsoft JhengHei"/>
+                <a:ea typeface="Microsoft JhengHei"/>
+                <a:cs typeface="Microsoft JhengHei"/>
+              </a:rPr>
+              <a:t>連續值勤天數（60%）× 近 7 日累計工時（40%）合成 0–100 疲勞分，高疲勞者自動降低外海負荷。</a:t>
+            </a:r>
+          </a:p>
+        </p:txBody>
+      </p:sp>
+      <p:sp>
+        <p:nvSpPr>
+          <p:cNvPr id="16" name="Rounded Rectangle 15"/>
           <p:cNvSpPr/>
           <p:nvPr/>
         </p:nvSpPr>
         <p:spPr>
           <a:xfrm>
-            <a:off x="2834640" y="1874519"/>
-            <a:ext cx="4297680" cy="420624"/>
-          </a:xfrm>
-          <a:prstGeom prst="rect">
-            <a:avLst/>
+            <a:off x="640080" y="3474720"/>
+            <a:ext cx="5669280" cy="1371600"/>
+          </a:xfrm>
+          <a:prstGeom prst="roundRect">
+            <a:avLst>
+              <a:gd name="adj" fmla="val 5000"/>
+            </a:avLst>
           </a:prstGeom>
           <a:solidFill>
-            <a:srgbClr val="1C3D5A"/>
+            <a:srgbClr val="FFFFFF"/>
           </a:solidFill>
-          <a:ln>
-            <a:noFill/>
+          <a:ln w="9525">
+            <a:solidFill>
+              <a:srgbClr val="D7E0E6"/>
+            </a:solidFill>
           </a:ln>
-          <a:effectLst/>
         </p:spPr>
         <p:style>
           <a:lnRef idx="1">
@@ -14433,69 +14361,24 @@
       </p:sp>
       <p:sp>
         <p:nvSpPr>
-          <p:cNvPr id="11" name="TextBox 10"/>
-          <p:cNvSpPr txBox="1"/>
-          <p:nvPr/>
-        </p:nvSpPr>
-        <p:spPr>
-          <a:xfrm>
-            <a:off x="2944368" y="1874519"/>
-            <a:ext cx="4114800" cy="420624"/>
-          </a:xfrm>
-          <a:prstGeom prst="rect">
-            <a:avLst/>
-          </a:prstGeom>
-          <a:noFill/>
-        </p:spPr>
-        <p:txBody>
-          <a:bodyPr wrap="square" anchor="ctr" lIns="0" rIns="0" tIns="0" bIns="0">
-            <a:spAutoFit/>
-          </a:bodyPr>
-          <a:lstStyle/>
-          <a:p>
-            <a:pPr algn="l">
-              <a:lnSpc>
-                <a:spcPct val="112000"/>
-              </a:lnSpc>
-              <a:spcAft>
-                <a:spcPts val="500"/>
-              </a:spcAft>
-            </a:pPr>
-            <a:r>
-              <a:rPr sz="1250" b="1" i="0">
-                <a:solidFill>
-                  <a:srgbClr val="FFFFFF"/>
-                </a:solidFill>
-                <a:latin typeface="Microsoft JhengHei"/>
-                <a:ea typeface="Microsoft JhengHei"/>
-                <a:cs typeface="Microsoft JhengHei"/>
-              </a:rPr>
-              <a:t>第 5 組（海象視覺化）</a:t>
-            </a:r>
-          </a:p>
-        </p:txBody>
-      </p:sp>
-      <p:sp>
-        <p:nvSpPr>
-          <p:cNvPr id="12" name="Rectangle 11"/>
+          <p:cNvPr id="17" name="Rectangle 16"/>
           <p:cNvSpPr/>
           <p:nvPr/>
         </p:nvSpPr>
         <p:spPr>
           <a:xfrm>
-            <a:off x="7132320" y="1874519"/>
-            <a:ext cx="4419295" cy="420624"/>
+            <a:off x="640080" y="3474720"/>
+            <a:ext cx="73152" cy="1371600"/>
           </a:xfrm>
           <a:prstGeom prst="rect">
             <a:avLst/>
           </a:prstGeom>
           <a:solidFill>
-            <a:srgbClr val="1C3D5A"/>
+            <a:srgbClr val="4E8C8A"/>
           </a:solidFill>
           <a:ln>
             <a:noFill/>
           </a:ln>
-          <a:effectLst/>
         </p:spPr>
         <p:style>
           <a:lnRef idx="1">
@@ -14521,69 +14404,116 @@
       </p:sp>
       <p:sp>
         <p:nvSpPr>
-          <p:cNvPr id="13" name="TextBox 12"/>
-          <p:cNvSpPr txBox="1"/>
-          <p:nvPr/>
-        </p:nvSpPr>
-        <p:spPr>
-          <a:xfrm>
-            <a:off x="7242048" y="1874519"/>
-            <a:ext cx="4236415" cy="420624"/>
-          </a:xfrm>
-          <a:prstGeom prst="rect">
-            <a:avLst/>
-          </a:prstGeom>
-          <a:noFill/>
-        </p:spPr>
-        <p:txBody>
-          <a:bodyPr wrap="square" anchor="ctr" lIns="0" rIns="0" tIns="0" bIns="0">
-            <a:spAutoFit/>
-          </a:bodyPr>
-          <a:lstStyle/>
-          <a:p>
-            <a:pPr algn="l">
-              <a:lnSpc>
-                <a:spcPct val="112000"/>
-              </a:lnSpc>
-              <a:spcAft>
-                <a:spcPts val="500"/>
-              </a:spcAft>
-            </a:pPr>
-            <a:r>
-              <a:rPr sz="1250" b="1" i="0">
-                <a:solidFill>
-                  <a:srgbClr val="FFFFFF"/>
-                </a:solidFill>
-                <a:latin typeface="Microsoft JhengHei"/>
-                <a:ea typeface="Microsoft JhengHei"/>
-                <a:cs typeface="Microsoft JhengHei"/>
-              </a:rPr>
-              <a:t>第 2 組（本系統）</a:t>
-            </a:r>
-          </a:p>
-        </p:txBody>
-      </p:sp>
-      <p:sp>
-        <p:nvSpPr>
-          <p:cNvPr id="14" name="Rectangle 13"/>
+          <p:cNvPr id="18" name="TextBox 17"/>
+          <p:cNvSpPr txBox="1"/>
+          <p:nvPr/>
+        </p:nvSpPr>
+        <p:spPr>
+          <a:xfrm>
+            <a:off x="896112" y="3639312"/>
+            <a:ext cx="5212080" cy="347472"/>
+          </a:xfrm>
+          <a:prstGeom prst="rect">
+            <a:avLst/>
+          </a:prstGeom>
+          <a:noFill/>
+        </p:spPr>
+        <p:txBody>
+          <a:bodyPr wrap="square" anchor="t" lIns="0" rIns="0" tIns="0" bIns="0">
+            <a:spAutoFit/>
+          </a:bodyPr>
+          <a:lstStyle/>
+          <a:p>
+            <a:pPr algn="l">
+              <a:lnSpc>
+                <a:spcPct val="112000"/>
+              </a:lnSpc>
+              <a:spcAft>
+                <a:spcPts val="500"/>
+              </a:spcAft>
+            </a:pPr>
+            <a:r>
+              <a:rPr sz="1500" b="1" i="0">
+                <a:solidFill>
+                  <a:srgbClr val="1C3D5A"/>
+                </a:solidFill>
+                <a:latin typeface="Microsoft JhengHei"/>
+                <a:ea typeface="Microsoft JhengHei"/>
+                <a:cs typeface="Microsoft JhengHei"/>
+              </a:rPr>
+              <a:t>工時公平性 Gini</a:t>
+            </a:r>
+          </a:p>
+        </p:txBody>
+      </p:sp>
+      <p:sp>
+        <p:nvSpPr>
+          <p:cNvPr id="19" name="TextBox 18"/>
+          <p:cNvSpPr txBox="1"/>
+          <p:nvPr/>
+        </p:nvSpPr>
+        <p:spPr>
+          <a:xfrm>
+            <a:off x="896112" y="4041648"/>
+            <a:ext cx="5212080" cy="731520"/>
+          </a:xfrm>
+          <a:prstGeom prst="rect">
+            <a:avLst/>
+          </a:prstGeom>
+          <a:noFill/>
+        </p:spPr>
+        <p:txBody>
+          <a:bodyPr wrap="square" anchor="t" lIns="0" rIns="0" tIns="0" bIns="0">
+            <a:spAutoFit/>
+          </a:bodyPr>
+          <a:lstStyle/>
+          <a:p>
+            <a:pPr algn="l">
+              <a:lnSpc>
+                <a:spcPct val="115000"/>
+              </a:lnSpc>
+              <a:spcAft>
+                <a:spcPts val="500"/>
+              </a:spcAft>
+            </a:pPr>
+            <a:r>
+              <a:rPr sz="1200" b="0" i="0">
+                <a:solidFill>
+                  <a:srgbClr val="3D4D5A"/>
+                </a:solidFill>
+                <a:latin typeface="Microsoft JhengHei"/>
+                <a:ea typeface="Microsoft JhengHei"/>
+                <a:cs typeface="Microsoft JhengHei"/>
+              </a:rPr>
+              <a:t>Lorenz 曲線量化人員工時分配均等度，Gini = 0.042，確保排班公平可追溯。</a:t>
+            </a:r>
+          </a:p>
+        </p:txBody>
+      </p:sp>
+      <p:sp>
+        <p:nvSpPr>
+          <p:cNvPr id="20" name="Rounded Rectangle 19"/>
           <p:cNvSpPr/>
           <p:nvPr/>
         </p:nvSpPr>
         <p:spPr>
           <a:xfrm>
-            <a:off x="640080" y="2295143"/>
-            <a:ext cx="10911535" cy="457200"/>
-          </a:xfrm>
-          <a:prstGeom prst="rect">
-            <a:avLst/>
+            <a:off x="6583680" y="3474720"/>
+            <a:ext cx="5669280" cy="1371600"/>
+          </a:xfrm>
+          <a:prstGeom prst="roundRect">
+            <a:avLst>
+              <a:gd name="adj" fmla="val 5000"/>
+            </a:avLst>
           </a:prstGeom>
           <a:solidFill>
             <a:srgbClr val="FFFFFF"/>
           </a:solidFill>
-          <a:ln>
-            <a:noFill/>
+          <a:ln w="9525">
+            <a:solidFill>
+              <a:srgbClr val="D7E0E6"/>
+            </a:solidFill>
           </a:ln>
-          <a:effectLst/>
         </p:spPr>
         <p:style>
           <a:lnRef idx="1">
@@ -14609,157 +14539,24 @@
       </p:sp>
       <p:sp>
         <p:nvSpPr>
-          <p:cNvPr id="15" name="TextBox 14"/>
-          <p:cNvSpPr txBox="1"/>
-          <p:nvPr/>
-        </p:nvSpPr>
-        <p:spPr>
-          <a:xfrm>
-            <a:off x="749808" y="2295143"/>
-            <a:ext cx="2011680" cy="457200"/>
-          </a:xfrm>
-          <a:prstGeom prst="rect">
-            <a:avLst/>
-          </a:prstGeom>
-          <a:noFill/>
-        </p:spPr>
-        <p:txBody>
-          <a:bodyPr wrap="square" anchor="ctr" lIns="0" rIns="0" tIns="0" bIns="0">
-            <a:spAutoFit/>
-          </a:bodyPr>
-          <a:lstStyle/>
-          <a:p>
-            <a:pPr algn="l">
-              <a:lnSpc>
-                <a:spcPct val="112000"/>
-              </a:lnSpc>
-              <a:spcAft>
-                <a:spcPts val="500"/>
-              </a:spcAft>
-            </a:pPr>
-            <a:r>
-              <a:rPr sz="1250" b="0" i="0">
-                <a:solidFill>
-                  <a:srgbClr val="3D4D5A"/>
-                </a:solidFill>
-                <a:latin typeface="Microsoft JhengHei"/>
-                <a:ea typeface="Microsoft JhengHei"/>
-                <a:cs typeface="Microsoft JhengHei"/>
-              </a:rPr>
-              <a:t>資料主角</a:t>
-            </a:r>
-          </a:p>
-        </p:txBody>
-      </p:sp>
-      <p:sp>
-        <p:nvSpPr>
-          <p:cNvPr id="16" name="TextBox 15"/>
-          <p:cNvSpPr txBox="1"/>
-          <p:nvPr/>
-        </p:nvSpPr>
-        <p:spPr>
-          <a:xfrm>
-            <a:off x="2944368" y="2295143"/>
-            <a:ext cx="4114800" cy="457200"/>
-          </a:xfrm>
-          <a:prstGeom prst="rect">
-            <a:avLst/>
-          </a:prstGeom>
-          <a:noFill/>
-        </p:spPr>
-        <p:txBody>
-          <a:bodyPr wrap="square" anchor="ctr" lIns="0" rIns="0" tIns="0" bIns="0">
-            <a:spAutoFit/>
-          </a:bodyPr>
-          <a:lstStyle/>
-          <a:p>
-            <a:pPr algn="l">
-              <a:lnSpc>
-                <a:spcPct val="112000"/>
-              </a:lnSpc>
-              <a:spcAft>
-                <a:spcPts val="500"/>
-              </a:spcAft>
-            </a:pPr>
-            <a:r>
-              <a:rPr sz="1250" b="0" i="0">
-                <a:solidFill>
-                  <a:srgbClr val="7C8B97"/>
-                </a:solidFill>
-                <a:latin typeface="Microsoft JhengHei"/>
-                <a:ea typeface="Microsoft JhengHei"/>
-                <a:cs typeface="Microsoft JhengHei"/>
-              </a:rPr>
-              <a:t>海象觀測值</a:t>
-            </a:r>
-          </a:p>
-        </p:txBody>
-      </p:sp>
-      <p:sp>
-        <p:nvSpPr>
-          <p:cNvPr id="17" name="TextBox 16"/>
-          <p:cNvSpPr txBox="1"/>
-          <p:nvPr/>
-        </p:nvSpPr>
-        <p:spPr>
-          <a:xfrm>
-            <a:off x="7242048" y="2295143"/>
-            <a:ext cx="4236415" cy="457200"/>
-          </a:xfrm>
-          <a:prstGeom prst="rect">
-            <a:avLst/>
-          </a:prstGeom>
-          <a:noFill/>
-        </p:spPr>
-        <p:txBody>
-          <a:bodyPr wrap="square" anchor="ctr" lIns="0" rIns="0" tIns="0" bIns="0">
-            <a:spAutoFit/>
-          </a:bodyPr>
-          <a:lstStyle/>
-          <a:p>
-            <a:pPr algn="l">
-              <a:lnSpc>
-                <a:spcPct val="112000"/>
-              </a:lnSpc>
-              <a:spcAft>
-                <a:spcPts val="500"/>
-              </a:spcAft>
-            </a:pPr>
-            <a:r>
-              <a:rPr sz="1250" b="1" i="0">
-                <a:solidFill>
-                  <a:srgbClr val="1C3D5A"/>
-                </a:solidFill>
-                <a:latin typeface="Microsoft JhengHei"/>
-                <a:ea typeface="Microsoft JhengHei"/>
-                <a:cs typeface="Microsoft JhengHei"/>
-              </a:rPr>
-              <a:t>值勤紀錄 × 人員 × 船艦</a:t>
-            </a:r>
-          </a:p>
-        </p:txBody>
-      </p:sp>
-      <p:sp>
-        <p:nvSpPr>
-          <p:cNvPr id="18" name="Rectangle 17"/>
+          <p:cNvPr id="21" name="Rectangle 20"/>
           <p:cNvSpPr/>
           <p:nvPr/>
         </p:nvSpPr>
         <p:spPr>
           <a:xfrm>
-            <a:off x="640080" y="2752343"/>
-            <a:ext cx="10911535" cy="457200"/>
+            <a:off x="6583680" y="3474720"/>
+            <a:ext cx="73152" cy="1371600"/>
           </a:xfrm>
           <a:prstGeom prst="rect">
             <a:avLst/>
           </a:prstGeom>
           <a:solidFill>
-            <a:srgbClr val="F3F7F9"/>
+            <a:srgbClr val="34506A"/>
           </a:solidFill>
           <a:ln>
             <a:noFill/>
           </a:ln>
-          <a:effectLst/>
         </p:spPr>
         <p:style>
           <a:lnRef idx="1">
@@ -14785,36 +14582,80 @@
       </p:sp>
       <p:sp>
         <p:nvSpPr>
-          <p:cNvPr id="19" name="TextBox 18"/>
-          <p:cNvSpPr txBox="1"/>
-          <p:nvPr/>
-        </p:nvSpPr>
-        <p:spPr>
-          <a:xfrm>
-            <a:off x="749808" y="2752343"/>
-            <a:ext cx="2011680" cy="457200"/>
-          </a:xfrm>
-          <a:prstGeom prst="rect">
-            <a:avLst/>
-          </a:prstGeom>
-          <a:noFill/>
-        </p:spPr>
-        <p:txBody>
-          <a:bodyPr wrap="square" anchor="ctr" lIns="0" rIns="0" tIns="0" bIns="0">
-            <a:spAutoFit/>
-          </a:bodyPr>
-          <a:lstStyle/>
-          <a:p>
-            <a:pPr algn="l">
-              <a:lnSpc>
-                <a:spcPct val="112000"/>
-              </a:lnSpc>
-              <a:spcAft>
-                <a:spcPts val="500"/>
-              </a:spcAft>
-            </a:pPr>
-            <a:r>
-              <a:rPr sz="1250" b="0" i="0">
+          <p:cNvPr id="22" name="TextBox 21"/>
+          <p:cNvSpPr txBox="1"/>
+          <p:nvPr/>
+        </p:nvSpPr>
+        <p:spPr>
+          <a:xfrm>
+            <a:off x="6839712" y="3639312"/>
+            <a:ext cx="5212080" cy="347472"/>
+          </a:xfrm>
+          <a:prstGeom prst="rect">
+            <a:avLst/>
+          </a:prstGeom>
+          <a:noFill/>
+        </p:spPr>
+        <p:txBody>
+          <a:bodyPr wrap="square" anchor="t" lIns="0" rIns="0" tIns="0" bIns="0">
+            <a:spAutoFit/>
+          </a:bodyPr>
+          <a:lstStyle/>
+          <a:p>
+            <a:pPr algn="l">
+              <a:lnSpc>
+                <a:spcPct val="112000"/>
+              </a:lnSpc>
+              <a:spcAft>
+                <a:spcPts val="500"/>
+              </a:spcAft>
+            </a:pPr>
+            <a:r>
+              <a:rPr sz="1500" b="1" i="0">
+                <a:solidFill>
+                  <a:srgbClr val="1C3D5A"/>
+                </a:solidFill>
+                <a:latin typeface="Microsoft JhengHei"/>
+                <a:ea typeface="Microsoft JhengHei"/>
+                <a:cs typeface="Microsoft JhengHei"/>
+              </a:rPr>
+              <a:t>船艦可用性管理</a:t>
+            </a:r>
+          </a:p>
+        </p:txBody>
+      </p:sp>
+      <p:sp>
+        <p:nvSpPr>
+          <p:cNvPr id="23" name="TextBox 22"/>
+          <p:cNvSpPr txBox="1"/>
+          <p:nvPr/>
+        </p:nvSpPr>
+        <p:spPr>
+          <a:xfrm>
+            <a:off x="6839712" y="4041648"/>
+            <a:ext cx="5212080" cy="731520"/>
+          </a:xfrm>
+          <a:prstGeom prst="rect">
+            <a:avLst/>
+          </a:prstGeom>
+          <a:noFill/>
+        </p:spPr>
+        <p:txBody>
+          <a:bodyPr wrap="square" anchor="t" lIns="0" rIns="0" tIns="0" bIns="0">
+            <a:spAutoFit/>
+          </a:bodyPr>
+          <a:lstStyle/>
+          <a:p>
+            <a:pPr algn="l">
+              <a:lnSpc>
+                <a:spcPct val="115000"/>
+              </a:lnSpc>
+              <a:spcAft>
+                <a:spcPts val="500"/>
+              </a:spcAft>
+            </a:pPr>
+            <a:r>
+              <a:rPr sz="1200" b="0" i="0">
                 <a:solidFill>
                   <a:srgbClr val="3D4D5A"/>
                 </a:solidFill>
@@ -14822,1026 +14663,14 @@
                 <a:ea typeface="Microsoft JhengHei"/>
                 <a:cs typeface="Microsoft JhengHei"/>
               </a:rPr>
-              <a:t>核心問題</a:t>
-            </a:r>
-          </a:p>
-        </p:txBody>
-      </p:sp>
-      <p:sp>
-        <p:nvSpPr>
-          <p:cNvPr id="20" name="TextBox 19"/>
-          <p:cNvSpPr txBox="1"/>
-          <p:nvPr/>
-        </p:nvSpPr>
-        <p:spPr>
-          <a:xfrm>
-            <a:off x="2944368" y="2752343"/>
-            <a:ext cx="4114800" cy="457200"/>
-          </a:xfrm>
-          <a:prstGeom prst="rect">
-            <a:avLst/>
-          </a:prstGeom>
-          <a:noFill/>
-        </p:spPr>
-        <p:txBody>
-          <a:bodyPr wrap="square" anchor="ctr" lIns="0" rIns="0" tIns="0" bIns="0">
-            <a:spAutoFit/>
-          </a:bodyPr>
-          <a:lstStyle/>
-          <a:p>
-            <a:pPr algn="l">
-              <a:lnSpc>
-                <a:spcPct val="112000"/>
-              </a:lnSpc>
-              <a:spcAft>
-                <a:spcPts val="500"/>
-              </a:spcAft>
-            </a:pPr>
-            <a:r>
-              <a:rPr sz="1250" b="0" i="0">
-                <a:solidFill>
-                  <a:srgbClr val="7C8B97"/>
-                </a:solidFill>
-                <a:latin typeface="Microsoft JhengHei"/>
-                <a:ea typeface="Microsoft JhengHei"/>
-                <a:cs typeface="Microsoft JhengHei"/>
-              </a:rPr>
-              <a:t>海象怎麼分析、怎麼畫？</a:t>
-            </a:r>
-          </a:p>
-        </p:txBody>
-      </p:sp>
-      <p:sp>
-        <p:nvSpPr>
-          <p:cNvPr id="21" name="TextBox 20"/>
-          <p:cNvSpPr txBox="1"/>
-          <p:nvPr/>
-        </p:nvSpPr>
-        <p:spPr>
-          <a:xfrm>
-            <a:off x="7242048" y="2752343"/>
-            <a:ext cx="4236415" cy="457200"/>
-          </a:xfrm>
-          <a:prstGeom prst="rect">
-            <a:avLst/>
-          </a:prstGeom>
-          <a:noFill/>
-        </p:spPr>
-        <p:txBody>
-          <a:bodyPr wrap="square" anchor="ctr" lIns="0" rIns="0" tIns="0" bIns="0">
-            <a:spAutoFit/>
-          </a:bodyPr>
-          <a:lstStyle/>
-          <a:p>
-            <a:pPr algn="l">
-              <a:lnSpc>
-                <a:spcPct val="112000"/>
-              </a:lnSpc>
-              <a:spcAft>
-                <a:spcPts val="500"/>
-              </a:spcAft>
-            </a:pPr>
-            <a:r>
-              <a:rPr sz="1250" b="1" i="0">
-                <a:solidFill>
-                  <a:srgbClr val="1C3D5A"/>
-                </a:solidFill>
-                <a:latin typeface="Microsoft JhengHei"/>
-                <a:ea typeface="Microsoft JhengHei"/>
-                <a:cs typeface="Microsoft JhengHei"/>
-              </a:rPr>
-              <a:t>惡劣海況時該派誰、上哪艘船？</a:t>
-            </a:r>
-          </a:p>
-        </p:txBody>
-      </p:sp>
-      <p:sp>
-        <p:nvSpPr>
-          <p:cNvPr id="22" name="Rectangle 21"/>
-          <p:cNvSpPr/>
-          <p:nvPr/>
-        </p:nvSpPr>
-        <p:spPr>
-          <a:xfrm>
-            <a:off x="640080" y="3209543"/>
-            <a:ext cx="10911535" cy="457200"/>
-          </a:xfrm>
-          <a:prstGeom prst="rect">
-            <a:avLst/>
-          </a:prstGeom>
-          <a:solidFill>
-            <a:srgbClr val="FFFFFF"/>
-          </a:solidFill>
-          <a:ln>
-            <a:noFill/>
-          </a:ln>
-          <a:effectLst/>
-        </p:spPr>
-        <p:style>
-          <a:lnRef idx="1">
-            <a:schemeClr val="accent1"/>
-          </a:lnRef>
-          <a:fillRef idx="3">
-            <a:schemeClr val="accent1"/>
-          </a:fillRef>
-          <a:effectRef idx="2">
-            <a:schemeClr val="accent1"/>
-          </a:effectRef>
-          <a:fontRef idx="minor">
-            <a:schemeClr val="lt1"/>
-          </a:fontRef>
-        </p:style>
-        <p:txBody>
-          <a:bodyPr rtlCol="0" anchor="ctr"/>
-          <a:lstStyle/>
-          <a:p>
-            <a:pPr algn="ctr"/>
-          </a:p>
-        </p:txBody>
-      </p:sp>
-      <p:sp>
-        <p:nvSpPr>
-          <p:cNvPr id="23" name="TextBox 22"/>
-          <p:cNvSpPr txBox="1"/>
-          <p:nvPr/>
-        </p:nvSpPr>
-        <p:spPr>
-          <a:xfrm>
-            <a:off x="749808" y="3209543"/>
-            <a:ext cx="2011680" cy="457200"/>
-          </a:xfrm>
-          <a:prstGeom prst="rect">
-            <a:avLst/>
-          </a:prstGeom>
-          <a:noFill/>
-        </p:spPr>
-        <p:txBody>
-          <a:bodyPr wrap="square" anchor="ctr" lIns="0" rIns="0" tIns="0" bIns="0">
-            <a:spAutoFit/>
-          </a:bodyPr>
-          <a:lstStyle/>
-          <a:p>
-            <a:pPr algn="l">
-              <a:lnSpc>
-                <a:spcPct val="112000"/>
-              </a:lnSpc>
-              <a:spcAft>
-                <a:spcPts val="500"/>
-              </a:spcAft>
-            </a:pPr>
-            <a:r>
-              <a:rPr sz="1250" b="0" i="0">
-                <a:solidFill>
-                  <a:srgbClr val="3D4D5A"/>
-                </a:solidFill>
-                <a:latin typeface="Microsoft JhengHei"/>
-                <a:ea typeface="Microsoft JhengHei"/>
-                <a:cs typeface="Microsoft JhengHei"/>
-              </a:rPr>
-              <a:t>系統本質</a:t>
-            </a:r>
-          </a:p>
-        </p:txBody>
-      </p:sp>
-      <p:sp>
-        <p:nvSpPr>
-          <p:cNvPr id="24" name="TextBox 23"/>
-          <p:cNvSpPr txBox="1"/>
-          <p:nvPr/>
-        </p:nvSpPr>
-        <p:spPr>
-          <a:xfrm>
-            <a:off x="2944368" y="3209543"/>
-            <a:ext cx="4114800" cy="457200"/>
-          </a:xfrm>
-          <a:prstGeom prst="rect">
-            <a:avLst/>
-          </a:prstGeom>
-          <a:noFill/>
-        </p:spPr>
-        <p:txBody>
-          <a:bodyPr wrap="square" anchor="ctr" lIns="0" rIns="0" tIns="0" bIns="0">
-            <a:spAutoFit/>
-          </a:bodyPr>
-          <a:lstStyle/>
-          <a:p>
-            <a:pPr algn="l">
-              <a:lnSpc>
-                <a:spcPct val="112000"/>
-              </a:lnSpc>
-              <a:spcAft>
-                <a:spcPts val="500"/>
-              </a:spcAft>
-            </a:pPr>
-            <a:r>
-              <a:rPr sz="1250" b="0" i="0">
-                <a:solidFill>
-                  <a:srgbClr val="7C8B97"/>
-                </a:solidFill>
-                <a:latin typeface="Microsoft JhengHei"/>
-                <a:ea typeface="Microsoft JhengHei"/>
-                <a:cs typeface="Microsoft JhengHei"/>
-              </a:rPr>
-              <a:t>分析 / 視覺化平台</a:t>
-            </a:r>
-          </a:p>
-        </p:txBody>
-      </p:sp>
-      <p:sp>
-        <p:nvSpPr>
-          <p:cNvPr id="25" name="TextBox 24"/>
-          <p:cNvSpPr txBox="1"/>
-          <p:nvPr/>
-        </p:nvSpPr>
-        <p:spPr>
-          <a:xfrm>
-            <a:off x="7242048" y="3209543"/>
-            <a:ext cx="4236415" cy="457200"/>
-          </a:xfrm>
-          <a:prstGeom prst="rect">
-            <a:avLst/>
-          </a:prstGeom>
-          <a:noFill/>
-        </p:spPr>
-        <p:txBody>
-          <a:bodyPr wrap="square" anchor="ctr" lIns="0" rIns="0" tIns="0" bIns="0">
-            <a:spAutoFit/>
-          </a:bodyPr>
-          <a:lstStyle/>
-          <a:p>
-            <a:pPr algn="l">
-              <a:lnSpc>
-                <a:spcPct val="112000"/>
-              </a:lnSpc>
-              <a:spcAft>
-                <a:spcPts val="500"/>
-              </a:spcAft>
-            </a:pPr>
-            <a:r>
-              <a:rPr sz="1250" b="1" i="0">
-                <a:solidFill>
-                  <a:srgbClr val="1C3D5A"/>
-                </a:solidFill>
-                <a:latin typeface="Microsoft JhengHei"/>
-                <a:ea typeface="Microsoft JhengHei"/>
-                <a:cs typeface="Microsoft JhengHei"/>
-              </a:rPr>
-              <a:t>決策支援系統 DSS（含打卡/請假）</a:t>
-            </a:r>
-          </a:p>
-        </p:txBody>
-      </p:sp>
-      <p:sp>
-        <p:nvSpPr>
-          <p:cNvPr id="26" name="Rectangle 25"/>
-          <p:cNvSpPr/>
-          <p:nvPr/>
-        </p:nvSpPr>
-        <p:spPr>
-          <a:xfrm>
-            <a:off x="640080" y="3666743"/>
-            <a:ext cx="10911535" cy="457200"/>
-          </a:xfrm>
-          <a:prstGeom prst="rect">
-            <a:avLst/>
-          </a:prstGeom>
-          <a:solidFill>
-            <a:srgbClr val="F3F7F9"/>
-          </a:solidFill>
-          <a:ln>
-            <a:noFill/>
-          </a:ln>
-          <a:effectLst/>
-        </p:spPr>
-        <p:style>
-          <a:lnRef idx="1">
-            <a:schemeClr val="accent1"/>
-          </a:lnRef>
-          <a:fillRef idx="3">
-            <a:schemeClr val="accent1"/>
-          </a:fillRef>
-          <a:effectRef idx="2">
-            <a:schemeClr val="accent1"/>
-          </a:effectRef>
-          <a:fontRef idx="minor">
-            <a:schemeClr val="lt1"/>
-          </a:fontRef>
-        </p:style>
-        <p:txBody>
-          <a:bodyPr rtlCol="0" anchor="ctr"/>
-          <a:lstStyle/>
-          <a:p>
-            <a:pPr algn="ctr"/>
-          </a:p>
-        </p:txBody>
-      </p:sp>
-      <p:sp>
-        <p:nvSpPr>
-          <p:cNvPr id="27" name="TextBox 26"/>
-          <p:cNvSpPr txBox="1"/>
-          <p:nvPr/>
-        </p:nvSpPr>
-        <p:spPr>
-          <a:xfrm>
-            <a:off x="749808" y="3666743"/>
-            <a:ext cx="2011680" cy="457200"/>
-          </a:xfrm>
-          <a:prstGeom prst="rect">
-            <a:avLst/>
-          </a:prstGeom>
-          <a:noFill/>
-        </p:spPr>
-        <p:txBody>
-          <a:bodyPr wrap="square" anchor="ctr" lIns="0" rIns="0" tIns="0" bIns="0">
-            <a:spAutoFit/>
-          </a:bodyPr>
-          <a:lstStyle/>
-          <a:p>
-            <a:pPr algn="l">
-              <a:lnSpc>
-                <a:spcPct val="112000"/>
-              </a:lnSpc>
-              <a:spcAft>
-                <a:spcPts val="500"/>
-              </a:spcAft>
-            </a:pPr>
-            <a:r>
-              <a:rPr sz="1250" b="0" i="0">
-                <a:solidFill>
-                  <a:srgbClr val="3D4D5A"/>
-                </a:solidFill>
-                <a:latin typeface="Microsoft JhengHei"/>
-                <a:ea typeface="Microsoft JhengHei"/>
-                <a:cs typeface="Microsoft JhengHei"/>
-              </a:rPr>
-              <a:t>招牌輸出</a:t>
-            </a:r>
-          </a:p>
-        </p:txBody>
-      </p:sp>
-      <p:sp>
-        <p:nvSpPr>
-          <p:cNvPr id="28" name="TextBox 27"/>
-          <p:cNvSpPr txBox="1"/>
-          <p:nvPr/>
-        </p:nvSpPr>
-        <p:spPr>
-          <a:xfrm>
-            <a:off x="2944368" y="3666743"/>
-            <a:ext cx="4114800" cy="457200"/>
-          </a:xfrm>
-          <a:prstGeom prst="rect">
-            <a:avLst/>
-          </a:prstGeom>
-          <a:noFill/>
-        </p:spPr>
-        <p:txBody>
-          <a:bodyPr wrap="square" anchor="ctr" lIns="0" rIns="0" tIns="0" bIns="0">
-            <a:spAutoFit/>
-          </a:bodyPr>
-          <a:lstStyle/>
-          <a:p>
-            <a:pPr algn="l">
-              <a:lnSpc>
-                <a:spcPct val="112000"/>
-              </a:lnSpc>
-              <a:spcAft>
-                <a:spcPts val="500"/>
-              </a:spcAft>
-            </a:pPr>
-            <a:r>
-              <a:rPr sz="1250" b="0" i="0">
-                <a:solidFill>
-                  <a:srgbClr val="7C8B97"/>
-                </a:solidFill>
-                <a:latin typeface="Microsoft JhengHei"/>
-                <a:ea typeface="Microsoft JhengHei"/>
-                <a:cs typeface="Microsoft JhengHei"/>
-              </a:rPr>
-              <a:t>海象趨勢圖</a:t>
-            </a:r>
-          </a:p>
-        </p:txBody>
-      </p:sp>
-      <p:sp>
-        <p:nvSpPr>
-          <p:cNvPr id="29" name="TextBox 28"/>
-          <p:cNvSpPr txBox="1"/>
-          <p:nvPr/>
-        </p:nvSpPr>
-        <p:spPr>
-          <a:xfrm>
-            <a:off x="7242048" y="3666743"/>
-            <a:ext cx="4236415" cy="457200"/>
-          </a:xfrm>
-          <a:prstGeom prst="rect">
-            <a:avLst/>
-          </a:prstGeom>
-          <a:noFill/>
-        </p:spPr>
-        <p:txBody>
-          <a:bodyPr wrap="square" anchor="ctr" lIns="0" rIns="0" tIns="0" bIns="0">
-            <a:spAutoFit/>
-          </a:bodyPr>
-          <a:lstStyle/>
-          <a:p>
-            <a:pPr algn="l">
-              <a:lnSpc>
-                <a:spcPct val="112000"/>
-              </a:lnSpc>
-              <a:spcAft>
-                <a:spcPts val="500"/>
-              </a:spcAft>
-            </a:pPr>
-            <a:r>
-              <a:rPr sz="1250" b="1" i="0">
-                <a:solidFill>
-                  <a:srgbClr val="C8922E"/>
-                </a:solidFill>
-                <a:latin typeface="Microsoft JhengHei"/>
-                <a:ea typeface="Microsoft JhengHei"/>
-                <a:cs typeface="Microsoft JhengHei"/>
-              </a:rPr>
-              <a:t>自動排班引擎 → 明日具名班表</a:t>
-            </a:r>
-          </a:p>
-        </p:txBody>
-      </p:sp>
-      <p:sp>
-        <p:nvSpPr>
-          <p:cNvPr id="30" name="Rectangle 29"/>
-          <p:cNvSpPr/>
-          <p:nvPr/>
-        </p:nvSpPr>
-        <p:spPr>
-          <a:xfrm>
-            <a:off x="640080" y="4123943"/>
-            <a:ext cx="10911535" cy="457200"/>
-          </a:xfrm>
-          <a:prstGeom prst="rect">
-            <a:avLst/>
-          </a:prstGeom>
-          <a:solidFill>
-            <a:srgbClr val="FFFFFF"/>
-          </a:solidFill>
-          <a:ln>
-            <a:noFill/>
-          </a:ln>
-          <a:effectLst/>
-        </p:spPr>
-        <p:style>
-          <a:lnRef idx="1">
-            <a:schemeClr val="accent1"/>
-          </a:lnRef>
-          <a:fillRef idx="3">
-            <a:schemeClr val="accent1"/>
-          </a:fillRef>
-          <a:effectRef idx="2">
-            <a:schemeClr val="accent1"/>
-          </a:effectRef>
-          <a:fontRef idx="minor">
-            <a:schemeClr val="lt1"/>
-          </a:fontRef>
-        </p:style>
-        <p:txBody>
-          <a:bodyPr rtlCol="0" anchor="ctr"/>
-          <a:lstStyle/>
-          <a:p>
-            <a:pPr algn="ctr"/>
-          </a:p>
-        </p:txBody>
-      </p:sp>
-      <p:sp>
-        <p:nvSpPr>
-          <p:cNvPr id="31" name="TextBox 30"/>
-          <p:cNvSpPr txBox="1"/>
-          <p:nvPr/>
-        </p:nvSpPr>
-        <p:spPr>
-          <a:xfrm>
-            <a:off x="749808" y="4123943"/>
-            <a:ext cx="2011680" cy="457200"/>
-          </a:xfrm>
-          <a:prstGeom prst="rect">
-            <a:avLst/>
-          </a:prstGeom>
-          <a:noFill/>
-        </p:spPr>
-        <p:txBody>
-          <a:bodyPr wrap="square" anchor="ctr" lIns="0" rIns="0" tIns="0" bIns="0">
-            <a:spAutoFit/>
-          </a:bodyPr>
-          <a:lstStyle/>
-          <a:p>
-            <a:pPr algn="l">
-              <a:lnSpc>
-                <a:spcPct val="112000"/>
-              </a:lnSpc>
-              <a:spcAft>
-                <a:spcPts val="500"/>
-              </a:spcAft>
-            </a:pPr>
-            <a:r>
-              <a:rPr sz="1250" b="0" i="0">
-                <a:solidFill>
-                  <a:srgbClr val="3D4D5A"/>
-                </a:solidFill>
-                <a:latin typeface="Microsoft JhengHei"/>
-                <a:ea typeface="Microsoft JhengHei"/>
-                <a:cs typeface="Microsoft JhengHei"/>
-              </a:rPr>
-              <a:t>排班能力</a:t>
-            </a:r>
-          </a:p>
-        </p:txBody>
-      </p:sp>
-      <p:sp>
-        <p:nvSpPr>
-          <p:cNvPr id="32" name="TextBox 31"/>
-          <p:cNvSpPr txBox="1"/>
-          <p:nvPr/>
-        </p:nvSpPr>
-        <p:spPr>
-          <a:xfrm>
-            <a:off x="2944368" y="4123943"/>
-            <a:ext cx="4114800" cy="457200"/>
-          </a:xfrm>
-          <a:prstGeom prst="rect">
-            <a:avLst/>
-          </a:prstGeom>
-          <a:noFill/>
-        </p:spPr>
-        <p:txBody>
-          <a:bodyPr wrap="square" anchor="ctr" lIns="0" rIns="0" tIns="0" bIns="0">
-            <a:spAutoFit/>
-          </a:bodyPr>
-          <a:lstStyle/>
-          <a:p>
-            <a:pPr algn="l">
-              <a:lnSpc>
-                <a:spcPct val="112000"/>
-              </a:lnSpc>
-              <a:spcAft>
-                <a:spcPts val="500"/>
-              </a:spcAft>
-            </a:pPr>
-            <a:r>
-              <a:rPr sz="1250" b="0" i="0">
-                <a:solidFill>
-                  <a:srgbClr val="7C8B97"/>
-                </a:solidFill>
-                <a:latin typeface="Microsoft JhengHei"/>
-                <a:ea typeface="Microsoft JhengHei"/>
-                <a:cs typeface="Microsoft JhengHei"/>
-              </a:rPr>
-              <a:t>無人員 / 船艦資料</a:t>
-            </a:r>
-          </a:p>
-        </p:txBody>
-      </p:sp>
-      <p:sp>
-        <p:nvSpPr>
-          <p:cNvPr id="33" name="TextBox 32"/>
-          <p:cNvSpPr txBox="1"/>
-          <p:nvPr/>
-        </p:nvSpPr>
-        <p:spPr>
-          <a:xfrm>
-            <a:off x="7242048" y="4123943"/>
-            <a:ext cx="4236415" cy="457200"/>
-          </a:xfrm>
-          <a:prstGeom prst="rect">
-            <a:avLst/>
-          </a:prstGeom>
-          <a:noFill/>
-        </p:spPr>
-        <p:txBody>
-          <a:bodyPr wrap="square" anchor="ctr" lIns="0" rIns="0" tIns="0" bIns="0">
-            <a:spAutoFit/>
-          </a:bodyPr>
-          <a:lstStyle/>
-          <a:p>
-            <a:pPr algn="l">
-              <a:lnSpc>
-                <a:spcPct val="112000"/>
-              </a:lnSpc>
-              <a:spcAft>
-                <a:spcPts val="500"/>
-              </a:spcAft>
-            </a:pPr>
-            <a:r>
-              <a:rPr sz="1250" b="1" i="0">
-                <a:solidFill>
-                  <a:srgbClr val="4E8C8A"/>
-                </a:solidFill>
-                <a:latin typeface="Microsoft JhengHei"/>
-                <a:ea typeface="Microsoft JhengHei"/>
-                <a:cs typeface="Microsoft JhengHei"/>
-              </a:rPr>
-              <a:t>MILP 整數規劃全域最佳化</a:t>
-            </a:r>
-          </a:p>
-        </p:txBody>
-      </p:sp>
-      <p:sp>
-        <p:nvSpPr>
-          <p:cNvPr id="34" name="Rectangle 33"/>
-          <p:cNvSpPr/>
-          <p:nvPr/>
-        </p:nvSpPr>
-        <p:spPr>
-          <a:xfrm>
-            <a:off x="640080" y="4581143"/>
-            <a:ext cx="10911535" cy="457200"/>
-          </a:xfrm>
-          <a:prstGeom prst="rect">
-            <a:avLst/>
-          </a:prstGeom>
-          <a:solidFill>
-            <a:srgbClr val="F3F7F9"/>
-          </a:solidFill>
-          <a:ln>
-            <a:noFill/>
-          </a:ln>
-          <a:effectLst/>
-        </p:spPr>
-        <p:style>
-          <a:lnRef idx="1">
-            <a:schemeClr val="accent1"/>
-          </a:lnRef>
-          <a:fillRef idx="3">
-            <a:schemeClr val="accent1"/>
-          </a:fillRef>
-          <a:effectRef idx="2">
-            <a:schemeClr val="accent1"/>
-          </a:effectRef>
-          <a:fontRef idx="minor">
-            <a:schemeClr val="lt1"/>
-          </a:fontRef>
-        </p:style>
-        <p:txBody>
-          <a:bodyPr rtlCol="0" anchor="ctr"/>
-          <a:lstStyle/>
-          <a:p>
-            <a:pPr algn="ctr"/>
-          </a:p>
-        </p:txBody>
-      </p:sp>
-      <p:sp>
-        <p:nvSpPr>
-          <p:cNvPr id="35" name="TextBox 34"/>
-          <p:cNvSpPr txBox="1"/>
-          <p:nvPr/>
-        </p:nvSpPr>
-        <p:spPr>
-          <a:xfrm>
-            <a:off x="749808" y="4581143"/>
-            <a:ext cx="2011680" cy="457200"/>
-          </a:xfrm>
-          <a:prstGeom prst="rect">
-            <a:avLst/>
-          </a:prstGeom>
-          <a:noFill/>
-        </p:spPr>
-        <p:txBody>
-          <a:bodyPr wrap="square" anchor="ctr" lIns="0" rIns="0" tIns="0" bIns="0">
-            <a:spAutoFit/>
-          </a:bodyPr>
-          <a:lstStyle/>
-          <a:p>
-            <a:pPr algn="l">
-              <a:lnSpc>
-                <a:spcPct val="112000"/>
-              </a:lnSpc>
-              <a:spcAft>
-                <a:spcPts val="500"/>
-              </a:spcAft>
-            </a:pPr>
-            <a:r>
-              <a:rPr sz="1250" b="0" i="0">
-                <a:solidFill>
-                  <a:srgbClr val="3D4D5A"/>
-                </a:solidFill>
-                <a:latin typeface="Microsoft JhengHei"/>
-                <a:ea typeface="Microsoft JhengHei"/>
-                <a:cs typeface="Microsoft JhengHei"/>
-              </a:rPr>
-              <a:t>ML 預測</a:t>
-            </a:r>
-          </a:p>
-        </p:txBody>
-      </p:sp>
-      <p:sp>
-        <p:nvSpPr>
-          <p:cNvPr id="36" name="TextBox 35"/>
-          <p:cNvSpPr txBox="1"/>
-          <p:nvPr/>
-        </p:nvSpPr>
-        <p:spPr>
-          <a:xfrm>
-            <a:off x="2944368" y="4581143"/>
-            <a:ext cx="4114800" cy="457200"/>
-          </a:xfrm>
-          <a:prstGeom prst="rect">
-            <a:avLst/>
-          </a:prstGeom>
-          <a:noFill/>
-        </p:spPr>
-        <p:txBody>
-          <a:bodyPr wrap="square" anchor="ctr" lIns="0" rIns="0" tIns="0" bIns="0">
-            <a:spAutoFit/>
-          </a:bodyPr>
-          <a:lstStyle/>
-          <a:p>
-            <a:pPr algn="l">
-              <a:lnSpc>
-                <a:spcPct val="112000"/>
-              </a:lnSpc>
-              <a:spcAft>
-                <a:spcPts val="500"/>
-              </a:spcAft>
-            </a:pPr>
-            <a:r>
-              <a:rPr sz="1250" b="0" i="0">
-                <a:solidFill>
-                  <a:srgbClr val="7C8B97"/>
-                </a:solidFill>
-                <a:latin typeface="Microsoft JhengHei"/>
-                <a:ea typeface="Microsoft JhengHei"/>
-                <a:cs typeface="Microsoft JhengHei"/>
-              </a:rPr>
-              <a:t>視情況</a:t>
-            </a:r>
-          </a:p>
-        </p:txBody>
-      </p:sp>
-      <p:sp>
-        <p:nvSpPr>
-          <p:cNvPr id="37" name="TextBox 36"/>
-          <p:cNvSpPr txBox="1"/>
-          <p:nvPr/>
-        </p:nvSpPr>
-        <p:spPr>
-          <a:xfrm>
-            <a:off x="7242048" y="4581143"/>
-            <a:ext cx="4236415" cy="457200"/>
-          </a:xfrm>
-          <a:prstGeom prst="rect">
-            <a:avLst/>
-          </a:prstGeom>
-          <a:noFill/>
-        </p:spPr>
-        <p:txBody>
-          <a:bodyPr wrap="square" anchor="ctr" lIns="0" rIns="0" tIns="0" bIns="0">
-            <a:spAutoFit/>
-          </a:bodyPr>
-          <a:lstStyle/>
-          <a:p>
-            <a:pPr algn="l">
-              <a:lnSpc>
-                <a:spcPct val="112000"/>
-              </a:lnSpc>
-              <a:spcAft>
-                <a:spcPts val="500"/>
-              </a:spcAft>
-            </a:pPr>
-            <a:r>
-              <a:rPr sz="1250" b="1" i="0">
-                <a:solidFill>
-                  <a:srgbClr val="4E8C8A"/>
-                </a:solidFill>
-                <a:latin typeface="Microsoft JhengHei"/>
-                <a:ea typeface="Microsoft JhengHei"/>
-                <a:cs typeface="Microsoft JhengHei"/>
-              </a:rPr>
-              <a:t>RF acc=0.949 / AUC=0.811</a:t>
-            </a:r>
-          </a:p>
-        </p:txBody>
-      </p:sp>
-      <p:sp>
-        <p:nvSpPr>
-          <p:cNvPr id="38" name="Rectangle 37"/>
-          <p:cNvSpPr/>
-          <p:nvPr/>
-        </p:nvSpPr>
-        <p:spPr>
-          <a:xfrm>
-            <a:off x="640080" y="5038343"/>
-            <a:ext cx="10911535" cy="457200"/>
-          </a:xfrm>
-          <a:prstGeom prst="rect">
-            <a:avLst/>
-          </a:prstGeom>
-          <a:solidFill>
-            <a:srgbClr val="FFFFFF"/>
-          </a:solidFill>
-          <a:ln>
-            <a:noFill/>
-          </a:ln>
-          <a:effectLst/>
-        </p:spPr>
-        <p:style>
-          <a:lnRef idx="1">
-            <a:schemeClr val="accent1"/>
-          </a:lnRef>
-          <a:fillRef idx="3">
-            <a:schemeClr val="accent1"/>
-          </a:fillRef>
-          <a:effectRef idx="2">
-            <a:schemeClr val="accent1"/>
-          </a:effectRef>
-          <a:fontRef idx="minor">
-            <a:schemeClr val="lt1"/>
-          </a:fontRef>
-        </p:style>
-        <p:txBody>
-          <a:bodyPr rtlCol="0" anchor="ctr"/>
-          <a:lstStyle/>
-          <a:p>
-            <a:pPr algn="ctr"/>
-          </a:p>
-        </p:txBody>
-      </p:sp>
-      <p:sp>
-        <p:nvSpPr>
-          <p:cNvPr id="39" name="TextBox 38"/>
-          <p:cNvSpPr txBox="1"/>
-          <p:nvPr/>
-        </p:nvSpPr>
-        <p:spPr>
-          <a:xfrm>
-            <a:off x="749808" y="5038343"/>
-            <a:ext cx="2011680" cy="457200"/>
-          </a:xfrm>
-          <a:prstGeom prst="rect">
-            <a:avLst/>
-          </a:prstGeom>
-          <a:noFill/>
-        </p:spPr>
-        <p:txBody>
-          <a:bodyPr wrap="square" anchor="ctr" lIns="0" rIns="0" tIns="0" bIns="0">
-            <a:spAutoFit/>
-          </a:bodyPr>
-          <a:lstStyle/>
-          <a:p>
-            <a:pPr algn="l">
-              <a:lnSpc>
-                <a:spcPct val="112000"/>
-              </a:lnSpc>
-              <a:spcAft>
-                <a:spcPts val="500"/>
-              </a:spcAft>
-            </a:pPr>
-            <a:r>
-              <a:rPr sz="1250" b="0" i="0">
-                <a:solidFill>
-                  <a:srgbClr val="3D4D5A"/>
-                </a:solidFill>
-                <a:latin typeface="Microsoft JhengHei"/>
-                <a:ea typeface="Microsoft JhengHei"/>
-                <a:cs typeface="Microsoft JhengHei"/>
-              </a:rPr>
-              <a:t>異常偵測</a:t>
-            </a:r>
-          </a:p>
-        </p:txBody>
-      </p:sp>
-      <p:sp>
-        <p:nvSpPr>
-          <p:cNvPr id="40" name="TextBox 39"/>
-          <p:cNvSpPr txBox="1"/>
-          <p:nvPr/>
-        </p:nvSpPr>
-        <p:spPr>
-          <a:xfrm>
-            <a:off x="2944368" y="5038343"/>
-            <a:ext cx="4114800" cy="457200"/>
-          </a:xfrm>
-          <a:prstGeom prst="rect">
-            <a:avLst/>
-          </a:prstGeom>
-          <a:noFill/>
-        </p:spPr>
-        <p:txBody>
-          <a:bodyPr wrap="square" anchor="ctr" lIns="0" rIns="0" tIns="0" bIns="0">
-            <a:spAutoFit/>
-          </a:bodyPr>
-          <a:lstStyle/>
-          <a:p>
-            <a:pPr algn="l">
-              <a:lnSpc>
-                <a:spcPct val="112000"/>
-              </a:lnSpc>
-              <a:spcAft>
-                <a:spcPts val="500"/>
-              </a:spcAft>
-            </a:pPr>
-            <a:r>
-              <a:rPr sz="1250" b="0" i="0">
-                <a:solidFill>
-                  <a:srgbClr val="7C8B97"/>
-                </a:solidFill>
-                <a:latin typeface="Microsoft JhengHei"/>
-                <a:ea typeface="Microsoft JhengHei"/>
-                <a:cs typeface="Microsoft JhengHei"/>
-              </a:rPr>
-              <a:t>—</a:t>
-            </a:r>
-          </a:p>
-        </p:txBody>
-      </p:sp>
-      <p:sp>
-        <p:nvSpPr>
-          <p:cNvPr id="41" name="TextBox 40"/>
-          <p:cNvSpPr txBox="1"/>
-          <p:nvPr/>
-        </p:nvSpPr>
-        <p:spPr>
-          <a:xfrm>
-            <a:off x="7242048" y="5038343"/>
-            <a:ext cx="4236415" cy="457200"/>
-          </a:xfrm>
-          <a:prstGeom prst="rect">
-            <a:avLst/>
-          </a:prstGeom>
-          <a:noFill/>
-        </p:spPr>
-        <p:txBody>
-          <a:bodyPr wrap="square" anchor="ctr" lIns="0" rIns="0" tIns="0" bIns="0">
-            <a:spAutoFit/>
-          </a:bodyPr>
-          <a:lstStyle/>
-          <a:p>
-            <a:pPr algn="l">
-              <a:lnSpc>
-                <a:spcPct val="112000"/>
-              </a:lnSpc>
-              <a:spcAft>
-                <a:spcPts val="500"/>
-              </a:spcAft>
-            </a:pPr>
-            <a:r>
-              <a:rPr sz="1250" b="1" i="0">
-                <a:solidFill>
-                  <a:srgbClr val="4E8C8A"/>
-                </a:solidFill>
-                <a:latin typeface="Microsoft JhengHei"/>
-                <a:ea typeface="Microsoft JhengHei"/>
-                <a:cs typeface="Microsoft JhengHei"/>
-              </a:rPr>
-              <a:t>Z-score + Isolation Forest 5 維</a:t>
-            </a:r>
-          </a:p>
-        </p:txBody>
-      </p:sp>
-      <p:sp>
-        <p:nvSpPr>
-          <p:cNvPr id="42" name="Rectangle 41"/>
-          <p:cNvSpPr/>
-          <p:nvPr/>
-        </p:nvSpPr>
-        <p:spPr>
-          <a:xfrm>
-            <a:off x="640080" y="1874519"/>
-            <a:ext cx="10911535" cy="3621024"/>
-          </a:xfrm>
-          <a:prstGeom prst="rect">
-            <a:avLst/>
-          </a:prstGeom>
-          <a:noFill/>
-          <a:ln w="9525">
-            <a:solidFill>
-              <a:srgbClr val="D7E0E6"/>
-            </a:solidFill>
-          </a:ln>
-          <a:effectLst/>
-        </p:spPr>
-        <p:style>
-          <a:lnRef idx="1">
-            <a:schemeClr val="accent1"/>
-          </a:lnRef>
-          <a:fillRef idx="3">
-            <a:schemeClr val="accent1"/>
-          </a:fillRef>
-          <a:effectRef idx="2">
-            <a:schemeClr val="accent1"/>
-          </a:effectRef>
-          <a:fontRef idx="minor">
-            <a:schemeClr val="lt1"/>
-          </a:fontRef>
-        </p:style>
-        <p:txBody>
-          <a:bodyPr rtlCol="0" anchor="ctr"/>
-          <a:lstStyle/>
-          <a:p>
-            <a:pPr algn="ctr"/>
-          </a:p>
-        </p:txBody>
-      </p:sp>
-      <p:sp>
-        <p:nvSpPr>
-          <p:cNvPr id="43" name="Rounded Rectangle 42"/>
+              <a:t>依累計趟次推估維護需求，可用度 &lt; 30% 自動排除於排班候選池。</a:t>
+            </a:r>
+          </a:p>
+        </p:txBody>
+      </p:sp>
+      <p:sp>
+        <p:nvSpPr>
+          <p:cNvPr id="24" name="Rounded Rectangle 23"/>
           <p:cNvSpPr/>
           <p:nvPr/>
         </p:nvSpPr>
@@ -15861,7 +14690,6 @@
           <a:ln>
             <a:noFill/>
           </a:ln>
-          <a:effectLst/>
         </p:spPr>
         <p:style>
           <a:lnRef idx="1">
@@ -15887,7 +14715,7 @@
       </p:sp>
       <p:sp>
         <p:nvSpPr>
-          <p:cNvPr id="44" name="Rectangle 43"/>
+          <p:cNvPr id="25" name="Rectangle 24"/>
           <p:cNvSpPr/>
           <p:nvPr/>
         </p:nvSpPr>
@@ -15905,7 +14733,6 @@
           <a:ln>
             <a:noFill/>
           </a:ln>
-          <a:effectLst/>
         </p:spPr>
         <p:style>
           <a:lnRef idx="1">
@@ -15931,7 +14758,7 @@
       </p:sp>
       <p:sp>
         <p:nvSpPr>
-          <p:cNvPr id="45" name="TextBox 44"/>
+          <p:cNvPr id="26" name="TextBox 25"/>
           <p:cNvSpPr txBox="1"/>
           <p:nvPr/>
         </p:nvSpPr>
@@ -15968,14 +14795,14 @@
                 <a:ea typeface="Microsoft JhengHei"/>
                 <a:cs typeface="Microsoft JhengHei"/>
               </a:rPr>
-              <a:t>一句話</a:t>
-            </a:r>
-          </a:p>
-        </p:txBody>
-      </p:sp>
-      <p:sp>
-        <p:nvSpPr>
-          <p:cNvPr id="46" name="TextBox 45"/>
+              <a:t>整合</a:t>
+            </a:r>
+          </a:p>
+        </p:txBody>
+      </p:sp>
+      <p:sp>
+        <p:nvSpPr>
+          <p:cNvPr id="27" name="TextBox 26"/>
           <p:cNvSpPr txBox="1"/>
           <p:nvPr/>
         </p:nvSpPr>
@@ -16012,7 +14839,7 @@
                 <a:ea typeface="Microsoft JhengHei"/>
                 <a:cs typeface="Microsoft JhengHei"/>
               </a:rPr>
-              <a:t>全班唯一把海象接進人力資源排班決策的管理系統 — 這些輸出純海象資料根本做不出來。</a:t>
+              <a:t>四項功能共用同一個排班引擎，以 MILP 全域最佳化一次求解 — 不是分別看四張圖再人工判斷。</a:t>
             </a:r>
           </a:p>
         </p:txBody>
@@ -16150,7 +14977,6 @@
               <a:srgbClr val="C8922E"/>
             </a:solidFill>
           </a:ln>
-          <a:effectLst/>
         </p:spPr>
         <p:style>
           <a:lnRef idx="2">
@@ -16186,7 +15012,6 @@
               <a:srgbClr val="D7E0E6"/>
             </a:solidFill>
           </a:ln>
-          <a:effectLst/>
         </p:spPr>
         <p:style>
           <a:lnRef idx="2">
@@ -16318,13 +15143,6 @@
               <a:srgbClr val="C5D2DA"/>
             </a:solidFill>
           </a:ln>
-          <a:effectLst>
-            <a:outerShdw blurRad="114300" dist="50800" dir="5400000" rotWithShape="0">
-              <a:srgbClr val="1C3D5A">
-                <a:alpha val="16000"/>
-              </a:srgbClr>
-            </a:outerShdw>
-          </a:effectLst>
         </p:spPr>
       </p:pic>
       <p:sp>
@@ -16390,7 +15208,6 @@
               <a:srgbClr val="D7E0E6"/>
             </a:solidFill>
           </a:ln>
-          <a:effectLst/>
         </p:spPr>
         <p:style>
           <a:lnRef idx="2">
@@ -16851,7 +15668,6 @@
               <a:srgbClr val="C8922E"/>
             </a:solidFill>
           </a:ln>
-          <a:effectLst/>
         </p:spPr>
         <p:style>
           <a:lnRef idx="2">
@@ -16887,7 +15703,6 @@
               <a:srgbClr val="D7E0E6"/>
             </a:solidFill>
           </a:ln>
-          <a:effectLst/>
         </p:spPr>
         <p:style>
           <a:lnRef idx="2">
@@ -17016,13 +15831,6 @@
               <a:srgbClr val="D7E0E6"/>
             </a:solidFill>
           </a:ln>
-          <a:effectLst>
-            <a:outerShdw blurRad="88900" dist="44450" dir="5400000" rotWithShape="0">
-              <a:srgbClr val="1C3D5A">
-                <a:alpha val="20000"/>
-              </a:srgbClr>
-            </a:outerShdw>
-          </a:effectLst>
         </p:spPr>
         <p:style>
           <a:lnRef idx="1">
@@ -17066,7 +15874,6 @@
           <a:ln>
             <a:noFill/>
           </a:ln>
-          <a:effectLst/>
         </p:spPr>
         <p:style>
           <a:lnRef idx="1">
@@ -17353,13 +16160,6 @@
               <a:srgbClr val="D7E0E6"/>
             </a:solidFill>
           </a:ln>
-          <a:effectLst>
-            <a:outerShdw blurRad="88900" dist="44450" dir="5400000" rotWithShape="0">
-              <a:srgbClr val="1C3D5A">
-                <a:alpha val="20000"/>
-              </a:srgbClr>
-            </a:outerShdw>
-          </a:effectLst>
         </p:spPr>
         <p:style>
           <a:lnRef idx="1">
@@ -17403,7 +16203,6 @@
           <a:ln>
             <a:noFill/>
           </a:ln>
-          <a:effectLst/>
         </p:spPr>
         <p:style>
           <a:lnRef idx="1">
@@ -17690,13 +16489,6 @@
               <a:srgbClr val="D7E0E6"/>
             </a:solidFill>
           </a:ln>
-          <a:effectLst>
-            <a:outerShdw blurRad="88900" dist="44450" dir="5400000" rotWithShape="0">
-              <a:srgbClr val="1C3D5A">
-                <a:alpha val="20000"/>
-              </a:srgbClr>
-            </a:outerShdw>
-          </a:effectLst>
         </p:spPr>
         <p:style>
           <a:lnRef idx="1">
@@ -17740,7 +16532,6 @@
           <a:ln>
             <a:noFill/>
           </a:ln>
-          <a:effectLst/>
         </p:spPr>
         <p:style>
           <a:lnRef idx="1">
@@ -17981,7 +16772,6 @@
           <a:ln>
             <a:noFill/>
           </a:ln>
-          <a:effectLst/>
         </p:spPr>
         <p:style>
           <a:lnRef idx="1">
@@ -18025,7 +16815,6 @@
           <a:ln>
             <a:noFill/>
           </a:ln>
-          <a:effectLst/>
         </p:spPr>
         <p:style>
           <a:lnRef idx="1">
@@ -18088,7 +16877,7 @@
                 <a:ea typeface="Microsoft JhengHei"/>
                 <a:cs typeface="Microsoft JhengHei"/>
               </a:rPr>
-              <a:t>差異化</a:t>
+              <a:t>核心</a:t>
             </a:r>
           </a:p>
         </p:txBody>
@@ -18132,7 +16921,7 @@
                 <a:ea typeface="Microsoft JhengHei"/>
                 <a:cs typeface="Microsoft JhengHei"/>
               </a:rPr>
-              <a:t>需要人員 / 勤務 / 船艦三維資料才能產出 — 純海象視覺化系統做不到的決策維度。</a:t>
+              <a:t>本系統整合值勤、人員、船艦、海象四類資料，最終輸出可執行的明日具名班表。</a:t>
             </a:r>
           </a:p>
         </p:txBody>
@@ -18270,7 +17059,6 @@
               <a:srgbClr val="C8922E"/>
             </a:solidFill>
           </a:ln>
-          <a:effectLst/>
         </p:spPr>
         <p:style>
           <a:lnRef idx="2">
@@ -18306,7 +17094,6 @@
               <a:srgbClr val="D7E0E6"/>
             </a:solidFill>
           </a:ln>
-          <a:effectLst/>
         </p:spPr>
         <p:style>
           <a:lnRef idx="2">
@@ -18438,13 +17225,6 @@
               <a:srgbClr val="C5D2DA"/>
             </a:solidFill>
           </a:ln>
-          <a:effectLst>
-            <a:outerShdw blurRad="114300" dist="50800" dir="5400000" rotWithShape="0">
-              <a:srgbClr val="1C3D5A">
-                <a:alpha val="16000"/>
-              </a:srgbClr>
-            </a:outerShdw>
-          </a:effectLst>
         </p:spPr>
       </p:pic>
       <p:sp>
@@ -18469,7 +17249,6 @@
           <a:ln>
             <a:noFill/>
           </a:ln>
-          <a:effectLst/>
         </p:spPr>
         <p:style>
           <a:lnRef idx="1">
@@ -18513,7 +17292,6 @@
           <a:ln>
             <a:noFill/>
           </a:ln>
-          <a:effectLst/>
         </p:spPr>
         <p:style>
           <a:lnRef idx="1">
@@ -18758,7 +17536,6 @@
               <a:srgbClr val="C8922E"/>
             </a:solidFill>
           </a:ln>
-          <a:effectLst/>
         </p:spPr>
         <p:style>
           <a:lnRef idx="2">
@@ -18794,7 +17571,6 @@
               <a:srgbClr val="D7E0E6"/>
             </a:solidFill>
           </a:ln>
-          <a:effectLst/>
         </p:spPr>
         <p:style>
           <a:lnRef idx="2">
@@ -18923,13 +17699,6 @@
               <a:srgbClr val="D7E0E6"/>
             </a:solidFill>
           </a:ln>
-          <a:effectLst>
-            <a:outerShdw blurRad="88900" dist="44450" dir="5400000" rotWithShape="0">
-              <a:srgbClr val="1C3D5A">
-                <a:alpha val="20000"/>
-              </a:srgbClr>
-            </a:outerShdw>
-          </a:effectLst>
         </p:spPr>
         <p:style>
           <a:lnRef idx="1">
@@ -19109,13 +17878,6 @@
               <a:srgbClr val="D7E0E6"/>
             </a:solidFill>
           </a:ln>
-          <a:effectLst>
-            <a:outerShdw blurRad="88900" dist="44450" dir="5400000" rotWithShape="0">
-              <a:srgbClr val="1C3D5A">
-                <a:alpha val="20000"/>
-              </a:srgbClr>
-            </a:outerShdw>
-          </a:effectLst>
         </p:spPr>
         <p:style>
           <a:lnRef idx="1">
@@ -19295,13 +18057,6 @@
               <a:srgbClr val="D7E0E6"/>
             </a:solidFill>
           </a:ln>
-          <a:effectLst>
-            <a:outerShdw blurRad="88900" dist="44450" dir="5400000" rotWithShape="0">
-              <a:srgbClr val="1C3D5A">
-                <a:alpha val="20000"/>
-              </a:srgbClr>
-            </a:outerShdw>
-          </a:effectLst>
         </p:spPr>
         <p:style>
           <a:lnRef idx="1">
@@ -19481,13 +18236,6 @@
               <a:srgbClr val="D7E0E6"/>
             </a:solidFill>
           </a:ln>
-          <a:effectLst>
-            <a:outerShdw blurRad="88900" dist="44450" dir="5400000" rotWithShape="0">
-              <a:srgbClr val="1C3D5A">
-                <a:alpha val="20000"/>
-              </a:srgbClr>
-            </a:outerShdw>
-          </a:effectLst>
         </p:spPr>
         <p:style>
           <a:lnRef idx="1">
@@ -19667,13 +18415,6 @@
               <a:srgbClr val="C8922E"/>
             </a:solidFill>
           </a:ln>
-          <a:effectLst>
-            <a:outerShdw blurRad="88900" dist="44450" dir="5400000" rotWithShape="0">
-              <a:srgbClr val="1C3D5A">
-                <a:alpha val="20000"/>
-              </a:srgbClr>
-            </a:outerShdw>
-          </a:effectLst>
         </p:spPr>
         <p:style>
           <a:lnRef idx="1">
@@ -19894,7 +18635,7 @@
                 <a:ea typeface="Microsoft JhengHei"/>
                 <a:cs typeface="Microsoft JhengHei"/>
               </a:rPr>
-              <a:t>排班引擎 · MILP 模型</a:t>
+              <a:t>排班引擎 · 最佳化求解</a:t>
             </a:r>
           </a:p>
         </p:txBody>
@@ -19938,7 +18679,7 @@
                 <a:ea typeface="Microsoft JhengHei"/>
                 <a:cs typeface="Microsoft JhengHei"/>
               </a:rPr>
-              <a:t>把排班寫成整數線性規劃，交給求解器</a:t>
+              <a:t>把排班問題交給數學求解器，找全域最優指派</a:t>
             </a:r>
           </a:p>
         </p:txBody>
@@ -19962,7 +18703,6 @@
               <a:srgbClr val="C8922E"/>
             </a:solidFill>
           </a:ln>
-          <a:effectLst/>
         </p:spPr>
         <p:style>
           <a:lnRef idx="2">
@@ -19998,7 +18738,6 @@
               <a:srgbClr val="D7E0E6"/>
             </a:solidFill>
           </a:ln>
-          <a:effectLst/>
         </p:spPr>
         <p:style>
           <a:lnRef idx="2">
@@ -20111,27 +18850,22 @@
         </p:nvSpPr>
         <p:spPr>
           <a:xfrm>
-            <a:off x="640080" y="1874519"/>
-            <a:ext cx="5852160" cy="4114800"/>
+            <a:off x="640080" y="2011680"/>
+            <a:ext cx="3474720" cy="3474720"/>
           </a:xfrm>
           <a:prstGeom prst="roundRect">
             <a:avLst>
-              <a:gd name="adj" fmla="val 3000"/>
+              <a:gd name="adj" fmla="val 5000"/>
             </a:avLst>
           </a:prstGeom>
           <a:solidFill>
-            <a:srgbClr val="0F2233"/>
+            <a:srgbClr val="FFFFFF"/>
           </a:solidFill>
-          <a:ln>
-            <a:noFill/>
+          <a:ln w="9525">
+            <a:solidFill>
+              <a:srgbClr val="D7E0E6"/>
+            </a:solidFill>
           </a:ln>
-          <a:effectLst>
-            <a:outerShdw blurRad="88900" dist="44450" dir="5400000" rotWithShape="0">
-              <a:srgbClr val="1C3D5A">
-                <a:alpha val="20000"/>
-              </a:srgbClr>
-            </a:outerShdw>
-          </a:effectLst>
         </p:spPr>
         <p:style>
           <a:lnRef idx="1">
@@ -20157,14 +18891,57 @@
       </p:sp>
       <p:sp>
         <p:nvSpPr>
-          <p:cNvPr id="9" name="TextBox 8"/>
-          <p:cNvSpPr txBox="1"/>
-          <p:nvPr/>
-        </p:nvSpPr>
-        <p:spPr>
-          <a:xfrm>
-            <a:off x="914400" y="2103120"/>
-            <a:ext cx="5303520" cy="274320"/>
+          <p:cNvPr id="9" name="Rectangle 8"/>
+          <p:cNvSpPr/>
+          <p:nvPr/>
+        </p:nvSpPr>
+        <p:spPr>
+          <a:xfrm>
+            <a:off x="640080" y="2011680"/>
+            <a:ext cx="3474720" cy="64008"/>
+          </a:xfrm>
+          <a:prstGeom prst="rect">
+            <a:avLst/>
+          </a:prstGeom>
+          <a:solidFill>
+            <a:srgbClr val="1C3D5A"/>
+          </a:solidFill>
+          <a:ln>
+            <a:noFill/>
+          </a:ln>
+        </p:spPr>
+        <p:style>
+          <a:lnRef idx="1">
+            <a:schemeClr val="accent1"/>
+          </a:lnRef>
+          <a:fillRef idx="3">
+            <a:schemeClr val="accent1"/>
+          </a:fillRef>
+          <a:effectRef idx="2">
+            <a:schemeClr val="accent1"/>
+          </a:effectRef>
+          <a:fontRef idx="minor">
+            <a:schemeClr val="lt1"/>
+          </a:fontRef>
+        </p:style>
+        <p:txBody>
+          <a:bodyPr rtlCol="0" anchor="ctr"/>
+          <a:lstStyle/>
+          <a:p>
+            <a:pPr algn="ctr"/>
+          </a:p>
+        </p:txBody>
+      </p:sp>
+      <p:sp>
+        <p:nvSpPr>
+          <p:cNvPr id="10" name="TextBox 9"/>
+          <p:cNvSpPr txBox="1"/>
+          <p:nvPr/>
+        </p:nvSpPr>
+        <p:spPr>
+          <a:xfrm>
+            <a:off x="868680" y="2240280"/>
+            <a:ext cx="3017520" cy="402336"/>
           </a:xfrm>
           <a:prstGeom prst="rect">
             <a:avLst/>
@@ -20186,447 +18963,7 @@
               </a:spcAft>
             </a:pPr>
             <a:r>
-              <a:rPr sz="1350" b="1" i="0">
-                <a:solidFill>
-                  <a:srgbClr val="C8922E"/>
-                </a:solidFill>
-                <a:latin typeface="Consolas"/>
-                <a:ea typeface="Microsoft JhengHei"/>
-                <a:cs typeface="Consolas"/>
-              </a:rPr>
-              <a:t>決策變數</a:t>
-            </a:r>
-          </a:p>
-        </p:txBody>
-      </p:sp>
-      <p:sp>
-        <p:nvSpPr>
-          <p:cNvPr id="10" name="TextBox 9"/>
-          <p:cNvSpPr txBox="1"/>
-          <p:nvPr/>
-        </p:nvSpPr>
-        <p:spPr>
-          <a:xfrm>
-            <a:off x="914400" y="2409444"/>
-            <a:ext cx="5303520" cy="274320"/>
-          </a:xfrm>
-          <a:prstGeom prst="rect">
-            <a:avLst/>
-          </a:prstGeom>
-          <a:noFill/>
-        </p:spPr>
-        <p:txBody>
-          <a:bodyPr wrap="square" anchor="t" lIns="0" rIns="0" tIns="0" bIns="0">
-            <a:spAutoFit/>
-          </a:bodyPr>
-          <a:lstStyle/>
-          <a:p>
-            <a:pPr algn="l">
-              <a:lnSpc>
-                <a:spcPct val="112000"/>
-              </a:lnSpc>
-              <a:spcAft>
-                <a:spcPts val="500"/>
-              </a:spcAft>
-            </a:pPr>
-            <a:r>
-              <a:rPr sz="1250" b="0" i="0">
-                <a:solidFill>
-                  <a:srgbClr val="D5E0E8"/>
-                </a:solidFill>
-                <a:latin typeface="Consolas"/>
-                <a:ea typeface="Microsoft JhengHei"/>
-                <a:cs typeface="Consolas"/>
-              </a:rPr>
-              <a:t>  x[i,v] ∈ {0,1}   人員 i 是否指派船艦 v</a:t>
-            </a:r>
-          </a:p>
-        </p:txBody>
-      </p:sp>
-      <p:sp>
-        <p:nvSpPr>
-          <p:cNvPr id="11" name="TextBox 10"/>
-          <p:cNvSpPr txBox="1"/>
-          <p:nvPr/>
-        </p:nvSpPr>
-        <p:spPr>
-          <a:xfrm>
-            <a:off x="914400" y="2825496"/>
-            <a:ext cx="5303520" cy="274320"/>
-          </a:xfrm>
-          <a:prstGeom prst="rect">
-            <a:avLst/>
-          </a:prstGeom>
-          <a:noFill/>
-        </p:spPr>
-        <p:txBody>
-          <a:bodyPr wrap="square" anchor="t" lIns="0" rIns="0" tIns="0" bIns="0">
-            <a:spAutoFit/>
-          </a:bodyPr>
-          <a:lstStyle/>
-          <a:p>
-            <a:pPr algn="l">
-              <a:lnSpc>
-                <a:spcPct val="112000"/>
-              </a:lnSpc>
-              <a:spcAft>
-                <a:spcPts val="500"/>
-              </a:spcAft>
-            </a:pPr>
-            <a:r>
-              <a:rPr sz="1350" b="1" i="0">
-                <a:solidFill>
-                  <a:srgbClr val="C8922E"/>
-                </a:solidFill>
-                <a:latin typeface="Consolas"/>
-                <a:ea typeface="Microsoft JhengHei"/>
-                <a:cs typeface="Consolas"/>
-              </a:rPr>
-              <a:t>限制式</a:t>
-            </a:r>
-          </a:p>
-        </p:txBody>
-      </p:sp>
-      <p:sp>
-        <p:nvSpPr>
-          <p:cNvPr id="12" name="TextBox 11"/>
-          <p:cNvSpPr txBox="1"/>
-          <p:nvPr/>
-        </p:nvSpPr>
-        <p:spPr>
-          <a:xfrm>
-            <a:off x="914400" y="3131820"/>
-            <a:ext cx="5303520" cy="274320"/>
-          </a:xfrm>
-          <a:prstGeom prst="rect">
-            <a:avLst/>
-          </a:prstGeom>
-          <a:noFill/>
-        </p:spPr>
-        <p:txBody>
-          <a:bodyPr wrap="square" anchor="t" lIns="0" rIns="0" tIns="0" bIns="0">
-            <a:spAutoFit/>
-          </a:bodyPr>
-          <a:lstStyle/>
-          <a:p>
-            <a:pPr algn="l">
-              <a:lnSpc>
-                <a:spcPct val="112000"/>
-              </a:lnSpc>
-              <a:spcAft>
-                <a:spcPts val="500"/>
-              </a:spcAft>
-            </a:pPr>
-            <a:r>
-              <a:rPr sz="1250" b="0" i="0">
-                <a:solidFill>
-                  <a:srgbClr val="D5E0E8"/>
-                </a:solidFill>
-                <a:latin typeface="Consolas"/>
-                <a:ea typeface="Microsoft JhengHei"/>
-                <a:cs typeface="Consolas"/>
-              </a:rPr>
-              <a:t>  Σ_v x[i,v] ≤ 1      每人最多一艘船</a:t>
-            </a:r>
-          </a:p>
-        </p:txBody>
-      </p:sp>
-      <p:sp>
-        <p:nvSpPr>
-          <p:cNvPr id="13" name="TextBox 12"/>
-          <p:cNvSpPr txBox="1"/>
-          <p:nvPr/>
-        </p:nvSpPr>
-        <p:spPr>
-          <a:xfrm>
-            <a:off x="914400" y="3438144"/>
-            <a:ext cx="5303520" cy="274320"/>
-          </a:xfrm>
-          <a:prstGeom prst="rect">
-            <a:avLst/>
-          </a:prstGeom>
-          <a:noFill/>
-        </p:spPr>
-        <p:txBody>
-          <a:bodyPr wrap="square" anchor="t" lIns="0" rIns="0" tIns="0" bIns="0">
-            <a:spAutoFit/>
-          </a:bodyPr>
-          <a:lstStyle/>
-          <a:p>
-            <a:pPr algn="l">
-              <a:lnSpc>
-                <a:spcPct val="112000"/>
-              </a:lnSpc>
-              <a:spcAft>
-                <a:spcPts val="500"/>
-              </a:spcAft>
-            </a:pPr>
-            <a:r>
-              <a:rPr sz="1250" b="0" i="0">
-                <a:solidFill>
-                  <a:srgbClr val="D5E0E8"/>
-                </a:solidFill>
-                <a:latin typeface="Consolas"/>
-                <a:ea typeface="Microsoft JhengHei"/>
-                <a:cs typeface="Consolas"/>
-              </a:rPr>
-              <a:t>  Σ_i x[i,v] ≤ 1      每艦最多一人</a:t>
-            </a:r>
-          </a:p>
-        </p:txBody>
-      </p:sp>
-      <p:sp>
-        <p:nvSpPr>
-          <p:cNvPr id="14" name="TextBox 13"/>
-          <p:cNvSpPr txBox="1"/>
-          <p:nvPr/>
-        </p:nvSpPr>
-        <p:spPr>
-          <a:xfrm>
-            <a:off x="914400" y="3744468"/>
-            <a:ext cx="5303520" cy="274320"/>
-          </a:xfrm>
-          <a:prstGeom prst="rect">
-            <a:avLst/>
-          </a:prstGeom>
-          <a:noFill/>
-        </p:spPr>
-        <p:txBody>
-          <a:bodyPr wrap="square" anchor="t" lIns="0" rIns="0" tIns="0" bIns="0">
-            <a:spAutoFit/>
-          </a:bodyPr>
-          <a:lstStyle/>
-          <a:p>
-            <a:pPr algn="l">
-              <a:lnSpc>
-                <a:spcPct val="112000"/>
-              </a:lnSpc>
-              <a:spcAft>
-                <a:spcPts val="500"/>
-              </a:spcAft>
-            </a:pPr>
-            <a:r>
-              <a:rPr sz="1250" b="0" i="0">
-                <a:solidFill>
-                  <a:srgbClr val="D5E0E8"/>
-                </a:solidFill>
-                <a:latin typeface="Consolas"/>
-                <a:ea typeface="Microsoft JhengHei"/>
-                <a:cs typeface="Consolas"/>
-              </a:rPr>
-              <a:t>  Σ x[i,v] ≤ slots[z]  各海域員額上限</a:t>
-            </a:r>
-          </a:p>
-        </p:txBody>
-      </p:sp>
-      <p:sp>
-        <p:nvSpPr>
-          <p:cNvPr id="15" name="TextBox 14"/>
-          <p:cNvSpPr txBox="1"/>
-          <p:nvPr/>
-        </p:nvSpPr>
-        <p:spPr>
-          <a:xfrm>
-            <a:off x="914400" y="4160520"/>
-            <a:ext cx="5303520" cy="274320"/>
-          </a:xfrm>
-          <a:prstGeom prst="rect">
-            <a:avLst/>
-          </a:prstGeom>
-          <a:noFill/>
-        </p:spPr>
-        <p:txBody>
-          <a:bodyPr wrap="square" anchor="t" lIns="0" rIns="0" tIns="0" bIns="0">
-            <a:spAutoFit/>
-          </a:bodyPr>
-          <a:lstStyle/>
-          <a:p>
-            <a:pPr algn="l">
-              <a:lnSpc>
-                <a:spcPct val="112000"/>
-              </a:lnSpc>
-              <a:spcAft>
-                <a:spcPts val="500"/>
-              </a:spcAft>
-            </a:pPr>
-            <a:r>
-              <a:rPr sz="1350" b="1" i="0">
-                <a:solidFill>
-                  <a:srgbClr val="C8922E"/>
-                </a:solidFill>
-                <a:latin typeface="Consolas"/>
-                <a:ea typeface="Microsoft JhengHei"/>
-                <a:cs typeface="Consolas"/>
-              </a:rPr>
-              <a:t>目標函數</a:t>
-            </a:r>
-          </a:p>
-        </p:txBody>
-      </p:sp>
-      <p:sp>
-        <p:nvSpPr>
-          <p:cNvPr id="16" name="TextBox 15"/>
-          <p:cNvSpPr txBox="1"/>
-          <p:nvPr/>
-        </p:nvSpPr>
-        <p:spPr>
-          <a:xfrm>
-            <a:off x="914400" y="4466844"/>
-            <a:ext cx="5303520" cy="274320"/>
-          </a:xfrm>
-          <a:prstGeom prst="rect">
-            <a:avLst/>
-          </a:prstGeom>
-          <a:noFill/>
-        </p:spPr>
-        <p:txBody>
-          <a:bodyPr wrap="square" anchor="t" lIns="0" rIns="0" tIns="0" bIns="0">
-            <a:spAutoFit/>
-          </a:bodyPr>
-          <a:lstStyle/>
-          <a:p>
-            <a:pPr algn="l">
-              <a:lnSpc>
-                <a:spcPct val="112000"/>
-              </a:lnSpc>
-              <a:spcAft>
-                <a:spcPts val="500"/>
-              </a:spcAft>
-            </a:pPr>
-            <a:r>
-              <a:rPr sz="1250" b="0" i="0">
-                <a:solidFill>
-                  <a:srgbClr val="D5E0E8"/>
-                </a:solidFill>
-                <a:latin typeface="Consolas"/>
-                <a:ea typeface="Microsoft JhengHei"/>
-                <a:cs typeface="Consolas"/>
-              </a:rPr>
-              <a:t>  min Σ ( cost[i,v]</a:t>
-            </a:r>
-          </a:p>
-        </p:txBody>
-      </p:sp>
-      <p:sp>
-        <p:nvSpPr>
-          <p:cNvPr id="17" name="TextBox 16"/>
-          <p:cNvSpPr txBox="1"/>
-          <p:nvPr/>
-        </p:nvSpPr>
-        <p:spPr>
-          <a:xfrm>
-            <a:off x="914400" y="4773168"/>
-            <a:ext cx="5303520" cy="274320"/>
-          </a:xfrm>
-          <a:prstGeom prst="rect">
-            <a:avLst/>
-          </a:prstGeom>
-          <a:noFill/>
-        </p:spPr>
-        <p:txBody>
-          <a:bodyPr wrap="square" anchor="t" lIns="0" rIns="0" tIns="0" bIns="0">
-            <a:spAutoFit/>
-          </a:bodyPr>
-          <a:lstStyle/>
-          <a:p>
-            <a:pPr algn="l">
-              <a:lnSpc>
-                <a:spcPct val="112000"/>
-              </a:lnSpc>
-              <a:spcAft>
-                <a:spcPts val="500"/>
-              </a:spcAft>
-            </a:pPr>
-            <a:r>
-              <a:rPr sz="1250" b="0" i="0">
-                <a:solidFill>
-                  <a:srgbClr val="D5E0E8"/>
-                </a:solidFill>
-                <a:latin typeface="Consolas"/>
-                <a:ea typeface="Microsoft JhengHei"/>
-                <a:cs typeface="Consolas"/>
-              </a:rPr>
-              <a:t>        − BIG · 指派</a:t>
-            </a:r>
-          </a:p>
-        </p:txBody>
-      </p:sp>
-      <p:sp>
-        <p:nvSpPr>
-          <p:cNvPr id="18" name="TextBox 17"/>
-          <p:cNvSpPr txBox="1"/>
-          <p:nvPr/>
-        </p:nvSpPr>
-        <p:spPr>
-          <a:xfrm>
-            <a:off x="914400" y="5079492"/>
-            <a:ext cx="5303520" cy="274320"/>
-          </a:xfrm>
-          <a:prstGeom prst="rect">
-            <a:avLst/>
-          </a:prstGeom>
-          <a:noFill/>
-        </p:spPr>
-        <p:txBody>
-          <a:bodyPr wrap="square" anchor="t" lIns="0" rIns="0" tIns="0" bIns="0">
-            <a:spAutoFit/>
-          </a:bodyPr>
-          <a:lstStyle/>
-          <a:p>
-            <a:pPr algn="l">
-              <a:lnSpc>
-                <a:spcPct val="112000"/>
-              </a:lnSpc>
-              <a:spcAft>
-                <a:spcPts val="500"/>
-              </a:spcAft>
-            </a:pPr>
-            <a:r>
-              <a:rPr sz="1250" b="0" i="0">
-                <a:solidFill>
-                  <a:srgbClr val="D5E0E8"/>
-                </a:solidFill>
-                <a:latin typeface="Consolas"/>
-                <a:ea typeface="Microsoft JhengHei"/>
-                <a:cs typeface="Consolas"/>
-              </a:rPr>
-              <a:t>        − PRIORITY[zone] )</a:t>
-            </a:r>
-          </a:p>
-        </p:txBody>
-      </p:sp>
-      <p:sp>
-        <p:nvSpPr>
-          <p:cNvPr id="19" name="TextBox 18"/>
-          <p:cNvSpPr txBox="1"/>
-          <p:nvPr/>
-        </p:nvSpPr>
-        <p:spPr>
-          <a:xfrm>
-            <a:off x="6903720" y="1874519"/>
-            <a:ext cx="4647895" cy="310896"/>
-          </a:xfrm>
-          <a:prstGeom prst="rect">
-            <a:avLst/>
-          </a:prstGeom>
-          <a:noFill/>
-        </p:spPr>
-        <p:txBody>
-          <a:bodyPr wrap="square" anchor="t" lIns="0" rIns="0" tIns="0" bIns="0">
-            <a:spAutoFit/>
-          </a:bodyPr>
-          <a:lstStyle/>
-          <a:p>
-            <a:pPr algn="l">
-              <a:lnSpc>
-                <a:spcPct val="112000"/>
-              </a:lnSpc>
-              <a:spcAft>
-                <a:spcPts val="500"/>
-              </a:spcAft>
-            </a:pPr>
-            <a:r>
-              <a:rPr sz="1350" b="1" i="0">
+              <a:rPr sz="1600" b="1" i="0">
                 <a:solidFill>
                   <a:srgbClr val="1C3D5A"/>
                 </a:solidFill>
@@ -20634,21 +18971,21 @@
                 <a:ea typeface="Microsoft JhengHei"/>
                 <a:cs typeface="Microsoft JhengHei"/>
               </a:rPr>
-              <a:t>設計重點</a:t>
+              <a:t>輸入</a:t>
             </a:r>
           </a:p>
         </p:txBody>
       </p:sp>
       <p:cxnSp>
         <p:nvCxnSpPr>
-          <p:cNvPr id="20" name="Connector 19"/>
+          <p:cNvPr id="11" name="Connector 10"/>
           <p:cNvCxnSpPr/>
           <p:nvPr/>
         </p:nvCxnSpPr>
         <p:spPr>
           <a:xfrm>
-            <a:off x="6903720" y="2203703"/>
-            <a:ext cx="4647895" cy="0"/>
+            <a:off x="868680" y="2715768"/>
+            <a:ext cx="3017520" cy="0"/>
           </a:xfrm>
           <a:prstGeom prst="bentConnector3">
             <a:avLst/>
@@ -20658,7 +18995,6 @@
               <a:srgbClr val="D7E0E6"/>
             </a:solidFill>
           </a:ln>
-          <a:effectLst/>
         </p:spPr>
         <p:style>
           <a:lnRef idx="2">
@@ -20677,14 +19013,14 @@
       </p:cxnSp>
       <p:sp>
         <p:nvSpPr>
-          <p:cNvPr id="21" name="TextBox 20"/>
-          <p:cNvSpPr txBox="1"/>
-          <p:nvPr/>
-        </p:nvSpPr>
-        <p:spPr>
-          <a:xfrm>
-            <a:off x="6903720" y="2331719"/>
-            <a:ext cx="4647895" cy="4572000"/>
+          <p:cNvPr id="12" name="TextBox 11"/>
+          <p:cNvSpPr txBox="1"/>
+          <p:nvPr/>
+        </p:nvSpPr>
+        <p:spPr>
+          <a:xfrm>
+            <a:off x="868680" y="2880360"/>
+            <a:ext cx="3017520" cy="2377440"/>
           </a:xfrm>
           <a:prstGeom prst="rect">
             <a:avLst/>
@@ -20699,21 +19035,385 @@
           <a:p>
             <a:pPr algn="l">
               <a:lnSpc>
-                <a:spcPct val="112000"/>
-              </a:lnSpc>
-              <a:spcAft>
-                <a:spcPts val="600"/>
+                <a:spcPct val="120000"/>
+              </a:lnSpc>
+              <a:spcAft>
+                <a:spcPts val="800"/>
               </a:spcAft>
             </a:pPr>
             <a:r>
               <a:rPr sz="1250" b="1" i="0">
                 <a:solidFill>
+                  <a:srgbClr val="1C3D5A"/>
+                </a:solidFill>
+                <a:latin typeface="Microsoft JhengHei"/>
+                <a:ea typeface="Microsoft JhengHei"/>
+                <a:cs typeface="Microsoft JhengHei"/>
+              </a:rPr>
+              <a:t>▪  </a:t>
+            </a:r>
+            <a:r>
+              <a:rPr sz="1250" b="0" i="0">
+                <a:solidFill>
+                  <a:srgbClr val="3D4D5A"/>
+                </a:solidFill>
+                <a:latin typeface="Microsoft JhengHei"/>
+                <a:ea typeface="Microsoft JhengHei"/>
+                <a:cs typeface="Microsoft JhengHei"/>
+              </a:rPr>
+              <a:t>人員清單（疲勞分、外海暴露率）</a:t>
+            </a:r>
+          </a:p>
+          <a:p>
+            <a:pPr algn="l">
+              <a:lnSpc>
+                <a:spcPct val="120000"/>
+              </a:lnSpc>
+              <a:spcAft>
+                <a:spcPts val="800"/>
+              </a:spcAft>
+            </a:pPr>
+            <a:r>
+              <a:rPr sz="1250" b="1" i="0">
+                <a:solidFill>
+                  <a:srgbClr val="1C3D5A"/>
+                </a:solidFill>
+                <a:latin typeface="Microsoft JhengHei"/>
+                <a:ea typeface="Microsoft JhengHei"/>
+                <a:cs typeface="Microsoft JhengHei"/>
+              </a:rPr>
+              <a:t>▪  </a:t>
+            </a:r>
+            <a:r>
+              <a:rPr sz="1250" b="0" i="0">
+                <a:solidFill>
+                  <a:srgbClr val="3D4D5A"/>
+                </a:solidFill>
+                <a:latin typeface="Microsoft JhengHei"/>
+                <a:ea typeface="Microsoft JhengHei"/>
+                <a:cs typeface="Microsoft JhengHei"/>
+              </a:rPr>
+              <a:t>可用船艦清單</a:t>
+            </a:r>
+          </a:p>
+          <a:p>
+            <a:pPr algn="l">
+              <a:lnSpc>
+                <a:spcPct val="120000"/>
+              </a:lnSpc>
+              <a:spcAft>
+                <a:spcPts val="800"/>
+              </a:spcAft>
+            </a:pPr>
+            <a:r>
+              <a:rPr sz="1250" b="1" i="0">
+                <a:solidFill>
+                  <a:srgbClr val="1C3D5A"/>
+                </a:solidFill>
+                <a:latin typeface="Microsoft JhengHei"/>
+                <a:ea typeface="Microsoft JhengHei"/>
+                <a:cs typeface="Microsoft JhengHei"/>
+              </a:rPr>
+              <a:t>▪  </a:t>
+            </a:r>
+            <a:r>
+              <a:rPr sz="1250" b="0" i="0">
+                <a:solidFill>
+                  <a:srgbClr val="3D4D5A"/>
+                </a:solidFill>
+                <a:latin typeface="Microsoft JhengHei"/>
+                <a:ea typeface="Microsoft JhengHei"/>
+                <a:cs typeface="Microsoft JhengHei"/>
+              </a:rPr>
+              <a:t>明日惡劣海況機率</a:t>
+            </a:r>
+          </a:p>
+          <a:p>
+            <a:pPr algn="l">
+              <a:lnSpc>
+                <a:spcPct val="120000"/>
+              </a:lnSpc>
+              <a:spcAft>
+                <a:spcPts val="800"/>
+              </a:spcAft>
+            </a:pPr>
+            <a:r>
+              <a:rPr sz="1250" b="1" i="0">
+                <a:solidFill>
+                  <a:srgbClr val="1C3D5A"/>
+                </a:solidFill>
+                <a:latin typeface="Microsoft JhengHei"/>
+                <a:ea typeface="Microsoft JhengHei"/>
+                <a:cs typeface="Microsoft JhengHei"/>
+              </a:rPr>
+              <a:t>▪  </a:t>
+            </a:r>
+            <a:r>
+              <a:rPr sz="1250" b="0" i="0">
+                <a:solidFill>
+                  <a:srgbClr val="3D4D5A"/>
+                </a:solidFill>
+                <a:latin typeface="Microsoft JhengHei"/>
+                <a:ea typeface="Microsoft JhengHei"/>
+                <a:cs typeface="Microsoft JhengHei"/>
+              </a:rPr>
+              <a:t>各海域可容員額</a:t>
+            </a:r>
+          </a:p>
+        </p:txBody>
+      </p:sp>
+      <p:sp>
+        <p:nvSpPr>
+          <p:cNvPr id="13" name="TextBox 12"/>
+          <p:cNvSpPr txBox="1"/>
+          <p:nvPr/>
+        </p:nvSpPr>
+        <p:spPr>
+          <a:xfrm>
+            <a:off x="4114800" y="2011680"/>
+            <a:ext cx="411480" cy="3474720"/>
+          </a:xfrm>
+          <a:prstGeom prst="rect">
+            <a:avLst/>
+          </a:prstGeom>
+          <a:noFill/>
+        </p:spPr>
+        <p:txBody>
+          <a:bodyPr wrap="square" anchor="ctr" lIns="0" rIns="0" tIns="0" bIns="0">
+            <a:spAutoFit/>
+          </a:bodyPr>
+          <a:lstStyle/>
+          <a:p>
+            <a:pPr algn="ctr">
+              <a:lnSpc>
+                <a:spcPct val="112000"/>
+              </a:lnSpc>
+              <a:spcAft>
+                <a:spcPts val="500"/>
+              </a:spcAft>
+            </a:pPr>
+            <a:r>
+              <a:rPr sz="2800" b="1" i="0">
+                <a:solidFill>
                   <a:srgbClr val="C8922E"/>
                 </a:solidFill>
                 <a:latin typeface="Microsoft JhengHei"/>
                 <a:ea typeface="Microsoft JhengHei"/>
                 <a:cs typeface="Microsoft JhengHei"/>
               </a:rPr>
+              <a:t>→</a:t>
+            </a:r>
+          </a:p>
+        </p:txBody>
+      </p:sp>
+      <p:sp>
+        <p:nvSpPr>
+          <p:cNvPr id="14" name="Rounded Rectangle 13"/>
+          <p:cNvSpPr/>
+          <p:nvPr/>
+        </p:nvSpPr>
+        <p:spPr>
+          <a:xfrm>
+            <a:off x="4526280" y="2011680"/>
+            <a:ext cx="3474720" cy="3474720"/>
+          </a:xfrm>
+          <a:prstGeom prst="roundRect">
+            <a:avLst>
+              <a:gd name="adj" fmla="val 5000"/>
+            </a:avLst>
+          </a:prstGeom>
+          <a:solidFill>
+            <a:srgbClr val="FFFFFF"/>
+          </a:solidFill>
+          <a:ln w="9525">
+            <a:solidFill>
+              <a:srgbClr val="D7E0E6"/>
+            </a:solidFill>
+          </a:ln>
+        </p:spPr>
+        <p:style>
+          <a:lnRef idx="1">
+            <a:schemeClr val="accent1"/>
+          </a:lnRef>
+          <a:fillRef idx="3">
+            <a:schemeClr val="accent1"/>
+          </a:fillRef>
+          <a:effectRef idx="2">
+            <a:schemeClr val="accent1"/>
+          </a:effectRef>
+          <a:fontRef idx="minor">
+            <a:schemeClr val="lt1"/>
+          </a:fontRef>
+        </p:style>
+        <p:txBody>
+          <a:bodyPr rtlCol="0" anchor="ctr"/>
+          <a:lstStyle/>
+          <a:p>
+            <a:pPr algn="ctr"/>
+          </a:p>
+        </p:txBody>
+      </p:sp>
+      <p:sp>
+        <p:nvSpPr>
+          <p:cNvPr id="15" name="Rectangle 14"/>
+          <p:cNvSpPr/>
+          <p:nvPr/>
+        </p:nvSpPr>
+        <p:spPr>
+          <a:xfrm>
+            <a:off x="4526280" y="2011680"/>
+            <a:ext cx="3474720" cy="64008"/>
+          </a:xfrm>
+          <a:prstGeom prst="rect">
+            <a:avLst/>
+          </a:prstGeom>
+          <a:solidFill>
+            <a:srgbClr val="C8922E"/>
+          </a:solidFill>
+          <a:ln>
+            <a:noFill/>
+          </a:ln>
+        </p:spPr>
+        <p:style>
+          <a:lnRef idx="1">
+            <a:schemeClr val="accent1"/>
+          </a:lnRef>
+          <a:fillRef idx="3">
+            <a:schemeClr val="accent1"/>
+          </a:fillRef>
+          <a:effectRef idx="2">
+            <a:schemeClr val="accent1"/>
+          </a:effectRef>
+          <a:fontRef idx="minor">
+            <a:schemeClr val="lt1"/>
+          </a:fontRef>
+        </p:style>
+        <p:txBody>
+          <a:bodyPr rtlCol="0" anchor="ctr"/>
+          <a:lstStyle/>
+          <a:p>
+            <a:pPr algn="ctr"/>
+          </a:p>
+        </p:txBody>
+      </p:sp>
+      <p:sp>
+        <p:nvSpPr>
+          <p:cNvPr id="16" name="TextBox 15"/>
+          <p:cNvSpPr txBox="1"/>
+          <p:nvPr/>
+        </p:nvSpPr>
+        <p:spPr>
+          <a:xfrm>
+            <a:off x="4754880" y="2240280"/>
+            <a:ext cx="3017520" cy="402336"/>
+          </a:xfrm>
+          <a:prstGeom prst="rect">
+            <a:avLst/>
+          </a:prstGeom>
+          <a:noFill/>
+        </p:spPr>
+        <p:txBody>
+          <a:bodyPr wrap="square" anchor="t" lIns="0" rIns="0" tIns="0" bIns="0">
+            <a:spAutoFit/>
+          </a:bodyPr>
+          <a:lstStyle/>
+          <a:p>
+            <a:pPr algn="l">
+              <a:lnSpc>
+                <a:spcPct val="112000"/>
+              </a:lnSpc>
+              <a:spcAft>
+                <a:spcPts val="500"/>
+              </a:spcAft>
+            </a:pPr>
+            <a:r>
+              <a:rPr sz="1600" b="1" i="0">
+                <a:solidFill>
+                  <a:srgbClr val="C8922E"/>
+                </a:solidFill>
+                <a:latin typeface="Microsoft JhengHei"/>
+                <a:ea typeface="Microsoft JhengHei"/>
+                <a:cs typeface="Microsoft JhengHei"/>
+              </a:rPr>
+              <a:t>求解器</a:t>
+            </a:r>
+          </a:p>
+        </p:txBody>
+      </p:sp>
+      <p:cxnSp>
+        <p:nvCxnSpPr>
+          <p:cNvPr id="17" name="Connector 16"/>
+          <p:cNvCxnSpPr/>
+          <p:nvPr/>
+        </p:nvCxnSpPr>
+        <p:spPr>
+          <a:xfrm>
+            <a:off x="4754880" y="2715768"/>
+            <a:ext cx="3017520" cy="0"/>
+          </a:xfrm>
+          <a:prstGeom prst="bentConnector3">
+            <a:avLst/>
+          </a:prstGeom>
+          <a:ln w="12700">
+            <a:solidFill>
+              <a:srgbClr val="D7E0E6"/>
+            </a:solidFill>
+          </a:ln>
+        </p:spPr>
+        <p:style>
+          <a:lnRef idx="2">
+            <a:schemeClr val="accent1"/>
+          </a:lnRef>
+          <a:fillRef idx="0">
+            <a:schemeClr val="accent1"/>
+          </a:fillRef>
+          <a:effectRef idx="1">
+            <a:schemeClr val="accent1"/>
+          </a:effectRef>
+          <a:fontRef idx="minor">
+            <a:schemeClr val="tx1"/>
+          </a:fontRef>
+        </p:style>
+      </p:cxnSp>
+      <p:sp>
+        <p:nvSpPr>
+          <p:cNvPr id="18" name="TextBox 17"/>
+          <p:cNvSpPr txBox="1"/>
+          <p:nvPr/>
+        </p:nvSpPr>
+        <p:spPr>
+          <a:xfrm>
+            <a:off x="4754880" y="2880360"/>
+            <a:ext cx="3017520" cy="2377440"/>
+          </a:xfrm>
+          <a:prstGeom prst="rect">
+            <a:avLst/>
+          </a:prstGeom>
+          <a:noFill/>
+        </p:spPr>
+        <p:txBody>
+          <a:bodyPr wrap="square" anchor="t" lIns="0" rIns="0" tIns="0" bIns="0">
+            <a:spAutoFit/>
+          </a:bodyPr>
+          <a:lstStyle/>
+          <a:p>
+            <a:pPr algn="l">
+              <a:lnSpc>
+                <a:spcPct val="120000"/>
+              </a:lnSpc>
+              <a:spcAft>
+                <a:spcPts val="800"/>
+              </a:spcAft>
+            </a:pPr>
+            <a:r>
+              <a:rPr sz="1250" b="1" i="0">
+                <a:solidFill>
+                  <a:srgbClr val="C8922E"/>
+                </a:solidFill>
+                <a:latin typeface="Microsoft JhengHei"/>
+                <a:ea typeface="Microsoft JhengHei"/>
+                <a:cs typeface="Microsoft JhengHei"/>
+              </a:rPr>
               <a:t>▪  </a:t>
             </a:r>
             <a:r>
@@ -20725,16 +19425,16 @@
                 <a:ea typeface="Microsoft JhengHei"/>
                 <a:cs typeface="Microsoft JhengHei"/>
               </a:rPr>
-              <a:t>求解器：SciPy milp（HiGHS 分支定界）</a:t>
-            </a:r>
-          </a:p>
-          <a:p>
-            <a:pPr algn="l">
-              <a:lnSpc>
-                <a:spcPct val="112000"/>
-              </a:lnSpc>
-              <a:spcAft>
-                <a:spcPts val="600"/>
+              <a:t>Python scipy.optimize.milp</a:t>
+            </a:r>
+          </a:p>
+          <a:p>
+            <a:pPr algn="l">
+              <a:lnSpc>
+                <a:spcPct val="120000"/>
+              </a:lnSpc>
+              <a:spcAft>
+                <a:spcPts val="800"/>
               </a:spcAft>
             </a:pPr>
             <a:r>
@@ -20757,16 +19457,16 @@
                 <a:ea typeface="Microsoft JhengHei"/>
                 <a:cs typeface="Microsoft JhengHei"/>
               </a:rPr>
-              <a:t>cost：疲勞 / 暴露 / 海域適配綜合成本</a:t>
-            </a:r>
-          </a:p>
-          <a:p>
-            <a:pPr algn="l">
-              <a:lnSpc>
-                <a:spcPct val="112000"/>
-              </a:lnSpc>
-              <a:spcAft>
-                <a:spcPts val="600"/>
+              <a:t>目標：最小化綜合成本</a:t>
+            </a:r>
+          </a:p>
+          <a:p>
+            <a:pPr algn="l">
+              <a:lnSpc>
+                <a:spcPct val="120000"/>
+              </a:lnSpc>
+              <a:spcAft>
+                <a:spcPts val="800"/>
               </a:spcAft>
             </a:pPr>
             <a:r>
@@ -20789,16 +19489,16 @@
                 <a:ea typeface="Microsoft JhengHei"/>
                 <a:cs typeface="Microsoft JhengHei"/>
               </a:rPr>
-              <a:t>BIG：確保盡量填滿可用名額</a:t>
-            </a:r>
-          </a:p>
-          <a:p>
-            <a:pPr algn="l">
-              <a:lnSpc>
-                <a:spcPct val="112000"/>
-              </a:lnSpc>
-              <a:spcAft>
-                <a:spcPts val="600"/>
+              <a:t>限制：每人一船、每船一組</a:t>
+            </a:r>
+          </a:p>
+          <a:p>
+            <a:pPr algn="l">
+              <a:lnSpc>
+                <a:spcPct val="120000"/>
+              </a:lnSpc>
+              <a:spcAft>
+                <a:spcPts val="800"/>
               </a:spcAft>
             </a:pPr>
             <a:r>
@@ -20821,135 +19521,547 @@
                 <a:ea typeface="Microsoft JhengHei"/>
                 <a:cs typeface="Microsoft JhengHei"/>
               </a:rPr>
-              <a:t>PRIORITY：外海300 &gt; 近海200 &gt; 港口100</a:t>
-            </a:r>
-          </a:p>
-          <a:p>
-            <a:pPr algn="l">
-              <a:lnSpc>
-                <a:spcPct val="112000"/>
-              </a:lnSpc>
-              <a:spcAft>
-                <a:spcPts val="600"/>
-              </a:spcAft>
-            </a:pPr>
-            <a:r>
-              <a:rPr sz="1100" b="1" i="0">
-                <a:solidFill>
-                  <a:srgbClr val="C5D2DA"/>
-                </a:solidFill>
-                <a:latin typeface="Microsoft JhengHei"/>
-                <a:ea typeface="Microsoft JhengHei"/>
-                <a:cs typeface="Microsoft JhengHei"/>
-              </a:rPr>
-              <a:t>–  </a:t>
-            </a:r>
-            <a:r>
-              <a:rPr sz="1100" b="0" i="0">
-                <a:solidFill>
-                  <a:srgbClr val="7C8B97"/>
-                </a:solidFill>
-                <a:latin typeface="Microsoft JhengHei"/>
-                <a:ea typeface="Microsoft JhengHei"/>
-                <a:cs typeface="Microsoft JhengHei"/>
-              </a:rPr>
-              <a:t>人力短缺時安全關鍵海域優先</a:t>
-            </a:r>
-          </a:p>
-          <a:p>
-            <a:pPr algn="l">
-              <a:lnSpc>
-                <a:spcPct val="112000"/>
-              </a:lnSpc>
-              <a:spcAft>
-                <a:spcPts val="600"/>
+              <a:t>安全關鍵海域優先填滿</a:t>
+            </a:r>
+          </a:p>
+        </p:txBody>
+      </p:sp>
+      <p:sp>
+        <p:nvSpPr>
+          <p:cNvPr id="19" name="TextBox 18"/>
+          <p:cNvSpPr txBox="1"/>
+          <p:nvPr/>
+        </p:nvSpPr>
+        <p:spPr>
+          <a:xfrm>
+            <a:off x="8001000" y="2011680"/>
+            <a:ext cx="411480" cy="3474720"/>
+          </a:xfrm>
+          <a:prstGeom prst="rect">
+            <a:avLst/>
+          </a:prstGeom>
+          <a:noFill/>
+        </p:spPr>
+        <p:txBody>
+          <a:bodyPr wrap="square" anchor="ctr" lIns="0" rIns="0" tIns="0" bIns="0">
+            <a:spAutoFit/>
+          </a:bodyPr>
+          <a:lstStyle/>
+          <a:p>
+            <a:pPr algn="ctr">
+              <a:lnSpc>
+                <a:spcPct val="112000"/>
+              </a:lnSpc>
+              <a:spcAft>
+                <a:spcPts val="500"/>
+              </a:spcAft>
+            </a:pPr>
+            <a:r>
+              <a:rPr sz="2800" b="1" i="0">
+                <a:solidFill>
+                  <a:srgbClr val="C8922E"/>
+                </a:solidFill>
+                <a:latin typeface="Microsoft JhengHei"/>
+                <a:ea typeface="Microsoft JhengHei"/>
+                <a:cs typeface="Microsoft JhengHei"/>
+              </a:rPr>
+              <a:t>→</a:t>
+            </a:r>
+          </a:p>
+        </p:txBody>
+      </p:sp>
+      <p:sp>
+        <p:nvSpPr>
+          <p:cNvPr id="20" name="Rounded Rectangle 19"/>
+          <p:cNvSpPr/>
+          <p:nvPr/>
+        </p:nvSpPr>
+        <p:spPr>
+          <a:xfrm>
+            <a:off x="8412480" y="2011680"/>
+            <a:ext cx="3474720" cy="3474720"/>
+          </a:xfrm>
+          <a:prstGeom prst="roundRect">
+            <a:avLst>
+              <a:gd name="adj" fmla="val 5000"/>
+            </a:avLst>
+          </a:prstGeom>
+          <a:solidFill>
+            <a:srgbClr val="FFFFFF"/>
+          </a:solidFill>
+          <a:ln w="9525">
+            <a:solidFill>
+              <a:srgbClr val="D7E0E6"/>
+            </a:solidFill>
+          </a:ln>
+        </p:spPr>
+        <p:style>
+          <a:lnRef idx="1">
+            <a:schemeClr val="accent1"/>
+          </a:lnRef>
+          <a:fillRef idx="3">
+            <a:schemeClr val="accent1"/>
+          </a:fillRef>
+          <a:effectRef idx="2">
+            <a:schemeClr val="accent1"/>
+          </a:effectRef>
+          <a:fontRef idx="minor">
+            <a:schemeClr val="lt1"/>
+          </a:fontRef>
+        </p:style>
+        <p:txBody>
+          <a:bodyPr rtlCol="0" anchor="ctr"/>
+          <a:lstStyle/>
+          <a:p>
+            <a:pPr algn="ctr"/>
+          </a:p>
+        </p:txBody>
+      </p:sp>
+      <p:sp>
+        <p:nvSpPr>
+          <p:cNvPr id="21" name="Rectangle 20"/>
+          <p:cNvSpPr/>
+          <p:nvPr/>
+        </p:nvSpPr>
+        <p:spPr>
+          <a:xfrm>
+            <a:off x="8412480" y="2011680"/>
+            <a:ext cx="3474720" cy="64008"/>
+          </a:xfrm>
+          <a:prstGeom prst="rect">
+            <a:avLst/>
+          </a:prstGeom>
+          <a:solidFill>
+            <a:srgbClr val="4E8C8A"/>
+          </a:solidFill>
+          <a:ln>
+            <a:noFill/>
+          </a:ln>
+        </p:spPr>
+        <p:style>
+          <a:lnRef idx="1">
+            <a:schemeClr val="accent1"/>
+          </a:lnRef>
+          <a:fillRef idx="3">
+            <a:schemeClr val="accent1"/>
+          </a:fillRef>
+          <a:effectRef idx="2">
+            <a:schemeClr val="accent1"/>
+          </a:effectRef>
+          <a:fontRef idx="minor">
+            <a:schemeClr val="lt1"/>
+          </a:fontRef>
+        </p:style>
+        <p:txBody>
+          <a:bodyPr rtlCol="0" anchor="ctr"/>
+          <a:lstStyle/>
+          <a:p>
+            <a:pPr algn="ctr"/>
+          </a:p>
+        </p:txBody>
+      </p:sp>
+      <p:sp>
+        <p:nvSpPr>
+          <p:cNvPr id="22" name="TextBox 21"/>
+          <p:cNvSpPr txBox="1"/>
+          <p:nvPr/>
+        </p:nvSpPr>
+        <p:spPr>
+          <a:xfrm>
+            <a:off x="8641080" y="2240280"/>
+            <a:ext cx="3017520" cy="402336"/>
+          </a:xfrm>
+          <a:prstGeom prst="rect">
+            <a:avLst/>
+          </a:prstGeom>
+          <a:noFill/>
+        </p:spPr>
+        <p:txBody>
+          <a:bodyPr wrap="square" anchor="t" lIns="0" rIns="0" tIns="0" bIns="0">
+            <a:spAutoFit/>
+          </a:bodyPr>
+          <a:lstStyle/>
+          <a:p>
+            <a:pPr algn="l">
+              <a:lnSpc>
+                <a:spcPct val="112000"/>
+              </a:lnSpc>
+              <a:spcAft>
+                <a:spcPts val="500"/>
+              </a:spcAft>
+            </a:pPr>
+            <a:r>
+              <a:rPr sz="1600" b="1" i="0">
+                <a:solidFill>
+                  <a:srgbClr val="4E8C8A"/>
+                </a:solidFill>
+                <a:latin typeface="Microsoft JhengHei"/>
+                <a:ea typeface="Microsoft JhengHei"/>
+                <a:cs typeface="Microsoft JhengHei"/>
+              </a:rPr>
+              <a:t>輸出</a:t>
+            </a:r>
+          </a:p>
+        </p:txBody>
+      </p:sp>
+      <p:cxnSp>
+        <p:nvCxnSpPr>
+          <p:cNvPr id="23" name="Connector 22"/>
+          <p:cNvCxnSpPr/>
+          <p:nvPr/>
+        </p:nvCxnSpPr>
+        <p:spPr>
+          <a:xfrm>
+            <a:off x="8641080" y="2715768"/>
+            <a:ext cx="3017520" cy="0"/>
+          </a:xfrm>
+          <a:prstGeom prst="bentConnector3">
+            <a:avLst/>
+          </a:prstGeom>
+          <a:ln w="12700">
+            <a:solidFill>
+              <a:srgbClr val="D7E0E6"/>
+            </a:solidFill>
+          </a:ln>
+        </p:spPr>
+        <p:style>
+          <a:lnRef idx="2">
+            <a:schemeClr val="accent1"/>
+          </a:lnRef>
+          <a:fillRef idx="0">
+            <a:schemeClr val="accent1"/>
+          </a:fillRef>
+          <a:effectRef idx="1">
+            <a:schemeClr val="accent1"/>
+          </a:effectRef>
+          <a:fontRef idx="minor">
+            <a:schemeClr val="tx1"/>
+          </a:fontRef>
+        </p:style>
+      </p:cxnSp>
+      <p:sp>
+        <p:nvSpPr>
+          <p:cNvPr id="24" name="TextBox 23"/>
+          <p:cNvSpPr txBox="1"/>
+          <p:nvPr/>
+        </p:nvSpPr>
+        <p:spPr>
+          <a:xfrm>
+            <a:off x="8641080" y="2880360"/>
+            <a:ext cx="3017520" cy="2377440"/>
+          </a:xfrm>
+          <a:prstGeom prst="rect">
+            <a:avLst/>
+          </a:prstGeom>
+          <a:noFill/>
+        </p:spPr>
+        <p:txBody>
+          <a:bodyPr wrap="square" anchor="t" lIns="0" rIns="0" tIns="0" bIns="0">
+            <a:spAutoFit/>
+          </a:bodyPr>
+          <a:lstStyle/>
+          <a:p>
+            <a:pPr algn="l">
+              <a:lnSpc>
+                <a:spcPct val="120000"/>
+              </a:lnSpc>
+              <a:spcAft>
+                <a:spcPts val="800"/>
               </a:spcAft>
             </a:pPr>
             <a:r>
               <a:rPr sz="1250" b="1" i="0">
                 <a:solidFill>
+                  <a:srgbClr val="4E8C8A"/>
+                </a:solidFill>
+                <a:latin typeface="Microsoft JhengHei"/>
+                <a:ea typeface="Microsoft JhengHei"/>
+                <a:cs typeface="Microsoft JhengHei"/>
+              </a:rPr>
+              <a:t>▪  </a:t>
+            </a:r>
+            <a:r>
+              <a:rPr sz="1250" b="0" i="0">
+                <a:solidFill>
+                  <a:srgbClr val="3D4D5A"/>
+                </a:solidFill>
+                <a:latin typeface="Microsoft JhengHei"/>
+                <a:ea typeface="Microsoft JhengHei"/>
+                <a:cs typeface="Microsoft JhengHei"/>
+              </a:rPr>
+              <a:t>具名人員×船艦指派矩陣</a:t>
+            </a:r>
+          </a:p>
+          <a:p>
+            <a:pPr algn="l">
+              <a:lnSpc>
+                <a:spcPct val="120000"/>
+              </a:lnSpc>
+              <a:spcAft>
+                <a:spcPts val="800"/>
+              </a:spcAft>
+            </a:pPr>
+            <a:r>
+              <a:rPr sz="1250" b="1" i="0">
+                <a:solidFill>
+                  <a:srgbClr val="4E8C8A"/>
+                </a:solidFill>
+                <a:latin typeface="Microsoft JhengHei"/>
+                <a:ea typeface="Microsoft JhengHei"/>
+                <a:cs typeface="Microsoft JhengHei"/>
+              </a:rPr>
+              <a:t>▪  </a:t>
+            </a:r>
+            <a:r>
+              <a:rPr sz="1250" b="0" i="0">
+                <a:solidFill>
+                  <a:srgbClr val="3D4D5A"/>
+                </a:solidFill>
+                <a:latin typeface="Microsoft JhengHei"/>
+                <a:ea typeface="Microsoft JhengHei"/>
+                <a:cs typeface="Microsoft JhengHei"/>
+              </a:rPr>
+              <a:t>三海域值勤班表</a:t>
+            </a:r>
+          </a:p>
+          <a:p>
+            <a:pPr algn="l">
+              <a:lnSpc>
+                <a:spcPct val="120000"/>
+              </a:lnSpc>
+              <a:spcAft>
+                <a:spcPts val="800"/>
+              </a:spcAft>
+            </a:pPr>
+            <a:r>
+              <a:rPr sz="1250" b="1" i="0">
+                <a:solidFill>
+                  <a:srgbClr val="4E8C8A"/>
+                </a:solidFill>
+                <a:latin typeface="Microsoft JhengHei"/>
+                <a:ea typeface="Microsoft JhengHei"/>
+                <a:cs typeface="Microsoft JhengHei"/>
+              </a:rPr>
+              <a:t>▪  </a:t>
+            </a:r>
+            <a:r>
+              <a:rPr sz="1250" b="0" i="0">
+                <a:solidFill>
+                  <a:srgbClr val="3D4D5A"/>
+                </a:solidFill>
+                <a:latin typeface="Microsoft JhengHei"/>
+                <a:ea typeface="Microsoft JhengHei"/>
+                <a:cs typeface="Microsoft JhengHei"/>
+              </a:rPr>
+              <a:t>輪休建議清單</a:t>
+            </a:r>
+          </a:p>
+          <a:p>
+            <a:pPr algn="l">
+              <a:lnSpc>
+                <a:spcPct val="120000"/>
+              </a:lnSpc>
+              <a:spcAft>
+                <a:spcPts val="800"/>
+              </a:spcAft>
+            </a:pPr>
+            <a:r>
+              <a:rPr sz="1250" b="1" i="0">
+                <a:solidFill>
+                  <a:srgbClr val="4E8C8A"/>
+                </a:solidFill>
+                <a:latin typeface="Microsoft JhengHei"/>
+                <a:ea typeface="Microsoft JhengHei"/>
+                <a:cs typeface="Microsoft JhengHei"/>
+              </a:rPr>
+              <a:t>▪  </a:t>
+            </a:r>
+            <a:r>
+              <a:rPr sz="1250" b="0" i="0">
+                <a:solidFill>
+                  <a:srgbClr val="3D4D5A"/>
+                </a:solidFill>
+                <a:latin typeface="Microsoft JhengHei"/>
+                <a:ea typeface="Microsoft JhengHei"/>
+                <a:cs typeface="Microsoft JhengHei"/>
+              </a:rPr>
+              <a:t>最優性驗證（差距 0%）</a:t>
+            </a:r>
+          </a:p>
+        </p:txBody>
+      </p:sp>
+      <p:sp>
+        <p:nvSpPr>
+          <p:cNvPr id="25" name="Rounded Rectangle 24"/>
+          <p:cNvSpPr/>
+          <p:nvPr/>
+        </p:nvSpPr>
+        <p:spPr>
+          <a:xfrm>
+            <a:off x="640080" y="5650992"/>
+            <a:ext cx="10911535" cy="566928"/>
+          </a:xfrm>
+          <a:prstGeom prst="roundRect">
+            <a:avLst>
+              <a:gd name="adj" fmla="val 10000"/>
+            </a:avLst>
+          </a:prstGeom>
+          <a:solidFill>
+            <a:srgbClr val="FBF4E6"/>
+          </a:solidFill>
+          <a:ln>
+            <a:noFill/>
+          </a:ln>
+        </p:spPr>
+        <p:style>
+          <a:lnRef idx="1">
+            <a:schemeClr val="accent1"/>
+          </a:lnRef>
+          <a:fillRef idx="3">
+            <a:schemeClr val="accent1"/>
+          </a:fillRef>
+          <a:effectRef idx="2">
+            <a:schemeClr val="accent1"/>
+          </a:effectRef>
+          <a:fontRef idx="minor">
+            <a:schemeClr val="lt1"/>
+          </a:fontRef>
+        </p:style>
+        <p:txBody>
+          <a:bodyPr rtlCol="0" anchor="ctr"/>
+          <a:lstStyle/>
+          <a:p>
+            <a:pPr algn="ctr"/>
+          </a:p>
+        </p:txBody>
+      </p:sp>
+      <p:sp>
+        <p:nvSpPr>
+          <p:cNvPr id="26" name="Rectangle 25"/>
+          <p:cNvSpPr/>
+          <p:nvPr/>
+        </p:nvSpPr>
+        <p:spPr>
+          <a:xfrm>
+            <a:off x="640080" y="5650992"/>
+            <a:ext cx="82296" cy="566928"/>
+          </a:xfrm>
+          <a:prstGeom prst="rect">
+            <a:avLst/>
+          </a:prstGeom>
+          <a:solidFill>
+            <a:srgbClr val="C8922E"/>
+          </a:solidFill>
+          <a:ln>
+            <a:noFill/>
+          </a:ln>
+        </p:spPr>
+        <p:style>
+          <a:lnRef idx="1">
+            <a:schemeClr val="accent1"/>
+          </a:lnRef>
+          <a:fillRef idx="3">
+            <a:schemeClr val="accent1"/>
+          </a:fillRef>
+          <a:effectRef idx="2">
+            <a:schemeClr val="accent1"/>
+          </a:effectRef>
+          <a:fontRef idx="minor">
+            <a:schemeClr val="lt1"/>
+          </a:fontRef>
+        </p:style>
+        <p:txBody>
+          <a:bodyPr rtlCol="0" anchor="ctr"/>
+          <a:lstStyle/>
+          <a:p>
+            <a:pPr algn="ctr"/>
+          </a:p>
+        </p:txBody>
+      </p:sp>
+      <p:sp>
+        <p:nvSpPr>
+          <p:cNvPr id="27" name="TextBox 26"/>
+          <p:cNvSpPr txBox="1"/>
+          <p:nvPr/>
+        </p:nvSpPr>
+        <p:spPr>
+          <a:xfrm>
+            <a:off x="896112" y="5650992"/>
+            <a:ext cx="1371600" cy="566928"/>
+          </a:xfrm>
+          <a:prstGeom prst="rect">
+            <a:avLst/>
+          </a:prstGeom>
+          <a:noFill/>
+        </p:spPr>
+        <p:txBody>
+          <a:bodyPr wrap="square" anchor="ctr" lIns="0" rIns="0" tIns="0" bIns="0">
+            <a:spAutoFit/>
+          </a:bodyPr>
+          <a:lstStyle/>
+          <a:p>
+            <a:pPr algn="l">
+              <a:lnSpc>
+                <a:spcPct val="112000"/>
+              </a:lnSpc>
+              <a:spcAft>
+                <a:spcPts val="500"/>
+              </a:spcAft>
+            </a:pPr>
+            <a:r>
+              <a:rPr sz="1200" b="1" i="0">
+                <a:solidFill>
                   <a:srgbClr val="C8922E"/>
                 </a:solidFill>
                 <a:latin typeface="Microsoft JhengHei"/>
                 <a:ea typeface="Microsoft JhengHei"/>
                 <a:cs typeface="Microsoft JhengHei"/>
               </a:rPr>
-              <a:t>▪  </a:t>
-            </a:r>
-            <a:r>
-              <a:rPr sz="1250" b="0" i="0">
-                <a:solidFill>
-                  <a:srgbClr val="3D4D5A"/>
-                </a:solidFill>
-                <a:latin typeface="Microsoft JhengHei"/>
-                <a:ea typeface="Microsoft JhengHei"/>
-                <a:cs typeface="Microsoft JhengHei"/>
-              </a:rPr>
-              <a:t>貪婪法僅逐海域局部選擇</a:t>
-            </a:r>
-          </a:p>
-          <a:p>
-            <a:pPr algn="l">
-              <a:lnSpc>
-                <a:spcPct val="112000"/>
-              </a:lnSpc>
-              <a:spcAft>
-                <a:spcPts val="600"/>
-              </a:spcAft>
-            </a:pPr>
-            <a:r>
-              <a:rPr sz="1250" b="1" i="0">
-                <a:solidFill>
-                  <a:srgbClr val="C8922E"/>
-                </a:solidFill>
-                <a:latin typeface="Microsoft JhengHei"/>
-                <a:ea typeface="Microsoft JhengHei"/>
-                <a:cs typeface="Microsoft JhengHei"/>
-              </a:rPr>
-              <a:t>▪  </a:t>
-            </a:r>
-            <a:r>
-              <a:rPr sz="1250" b="0" i="0">
-                <a:solidFill>
-                  <a:srgbClr val="3D4D5A"/>
-                </a:solidFill>
-                <a:latin typeface="Microsoft JhengHei"/>
-                <a:ea typeface="Microsoft JhengHei"/>
-                <a:cs typeface="Microsoft JhengHei"/>
-              </a:rPr>
-              <a:t>MILP 對全體人員×船艦聯合最佳化</a:t>
-            </a:r>
-          </a:p>
-          <a:p>
-            <a:pPr algn="l">
-              <a:lnSpc>
-                <a:spcPct val="112000"/>
-              </a:lnSpc>
-              <a:spcAft>
-                <a:spcPts val="600"/>
-              </a:spcAft>
-            </a:pPr>
-            <a:r>
-              <a:rPr sz="1100" b="1" i="0">
-                <a:solidFill>
-                  <a:srgbClr val="C5D2DA"/>
-                </a:solidFill>
-                <a:latin typeface="Microsoft JhengHei"/>
-                <a:ea typeface="Microsoft JhengHei"/>
-                <a:cs typeface="Microsoft JhengHei"/>
-              </a:rPr>
-              <a:t>–  </a:t>
-            </a:r>
-            <a:r>
-              <a:rPr sz="1100" b="0" i="0">
-                <a:solidFill>
-                  <a:srgbClr val="7C8B97"/>
-                </a:solidFill>
-                <a:latin typeface="Microsoft JhengHei"/>
-                <a:ea typeface="Microsoft JhengHei"/>
-                <a:cs typeface="Microsoft JhengHei"/>
-              </a:rPr>
-              <a:t>找到的是全域最優、非局部最優</a:t>
+              <a:t>效益</a:t>
+            </a:r>
+          </a:p>
+        </p:txBody>
+      </p:sp>
+      <p:sp>
+        <p:nvSpPr>
+          <p:cNvPr id="28" name="TextBox 27"/>
+          <p:cNvSpPr txBox="1"/>
+          <p:nvPr/>
+        </p:nvSpPr>
+        <p:spPr>
+          <a:xfrm>
+            <a:off x="2331720" y="5650992"/>
+            <a:ext cx="8991295" cy="566928"/>
+          </a:xfrm>
+          <a:prstGeom prst="rect">
+            <a:avLst/>
+          </a:prstGeom>
+          <a:noFill/>
+        </p:spPr>
+        <p:txBody>
+          <a:bodyPr wrap="square" anchor="ctr" lIns="0" rIns="0" tIns="0" bIns="0">
+            <a:spAutoFit/>
+          </a:bodyPr>
+          <a:lstStyle/>
+          <a:p>
+            <a:pPr algn="l">
+              <a:lnSpc>
+                <a:spcPct val="105000"/>
+              </a:lnSpc>
+              <a:spcAft>
+                <a:spcPts val="500"/>
+              </a:spcAft>
+            </a:pPr>
+            <a:r>
+              <a:rPr sz="1300" b="0" i="0">
+                <a:solidFill>
+                  <a:srgbClr val="1C3D5A"/>
+                </a:solidFill>
+                <a:latin typeface="Microsoft JhengHei"/>
+                <a:ea typeface="Microsoft JhengHei"/>
+                <a:cs typeface="Microsoft JhengHei"/>
+              </a:rPr>
+              <a:t>MILP 將所有限制同時納入求解，不會因順序不同而得到不同班表 — 結果可重現、可驗證。</a:t>
             </a:r>
           </a:p>
         </p:txBody>
@@ -21087,7 +20199,6 @@
               <a:srgbClr val="C8922E"/>
             </a:solidFill>
           </a:ln>
-          <a:effectLst/>
         </p:spPr>
         <p:style>
           <a:lnRef idx="2">
@@ -21123,7 +20234,6 @@
               <a:srgbClr val="D7E0E6"/>
             </a:solidFill>
           </a:ln>
-          <a:effectLst/>
         </p:spPr>
         <p:style>
           <a:lnRef idx="2">
@@ -21255,13 +20365,6 @@
               <a:srgbClr val="C5D2DA"/>
             </a:solidFill>
           </a:ln>
-          <a:effectLst>
-            <a:outerShdw blurRad="114300" dist="50800" dir="5400000" rotWithShape="0">
-              <a:srgbClr val="1C3D5A">
-                <a:alpha val="16000"/>
-              </a:srgbClr>
-            </a:outerShdw>
-          </a:effectLst>
         </p:spPr>
       </p:pic>
       <p:sp>
@@ -21288,13 +20391,6 @@
               <a:srgbClr val="D7E0E6"/>
             </a:solidFill>
           </a:ln>
-          <a:effectLst>
-            <a:outerShdw blurRad="88900" dist="44450" dir="5400000" rotWithShape="0">
-              <a:srgbClr val="1C3D5A">
-                <a:alpha val="20000"/>
-              </a:srgbClr>
-            </a:outerShdw>
-          </a:effectLst>
         </p:spPr>
         <p:style>
           <a:lnRef idx="1">
@@ -21338,7 +20434,6 @@
           <a:ln>
             <a:noFill/>
           </a:ln>
-          <a:effectLst/>
         </p:spPr>
         <p:style>
           <a:lnRef idx="1">
@@ -21474,13 +20569,6 @@
               <a:srgbClr val="D7E0E6"/>
             </a:solidFill>
           </a:ln>
-          <a:effectLst>
-            <a:outerShdw blurRad="88900" dist="44450" dir="5400000" rotWithShape="0">
-              <a:srgbClr val="1C3D5A">
-                <a:alpha val="20000"/>
-              </a:srgbClr>
-            </a:outerShdw>
-          </a:effectLst>
         </p:spPr>
         <p:style>
           <a:lnRef idx="1">
@@ -21524,7 +20612,6 @@
           <a:ln>
             <a:noFill/>
           </a:ln>
-          <a:effectLst/>
         </p:spPr>
         <p:style>
           <a:lnRef idx="1">
@@ -21660,13 +20747,6 @@
               <a:srgbClr val="D7E0E6"/>
             </a:solidFill>
           </a:ln>
-          <a:effectLst>
-            <a:outerShdw blurRad="88900" dist="44450" dir="5400000" rotWithShape="0">
-              <a:srgbClr val="1C3D5A">
-                <a:alpha val="20000"/>
-              </a:srgbClr>
-            </a:outerShdw>
-          </a:effectLst>
         </p:spPr>
         <p:style>
           <a:lnRef idx="1">
@@ -21710,7 +20790,6 @@
           <a:ln>
             <a:noFill/>
           </a:ln>
-          <a:effectLst/>
         </p:spPr>
         <p:style>
           <a:lnRef idx="1">
@@ -21846,7 +20925,6 @@
               <a:srgbClr val="D7E0E6"/>
             </a:solidFill>
           </a:ln>
-          <a:effectLst/>
         </p:spPr>
         <p:style>
           <a:lnRef idx="1">
@@ -22068,7 +21146,6 @@
               <a:srgbClr val="C8922E"/>
             </a:solidFill>
           </a:ln>
-          <a:effectLst/>
         </p:spPr>
         <p:style>
           <a:lnRef idx="2">
@@ -22104,7 +21181,6 @@
               <a:srgbClr val="D7E0E6"/>
             </a:solidFill>
           </a:ln>
-          <a:effectLst/>
         </p:spPr>
         <p:style>
           <a:lnRef idx="2">
@@ -22233,13 +21309,6 @@
               <a:srgbClr val="D7E0E6"/>
             </a:solidFill>
           </a:ln>
-          <a:effectLst>
-            <a:outerShdw blurRad="88900" dist="44450" dir="5400000" rotWithShape="0">
-              <a:srgbClr val="1C3D5A">
-                <a:alpha val="20000"/>
-              </a:srgbClr>
-            </a:outerShdw>
-          </a:effectLst>
         </p:spPr>
         <p:style>
           <a:lnRef idx="1">
@@ -22283,7 +21352,6 @@
           <a:ln>
             <a:noFill/>
           </a:ln>
-          <a:effectLst/>
         </p:spPr>
         <p:style>
           <a:lnRef idx="1">
@@ -22419,13 +21487,6 @@
               <a:srgbClr val="D7E0E6"/>
             </a:solidFill>
           </a:ln>
-          <a:effectLst>
-            <a:outerShdw blurRad="88900" dist="44450" dir="5400000" rotWithShape="0">
-              <a:srgbClr val="1C3D5A">
-                <a:alpha val="20000"/>
-              </a:srgbClr>
-            </a:outerShdw>
-          </a:effectLst>
         </p:spPr>
         <p:style>
           <a:lnRef idx="1">
@@ -22469,7 +21530,6 @@
           <a:ln>
             <a:noFill/>
           </a:ln>
-          <a:effectLst/>
         </p:spPr>
         <p:style>
           <a:lnRef idx="1">
@@ -22605,13 +21665,6 @@
               <a:srgbClr val="D7E0E6"/>
             </a:solidFill>
           </a:ln>
-          <a:effectLst>
-            <a:outerShdw blurRad="88900" dist="44450" dir="5400000" rotWithShape="0">
-              <a:srgbClr val="1C3D5A">
-                <a:alpha val="20000"/>
-              </a:srgbClr>
-            </a:outerShdw>
-          </a:effectLst>
         </p:spPr>
         <p:style>
           <a:lnRef idx="1">
@@ -22655,7 +21708,6 @@
           <a:ln>
             <a:noFill/>
           </a:ln>
-          <a:effectLst/>
         </p:spPr>
         <p:style>
           <a:lnRef idx="1">
@@ -22791,13 +21843,6 @@
               <a:srgbClr val="D7E0E6"/>
             </a:solidFill>
           </a:ln>
-          <a:effectLst>
-            <a:outerShdw blurRad="88900" dist="44450" dir="5400000" rotWithShape="0">
-              <a:srgbClr val="1C3D5A">
-                <a:alpha val="20000"/>
-              </a:srgbClr>
-            </a:outerShdw>
-          </a:effectLst>
         </p:spPr>
         <p:style>
           <a:lnRef idx="1">
@@ -22841,7 +21886,6 @@
           <a:ln>
             <a:noFill/>
           </a:ln>
-          <a:effectLst/>
         </p:spPr>
         <p:style>
           <a:lnRef idx="1">
@@ -22973,7 +22017,6 @@
           <a:ln>
             <a:noFill/>
           </a:ln>
-          <a:effectLst/>
         </p:spPr>
         <p:style>
           <a:lnRef idx="1">
@@ -23061,7 +22104,6 @@
           <a:ln>
             <a:noFill/>
           </a:ln>
-          <a:effectLst/>
         </p:spPr>
         <p:style>
           <a:lnRef idx="1">
@@ -23149,7 +22191,6 @@
           <a:ln>
             <a:noFill/>
           </a:ln>
-          <a:effectLst/>
         </p:spPr>
         <p:style>
           <a:lnRef idx="1">
@@ -23237,7 +22278,6 @@
           <a:ln>
             <a:noFill/>
           </a:ln>
-          <a:effectLst/>
         </p:spPr>
         <p:style>
           <a:lnRef idx="1">
@@ -23325,7 +22365,6 @@
           <a:ln>
             <a:noFill/>
           </a:ln>
-          <a:effectLst/>
         </p:spPr>
         <p:style>
           <a:lnRef idx="1">
@@ -23413,7 +22452,6 @@
           <a:ln>
             <a:noFill/>
           </a:ln>
-          <a:effectLst/>
         </p:spPr>
         <p:style>
           <a:lnRef idx="1">
@@ -23501,7 +22539,6 @@
           <a:ln>
             <a:noFill/>
           </a:ln>
-          <a:effectLst/>
         </p:spPr>
         <p:style>
           <a:lnRef idx="1">
@@ -23809,7 +22846,6 @@
           <a:ln>
             <a:noFill/>
           </a:ln>
-          <a:effectLst/>
         </p:spPr>
         <p:style>
           <a:lnRef idx="1">
@@ -24117,7 +23153,6 @@
           <a:ln>
             <a:noFill/>
           </a:ln>
-          <a:effectLst/>
         </p:spPr>
         <p:style>
           <a:lnRef idx="1">
@@ -24425,7 +23460,6 @@
           <a:ln>
             <a:noFill/>
           </a:ln>
-          <a:effectLst/>
         </p:spPr>
         <p:style>
           <a:lnRef idx="1">
@@ -24733,7 +23767,6 @@
           <a:ln>
             <a:noFill/>
           </a:ln>
-          <a:effectLst/>
         </p:spPr>
         <p:style>
           <a:lnRef idx="1">
@@ -25041,7 +24074,6 @@
           <a:ln>
             <a:noFill/>
           </a:ln>
-          <a:effectLst/>
         </p:spPr>
         <p:style>
           <a:lnRef idx="1">
@@ -25349,7 +24381,6 @@
               <a:srgbClr val="D7E0E6"/>
             </a:solidFill>
           </a:ln>
-          <a:effectLst/>
         </p:spPr>
         <p:style>
           <a:lnRef idx="1">
@@ -25395,7 +24426,6 @@
           <a:ln>
             <a:noFill/>
           </a:ln>
-          <a:effectLst/>
         </p:spPr>
         <p:style>
           <a:lnRef idx="1">
@@ -25439,7 +24469,6 @@
           <a:ln>
             <a:noFill/>
           </a:ln>
-          <a:effectLst/>
         </p:spPr>
         <p:style>
           <a:lnRef idx="1">
@@ -25597,7 +24626,6 @@
           <a:ln>
             <a:noFill/>
           </a:ln>
-          <a:effectLst/>
         </p:spPr>
         <p:style>
           <a:lnRef idx="1">
@@ -25816,7 +24844,6 @@
               <a:srgbClr val="C8922E"/>
             </a:solidFill>
           </a:ln>
-          <a:effectLst/>
         </p:spPr>
         <p:style>
           <a:lnRef idx="2">
@@ -25896,7 +24923,6 @@
               <a:srgbClr val="D7E0E6"/>
             </a:solidFill>
           </a:ln>
-          <a:effectLst/>
         </p:spPr>
         <p:style>
           <a:lnRef idx="2">
@@ -26083,7 +25109,6 @@
               <a:srgbClr val="D7E0E6"/>
             </a:solidFill>
           </a:ln>
-          <a:effectLst/>
         </p:spPr>
         <p:style>
           <a:lnRef idx="2">
@@ -26277,7 +25302,6 @@
               <a:srgbClr val="C8922E"/>
             </a:solidFill>
           </a:ln>
-          <a:effectLst/>
         </p:spPr>
         <p:style>
           <a:lnRef idx="2">
@@ -26313,7 +25337,6 @@
               <a:srgbClr val="D7E0E6"/>
             </a:solidFill>
           </a:ln>
-          <a:effectLst/>
         </p:spPr>
         <p:style>
           <a:lnRef idx="2">
@@ -26442,7 +25465,6 @@
               <a:srgbClr val="D7E0E6"/>
             </a:solidFill>
           </a:ln>
-          <a:effectLst/>
         </p:spPr>
         <p:style>
           <a:lnRef idx="1">
@@ -26529,7 +25551,6 @@
               <a:srgbClr val="C5D2DA"/>
             </a:solidFill>
           </a:ln>
-          <a:effectLst/>
         </p:spPr>
         <p:style>
           <a:lnRef idx="2">
@@ -27670,13 +26691,6 @@
               <a:srgbClr val="D7E0E6"/>
             </a:solidFill>
           </a:ln>
-          <a:effectLst>
-            <a:outerShdw blurRad="88900" dist="44450" dir="5400000" rotWithShape="0">
-              <a:srgbClr val="1C3D5A">
-                <a:alpha val="20000"/>
-              </a:srgbClr>
-            </a:outerShdw>
-          </a:effectLst>
         </p:spPr>
         <p:style>
           <a:lnRef idx="1">
@@ -27833,13 +26847,6 @@
               <a:srgbClr val="D7E0E6"/>
             </a:solidFill>
           </a:ln>
-          <a:effectLst>
-            <a:outerShdw blurRad="88900" dist="44450" dir="5400000" rotWithShape="0">
-              <a:srgbClr val="1C3D5A">
-                <a:alpha val="20000"/>
-              </a:srgbClr>
-            </a:outerShdw>
-          </a:effectLst>
         </p:spPr>
         <p:style>
           <a:lnRef idx="1">
@@ -27996,13 +27003,6 @@
               <a:srgbClr val="D7E0E6"/>
             </a:solidFill>
           </a:ln>
-          <a:effectLst>
-            <a:outerShdw blurRad="88900" dist="44450" dir="5400000" rotWithShape="0">
-              <a:srgbClr val="1C3D5A">
-                <a:alpha val="20000"/>
-              </a:srgbClr>
-            </a:outerShdw>
-          </a:effectLst>
         </p:spPr>
         <p:style>
           <a:lnRef idx="1">
@@ -28244,7 +27244,7 @@
                 <a:ea typeface="Microsoft JhengHei"/>
                 <a:cs typeface="Microsoft JhengHei"/>
               </a:rPr>
-              <a:t>AR(1) 時序自相關：讓海象「有記憶」、可被預測</a:t>
+              <a:t>海象具「持續性」：今天浪大、明天多半也大</a:t>
             </a:r>
           </a:p>
         </p:txBody>
@@ -28268,7 +27268,6 @@
               <a:srgbClr val="C8922E"/>
             </a:solidFill>
           </a:ln>
-          <a:effectLst/>
         </p:spPr>
         <p:style>
           <a:lnRef idx="2">
@@ -28304,7 +27303,6 @@
               <a:srgbClr val="D7E0E6"/>
             </a:solidFill>
           </a:ln>
-          <a:effectLst/>
         </p:spPr>
         <p:style>
           <a:lnRef idx="2">
@@ -28418,26 +27416,21 @@
         <p:spPr>
           <a:xfrm>
             <a:off x="640080" y="1874519"/>
-            <a:ext cx="5669280" cy="4114800"/>
+            <a:ext cx="5303520" cy="4114800"/>
           </a:xfrm>
           <a:prstGeom prst="roundRect">
             <a:avLst>
-              <a:gd name="adj" fmla="val 3000"/>
+              <a:gd name="adj" fmla="val 5000"/>
             </a:avLst>
           </a:prstGeom>
           <a:solidFill>
-            <a:srgbClr val="0F2233"/>
+            <a:srgbClr val="F3F7F9"/>
           </a:solidFill>
-          <a:ln>
-            <a:noFill/>
+          <a:ln w="9525">
+            <a:solidFill>
+              <a:srgbClr val="D7E0E6"/>
+            </a:solidFill>
           </a:ln>
-          <a:effectLst>
-            <a:outerShdw blurRad="88900" dist="44450" dir="5400000" rotWithShape="0">
-              <a:srgbClr val="1C3D5A">
-                <a:alpha val="20000"/>
-              </a:srgbClr>
-            </a:outerShdw>
-          </a:effectLst>
         </p:spPr>
         <p:style>
           <a:lnRef idx="1">
@@ -28469,8 +27462,8 @@
         </p:nvSpPr>
         <p:spPr>
           <a:xfrm>
-            <a:off x="914400" y="2103120"/>
-            <a:ext cx="5120640" cy="310896"/>
+            <a:off x="914400" y="2011680"/>
+            <a:ext cx="4754880" cy="347472"/>
           </a:xfrm>
           <a:prstGeom prst="rect">
             <a:avLst/>
@@ -28492,271 +27485,7 @@
               </a:spcAft>
             </a:pPr>
             <a:r>
-              <a:rPr sz="1350" b="1" i="0">
-                <a:solidFill>
-                  <a:srgbClr val="C8922E"/>
-                </a:solidFill>
-                <a:latin typeface="Microsoft JhengHei"/>
-                <a:ea typeface="Microsoft JhengHei"/>
-                <a:cs typeface="Microsoft JhengHei"/>
-              </a:rPr>
-              <a:t>AR(1) 日際嚴重度潛變數</a:t>
-            </a:r>
-          </a:p>
-        </p:txBody>
-      </p:sp>
-      <p:sp>
-        <p:nvSpPr>
-          <p:cNvPr id="10" name="TextBox 9"/>
-          <p:cNvSpPr txBox="1"/>
-          <p:nvPr/>
-        </p:nvSpPr>
-        <p:spPr>
-          <a:xfrm>
-            <a:off x="1005840" y="2514600"/>
-            <a:ext cx="5029200" cy="274320"/>
-          </a:xfrm>
-          <a:prstGeom prst="rect">
-            <a:avLst/>
-          </a:prstGeom>
-          <a:noFill/>
-        </p:spPr>
-        <p:txBody>
-          <a:bodyPr wrap="square" anchor="t" lIns="0" rIns="0" tIns="0" bIns="0">
-            <a:spAutoFit/>
-          </a:bodyPr>
-          <a:lstStyle/>
-          <a:p>
-            <a:pPr algn="l">
-              <a:lnSpc>
-                <a:spcPct val="112000"/>
-              </a:lnSpc>
-              <a:spcAft>
-                <a:spcPts val="500"/>
-              </a:spcAft>
-            </a:pPr>
-            <a:r>
-              <a:rPr sz="1300" b="0" i="0">
-                <a:solidFill>
-                  <a:srgbClr val="D5E0E8"/>
-                </a:solidFill>
-                <a:latin typeface="Consolas"/>
-                <a:ea typeface="Microsoft JhengHei"/>
-                <a:cs typeface="Consolas"/>
-              </a:rPr>
-              <a:t>z_t = φ · z_{t-1} + ε_t</a:t>
-            </a:r>
-          </a:p>
-        </p:txBody>
-      </p:sp>
-      <p:sp>
-        <p:nvSpPr>
-          <p:cNvPr id="11" name="TextBox 10"/>
-          <p:cNvSpPr txBox="1"/>
-          <p:nvPr/>
-        </p:nvSpPr>
-        <p:spPr>
-          <a:xfrm>
-            <a:off x="1005840" y="2880360"/>
-            <a:ext cx="5029200" cy="274320"/>
-          </a:xfrm>
-          <a:prstGeom prst="rect">
-            <a:avLst/>
-          </a:prstGeom>
-          <a:noFill/>
-        </p:spPr>
-        <p:txBody>
-          <a:bodyPr wrap="square" anchor="t" lIns="0" rIns="0" tIns="0" bIns="0">
-            <a:spAutoFit/>
-          </a:bodyPr>
-          <a:lstStyle/>
-          <a:p>
-            <a:pPr algn="l">
-              <a:lnSpc>
-                <a:spcPct val="112000"/>
-              </a:lnSpc>
-              <a:spcAft>
-                <a:spcPts val="500"/>
-              </a:spcAft>
-            </a:pPr>
-            <a:r>
-              <a:rPr sz="1300" b="0" i="0">
-                <a:solidFill>
-                  <a:srgbClr val="D5E0E8"/>
-                </a:solidFill>
-                <a:latin typeface="Consolas"/>
-                <a:ea typeface="Microsoft JhengHei"/>
-                <a:cs typeface="Consolas"/>
-              </a:rPr>
-              <a:t>φ = 0.72 ,  ε ~ N(0, 0.65²)</a:t>
-            </a:r>
-          </a:p>
-        </p:txBody>
-      </p:sp>
-      <p:sp>
-        <p:nvSpPr>
-          <p:cNvPr id="12" name="TextBox 11"/>
-          <p:cNvSpPr txBox="1"/>
-          <p:nvPr/>
-        </p:nvSpPr>
-        <p:spPr>
-          <a:xfrm>
-            <a:off x="1005840" y="3355848"/>
-            <a:ext cx="5029200" cy="274320"/>
-          </a:xfrm>
-          <a:prstGeom prst="rect">
-            <a:avLst/>
-          </a:prstGeom>
-          <a:noFill/>
-        </p:spPr>
-        <p:txBody>
-          <a:bodyPr wrap="square" anchor="t" lIns="0" rIns="0" tIns="0" bIns="0">
-            <a:spAutoFit/>
-          </a:bodyPr>
-          <a:lstStyle/>
-          <a:p>
-            <a:pPr algn="l">
-              <a:lnSpc>
-                <a:spcPct val="112000"/>
-              </a:lnSpc>
-              <a:spcAft>
-                <a:spcPts val="500"/>
-              </a:spcAft>
-            </a:pPr>
-            <a:r>
-              <a:rPr sz="1300" b="0" i="0">
-                <a:solidFill>
-                  <a:srgbClr val="D5E0E8"/>
-                </a:solidFill>
-                <a:latin typeface="Consolas"/>
-                <a:ea typeface="Microsoft JhengHei"/>
-                <a:cs typeface="Consolas"/>
-              </a:rPr>
-              <a:t>海況分布指數傾斜：</a:t>
-            </a:r>
-          </a:p>
-        </p:txBody>
-      </p:sp>
-      <p:sp>
-        <p:nvSpPr>
-          <p:cNvPr id="13" name="TextBox 12"/>
-          <p:cNvSpPr txBox="1"/>
-          <p:nvPr/>
-        </p:nvSpPr>
-        <p:spPr>
-          <a:xfrm>
-            <a:off x="1005840" y="3721608"/>
-            <a:ext cx="5029200" cy="274320"/>
-          </a:xfrm>
-          <a:prstGeom prst="rect">
-            <a:avLst/>
-          </a:prstGeom>
-          <a:noFill/>
-        </p:spPr>
-        <p:txBody>
-          <a:bodyPr wrap="square" anchor="t" lIns="0" rIns="0" tIns="0" bIns="0">
-            <a:spAutoFit/>
-          </a:bodyPr>
-          <a:lstStyle/>
-          <a:p>
-            <a:pPr algn="l">
-              <a:lnSpc>
-                <a:spcPct val="112000"/>
-              </a:lnSpc>
-              <a:spcAft>
-                <a:spcPts val="500"/>
-              </a:spcAft>
-            </a:pPr>
-            <a:r>
-              <a:rPr sz="1300" b="0" i="0">
-                <a:solidFill>
-                  <a:srgbClr val="D5E0E8"/>
-                </a:solidFill>
-                <a:latin typeface="Consolas"/>
-                <a:ea typeface="Microsoft JhengHei"/>
-                <a:cs typeface="Consolas"/>
-              </a:rPr>
-              <a:t>w_k ∝ base_k × exp( TILT · z_t</a:t>
-            </a:r>
-          </a:p>
-        </p:txBody>
-      </p:sp>
-      <p:sp>
-        <p:nvSpPr>
-          <p:cNvPr id="14" name="TextBox 13"/>
-          <p:cNvSpPr txBox="1"/>
-          <p:nvPr/>
-        </p:nvSpPr>
-        <p:spPr>
-          <a:xfrm>
-            <a:off x="1005840" y="4087368"/>
-            <a:ext cx="5029200" cy="274320"/>
-          </a:xfrm>
-          <a:prstGeom prst="rect">
-            <a:avLst/>
-          </a:prstGeom>
-          <a:noFill/>
-        </p:spPr>
-        <p:txBody>
-          <a:bodyPr wrap="square" anchor="t" lIns="0" rIns="0" tIns="0" bIns="0">
-            <a:spAutoFit/>
-          </a:bodyPr>
-          <a:lstStyle/>
-          <a:p>
-            <a:pPr algn="l">
-              <a:lnSpc>
-                <a:spcPct val="112000"/>
-              </a:lnSpc>
-              <a:spcAft>
-                <a:spcPts val="500"/>
-              </a:spcAft>
-            </a:pPr>
-            <a:r>
-              <a:rPr sz="1300" b="0" i="0">
-                <a:solidFill>
-                  <a:srgbClr val="D5E0E8"/>
-                </a:solidFill>
-                <a:latin typeface="Consolas"/>
-                <a:ea typeface="Microsoft JhengHei"/>
-                <a:cs typeface="Consolas"/>
-              </a:rPr>
-              <a:t>            · (rank_k − 2.5) )</a:t>
-            </a:r>
-          </a:p>
-        </p:txBody>
-      </p:sp>
-      <p:sp>
-        <p:nvSpPr>
-          <p:cNvPr id="15" name="TextBox 14"/>
-          <p:cNvSpPr txBox="1"/>
-          <p:nvPr/>
-        </p:nvSpPr>
-        <p:spPr>
-          <a:xfrm>
-            <a:off x="6720840" y="1874519"/>
-            <a:ext cx="4830775" cy="310896"/>
-          </a:xfrm>
-          <a:prstGeom prst="rect">
-            <a:avLst/>
-          </a:prstGeom>
-          <a:noFill/>
-        </p:spPr>
-        <p:txBody>
-          <a:bodyPr wrap="square" anchor="t" lIns="0" rIns="0" tIns="0" bIns="0">
-            <a:spAutoFit/>
-          </a:bodyPr>
-          <a:lstStyle/>
-          <a:p>
-            <a:pPr algn="l">
-              <a:lnSpc>
-                <a:spcPct val="112000"/>
-              </a:lnSpc>
-              <a:spcAft>
-                <a:spcPts val="500"/>
-              </a:spcAft>
-            </a:pPr>
-            <a:r>
-              <a:rPr sz="1350" b="1" i="0">
+              <a:rPr sz="1400" b="1" i="0">
                 <a:solidFill>
                   <a:srgbClr val="1C3D5A"/>
                 </a:solidFill>
@@ -28764,31 +27493,30 @@
                 <a:ea typeface="Microsoft JhengHei"/>
                 <a:cs typeface="Microsoft JhengHei"/>
               </a:rPr>
-              <a:t>設計動機</a:t>
+              <a:t>設計出發點：真實海象的時序特性</a:t>
             </a:r>
           </a:p>
         </p:txBody>
       </p:sp>
       <p:cxnSp>
         <p:nvCxnSpPr>
-          <p:cNvPr id="16" name="Connector 15"/>
+          <p:cNvPr id="10" name="Connector 9"/>
           <p:cNvCxnSpPr/>
           <p:nvPr/>
         </p:nvCxnSpPr>
         <p:spPr>
           <a:xfrm>
-            <a:off x="6720840" y="2203703"/>
-            <a:ext cx="4830775" cy="0"/>
+            <a:off x="914400" y="2423160"/>
+            <a:ext cx="4754880" cy="0"/>
           </a:xfrm>
           <a:prstGeom prst="bentConnector3">
             <a:avLst/>
           </a:prstGeom>
           <a:ln w="12700">
             <a:solidFill>
-              <a:srgbClr val="D7E0E6"/>
+              <a:srgbClr val="C5D2DA"/>
             </a:solidFill>
           </a:ln>
-          <a:effectLst/>
         </p:spPr>
         <p:style>
           <a:lnRef idx="2">
@@ -28807,14 +27535,278 @@
       </p:cxnSp>
       <p:sp>
         <p:nvSpPr>
+          <p:cNvPr id="11" name="TextBox 10"/>
+          <p:cNvSpPr txBox="1"/>
+          <p:nvPr/>
+        </p:nvSpPr>
+        <p:spPr>
+          <a:xfrm>
+            <a:off x="914400" y="2578608"/>
+            <a:ext cx="4754880" cy="274320"/>
+          </a:xfrm>
+          <a:prstGeom prst="rect">
+            <a:avLst/>
+          </a:prstGeom>
+          <a:noFill/>
+        </p:spPr>
+        <p:txBody>
+          <a:bodyPr wrap="square" anchor="t" lIns="0" rIns="0" tIns="0" bIns="0">
+            <a:spAutoFit/>
+          </a:bodyPr>
+          <a:lstStyle/>
+          <a:p>
+            <a:pPr algn="l">
+              <a:lnSpc>
+                <a:spcPct val="112000"/>
+              </a:lnSpc>
+              <a:spcAft>
+                <a:spcPts val="500"/>
+              </a:spcAft>
+            </a:pPr>
+            <a:r>
+              <a:rPr sz="1300" b="1" i="0">
+                <a:solidFill>
+                  <a:srgbClr val="1C3D5A"/>
+                </a:solidFill>
+                <a:latin typeface="Microsoft JhengHei"/>
+                <a:ea typeface="Microsoft JhengHei"/>
+                <a:cs typeface="Microsoft JhengHei"/>
+              </a:rPr>
+              <a:t>▪  天氣系統持續 3–7 天</a:t>
+            </a:r>
+          </a:p>
+        </p:txBody>
+      </p:sp>
+      <p:sp>
+        <p:nvSpPr>
+          <p:cNvPr id="12" name="TextBox 11"/>
+          <p:cNvSpPr txBox="1"/>
+          <p:nvPr/>
+        </p:nvSpPr>
+        <p:spPr>
+          <a:xfrm>
+            <a:off x="1143000" y="2852928"/>
+            <a:ext cx="4526280" cy="310896"/>
+          </a:xfrm>
+          <a:prstGeom prst="rect">
+            <a:avLst/>
+          </a:prstGeom>
+          <a:noFill/>
+        </p:spPr>
+        <p:txBody>
+          <a:bodyPr wrap="square" anchor="t" lIns="0" rIns="0" tIns="0" bIns="0">
+            <a:spAutoFit/>
+          </a:bodyPr>
+          <a:lstStyle/>
+          <a:p>
+            <a:pPr algn="l">
+              <a:lnSpc>
+                <a:spcPct val="112000"/>
+              </a:lnSpc>
+              <a:spcAft>
+                <a:spcPts val="500"/>
+              </a:spcAft>
+            </a:pPr>
+            <a:r>
+              <a:rPr sz="1150" b="0" i="0">
+                <a:solidFill>
+                  <a:srgbClr val="3D4D5A"/>
+                </a:solidFill>
+                <a:latin typeface="Microsoft JhengHei"/>
+                <a:ea typeface="Microsoft JhengHei"/>
+                <a:cs typeface="Microsoft JhengHei"/>
+              </a:rPr>
+              <a:t>今日大浪，明日通常也是大浪，不會突然平靜</a:t>
+            </a:r>
+          </a:p>
+        </p:txBody>
+      </p:sp>
+      <p:sp>
+        <p:nvSpPr>
+          <p:cNvPr id="13" name="TextBox 12"/>
+          <p:cNvSpPr txBox="1"/>
+          <p:nvPr/>
+        </p:nvSpPr>
+        <p:spPr>
+          <a:xfrm>
+            <a:off x="914400" y="3383280"/>
+            <a:ext cx="4754880" cy="274320"/>
+          </a:xfrm>
+          <a:prstGeom prst="rect">
+            <a:avLst/>
+          </a:prstGeom>
+          <a:noFill/>
+        </p:spPr>
+        <p:txBody>
+          <a:bodyPr wrap="square" anchor="t" lIns="0" rIns="0" tIns="0" bIns="0">
+            <a:spAutoFit/>
+          </a:bodyPr>
+          <a:lstStyle/>
+          <a:p>
+            <a:pPr algn="l">
+              <a:lnSpc>
+                <a:spcPct val="112000"/>
+              </a:lnSpc>
+              <a:spcAft>
+                <a:spcPts val="500"/>
+              </a:spcAft>
+            </a:pPr>
+            <a:r>
+              <a:rPr sz="1300" b="1" i="0">
+                <a:solidFill>
+                  <a:srgbClr val="1C3D5A"/>
+                </a:solidFill>
+                <a:latin typeface="Microsoft JhengHei"/>
+                <a:ea typeface="Microsoft JhengHei"/>
+                <a:cs typeface="Microsoft JhengHei"/>
+              </a:rPr>
+              <a:t>▪  獨立隨機抽樣不夠</a:t>
+            </a:r>
+          </a:p>
+        </p:txBody>
+      </p:sp>
+      <p:sp>
+        <p:nvSpPr>
+          <p:cNvPr id="14" name="TextBox 13"/>
+          <p:cNvSpPr txBox="1"/>
+          <p:nvPr/>
+        </p:nvSpPr>
+        <p:spPr>
+          <a:xfrm>
+            <a:off x="1143000" y="3657600"/>
+            <a:ext cx="4526280" cy="310896"/>
+          </a:xfrm>
+          <a:prstGeom prst="rect">
+            <a:avLst/>
+          </a:prstGeom>
+          <a:noFill/>
+        </p:spPr>
+        <p:txBody>
+          <a:bodyPr wrap="square" anchor="t" lIns="0" rIns="0" tIns="0" bIns="0">
+            <a:spAutoFit/>
+          </a:bodyPr>
+          <a:lstStyle/>
+          <a:p>
+            <a:pPr algn="l">
+              <a:lnSpc>
+                <a:spcPct val="112000"/>
+              </a:lnSpc>
+              <a:spcAft>
+                <a:spcPts val="500"/>
+              </a:spcAft>
+            </a:pPr>
+            <a:r>
+              <a:rPr sz="1150" b="0" i="0">
+                <a:solidFill>
+                  <a:srgbClr val="3D4D5A"/>
+                </a:solidFill>
+                <a:latin typeface="Microsoft JhengHei"/>
+                <a:ea typeface="Microsoft JhengHei"/>
+                <a:cs typeface="Microsoft JhengHei"/>
+              </a:rPr>
+              <a:t>若每筆各自抽，海況沒有日際關聯，排班預測失去意義</a:t>
+            </a:r>
+          </a:p>
+        </p:txBody>
+      </p:sp>
+      <p:sp>
+        <p:nvSpPr>
+          <p:cNvPr id="15" name="TextBox 14"/>
+          <p:cNvSpPr txBox="1"/>
+          <p:nvPr/>
+        </p:nvSpPr>
+        <p:spPr>
+          <a:xfrm>
+            <a:off x="914400" y="4187952"/>
+            <a:ext cx="4754880" cy="274320"/>
+          </a:xfrm>
+          <a:prstGeom prst="rect">
+            <a:avLst/>
+          </a:prstGeom>
+          <a:noFill/>
+        </p:spPr>
+        <p:txBody>
+          <a:bodyPr wrap="square" anchor="t" lIns="0" rIns="0" tIns="0" bIns="0">
+            <a:spAutoFit/>
+          </a:bodyPr>
+          <a:lstStyle/>
+          <a:p>
+            <a:pPr algn="l">
+              <a:lnSpc>
+                <a:spcPct val="112000"/>
+              </a:lnSpc>
+              <a:spcAft>
+                <a:spcPts val="500"/>
+              </a:spcAft>
+            </a:pPr>
+            <a:r>
+              <a:rPr sz="1300" b="1" i="0">
+                <a:solidFill>
+                  <a:srgbClr val="1C3D5A"/>
+                </a:solidFill>
+                <a:latin typeface="Microsoft JhengHei"/>
+                <a:ea typeface="Microsoft JhengHei"/>
+                <a:cs typeface="Microsoft JhengHei"/>
+              </a:rPr>
+              <a:t>▪  時序自相關模型</a:t>
+            </a:r>
+          </a:p>
+        </p:txBody>
+      </p:sp>
+      <p:sp>
+        <p:nvSpPr>
+          <p:cNvPr id="16" name="TextBox 15"/>
+          <p:cNvSpPr txBox="1"/>
+          <p:nvPr/>
+        </p:nvSpPr>
+        <p:spPr>
+          <a:xfrm>
+            <a:off x="1143000" y="4462272"/>
+            <a:ext cx="4526280" cy="310896"/>
+          </a:xfrm>
+          <a:prstGeom prst="rect">
+            <a:avLst/>
+          </a:prstGeom>
+          <a:noFill/>
+        </p:spPr>
+        <p:txBody>
+          <a:bodyPr wrap="square" anchor="t" lIns="0" rIns="0" tIns="0" bIns="0">
+            <a:spAutoFit/>
+          </a:bodyPr>
+          <a:lstStyle/>
+          <a:p>
+            <a:pPr algn="l">
+              <a:lnSpc>
+                <a:spcPct val="112000"/>
+              </a:lnSpc>
+              <a:spcAft>
+                <a:spcPts val="500"/>
+              </a:spcAft>
+            </a:pPr>
+            <a:r>
+              <a:rPr sz="1150" b="0" i="0">
+                <a:solidFill>
+                  <a:srgbClr val="3D4D5A"/>
+                </a:solidFill>
+                <a:latin typeface="Microsoft JhengHei"/>
+                <a:ea typeface="Microsoft JhengHei"/>
+                <a:cs typeface="Microsoft JhengHei"/>
+              </a:rPr>
+              <a:t>用前一日的海況嚴重度加上隨機擾動，生成下一日海況</a:t>
+            </a:r>
+          </a:p>
+        </p:txBody>
+      </p:sp>
+      <p:sp>
+        <p:nvSpPr>
           <p:cNvPr id="17" name="TextBox 16"/>
           <p:cNvSpPr txBox="1"/>
           <p:nvPr/>
         </p:nvSpPr>
         <p:spPr>
           <a:xfrm>
-            <a:off x="6720840" y="2331719"/>
-            <a:ext cx="4830775" cy="4572000"/>
+            <a:off x="914400" y="4992624"/>
+            <a:ext cx="4754880" cy="274320"/>
           </a:xfrm>
           <a:prstGeom prst="rect">
             <a:avLst/>
@@ -28832,10 +27824,209 @@
                 <a:spcPct val="112000"/>
               </a:lnSpc>
               <a:spcAft>
+                <a:spcPts val="500"/>
+              </a:spcAft>
+            </a:pPr>
+            <a:r>
+              <a:rPr sz="1300" b="1" i="0">
+                <a:solidFill>
+                  <a:srgbClr val="1C3D5A"/>
+                </a:solidFill>
+                <a:latin typeface="Microsoft JhengHei"/>
+                <a:ea typeface="Microsoft JhengHei"/>
+                <a:cs typeface="Microsoft JhengHei"/>
+              </a:rPr>
+              <a:t>▪  效果驗證</a:t>
+            </a:r>
+          </a:p>
+        </p:txBody>
+      </p:sp>
+      <p:sp>
+        <p:nvSpPr>
+          <p:cNvPr id="18" name="TextBox 17"/>
+          <p:cNvSpPr txBox="1"/>
+          <p:nvPr/>
+        </p:nvSpPr>
+        <p:spPr>
+          <a:xfrm>
+            <a:off x="1143000" y="5266944"/>
+            <a:ext cx="4526280" cy="310896"/>
+          </a:xfrm>
+          <a:prstGeom prst="rect">
+            <a:avLst/>
+          </a:prstGeom>
+          <a:noFill/>
+        </p:spPr>
+        <p:txBody>
+          <a:bodyPr wrap="square" anchor="t" lIns="0" rIns="0" tIns="0" bIns="0">
+            <a:spAutoFit/>
+          </a:bodyPr>
+          <a:lstStyle/>
+          <a:p>
+            <a:pPr algn="l">
+              <a:lnSpc>
+                <a:spcPct val="112000"/>
+              </a:lnSpc>
+              <a:spcAft>
+                <a:spcPts val="500"/>
+              </a:spcAft>
+            </a:pPr>
+            <a:r>
+              <a:rPr sz="1150" b="0" i="0">
+                <a:solidFill>
+                  <a:srgbClr val="3D4D5A"/>
+                </a:solidFill>
+                <a:latin typeface="Microsoft JhengHei"/>
+                <a:ea typeface="Microsoft JhengHei"/>
+                <a:cs typeface="Microsoft JhengHei"/>
+              </a:rPr>
+              <a:t>RandomForest 海況預測 AUC = 0.811（有時序訊號可學習）</a:t>
+            </a:r>
+          </a:p>
+        </p:txBody>
+      </p:sp>
+      <p:sp>
+        <p:nvSpPr>
+          <p:cNvPr id="19" name="TextBox 18"/>
+          <p:cNvSpPr txBox="1"/>
+          <p:nvPr/>
+        </p:nvSpPr>
+        <p:spPr>
+          <a:xfrm>
+            <a:off x="6355080" y="1874519"/>
+            <a:ext cx="5196535" cy="310896"/>
+          </a:xfrm>
+          <a:prstGeom prst="rect">
+            <a:avLst/>
+          </a:prstGeom>
+          <a:noFill/>
+        </p:spPr>
+        <p:txBody>
+          <a:bodyPr wrap="square" anchor="t" lIns="0" rIns="0" tIns="0" bIns="0">
+            <a:spAutoFit/>
+          </a:bodyPr>
+          <a:lstStyle/>
+          <a:p>
+            <a:pPr algn="l">
+              <a:lnSpc>
+                <a:spcPct val="112000"/>
+              </a:lnSpc>
+              <a:spcAft>
+                <a:spcPts val="500"/>
+              </a:spcAft>
+            </a:pPr>
+            <a:r>
+              <a:rPr sz="1350" b="1" i="0">
+                <a:solidFill>
+                  <a:srgbClr val="1C3D5A"/>
+                </a:solidFill>
+                <a:latin typeface="Microsoft JhengHei"/>
+                <a:ea typeface="Microsoft JhengHei"/>
+                <a:cs typeface="Microsoft JhengHei"/>
+              </a:rPr>
+              <a:t>機率結構</a:t>
+            </a:r>
+          </a:p>
+        </p:txBody>
+      </p:sp>
+      <p:cxnSp>
+        <p:nvCxnSpPr>
+          <p:cNvPr id="20" name="Connector 19"/>
+          <p:cNvCxnSpPr/>
+          <p:nvPr/>
+        </p:nvCxnSpPr>
+        <p:spPr>
+          <a:xfrm>
+            <a:off x="6355080" y="2203703"/>
+            <a:ext cx="5196535" cy="0"/>
+          </a:xfrm>
+          <a:prstGeom prst="bentConnector3">
+            <a:avLst/>
+          </a:prstGeom>
+          <a:ln w="12700">
+            <a:solidFill>
+              <a:srgbClr val="D7E0E6"/>
+            </a:solidFill>
+          </a:ln>
+        </p:spPr>
+        <p:style>
+          <a:lnRef idx="2">
+            <a:schemeClr val="accent1"/>
+          </a:lnRef>
+          <a:fillRef idx="0">
+            <a:schemeClr val="accent1"/>
+          </a:fillRef>
+          <a:effectRef idx="1">
+            <a:schemeClr val="accent1"/>
+          </a:effectRef>
+          <a:fontRef idx="minor">
+            <a:schemeClr val="tx1"/>
+          </a:fontRef>
+        </p:style>
+      </p:cxnSp>
+      <p:sp>
+        <p:nvSpPr>
+          <p:cNvPr id="21" name="TextBox 20"/>
+          <p:cNvSpPr txBox="1"/>
+          <p:nvPr/>
+        </p:nvSpPr>
+        <p:spPr>
+          <a:xfrm>
+            <a:off x="6355080" y="2331719"/>
+            <a:ext cx="5196535" cy="4572000"/>
+          </a:xfrm>
+          <a:prstGeom prst="rect">
+            <a:avLst/>
+          </a:prstGeom>
+          <a:noFill/>
+        </p:spPr>
+        <p:txBody>
+          <a:bodyPr wrap="square" anchor="t" lIns="0" rIns="0" tIns="0" bIns="0">
+            <a:spAutoFit/>
+          </a:bodyPr>
+          <a:lstStyle/>
+          <a:p>
+            <a:pPr algn="l">
+              <a:lnSpc>
+                <a:spcPct val="112000"/>
+              </a:lnSpc>
+              <a:spcAft>
                 <a:spcPts val="600"/>
               </a:spcAft>
             </a:pPr>
             <a:r>
+              <a:rPr sz="1300" b="1" i="0">
+                <a:solidFill>
+                  <a:srgbClr val="C8922E"/>
+                </a:solidFill>
+                <a:latin typeface="Microsoft JhengHei"/>
+                <a:ea typeface="Microsoft JhengHei"/>
+                <a:cs typeface="Microsoft JhengHei"/>
+              </a:rPr>
+              <a:t>▪  </a:t>
+            </a:r>
+            <a:r>
+              <a:rPr sz="1300" b="1" i="0">
+                <a:solidFill>
+                  <a:srgbClr val="1C3D5A"/>
+                </a:solidFill>
+                <a:latin typeface="Microsoft JhengHei"/>
+                <a:ea typeface="Microsoft JhengHei"/>
+                <a:cs typeface="Microsoft JhengHei"/>
+              </a:rPr>
+              <a:t>兩層機率設計</a:t>
+            </a:r>
+          </a:p>
+          <a:p>
+            <a:pPr algn="l">
+              <a:lnSpc>
+                <a:spcPct val="112000"/>
+              </a:lnSpc>
+              <a:spcAft>
+                <a:spcPts val="600"/>
+              </a:spcAft>
+            </a:pPr>
+            <a:r>
               <a:rPr sz="1250" b="1" i="0">
                 <a:solidFill>
                   <a:srgbClr val="C8922E"/>
@@ -28855,7 +28046,7 @@
                 <a:ea typeface="Microsoft JhengHei"/>
                 <a:cs typeface="Microsoft JhengHei"/>
               </a:rPr>
-              <a:t>真實海象具「多日天氣系統」持續性</a:t>
+              <a:t>海域決定各海況基礎機率</a:t>
             </a:r>
           </a:p>
           <a:p>
@@ -28868,9 +28059,73 @@
               </a:spcAft>
             </a:pPr>
             <a:r>
-              <a:rPr sz="1250" b="1" i="0">
-                <a:solidFill>
-                  <a:srgbClr val="C8922E"/>
+              <a:rPr sz="1100" b="1" i="0">
+                <a:solidFill>
+                  <a:srgbClr val="C5D2DA"/>
+                </a:solidFill>
+                <a:latin typeface="Microsoft JhengHei"/>
+                <a:ea typeface="Microsoft JhengHei"/>
+                <a:cs typeface="Microsoft JhengHei"/>
+              </a:rPr>
+              <a:t>–  </a:t>
+            </a:r>
+            <a:r>
+              <a:rPr sz="1100" b="0" i="0">
+                <a:solidFill>
+                  <a:srgbClr val="7C8B97"/>
+                </a:solidFill>
+                <a:latin typeface="Microsoft JhengHei"/>
+                <a:ea typeface="Microsoft JhengHei"/>
+                <a:cs typeface="Microsoft JhengHei"/>
+              </a:rPr>
+              <a:t>外海大浪基礎率 20%</a:t>
+            </a:r>
+          </a:p>
+          <a:p>
+            <a:pPr algn="l">
+              <a:lnSpc>
+                <a:spcPct val="112000"/>
+              </a:lnSpc>
+              <a:spcAft>
+                <a:spcPts val="600"/>
+              </a:spcAft>
+            </a:pPr>
+            <a:r>
+              <a:rPr sz="1100" b="1" i="0">
+                <a:solidFill>
+                  <a:srgbClr val="C5D2DA"/>
+                </a:solidFill>
+                <a:latin typeface="Microsoft JhengHei"/>
+                <a:ea typeface="Microsoft JhengHei"/>
+                <a:cs typeface="Microsoft JhengHei"/>
+              </a:rPr>
+              <a:t>–  </a:t>
+            </a:r>
+            <a:r>
+              <a:rPr sz="1100" b="0" i="0">
+                <a:solidFill>
+                  <a:srgbClr val="7C8B97"/>
+                </a:solidFill>
+                <a:latin typeface="Microsoft JhengHei"/>
+                <a:ea typeface="Microsoft JhengHei"/>
+                <a:cs typeface="Microsoft JhengHei"/>
+              </a:rPr>
+              <a:t>港口大浪基礎率  1%</a:t>
+            </a:r>
+          </a:p>
+          <a:p>
+            <a:pPr algn="l">
+              <a:lnSpc>
+                <a:spcPct val="112000"/>
+              </a:lnSpc>
+              <a:spcAft>
+                <a:spcPts val="600"/>
+              </a:spcAft>
+            </a:pPr>
+            <a:r>
+              <a:rPr sz="1300" b="1" i="0">
+                <a:solidFill>
+                  <a:srgbClr val="4E8C8A"/>
                 </a:solidFill>
                 <a:latin typeface="Microsoft JhengHei"/>
                 <a:ea typeface="Microsoft JhengHei"/>
@@ -28879,15 +28134,15 @@
               <a:t>▪  </a:t>
             </a:r>
             <a:r>
-              <a:rPr sz="1250" b="0" i="0">
-                <a:solidFill>
-                  <a:srgbClr val="3D4D5A"/>
-                </a:solidFill>
-                <a:latin typeface="Microsoft JhengHei"/>
-                <a:ea typeface="Microsoft JhengHei"/>
-                <a:cs typeface="Microsoft JhengHei"/>
-              </a:rPr>
-              <a:t>今天浪大、明天多半也大</a:t>
+              <a:rPr sz="1300" b="1" i="0">
+                <a:solidFill>
+                  <a:srgbClr val="4E8C8A"/>
+                </a:solidFill>
+                <a:latin typeface="Microsoft JhengHei"/>
+                <a:ea typeface="Microsoft JhengHei"/>
+                <a:cs typeface="Microsoft JhengHei"/>
+              </a:rPr>
+              <a:t>時序調整</a:t>
             </a:r>
           </a:p>
           <a:p>
@@ -28900,26 +28155,26 @@
               </a:spcAft>
             </a:pPr>
             <a:r>
-              <a:rPr sz="1300" b="1" i="0">
-                <a:solidFill>
-                  <a:srgbClr val="BC5B41"/>
-                </a:solidFill>
-                <a:latin typeface="Microsoft JhengHei"/>
-                <a:ea typeface="Microsoft JhengHei"/>
-                <a:cs typeface="Microsoft JhengHei"/>
-              </a:rPr>
-              <a:t>▪  </a:t>
-            </a:r>
-            <a:r>
-              <a:rPr sz="1300" b="1" i="0">
-                <a:solidFill>
-                  <a:srgbClr val="BC5B41"/>
-                </a:solidFill>
-                <a:latin typeface="Microsoft JhengHei"/>
-                <a:ea typeface="Microsoft JhengHei"/>
-                <a:cs typeface="Microsoft JhengHei"/>
-              </a:rPr>
-              <a:t>為何重要？</a:t>
+              <a:rPr sz="1100" b="1" i="0">
+                <a:solidFill>
+                  <a:srgbClr val="C5D2DA"/>
+                </a:solidFill>
+                <a:latin typeface="Microsoft JhengHei"/>
+                <a:ea typeface="Microsoft JhengHei"/>
+                <a:cs typeface="Microsoft JhengHei"/>
+              </a:rPr>
+              <a:t>–  </a:t>
+            </a:r>
+            <a:r>
+              <a:rPr sz="1100" b="0" i="0">
+                <a:solidFill>
+                  <a:srgbClr val="7C8B97"/>
+                </a:solidFill>
+                <a:latin typeface="Microsoft JhengHei"/>
+                <a:ea typeface="Microsoft JhengHei"/>
+                <a:cs typeface="Microsoft JhengHei"/>
+              </a:rPr>
+              <a:t>前日惡劣 → 今日惡劣機率升高</a:t>
             </a:r>
           </a:p>
           <a:p>
@@ -28951,7 +28206,7 @@
                 <a:ea typeface="Microsoft JhengHei"/>
                 <a:cs typeface="Microsoft JhengHei"/>
               </a:rPr>
-              <a:t>若各筆獨立抽樣 → 海況是白噪音</a:t>
+              <a:t>生成 1,200 筆有時序結構的值勤紀錄</a:t>
             </a:r>
           </a:p>
           <a:p>
@@ -28983,135 +28238,7 @@
                 <a:ea typeface="Microsoft JhengHei"/>
                 <a:cs typeface="Microsoft JhengHei"/>
               </a:rPr>
-              <a:t>Markov 轉移矩陣失去意義</a:t>
-            </a:r>
-          </a:p>
-          <a:p>
-            <a:pPr algn="l">
-              <a:lnSpc>
-                <a:spcPct val="112000"/>
-              </a:lnSpc>
-              <a:spcAft>
-                <a:spcPts val="600"/>
-              </a:spcAft>
-            </a:pPr>
-            <a:r>
-              <a:rPr sz="1100" b="1" i="0">
-                <a:solidFill>
-                  <a:srgbClr val="C5D2DA"/>
-                </a:solidFill>
-                <a:latin typeface="Microsoft JhengHei"/>
-                <a:ea typeface="Microsoft JhengHei"/>
-                <a:cs typeface="Microsoft JhengHei"/>
-              </a:rPr>
-              <a:t>–  </a:t>
-            </a:r>
-            <a:r>
-              <a:rPr sz="1100" b="0" i="0">
-                <a:solidFill>
-                  <a:srgbClr val="7C8B97"/>
-                </a:solidFill>
-                <a:latin typeface="Microsoft JhengHei"/>
-                <a:ea typeface="Microsoft JhengHei"/>
-                <a:cs typeface="Microsoft JhengHei"/>
-              </a:rPr>
-              <a:t>ML 預測等同隨機猜測（AUC≈0.5）</a:t>
-            </a:r>
-          </a:p>
-          <a:p>
-            <a:pPr algn="l">
-              <a:lnSpc>
-                <a:spcPct val="112000"/>
-              </a:lnSpc>
-              <a:spcAft>
-                <a:spcPts val="600"/>
-              </a:spcAft>
-            </a:pPr>
-            <a:r>
-              <a:rPr sz="1300" b="1" i="0">
-                <a:solidFill>
-                  <a:srgbClr val="4E8C8A"/>
-                </a:solidFill>
-                <a:latin typeface="Microsoft JhengHei"/>
-                <a:ea typeface="Microsoft JhengHei"/>
-                <a:cs typeface="Microsoft JhengHei"/>
-              </a:rPr>
-              <a:t>▪  </a:t>
-            </a:r>
-            <a:r>
-              <a:rPr sz="1300" b="1" i="0">
-                <a:solidFill>
-                  <a:srgbClr val="4E8C8A"/>
-                </a:solidFill>
-                <a:latin typeface="Microsoft JhengHei"/>
-                <a:ea typeface="Microsoft JhengHei"/>
-                <a:cs typeface="Microsoft JhengHei"/>
-              </a:rPr>
-              <a:t>加入 AR(1) 後</a:t>
-            </a:r>
-          </a:p>
-          <a:p>
-            <a:pPr algn="l">
-              <a:lnSpc>
-                <a:spcPct val="112000"/>
-              </a:lnSpc>
-              <a:spcAft>
-                <a:spcPts val="600"/>
-              </a:spcAft>
-            </a:pPr>
-            <a:r>
-              <a:rPr sz="1100" b="1" i="0">
-                <a:solidFill>
-                  <a:srgbClr val="C5D2DA"/>
-                </a:solidFill>
-                <a:latin typeface="Microsoft JhengHei"/>
-                <a:ea typeface="Microsoft JhengHei"/>
-                <a:cs typeface="Microsoft JhengHei"/>
-              </a:rPr>
-              <a:t>–  </a:t>
-            </a:r>
-            <a:r>
-              <a:rPr sz="1100" b="0" i="0">
-                <a:solidFill>
-                  <a:srgbClr val="7C8B97"/>
-                </a:solidFill>
-                <a:latin typeface="Microsoft JhengHei"/>
-                <a:ea typeface="Microsoft JhengHei"/>
-                <a:cs typeface="Microsoft JhengHei"/>
-              </a:rPr>
-              <a:t>海況有可學習時序訊號</a:t>
-            </a:r>
-          </a:p>
-          <a:p>
-            <a:pPr algn="l">
-              <a:lnSpc>
-                <a:spcPct val="112000"/>
-              </a:lnSpc>
-              <a:spcAft>
-                <a:spcPts val="600"/>
-              </a:spcAft>
-            </a:pPr>
-            <a:r>
-              <a:rPr sz="1100" b="1" i="0">
-                <a:solidFill>
-                  <a:srgbClr val="C5D2DA"/>
-                </a:solidFill>
-                <a:latin typeface="Microsoft JhengHei"/>
-                <a:ea typeface="Microsoft JhengHei"/>
-                <a:cs typeface="Microsoft JhengHei"/>
-              </a:rPr>
-              <a:t>–  </a:t>
-            </a:r>
-            <a:r>
-              <a:rPr sz="1100" b="0" i="0">
-                <a:solidFill>
-                  <a:srgbClr val="7C8B97"/>
-                </a:solidFill>
-                <a:latin typeface="Microsoft JhengHei"/>
-                <a:ea typeface="Microsoft JhengHei"/>
-                <a:cs typeface="Microsoft JhengHei"/>
-              </a:rPr>
-              <a:t>RF 測試集 AUC 提升至 0.811</a:t>
+              <a:t>讓後續 Markov、ML 預測有意義</a:t>
             </a:r>
           </a:p>
         </p:txBody>
@@ -29249,7 +28376,6 @@
               <a:srgbClr val="C8922E"/>
             </a:solidFill>
           </a:ln>
-          <a:effectLst/>
         </p:spPr>
         <p:style>
           <a:lnRef idx="2">
@@ -29285,7 +28411,6 @@
               <a:srgbClr val="D7E0E6"/>
             </a:solidFill>
           </a:ln>
-          <a:effectLst/>
         </p:spPr>
         <p:style>
           <a:lnRef idx="2">
@@ -29410,7 +28535,6 @@
           <a:ln>
             <a:noFill/>
           </a:ln>
-          <a:effectLst/>
         </p:spPr>
         <p:style>
           <a:lnRef idx="1">
@@ -29498,7 +28622,6 @@
           <a:ln>
             <a:noFill/>
           </a:ln>
-          <a:effectLst/>
         </p:spPr>
         <p:style>
           <a:lnRef idx="1">
@@ -29586,7 +28709,6 @@
           <a:ln>
             <a:noFill/>
           </a:ln>
-          <a:effectLst/>
         </p:spPr>
         <p:style>
           <a:lnRef idx="1">
@@ -29674,7 +28796,6 @@
           <a:ln>
             <a:noFill/>
           </a:ln>
-          <a:effectLst/>
         </p:spPr>
         <p:style>
           <a:lnRef idx="1">
@@ -29762,7 +28883,6 @@
           <a:ln>
             <a:noFill/>
           </a:ln>
-          <a:effectLst/>
         </p:spPr>
         <p:style>
           <a:lnRef idx="1">
@@ -29982,7 +29102,6 @@
           <a:ln>
             <a:noFill/>
           </a:ln>
-          <a:effectLst/>
         </p:spPr>
         <p:style>
           <a:lnRef idx="1">
@@ -30202,7 +29321,6 @@
           <a:ln>
             <a:noFill/>
           </a:ln>
-          <a:effectLst/>
         </p:spPr>
         <p:style>
           <a:lnRef idx="1">
@@ -30422,7 +29540,6 @@
           <a:ln>
             <a:noFill/>
           </a:ln>
-          <a:effectLst/>
         </p:spPr>
         <p:style>
           <a:lnRef idx="1">
@@ -30642,7 +29759,6 @@
               <a:srgbClr val="D7E0E6"/>
             </a:solidFill>
           </a:ln>
-          <a:effectLst/>
         </p:spPr>
         <p:style>
           <a:lnRef idx="1">
@@ -30729,7 +29845,6 @@
               <a:srgbClr val="D7E0E6"/>
             </a:solidFill>
           </a:ln>
-          <a:effectLst/>
         </p:spPr>
         <p:style>
           <a:lnRef idx="2">
@@ -30951,7 +30066,6 @@
           <a:ln>
             <a:noFill/>
           </a:ln>
-          <a:effectLst/>
         </p:spPr>
         <p:style>
           <a:lnRef idx="1">
@@ -30995,7 +30109,6 @@
           <a:ln>
             <a:noFill/>
           </a:ln>
-          <a:effectLst/>
         </p:spPr>
         <p:style>
           <a:lnRef idx="1">
@@ -31240,7 +30353,6 @@
               <a:srgbClr val="C8922E"/>
             </a:solidFill>
           </a:ln>
-          <a:effectLst/>
         </p:spPr>
         <p:style>
           <a:lnRef idx="2">
@@ -31276,7 +30388,6 @@
               <a:srgbClr val="D7E0E6"/>
             </a:solidFill>
           </a:ln>
-          <a:effectLst/>
         </p:spPr>
         <p:style>
           <a:lnRef idx="2">
@@ -31405,13 +30516,6 @@
               <a:srgbClr val="D7E0E6"/>
             </a:solidFill>
           </a:ln>
-          <a:effectLst>
-            <a:outerShdw blurRad="88900" dist="44450" dir="5400000" rotWithShape="0">
-              <a:srgbClr val="1C3D5A">
-                <a:alpha val="20000"/>
-              </a:srgbClr>
-            </a:outerShdw>
-          </a:effectLst>
         </p:spPr>
         <p:style>
           <a:lnRef idx="1">
@@ -31455,7 +30559,6 @@
           <a:ln>
             <a:noFill/>
           </a:ln>
-          <a:effectLst/>
         </p:spPr>
         <p:style>
           <a:lnRef idx="1">
@@ -31589,7 +30692,6 @@
           <a:ln>
             <a:noFill/>
           </a:ln>
-          <a:effectLst/>
         </p:spPr>
         <p:style>
           <a:lnRef idx="1">
@@ -31725,13 +30827,6 @@
               <a:srgbClr val="D7E0E6"/>
             </a:solidFill>
           </a:ln>
-          <a:effectLst>
-            <a:outerShdw blurRad="88900" dist="44450" dir="5400000" rotWithShape="0">
-              <a:srgbClr val="1C3D5A">
-                <a:alpha val="20000"/>
-              </a:srgbClr>
-            </a:outerShdw>
-          </a:effectLst>
         </p:spPr>
         <p:style>
           <a:lnRef idx="1">
@@ -31775,7 +30870,6 @@
           <a:ln>
             <a:noFill/>
           </a:ln>
-          <a:effectLst/>
         </p:spPr>
         <p:style>
           <a:lnRef idx="1">
@@ -31909,7 +31003,6 @@
           <a:ln>
             <a:noFill/>
           </a:ln>
-          <a:effectLst/>
         </p:spPr>
         <p:style>
           <a:lnRef idx="1">
@@ -32045,13 +31138,6 @@
               <a:srgbClr val="D7E0E6"/>
             </a:solidFill>
           </a:ln>
-          <a:effectLst>
-            <a:outerShdw blurRad="88900" dist="44450" dir="5400000" rotWithShape="0">
-              <a:srgbClr val="1C3D5A">
-                <a:alpha val="20000"/>
-              </a:srgbClr>
-            </a:outerShdw>
-          </a:effectLst>
         </p:spPr>
         <p:style>
           <a:lnRef idx="1">
@@ -32095,7 +31181,6 @@
           <a:ln>
             <a:noFill/>
           </a:ln>
-          <a:effectLst/>
         </p:spPr>
         <p:style>
           <a:lnRef idx="1">
@@ -32229,7 +31314,6 @@
           <a:ln>
             <a:noFill/>
           </a:ln>
-          <a:effectLst/>
         </p:spPr>
         <p:style>
           <a:lnRef idx="1">
@@ -32474,7 +31558,6 @@
               <a:srgbClr val="C8922E"/>
             </a:solidFill>
           </a:ln>
-          <a:effectLst/>
         </p:spPr>
         <p:style>
           <a:lnRef idx="2">
@@ -32510,7 +31593,6 @@
               <a:srgbClr val="D7E0E6"/>
             </a:solidFill>
           </a:ln>
-          <a:effectLst/>
         </p:spPr>
         <p:style>
           <a:lnRef idx="2">
@@ -32639,13 +31721,6 @@
               <a:srgbClr val="D7E0E6"/>
             </a:solidFill>
           </a:ln>
-          <a:effectLst>
-            <a:outerShdw blurRad="88900" dist="44450" dir="5400000" rotWithShape="0">
-              <a:srgbClr val="1C3D5A">
-                <a:alpha val="20000"/>
-              </a:srgbClr>
-            </a:outerShdw>
-          </a:effectLst>
         </p:spPr>
         <p:style>
           <a:lnRef idx="1">
@@ -32825,13 +31900,6 @@
               <a:srgbClr val="D7E0E6"/>
             </a:solidFill>
           </a:ln>
-          <a:effectLst>
-            <a:outerShdw blurRad="88900" dist="44450" dir="5400000" rotWithShape="0">
-              <a:srgbClr val="1C3D5A">
-                <a:alpha val="20000"/>
-              </a:srgbClr>
-            </a:outerShdw>
-          </a:effectLst>
         </p:spPr>
         <p:style>
           <a:lnRef idx="1">
@@ -33011,13 +32079,6 @@
               <a:srgbClr val="D7E0E6"/>
             </a:solidFill>
           </a:ln>
-          <a:effectLst>
-            <a:outerShdw blurRad="88900" dist="44450" dir="5400000" rotWithShape="0">
-              <a:srgbClr val="1C3D5A">
-                <a:alpha val="20000"/>
-              </a:srgbClr>
-            </a:outerShdw>
-          </a:effectLst>
         </p:spPr>
         <p:style>
           <a:lnRef idx="1">
@@ -33197,13 +32258,6 @@
               <a:srgbClr val="D7E0E6"/>
             </a:solidFill>
           </a:ln>
-          <a:effectLst>
-            <a:outerShdw blurRad="88900" dist="44450" dir="5400000" rotWithShape="0">
-              <a:srgbClr val="1C3D5A">
-                <a:alpha val="20000"/>
-              </a:srgbClr>
-            </a:outerShdw>
-          </a:effectLst>
         </p:spPr>
         <p:style>
           <a:lnRef idx="1">
@@ -33383,13 +32437,6 @@
               <a:srgbClr val="D7E0E6"/>
             </a:solidFill>
           </a:ln>
-          <a:effectLst>
-            <a:outerShdw blurRad="88900" dist="44450" dir="5400000" rotWithShape="0">
-              <a:srgbClr val="1C3D5A">
-                <a:alpha val="20000"/>
-              </a:srgbClr>
-            </a:outerShdw>
-          </a:effectLst>
         </p:spPr>
         <p:style>
           <a:lnRef idx="1">
@@ -33569,13 +32616,6 @@
               <a:srgbClr val="D7E0E6"/>
             </a:solidFill>
           </a:ln>
-          <a:effectLst>
-            <a:outerShdw blurRad="88900" dist="44450" dir="5400000" rotWithShape="0">
-              <a:srgbClr val="1C3D5A">
-                <a:alpha val="20000"/>
-              </a:srgbClr>
-            </a:outerShdw>
-          </a:effectLst>
         </p:spPr>
         <p:style>
           <a:lnRef idx="1">
@@ -33755,13 +32795,6 @@
               <a:srgbClr val="D7E0E6"/>
             </a:solidFill>
           </a:ln>
-          <a:effectLst>
-            <a:outerShdw blurRad="88900" dist="44450" dir="5400000" rotWithShape="0">
-              <a:srgbClr val="1C3D5A">
-                <a:alpha val="20000"/>
-              </a:srgbClr>
-            </a:outerShdw>
-          </a:effectLst>
         </p:spPr>
         <p:style>
           <a:lnRef idx="1">
@@ -33941,13 +32974,6 @@
               <a:srgbClr val="D7E0E6"/>
             </a:solidFill>
           </a:ln>
-          <a:effectLst>
-            <a:outerShdw blurRad="88900" dist="44450" dir="5400000" rotWithShape="0">
-              <a:srgbClr val="1C3D5A">
-                <a:alpha val="20000"/>
-              </a:srgbClr>
-            </a:outerShdw>
-          </a:effectLst>
         </p:spPr>
         <p:style>
           <a:lnRef idx="1">
@@ -34127,13 +33153,6 @@
               <a:srgbClr val="D7E0E6"/>
             </a:solidFill>
           </a:ln>
-          <a:effectLst>
-            <a:outerShdw blurRad="88900" dist="44450" dir="5400000" rotWithShape="0">
-              <a:srgbClr val="1C3D5A">
-                <a:alpha val="20000"/>
-              </a:srgbClr>
-            </a:outerShdw>
-          </a:effectLst>
         </p:spPr>
         <p:style>
           <a:lnRef idx="1">
@@ -34335,7 +33354,6 @@
           <a:ln>
             <a:noFill/>
           </a:ln>
-          <a:effectLst/>
         </p:spPr>
         <p:style>
           <a:lnRef idx="1">
@@ -34554,7 +33572,6 @@
               <a:srgbClr val="C8922E"/>
             </a:solidFill>
           </a:ln>
-          <a:effectLst/>
         </p:spPr>
         <p:style>
           <a:lnRef idx="2">
@@ -34634,7 +33651,6 @@
               <a:srgbClr val="D7E0E6"/>
             </a:solidFill>
           </a:ln>
-          <a:effectLst/>
         </p:spPr>
         <p:style>
           <a:lnRef idx="2">
@@ -34853,7 +33869,6 @@
               <a:srgbClr val="D7E0E6"/>
             </a:solidFill>
           </a:ln>
-          <a:effectLst/>
         </p:spPr>
         <p:style>
           <a:lnRef idx="2">
@@ -35047,7 +34062,6 @@
               <a:srgbClr val="C8922E"/>
             </a:solidFill>
           </a:ln>
-          <a:effectLst/>
         </p:spPr>
         <p:style>
           <a:lnRef idx="2">
@@ -35083,7 +34097,6 @@
               <a:srgbClr val="D7E0E6"/>
             </a:solidFill>
           </a:ln>
-          <a:effectLst/>
         </p:spPr>
         <p:style>
           <a:lnRef idx="2">
@@ -35212,13 +34225,6 @@
               <a:srgbClr val="D7E0E6"/>
             </a:solidFill>
           </a:ln>
-          <a:effectLst>
-            <a:outerShdw blurRad="88900" dist="44450" dir="5400000" rotWithShape="0">
-              <a:srgbClr val="1C3D5A">
-                <a:alpha val="20000"/>
-              </a:srgbClr>
-            </a:outerShdw>
-          </a:effectLst>
         </p:spPr>
         <p:style>
           <a:lnRef idx="1">
@@ -35262,7 +34268,6 @@
           <a:ln>
             <a:noFill/>
           </a:ln>
-          <a:effectLst/>
         </p:spPr>
         <p:style>
           <a:lnRef idx="1">
@@ -35442,13 +34447,6 @@
               <a:srgbClr val="D7E0E6"/>
             </a:solidFill>
           </a:ln>
-          <a:effectLst>
-            <a:outerShdw blurRad="88900" dist="44450" dir="5400000" rotWithShape="0">
-              <a:srgbClr val="1C3D5A">
-                <a:alpha val="20000"/>
-              </a:srgbClr>
-            </a:outerShdw>
-          </a:effectLst>
         </p:spPr>
         <p:style>
           <a:lnRef idx="1">
@@ -35492,7 +34490,6 @@
           <a:ln>
             <a:noFill/>
           </a:ln>
-          <a:effectLst/>
         </p:spPr>
         <p:style>
           <a:lnRef idx="1">
@@ -35672,13 +34669,6 @@
               <a:srgbClr val="D7E0E6"/>
             </a:solidFill>
           </a:ln>
-          <a:effectLst>
-            <a:outerShdw blurRad="88900" dist="44450" dir="5400000" rotWithShape="0">
-              <a:srgbClr val="1C3D5A">
-                <a:alpha val="20000"/>
-              </a:srgbClr>
-            </a:outerShdw>
-          </a:effectLst>
         </p:spPr>
         <p:style>
           <a:lnRef idx="1">
@@ -35722,7 +34712,6 @@
           <a:ln>
             <a:noFill/>
           </a:ln>
-          <a:effectLst/>
         </p:spPr>
         <p:style>
           <a:lnRef idx="1">
@@ -35902,13 +34891,6 @@
               <a:srgbClr val="D7E0E6"/>
             </a:solidFill>
           </a:ln>
-          <a:effectLst>
-            <a:outerShdw blurRad="88900" dist="44450" dir="5400000" rotWithShape="0">
-              <a:srgbClr val="1C3D5A">
-                <a:alpha val="20000"/>
-              </a:srgbClr>
-            </a:outerShdw>
-          </a:effectLst>
         </p:spPr>
         <p:style>
           <a:lnRef idx="1">
@@ -35952,7 +34934,6 @@
           <a:ln>
             <a:noFill/>
           </a:ln>
-          <a:effectLst/>
         </p:spPr>
         <p:style>
           <a:lnRef idx="1">
@@ -36132,7 +35113,6 @@
               <a:srgbClr val="D7E0E6"/>
             </a:solidFill>
           </a:ln>
-          <a:effectLst/>
         </p:spPr>
         <p:style>
           <a:lnRef idx="1">
@@ -36398,7 +35378,6 @@
               <a:srgbClr val="C8922E"/>
             </a:solidFill>
           </a:ln>
-          <a:effectLst/>
         </p:spPr>
         <p:style>
           <a:lnRef idx="2">
@@ -36434,7 +35413,6 @@
               <a:srgbClr val="D7E0E6"/>
             </a:solidFill>
           </a:ln>
-          <a:effectLst/>
         </p:spPr>
         <p:style>
           <a:lnRef idx="2">
@@ -36566,13 +35544,6 @@
               <a:srgbClr val="C5D2DA"/>
             </a:solidFill>
           </a:ln>
-          <a:effectLst>
-            <a:outerShdw blurRad="114300" dist="50800" dir="5400000" rotWithShape="0">
-              <a:srgbClr val="1C3D5A">
-                <a:alpha val="16000"/>
-              </a:srgbClr>
-            </a:outerShdw>
-          </a:effectLst>
         </p:spPr>
       </p:pic>
       <p:sp>
@@ -36638,7 +35609,6 @@
               <a:srgbClr val="D7E0E6"/>
             </a:solidFill>
           </a:ln>
-          <a:effectLst/>
         </p:spPr>
         <p:style>
           <a:lnRef idx="2">
@@ -37035,7 +36005,6 @@
               <a:srgbClr val="C8922E"/>
             </a:solidFill>
           </a:ln>
-          <a:effectLst/>
         </p:spPr>
         <p:style>
           <a:lnRef idx="2">
@@ -37071,7 +36040,6 @@
               <a:srgbClr val="D7E0E6"/>
             </a:solidFill>
           </a:ln>
-          <a:effectLst/>
         </p:spPr>
         <p:style>
           <a:lnRef idx="2">
@@ -37203,13 +36171,6 @@
               <a:srgbClr val="C5D2DA"/>
             </a:solidFill>
           </a:ln>
-          <a:effectLst>
-            <a:outerShdw blurRad="114300" dist="50800" dir="5400000" rotWithShape="0">
-              <a:srgbClr val="1C3D5A">
-                <a:alpha val="16000"/>
-              </a:srgbClr>
-            </a:outerShdw>
-          </a:effectLst>
         </p:spPr>
       </p:pic>
       <p:sp>
@@ -37275,7 +36236,6 @@
               <a:srgbClr val="D7E0E6"/>
             </a:solidFill>
           </a:ln>
-          <a:effectLst/>
         </p:spPr>
         <p:style>
           <a:lnRef idx="2">
@@ -37672,7 +36632,6 @@
               <a:srgbClr val="C8922E"/>
             </a:solidFill>
           </a:ln>
-          <a:effectLst/>
         </p:spPr>
         <p:style>
           <a:lnRef idx="2">
@@ -37708,7 +36667,6 @@
               <a:srgbClr val="D7E0E6"/>
             </a:solidFill>
           </a:ln>
-          <a:effectLst/>
         </p:spPr>
         <p:style>
           <a:lnRef idx="2">
@@ -37840,13 +36798,6 @@
               <a:srgbClr val="C5D2DA"/>
             </a:solidFill>
           </a:ln>
-          <a:effectLst>
-            <a:outerShdw blurRad="114300" dist="50800" dir="5400000" rotWithShape="0">
-              <a:srgbClr val="1C3D5A">
-                <a:alpha val="16000"/>
-              </a:srgbClr>
-            </a:outerShdw>
-          </a:effectLst>
         </p:spPr>
       </p:pic>
       <p:sp>
@@ -37912,7 +36863,6 @@
               <a:srgbClr val="D7E0E6"/>
             </a:solidFill>
           </a:ln>
-          <a:effectLst/>
         </p:spPr>
         <p:style>
           <a:lnRef idx="2">
@@ -38309,7 +37259,6 @@
               <a:srgbClr val="C8922E"/>
             </a:solidFill>
           </a:ln>
-          <a:effectLst/>
         </p:spPr>
         <p:style>
           <a:lnRef idx="2">
@@ -38345,7 +37294,6 @@
               <a:srgbClr val="D7E0E6"/>
             </a:solidFill>
           </a:ln>
-          <a:effectLst/>
         </p:spPr>
         <p:style>
           <a:lnRef idx="2">
@@ -38477,13 +37425,6 @@
               <a:srgbClr val="C5D2DA"/>
             </a:solidFill>
           </a:ln>
-          <a:effectLst>
-            <a:outerShdw blurRad="114300" dist="50800" dir="5400000" rotWithShape="0">
-              <a:srgbClr val="1C3D5A">
-                <a:alpha val="16000"/>
-              </a:srgbClr>
-            </a:outerShdw>
-          </a:effectLst>
         </p:spPr>
       </p:pic>
       <p:sp>
@@ -38549,7 +37490,6 @@
               <a:srgbClr val="D7E0E6"/>
             </a:solidFill>
           </a:ln>
-          <a:effectLst/>
         </p:spPr>
         <p:style>
           <a:lnRef idx="2">
@@ -38891,7 +37831,6 @@
           <a:ln>
             <a:noFill/>
           </a:ln>
-          <a:effectLst/>
         </p:spPr>
         <p:style>
           <a:lnRef idx="1">
@@ -39110,7 +38049,6 @@
               <a:srgbClr val="C8922E"/>
             </a:solidFill>
           </a:ln>
-          <a:effectLst/>
         </p:spPr>
         <p:style>
           <a:lnRef idx="2">
@@ -39190,7 +38128,6 @@
               <a:srgbClr val="D7E0E6"/>
             </a:solidFill>
           </a:ln>
-          <a:effectLst/>
         </p:spPr>
         <p:style>
           <a:lnRef idx="2">
@@ -39377,7 +38314,6 @@
               <a:srgbClr val="D7E0E6"/>
             </a:solidFill>
           </a:ln>
-          <a:effectLst/>
         </p:spPr>
         <p:style>
           <a:lnRef idx="2">
@@ -39571,7 +38507,6 @@
               <a:srgbClr val="C8922E"/>
             </a:solidFill>
           </a:ln>
-          <a:effectLst/>
         </p:spPr>
         <p:style>
           <a:lnRef idx="2">
@@ -39607,7 +38542,6 @@
               <a:srgbClr val="D7E0E6"/>
             </a:solidFill>
           </a:ln>
-          <a:effectLst/>
         </p:spPr>
         <p:style>
           <a:lnRef idx="2">
@@ -39739,13 +38673,6 @@
               <a:srgbClr val="C5D2DA"/>
             </a:solidFill>
           </a:ln>
-          <a:effectLst>
-            <a:outerShdw blurRad="114300" dist="50800" dir="5400000" rotWithShape="0">
-              <a:srgbClr val="1C3D5A">
-                <a:alpha val="16000"/>
-              </a:srgbClr>
-            </a:outerShdw>
-          </a:effectLst>
         </p:spPr>
       </p:pic>
       <p:pic>
@@ -39775,13 +38702,6 @@
               <a:srgbClr val="C5D2DA"/>
             </a:solidFill>
           </a:ln>
-          <a:effectLst>
-            <a:outerShdw blurRad="114300" dist="50800" dir="5400000" rotWithShape="0">
-              <a:srgbClr val="1C3D5A">
-                <a:alpha val="16000"/>
-              </a:srgbClr>
-            </a:outerShdw>
-          </a:effectLst>
         </p:spPr>
       </p:pic>
       <p:sp>
@@ -39847,7 +38767,6 @@
               <a:srgbClr val="D7E0E6"/>
             </a:solidFill>
           </a:ln>
-          <a:effectLst/>
         </p:spPr>
         <p:style>
           <a:lnRef idx="2">
@@ -39946,7 +38865,7 @@
                 <a:ea typeface="Microsoft JhengHei"/>
                 <a:cs typeface="Microsoft JhengHei"/>
               </a:rPr>
-              <a:t>numpy.polyfit 一階</a:t>
+              <a:t>依趨勢線性延伸預測</a:t>
             </a:r>
           </a:p>
           <a:p>
@@ -39978,7 +38897,7 @@
                 <a:ea typeface="Microsoft JhengHei"/>
                 <a:cs typeface="Microsoft JhengHei"/>
               </a:rPr>
-              <a:t>殘差標準差 ×1.96 估 95% 區間</a:t>
+              <a:t>含 95% 信賴區間帶</a:t>
             </a:r>
           </a:p>
           <a:p>
@@ -40042,7 +38961,7 @@
                 <a:ea typeface="Microsoft JhengHei"/>
                 <a:cs typeface="Microsoft JhengHei"/>
               </a:rPr>
-              <a:t>純 NumPy 實作 Level + Trend</a:t>
+              <a:t>同時追蹤水準 + 趨勢分量</a:t>
             </a:r>
           </a:p>
           <a:p>
@@ -40074,7 +38993,7 @@
                 <a:ea typeface="Microsoft JhengHei"/>
                 <a:cs typeface="Microsoft JhengHei"/>
               </a:rPr>
-              <a:t>格點搜尋 α∈[0.1,1)、β∈[0.05,0.55)</a:t>
+              <a:t>以純 NumPy 自行實作</a:t>
             </a:r>
           </a:p>
           <a:p>
@@ -40106,7 +39025,7 @@
                 <a:ea typeface="Microsoft JhengHei"/>
                 <a:cs typeface="Microsoft JhengHei"/>
               </a:rPr>
-              <a:t>評估準則：一步預測 SSE</a:t>
+              <a:t>對近期資料給予更高權重</a:t>
             </a:r>
           </a:p>
           <a:p>
@@ -40119,26 +39038,26 @@
               </a:spcAft>
             </a:pPr>
             <a:r>
-              <a:rPr sz="1100" b="1" i="0">
-                <a:solidFill>
-                  <a:srgbClr val="BC5B41"/>
-                </a:solidFill>
-                <a:latin typeface="Microsoft JhengHei"/>
-                <a:ea typeface="Microsoft JhengHei"/>
-                <a:cs typeface="Microsoft JhengHei"/>
-              </a:rPr>
-              <a:t>!  </a:t>
-            </a:r>
-            <a:r>
-              <a:rPr sz="1100" b="0" i="0">
-                <a:solidFill>
-                  <a:srgbClr val="BC5B41"/>
-                </a:solidFill>
-                <a:latin typeface="Microsoft JhengHei"/>
-                <a:ea typeface="Microsoft JhengHei"/>
-                <a:cs typeface="Microsoft JhengHei"/>
-              </a:rPr>
-              <a:t>注意：Holt 一步 SSE ≠ 線性全期 SSE</a:t>
+              <a:rPr sz="1300" b="1" i="0">
+                <a:solidFill>
+                  <a:srgbClr val="4E8C8A"/>
+                </a:solidFill>
+                <a:latin typeface="Microsoft JhengHei"/>
+                <a:ea typeface="Microsoft JhengHei"/>
+                <a:cs typeface="Microsoft JhengHei"/>
+              </a:rPr>
+              <a:t>▪  </a:t>
+            </a:r>
+            <a:r>
+              <a:rPr sz="1300" b="1" i="0">
+                <a:solidFill>
+                  <a:srgbClr val="4E8C8A"/>
+                </a:solidFill>
+                <a:latin typeface="Microsoft JhengHei"/>
+                <a:ea typeface="Microsoft JhengHei"/>
+                <a:cs typeface="Microsoft JhengHei"/>
+              </a:rPr>
+              <a:t>兩模型並排</a:t>
             </a:r>
           </a:p>
           <a:p>
@@ -40170,7 +39089,39 @@
                 <a:ea typeface="Microsoft JhengHei"/>
                 <a:cs typeface="Microsoft JhengHei"/>
               </a:rPr>
-              <a:t>不同統計量，不可直接比大小</a:t>
+              <a:t>比較預測差異，增加可信度</a:t>
+            </a:r>
+          </a:p>
+          <a:p>
+            <a:pPr algn="l">
+              <a:lnSpc>
+                <a:spcPct val="112000"/>
+              </a:lnSpc>
+              <a:spcAft>
+                <a:spcPts val="600"/>
+              </a:spcAft>
+            </a:pPr>
+            <a:r>
+              <a:rPr sz="1050" b="1" i="0">
+                <a:solidFill>
+                  <a:srgbClr val="C5D2DA"/>
+                </a:solidFill>
+                <a:latin typeface="Microsoft JhengHei"/>
+                <a:ea typeface="Microsoft JhengHei"/>
+                <a:cs typeface="Microsoft JhengHei"/>
+              </a:rPr>
+              <a:t>–  </a:t>
+            </a:r>
+            <a:r>
+              <a:rPr sz="1050" b="0" i="0">
+                <a:solidFill>
+                  <a:srgbClr val="7C8B97"/>
+                </a:solidFill>
+                <a:latin typeface="Microsoft JhengHei"/>
+                <a:ea typeface="Microsoft JhengHei"/>
+                <a:cs typeface="Microsoft JhengHei"/>
+              </a:rPr>
+              <a:t>趨勢方向一致即為穩健預測</a:t>
             </a:r>
           </a:p>
         </p:txBody>
@@ -40308,7 +39259,6 @@
               <a:srgbClr val="C8922E"/>
             </a:solidFill>
           </a:ln>
-          <a:effectLst/>
         </p:spPr>
         <p:style>
           <a:lnRef idx="2">
@@ -40344,7 +39294,6 @@
               <a:srgbClr val="D7E0E6"/>
             </a:solidFill>
           </a:ln>
-          <a:effectLst/>
         </p:spPr>
         <p:style>
           <a:lnRef idx="2">
@@ -40476,13 +39425,6 @@
               <a:srgbClr val="C5D2DA"/>
             </a:solidFill>
           </a:ln>
-          <a:effectLst>
-            <a:outerShdw blurRad="114300" dist="50800" dir="5400000" rotWithShape="0">
-              <a:srgbClr val="1C3D5A">
-                <a:alpha val="16000"/>
-              </a:srgbClr>
-            </a:outerShdw>
-          </a:effectLst>
         </p:spPr>
       </p:pic>
       <p:sp>
@@ -40548,7 +39490,6 @@
               <a:srgbClr val="D7E0E6"/>
             </a:solidFill>
           </a:ln>
-          <a:effectLst/>
         </p:spPr>
         <p:style>
           <a:lnRef idx="2">
@@ -41041,7 +39982,6 @@
               <a:srgbClr val="C8922E"/>
             </a:solidFill>
           </a:ln>
-          <a:effectLst/>
         </p:spPr>
         <p:style>
           <a:lnRef idx="2">
@@ -41077,7 +40017,6 @@
               <a:srgbClr val="D7E0E6"/>
             </a:solidFill>
           </a:ln>
-          <a:effectLst/>
         </p:spPr>
         <p:style>
           <a:lnRef idx="2">
@@ -41209,13 +40148,6 @@
               <a:srgbClr val="C5D2DA"/>
             </a:solidFill>
           </a:ln>
-          <a:effectLst>
-            <a:outerShdw blurRad="114300" dist="50800" dir="5400000" rotWithShape="0">
-              <a:srgbClr val="1C3D5A">
-                <a:alpha val="16000"/>
-              </a:srgbClr>
-            </a:outerShdw>
-          </a:effectLst>
         </p:spPr>
       </p:pic>
       <p:sp>
@@ -41240,7 +40172,6 @@
           <a:ln>
             <a:noFill/>
           </a:ln>
-          <a:effectLst/>
         </p:spPr>
         <p:style>
           <a:lnRef idx="1">
@@ -41284,7 +40215,6 @@
           <a:ln>
             <a:noFill/>
           </a:ln>
-          <a:effectLst/>
         </p:spPr>
         <p:style>
           <a:lnRef idx="1">
@@ -41442,7 +40372,6 @@
           <a:ln>
             <a:noFill/>
           </a:ln>
-          <a:effectLst/>
         </p:spPr>
         <p:style>
           <a:lnRef idx="1">
@@ -41661,7 +40590,6 @@
               <a:srgbClr val="C8922E"/>
             </a:solidFill>
           </a:ln>
-          <a:effectLst/>
         </p:spPr>
         <p:style>
           <a:lnRef idx="2">
@@ -41741,7 +40669,6 @@
               <a:srgbClr val="D7E0E6"/>
             </a:solidFill>
           </a:ln>
-          <a:effectLst/>
         </p:spPr>
         <p:style>
           <a:lnRef idx="2">
@@ -41928,7 +40855,6 @@
               <a:srgbClr val="D7E0E6"/>
             </a:solidFill>
           </a:ln>
-          <a:effectLst/>
         </p:spPr>
         <p:style>
           <a:lnRef idx="2">
@@ -42098,7 +41024,7 @@
                 <a:ea typeface="Microsoft JhengHei"/>
                 <a:cs typeface="Microsoft JhengHei"/>
               </a:rPr>
-              <a:t>5 維聯合偵測：找出 Z-score 看不到的情境異常</a:t>
+              <a:t>單維 Z-score + 五維 Isolation Forest 互補偵測</a:t>
             </a:r>
           </a:p>
         </p:txBody>
@@ -42122,7 +41048,6 @@
               <a:srgbClr val="C8922E"/>
             </a:solidFill>
           </a:ln>
-          <a:effectLst/>
         </p:spPr>
         <p:style>
           <a:lnRef idx="2">
@@ -42158,7 +41083,6 @@
               <a:srgbClr val="D7E0E6"/>
             </a:solidFill>
           </a:ln>
-          <a:effectLst/>
         </p:spPr>
         <p:style>
           <a:lnRef idx="2">
@@ -42290,13 +41214,6 @@
               <a:srgbClr val="C5D2DA"/>
             </a:solidFill>
           </a:ln>
-          <a:effectLst>
-            <a:outerShdw blurRad="114300" dist="50800" dir="5400000" rotWithShape="0">
-              <a:srgbClr val="1C3D5A">
-                <a:alpha val="16000"/>
-              </a:srgbClr>
-            </a:outerShdw>
-          </a:effectLst>
         </p:spPr>
       </p:pic>
       <p:sp>
@@ -42362,7 +41279,6 @@
               <a:srgbClr val="D7E0E6"/>
             </a:solidFill>
           </a:ln>
-          <a:effectLst/>
         </p:spPr>
         <p:style>
           <a:lnRef idx="2">
@@ -42429,7 +41345,7 @@
                 <a:ea typeface="Microsoft JhengHei"/>
                 <a:cs typeface="Microsoft JhengHei"/>
               </a:rPr>
-              <a:t>Z-score（1 維工時）</a:t>
+              <a:t>Z-score（工時單維）</a:t>
             </a:r>
           </a:p>
           <a:p>
@@ -42461,7 +41377,7 @@
                 <a:ea typeface="Microsoft JhengHei"/>
                 <a:cs typeface="Microsoft JhengHei"/>
               </a:rPr>
-              <a:t>偵測 ±2σ 工時 → 56 筆（4.7%）</a:t>
+              <a:t>工時超出 ±2σ 範圍</a:t>
             </a:r>
           </a:p>
           <a:p>
@@ -42474,6 +41390,38 @@
               </a:spcAft>
             </a:pPr>
             <a:r>
+              <a:rPr sz="1050" b="1" i="0">
+                <a:solidFill>
+                  <a:srgbClr val="C5D2DA"/>
+                </a:solidFill>
+                <a:latin typeface="Microsoft JhengHei"/>
+                <a:ea typeface="Microsoft JhengHei"/>
+                <a:cs typeface="Microsoft JhengHei"/>
+              </a:rPr>
+              <a:t>–  </a:t>
+            </a:r>
+            <a:r>
+              <a:rPr sz="1050" b="0" i="0">
+                <a:solidFill>
+                  <a:srgbClr val="7C8B97"/>
+                </a:solidFill>
+                <a:latin typeface="Microsoft JhengHei"/>
+                <a:ea typeface="Microsoft JhengHei"/>
+                <a:cs typeface="Microsoft JhengHei"/>
+              </a:rPr>
+              <a:t>識別工時過長 / 過短的紀錄</a:t>
+            </a:r>
+          </a:p>
+          <a:p>
+            <a:pPr algn="l">
+              <a:lnSpc>
+                <a:spcPct val="112000"/>
+              </a:lnSpc>
+              <a:spcAft>
+                <a:spcPts val="600"/>
+              </a:spcAft>
+            </a:pPr>
+            <a:r>
               <a:rPr sz="1300" b="1" i="0">
                 <a:solidFill>
                   <a:srgbClr val="C8922E"/>
@@ -42493,7 +41441,7 @@
                 <a:ea typeface="Microsoft JhengHei"/>
                 <a:cs typeface="Microsoft JhengHei"/>
               </a:rPr>
-              <a:t>Isolation Forest（5 維）</a:t>
+              <a:t>Isolation Forest（五維聯合）</a:t>
             </a:r>
           </a:p>
           <a:p>
@@ -42525,7 +41473,7 @@
                 <a:ea typeface="Microsoft JhengHei"/>
                 <a:cs typeface="Microsoft JhengHei"/>
               </a:rPr>
-              <a:t>工時/海況/海域/打卡時刻/星期</a:t>
+              <a:t>同時考慮工時、海況、海域、</a:t>
             </a:r>
           </a:p>
           <a:p>
@@ -42538,6 +41486,38 @@
               </a:spcAft>
             </a:pPr>
             <a:r>
+              <a:rPr sz="1200" b="1" i="0">
+                <a:solidFill>
+                  <a:srgbClr val="C8922E"/>
+                </a:solidFill>
+                <a:latin typeface="Microsoft JhengHei"/>
+                <a:ea typeface="Microsoft JhengHei"/>
+                <a:cs typeface="Microsoft JhengHei"/>
+              </a:rPr>
+              <a:t>▪  </a:t>
+            </a:r>
+            <a:r>
+              <a:rPr sz="1200" b="0" i="0">
+                <a:solidFill>
+                  <a:srgbClr val="3D4D5A"/>
+                </a:solidFill>
+                <a:latin typeface="Microsoft JhengHei"/>
+                <a:ea typeface="Microsoft JhengHei"/>
+                <a:cs typeface="Microsoft JhengHei"/>
+              </a:rPr>
+              <a:t>  打卡時刻、星期五個維度</a:t>
+            </a:r>
+          </a:p>
+          <a:p>
+            <a:pPr algn="l">
+              <a:lnSpc>
+                <a:spcPct val="112000"/>
+              </a:lnSpc>
+              <a:spcAft>
+                <a:spcPts val="600"/>
+              </a:spcAft>
+            </a:pPr>
+            <a:r>
               <a:rPr sz="1050" b="1" i="0">
                 <a:solidFill>
                   <a:srgbClr val="C5D2DA"/>
@@ -42557,7 +41537,7 @@
                 <a:ea typeface="Microsoft JhengHei"/>
                 <a:cs typeface="Microsoft JhengHei"/>
               </a:rPr>
-              <a:t>contamination = 5% → 60 筆</a:t>
+              <a:t>偵測「情境型異常」</a:t>
             </a:r>
           </a:p>
           <a:p>
@@ -42570,6 +41550,38 @@
               </a:spcAft>
             </a:pPr>
             <a:r>
+              <a:rPr sz="1300" b="1" i="0">
+                <a:solidFill>
+                  <a:srgbClr val="4E8C8A"/>
+                </a:solidFill>
+                <a:latin typeface="Microsoft JhengHei"/>
+                <a:ea typeface="Microsoft JhengHei"/>
+                <a:cs typeface="Microsoft JhengHei"/>
+              </a:rPr>
+              <a:t>▪  </a:t>
+            </a:r>
+            <a:r>
+              <a:rPr sz="1300" b="1" i="0">
+                <a:solidFill>
+                  <a:srgbClr val="4E8C8A"/>
+                </a:solidFill>
+                <a:latin typeface="Microsoft JhengHei"/>
+                <a:ea typeface="Microsoft JhengHei"/>
+                <a:cs typeface="Microsoft JhengHei"/>
+              </a:rPr>
+              <a:t>互補效果</a:t>
+            </a:r>
+          </a:p>
+          <a:p>
+            <a:pPr algn="l">
+              <a:lnSpc>
+                <a:spcPct val="112000"/>
+              </a:lnSpc>
+              <a:spcAft>
+                <a:spcPts val="600"/>
+              </a:spcAft>
+            </a:pPr>
+            <a:r>
               <a:rPr sz="1050" b="1" i="0">
                 <a:solidFill>
                   <a:srgbClr val="C5D2DA"/>
@@ -42589,7 +41601,7 @@
                 <a:ea typeface="Microsoft JhengHei"/>
                 <a:cs typeface="Microsoft JhengHei"/>
               </a:rPr>
-              <a:t>與 Z-score 重疊 31 筆</a:t>
+              <a:t>兩法聯用：工時正常但情境異常</a:t>
             </a:r>
           </a:p>
           <a:p>
@@ -42602,38 +41614,6 @@
               </a:spcAft>
             </a:pPr>
             <a:r>
-              <a:rPr sz="1300" b="1" i="0">
-                <a:solidFill>
-                  <a:srgbClr val="BC5B41"/>
-                </a:solidFill>
-                <a:latin typeface="Microsoft JhengHei"/>
-                <a:ea typeface="Microsoft JhengHei"/>
-                <a:cs typeface="Microsoft JhengHei"/>
-              </a:rPr>
-              <a:t>▪  </a:t>
-            </a:r>
-            <a:r>
-              <a:rPr sz="1300" b="1" i="0">
-                <a:solidFill>
-                  <a:srgbClr val="BC5B41"/>
-                </a:solidFill>
-                <a:latin typeface="Microsoft JhengHei"/>
-                <a:ea typeface="Microsoft JhengHei"/>
-                <a:cs typeface="Microsoft JhengHei"/>
-              </a:rPr>
-              <a:t>其餘 29 筆</a:t>
-            </a:r>
-          </a:p>
-          <a:p>
-            <a:pPr algn="l">
-              <a:lnSpc>
-                <a:spcPct val="112000"/>
-              </a:lnSpc>
-              <a:spcAft>
-                <a:spcPts val="600"/>
-              </a:spcAft>
-            </a:pPr>
-            <a:r>
               <a:rPr sz="1050" b="1" i="0">
                 <a:solidFill>
                   <a:srgbClr val="C5D2DA"/>
@@ -42653,39 +41633,7 @@
                 <a:ea typeface="Microsoft JhengHei"/>
                 <a:cs typeface="Microsoft JhengHei"/>
               </a:rPr>
-              <a:t>單維正常、多維異常</a:t>
-            </a:r>
-          </a:p>
-          <a:p>
-            <a:pPr algn="l">
-              <a:lnSpc>
-                <a:spcPct val="112000"/>
-              </a:lnSpc>
-              <a:spcAft>
-                <a:spcPts val="600"/>
-              </a:spcAft>
-            </a:pPr>
-            <a:r>
-              <a:rPr sz="1050" b="1" i="0">
-                <a:solidFill>
-                  <a:srgbClr val="C5D2DA"/>
-                </a:solidFill>
-                <a:latin typeface="Microsoft JhengHei"/>
-                <a:ea typeface="Microsoft JhengHei"/>
-                <a:cs typeface="Microsoft JhengHei"/>
-              </a:rPr>
-              <a:t>–  </a:t>
-            </a:r>
-            <a:r>
-              <a:rPr sz="1050" b="0" i="0">
-                <a:solidFill>
-                  <a:srgbClr val="7C8B97"/>
-                </a:solidFill>
-                <a:latin typeface="Microsoft JhengHei"/>
-                <a:ea typeface="Microsoft JhengHei"/>
-                <a:cs typeface="Microsoft JhengHei"/>
-              </a:rPr>
-              <a:t>Z-score 完全看不到的盲區</a:t>
+              <a:t>的紀錄，Z-score 看不到</a:t>
             </a:r>
           </a:p>
         </p:txBody>
@@ -42736,7 +41684,6 @@
           <a:ln>
             <a:noFill/>
           </a:ln>
-          <a:effectLst/>
         </p:spPr>
         <p:style>
           <a:lnRef idx="1">
@@ -42955,7 +41902,6 @@
               <a:srgbClr val="C8922E"/>
             </a:solidFill>
           </a:ln>
-          <a:effectLst/>
         </p:spPr>
         <p:style>
           <a:lnRef idx="2">
@@ -43035,7 +41981,6 @@
               <a:srgbClr val="D7E0E6"/>
             </a:solidFill>
           </a:ln>
-          <a:effectLst/>
         </p:spPr>
         <p:style>
           <a:lnRef idx="2">
@@ -43222,7 +42167,6 @@
               <a:srgbClr val="D7E0E6"/>
             </a:solidFill>
           </a:ln>
-          <a:effectLst/>
         </p:spPr>
         <p:style>
           <a:lnRef idx="2">
@@ -43416,7 +42360,6 @@
               <a:srgbClr val="C8922E"/>
             </a:solidFill>
           </a:ln>
-          <a:effectLst/>
         </p:spPr>
         <p:style>
           <a:lnRef idx="2">
@@ -43452,7 +42395,6 @@
               <a:srgbClr val="D7E0E6"/>
             </a:solidFill>
           </a:ln>
-          <a:effectLst/>
         </p:spPr>
         <p:style>
           <a:lnRef idx="2">
@@ -43584,13 +42526,6 @@
               <a:srgbClr val="C5D2DA"/>
             </a:solidFill>
           </a:ln>
-          <a:effectLst>
-            <a:outerShdw blurRad="114300" dist="50800" dir="5400000" rotWithShape="0">
-              <a:srgbClr val="1C3D5A">
-                <a:alpha val="16000"/>
-              </a:srgbClr>
-            </a:outerShdw>
-          </a:effectLst>
         </p:spPr>
       </p:pic>
       <p:sp>
@@ -43656,7 +42591,6 @@
               <a:srgbClr val="D7E0E6"/>
             </a:solidFill>
           </a:ln>
-          <a:effectLst/>
         </p:spPr>
         <p:style>
           <a:lnRef idx="2">
@@ -44117,7 +43051,6 @@
               <a:srgbClr val="C8922E"/>
             </a:solidFill>
           </a:ln>
-          <a:effectLst/>
         </p:spPr>
         <p:style>
           <a:lnRef idx="2">
@@ -44153,7 +43086,6 @@
               <a:srgbClr val="D7E0E6"/>
             </a:solidFill>
           </a:ln>
-          <a:effectLst/>
         </p:spPr>
         <p:style>
           <a:lnRef idx="2">
@@ -44285,13 +43217,6 @@
               <a:srgbClr val="C5D2DA"/>
             </a:solidFill>
           </a:ln>
-          <a:effectLst>
-            <a:outerShdw blurRad="114300" dist="50800" dir="5400000" rotWithShape="0">
-              <a:srgbClr val="1C3D5A">
-                <a:alpha val="16000"/>
-              </a:srgbClr>
-            </a:outerShdw>
-          </a:effectLst>
         </p:spPr>
       </p:pic>
       <p:sp>
@@ -44357,7 +43282,6 @@
               <a:srgbClr val="D7E0E6"/>
             </a:solidFill>
           </a:ln>
-          <a:effectLst/>
         </p:spPr>
         <p:style>
           <a:lnRef idx="2">
@@ -44818,7 +43742,6 @@
               <a:srgbClr val="C8922E"/>
             </a:solidFill>
           </a:ln>
-          <a:effectLst/>
         </p:spPr>
         <p:style>
           <a:lnRef idx="2">
@@ -44854,7 +43777,6 @@
               <a:srgbClr val="D7E0E6"/>
             </a:solidFill>
           </a:ln>
-          <a:effectLst/>
         </p:spPr>
         <p:style>
           <a:lnRef idx="2">
@@ -44986,13 +43908,6 @@
               <a:srgbClr val="C5D2DA"/>
             </a:solidFill>
           </a:ln>
-          <a:effectLst>
-            <a:outerShdw blurRad="114300" dist="50800" dir="5400000" rotWithShape="0">
-              <a:srgbClr val="1C3D5A">
-                <a:alpha val="16000"/>
-              </a:srgbClr>
-            </a:outerShdw>
-          </a:effectLst>
         </p:spPr>
       </p:pic>
       <p:sp>
@@ -45058,7 +43973,6 @@
               <a:srgbClr val="D7E0E6"/>
             </a:solidFill>
           </a:ln>
-          <a:effectLst/>
         </p:spPr>
         <p:style>
           <a:lnRef idx="2">
@@ -45423,7 +44337,6 @@
               <a:srgbClr val="C8922E"/>
             </a:solidFill>
           </a:ln>
-          <a:effectLst/>
         </p:spPr>
         <p:style>
           <a:lnRef idx="2">
@@ -45459,7 +44372,6 @@
               <a:srgbClr val="D7E0E6"/>
             </a:solidFill>
           </a:ln>
-          <a:effectLst/>
         </p:spPr>
         <p:style>
           <a:lnRef idx="2">
@@ -45591,13 +44503,6 @@
               <a:srgbClr val="C5D2DA"/>
             </a:solidFill>
           </a:ln>
-          <a:effectLst>
-            <a:outerShdw blurRad="114300" dist="50800" dir="5400000" rotWithShape="0">
-              <a:srgbClr val="1C3D5A">
-                <a:alpha val="16000"/>
-              </a:srgbClr>
-            </a:outerShdw>
-          </a:effectLst>
         </p:spPr>
       </p:pic>
       <p:sp>
@@ -45663,7 +44568,6 @@
               <a:srgbClr val="D7E0E6"/>
             </a:solidFill>
           </a:ln>
-          <a:effectLst/>
         </p:spPr>
         <p:style>
           <a:lnRef idx="2">
@@ -46005,7 +44909,6 @@
           <a:ln>
             <a:noFill/>
           </a:ln>
-          <a:effectLst/>
         </p:spPr>
         <p:style>
           <a:lnRef idx="1">
@@ -46224,7 +45127,6 @@
               <a:srgbClr val="C8922E"/>
             </a:solidFill>
           </a:ln>
-          <a:effectLst/>
         </p:spPr>
         <p:style>
           <a:lnRef idx="2">
@@ -46304,7 +45206,6 @@
               <a:srgbClr val="D7E0E6"/>
             </a:solidFill>
           </a:ln>
-          <a:effectLst/>
         </p:spPr>
         <p:style>
           <a:lnRef idx="2">
@@ -46491,7 +45392,6 @@
               <a:srgbClr val="D7E0E6"/>
             </a:solidFill>
           </a:ln>
-          <a:effectLst/>
         </p:spPr>
         <p:style>
           <a:lnRef idx="2">
@@ -46685,7 +45585,6 @@
               <a:srgbClr val="C8922E"/>
             </a:solidFill>
           </a:ln>
-          <a:effectLst/>
         </p:spPr>
         <p:style>
           <a:lnRef idx="2">
@@ -46721,7 +45620,6 @@
               <a:srgbClr val="D7E0E6"/>
             </a:solidFill>
           </a:ln>
-          <a:effectLst/>
         </p:spPr>
         <p:style>
           <a:lnRef idx="2">
@@ -46850,13 +45748,6 @@
               <a:srgbClr val="D7E0E6"/>
             </a:solidFill>
           </a:ln>
-          <a:effectLst>
-            <a:outerShdw blurRad="88900" dist="44450" dir="5400000" rotWithShape="0">
-              <a:srgbClr val="1C3D5A">
-                <a:alpha val="20000"/>
-              </a:srgbClr>
-            </a:outerShdw>
-          </a:effectLst>
         </p:spPr>
         <p:style>
           <a:lnRef idx="1">
@@ -46900,7 +45791,6 @@
           <a:ln>
             <a:noFill/>
           </a:ln>
-          <a:effectLst/>
         </p:spPr>
         <p:style>
           <a:lnRef idx="1">
@@ -47036,13 +45926,6 @@
               <a:srgbClr val="D7E0E6"/>
             </a:solidFill>
           </a:ln>
-          <a:effectLst>
-            <a:outerShdw blurRad="88900" dist="44450" dir="5400000" rotWithShape="0">
-              <a:srgbClr val="1C3D5A">
-                <a:alpha val="20000"/>
-              </a:srgbClr>
-            </a:outerShdw>
-          </a:effectLst>
         </p:spPr>
         <p:style>
           <a:lnRef idx="1">
@@ -47086,7 +45969,6 @@
           <a:ln>
             <a:noFill/>
           </a:ln>
-          <a:effectLst/>
         </p:spPr>
         <p:style>
           <a:lnRef idx="1">
@@ -47222,13 +46104,6 @@
               <a:srgbClr val="D7E0E6"/>
             </a:solidFill>
           </a:ln>
-          <a:effectLst>
-            <a:outerShdw blurRad="88900" dist="44450" dir="5400000" rotWithShape="0">
-              <a:srgbClr val="1C3D5A">
-                <a:alpha val="20000"/>
-              </a:srgbClr>
-            </a:outerShdw>
-          </a:effectLst>
         </p:spPr>
         <p:style>
           <a:lnRef idx="1">
@@ -47272,7 +46147,6 @@
           <a:ln>
             <a:noFill/>
           </a:ln>
-          <a:effectLst/>
         </p:spPr>
         <p:style>
           <a:lnRef idx="1">
@@ -47408,13 +46282,6 @@
               <a:srgbClr val="D7E0E6"/>
             </a:solidFill>
           </a:ln>
-          <a:effectLst>
-            <a:outerShdw blurRad="88900" dist="44450" dir="5400000" rotWithShape="0">
-              <a:srgbClr val="1C3D5A">
-                <a:alpha val="20000"/>
-              </a:srgbClr>
-            </a:outerShdw>
-          </a:effectLst>
         </p:spPr>
         <p:style>
           <a:lnRef idx="1">
@@ -47458,7 +46325,6 @@
           <a:ln>
             <a:noFill/>
           </a:ln>
-          <a:effectLst/>
         </p:spPr>
         <p:style>
           <a:lnRef idx="1">
@@ -47594,13 +46460,6 @@
               <a:srgbClr val="D7E0E6"/>
             </a:solidFill>
           </a:ln>
-          <a:effectLst>
-            <a:outerShdw blurRad="88900" dist="44450" dir="5400000" rotWithShape="0">
-              <a:srgbClr val="1C3D5A">
-                <a:alpha val="20000"/>
-              </a:srgbClr>
-            </a:outerShdw>
-          </a:effectLst>
         </p:spPr>
         <p:style>
           <a:lnRef idx="1">
@@ -47644,7 +46503,6 @@
           <a:ln>
             <a:noFill/>
           </a:ln>
-          <a:effectLst/>
         </p:spPr>
         <p:style>
           <a:lnRef idx="1">
@@ -47780,13 +46638,6 @@
               <a:srgbClr val="D7E0E6"/>
             </a:solidFill>
           </a:ln>
-          <a:effectLst>
-            <a:outerShdw blurRad="88900" dist="44450" dir="5400000" rotWithShape="0">
-              <a:srgbClr val="1C3D5A">
-                <a:alpha val="20000"/>
-              </a:srgbClr>
-            </a:outerShdw>
-          </a:effectLst>
         </p:spPr>
         <p:style>
           <a:lnRef idx="1">
@@ -47830,7 +46681,6 @@
           <a:ln>
             <a:noFill/>
           </a:ln>
-          <a:effectLst/>
         </p:spPr>
         <p:style>
           <a:lnRef idx="1">
@@ -47966,13 +46816,6 @@
               <a:srgbClr val="D7E0E6"/>
             </a:solidFill>
           </a:ln>
-          <a:effectLst>
-            <a:outerShdw blurRad="88900" dist="44450" dir="5400000" rotWithShape="0">
-              <a:srgbClr val="1C3D5A">
-                <a:alpha val="20000"/>
-              </a:srgbClr>
-            </a:outerShdw>
-          </a:effectLst>
         </p:spPr>
         <p:style>
           <a:lnRef idx="1">
@@ -48016,7 +46859,6 @@
           <a:ln>
             <a:noFill/>
           </a:ln>
-          <a:effectLst/>
         </p:spPr>
         <p:style>
           <a:lnRef idx="1">
@@ -48150,7 +46992,6 @@
           <a:ln>
             <a:noFill/>
           </a:ln>
-          <a:effectLst/>
         </p:spPr>
         <p:style>
           <a:lnRef idx="1">
@@ -48194,7 +47035,6 @@
           <a:ln>
             <a:noFill/>
           </a:ln>
-          <a:effectLst/>
         </p:spPr>
         <p:style>
           <a:lnRef idx="1">
@@ -48439,7 +47279,6 @@
               <a:srgbClr val="C8922E"/>
             </a:solidFill>
           </a:ln>
-          <a:effectLst/>
         </p:spPr>
         <p:style>
           <a:lnRef idx="2">
@@ -48475,7 +47314,6 @@
               <a:srgbClr val="D7E0E6"/>
             </a:solidFill>
           </a:ln>
-          <a:effectLst/>
         </p:spPr>
         <p:style>
           <a:lnRef idx="2">
@@ -48607,13 +47445,6 @@
               <a:srgbClr val="C5D2DA"/>
             </a:solidFill>
           </a:ln>
-          <a:effectLst>
-            <a:outerShdw blurRad="114300" dist="50800" dir="5400000" rotWithShape="0">
-              <a:srgbClr val="1C3D5A">
-                <a:alpha val="16000"/>
-              </a:srgbClr>
-            </a:outerShdw>
-          </a:effectLst>
         </p:spPr>
       </p:pic>
       <p:sp>
@@ -48679,7 +47510,6 @@
               <a:srgbClr val="D7E0E6"/>
             </a:solidFill>
           </a:ln>
-          <a:effectLst/>
         </p:spPr>
         <p:style>
           <a:lnRef idx="2">
@@ -49044,7 +47874,6 @@
               <a:srgbClr val="C8922E"/>
             </a:solidFill>
           </a:ln>
-          <a:effectLst/>
         </p:spPr>
         <p:style>
           <a:lnRef idx="2">
@@ -49080,7 +47909,6 @@
               <a:srgbClr val="D7E0E6"/>
             </a:solidFill>
           </a:ln>
-          <a:effectLst/>
         </p:spPr>
         <p:style>
           <a:lnRef idx="2">
@@ -49205,7 +48033,6 @@
           <a:ln>
             <a:noFill/>
           </a:ln>
-          <a:effectLst/>
         </p:spPr>
         <p:style>
           <a:lnRef idx="1">
@@ -49293,7 +48120,6 @@
           <a:ln>
             <a:noFill/>
           </a:ln>
-          <a:effectLst/>
         </p:spPr>
         <p:style>
           <a:lnRef idx="1">
@@ -49381,7 +48207,6 @@
           <a:ln>
             <a:noFill/>
           </a:ln>
-          <a:effectLst/>
         </p:spPr>
         <p:style>
           <a:lnRef idx="1">
@@ -49513,7 +48338,6 @@
           <a:ln>
             <a:noFill/>
           </a:ln>
-          <a:effectLst/>
         </p:spPr>
         <p:style>
           <a:lnRef idx="1">
@@ -49645,7 +48469,6 @@
           <a:ln>
             <a:noFill/>
           </a:ln>
-          <a:effectLst/>
         </p:spPr>
         <p:style>
           <a:lnRef idx="1">
@@ -49777,7 +48600,6 @@
           <a:ln>
             <a:noFill/>
           </a:ln>
-          <a:effectLst/>
         </p:spPr>
         <p:style>
           <a:lnRef idx="1">
@@ -49909,7 +48731,6 @@
           <a:ln>
             <a:noFill/>
           </a:ln>
-          <a:effectLst/>
         </p:spPr>
         <p:style>
           <a:lnRef idx="1">
@@ -50041,7 +48862,6 @@
           <a:ln>
             <a:noFill/>
           </a:ln>
-          <a:effectLst/>
         </p:spPr>
         <p:style>
           <a:lnRef idx="1">
@@ -50173,7 +48993,6 @@
               <a:srgbClr val="D7E0E6"/>
             </a:solidFill>
           </a:ln>
-          <a:effectLst/>
         </p:spPr>
         <p:style>
           <a:lnRef idx="1">
@@ -50221,7 +49040,6 @@
               <a:srgbClr val="D7E0E6"/>
             </a:solidFill>
           </a:ln>
-          <a:effectLst/>
         </p:spPr>
         <p:style>
           <a:lnRef idx="1">
@@ -50308,7 +49126,6 @@
               <a:srgbClr val="C5D2DA"/>
             </a:solidFill>
           </a:ln>
-          <a:effectLst/>
         </p:spPr>
         <p:style>
           <a:lnRef idx="2">
@@ -50875,7 +49692,6 @@
           <a:ln>
             <a:noFill/>
           </a:ln>
-          <a:effectLst/>
         </p:spPr>
         <p:style>
           <a:lnRef idx="1">
@@ -51076,7 +49892,6 @@
               <a:srgbClr val="C8922E"/>
             </a:solidFill>
           </a:ln>
-          <a:effectLst/>
         </p:spPr>
         <p:style>
           <a:lnRef idx="2">
@@ -51112,7 +49927,6 @@
               <a:srgbClr val="D7E0E6"/>
             </a:solidFill>
           </a:ln>
-          <a:effectLst/>
         </p:spPr>
         <p:style>
           <a:lnRef idx="2">
@@ -51241,7 +50055,6 @@
               <a:srgbClr val="D7E0E6"/>
             </a:solidFill>
           </a:ln>
-          <a:effectLst/>
         </p:spPr>
         <p:style>
           <a:lnRef idx="1">
@@ -51328,7 +50141,6 @@
               <a:srgbClr val="C5D2DA"/>
             </a:solidFill>
           </a:ln>
-          <a:effectLst/>
         </p:spPr>
         <p:style>
           <a:lnRef idx="2">
@@ -51596,13 +50408,6 @@
               <a:srgbClr val="D7E0E6"/>
             </a:solidFill>
           </a:ln>
-          <a:effectLst>
-            <a:outerShdw blurRad="88900" dist="44450" dir="5400000" rotWithShape="0">
-              <a:srgbClr val="1C3D5A">
-                <a:alpha val="20000"/>
-              </a:srgbClr>
-            </a:outerShdw>
-          </a:effectLst>
         </p:spPr>
         <p:style>
           <a:lnRef idx="1">
@@ -51646,7 +50451,6 @@
           <a:ln>
             <a:noFill/>
           </a:ln>
-          <a:effectLst/>
         </p:spPr>
         <p:style>
           <a:lnRef idx="1">
@@ -51782,13 +50586,6 @@
               <a:srgbClr val="D7E0E6"/>
             </a:solidFill>
           </a:ln>
-          <a:effectLst>
-            <a:outerShdw blurRad="88900" dist="44450" dir="5400000" rotWithShape="0">
-              <a:srgbClr val="1C3D5A">
-                <a:alpha val="20000"/>
-              </a:srgbClr>
-            </a:outerShdw>
-          </a:effectLst>
         </p:spPr>
         <p:style>
           <a:lnRef idx="1">
@@ -51832,7 +50629,6 @@
           <a:ln>
             <a:noFill/>
           </a:ln>
-          <a:effectLst/>
         </p:spPr>
         <p:style>
           <a:lnRef idx="1">
@@ -51968,13 +50764,6 @@
               <a:srgbClr val="D7E0E6"/>
             </a:solidFill>
           </a:ln>
-          <a:effectLst>
-            <a:outerShdw blurRad="88900" dist="44450" dir="5400000" rotWithShape="0">
-              <a:srgbClr val="1C3D5A">
-                <a:alpha val="20000"/>
-              </a:srgbClr>
-            </a:outerShdw>
-          </a:effectLst>
         </p:spPr>
         <p:style>
           <a:lnRef idx="1">
@@ -52018,7 +50807,6 @@
           <a:ln>
             <a:noFill/>
           </a:ln>
-          <a:effectLst/>
         </p:spPr>
         <p:style>
           <a:lnRef idx="1">
@@ -52263,7 +51051,6 @@
               <a:srgbClr val="C8922E"/>
             </a:solidFill>
           </a:ln>
-          <a:effectLst/>
         </p:spPr>
         <p:style>
           <a:lnRef idx="2">
@@ -52299,7 +51086,6 @@
               <a:srgbClr val="D7E0E6"/>
             </a:solidFill>
           </a:ln>
-          <a:effectLst/>
         </p:spPr>
         <p:style>
           <a:lnRef idx="2">
@@ -52428,13 +51214,6 @@
               <a:srgbClr val="D7E0E6"/>
             </a:solidFill>
           </a:ln>
-          <a:effectLst>
-            <a:outerShdw blurRad="88900" dist="44450" dir="5400000" rotWithShape="0">
-              <a:srgbClr val="1C3D5A">
-                <a:alpha val="20000"/>
-              </a:srgbClr>
-            </a:outerShdw>
-          </a:effectLst>
         </p:spPr>
         <p:style>
           <a:lnRef idx="1">
@@ -52478,7 +51257,6 @@
           <a:ln>
             <a:noFill/>
           </a:ln>
-          <a:effectLst/>
         </p:spPr>
         <p:style>
           <a:lnRef idx="1">
@@ -53006,13 +51784,6 @@
               <a:srgbClr val="D7E0E6"/>
             </a:solidFill>
           </a:ln>
-          <a:effectLst>
-            <a:outerShdw blurRad="88900" dist="44450" dir="5400000" rotWithShape="0">
-              <a:srgbClr val="1C3D5A">
-                <a:alpha val="20000"/>
-              </a:srgbClr>
-            </a:outerShdw>
-          </a:effectLst>
         </p:spPr>
         <p:style>
           <a:lnRef idx="1">
@@ -53056,7 +51827,6 @@
           <a:ln>
             <a:noFill/>
           </a:ln>
-          <a:effectLst/>
         </p:spPr>
         <p:style>
           <a:lnRef idx="1">
@@ -53911,13 +52681,6 @@
               <a:srgbClr val="D7E0E6"/>
             </a:solidFill>
           </a:ln>
-          <a:effectLst>
-            <a:outerShdw blurRad="88900" dist="44450" dir="5400000" rotWithShape="0">
-              <a:srgbClr val="1C3D5A">
-                <a:alpha val="20000"/>
-              </a:srgbClr>
-            </a:outerShdw>
-          </a:effectLst>
         </p:spPr>
         <p:style>
           <a:lnRef idx="1">
@@ -53961,7 +52724,6 @@
           <a:ln>
             <a:noFill/>
           </a:ln>
-          <a:effectLst/>
         </p:spPr>
         <p:style>
           <a:lnRef idx="1">
@@ -54511,7 +53273,6 @@
           <a:ln>
             <a:noFill/>
           </a:ln>
-          <a:effectLst/>
         </p:spPr>
         <p:style>
           <a:lnRef idx="1">
@@ -54555,7 +53316,6 @@
           <a:ln>
             <a:noFill/>
           </a:ln>
-          <a:effectLst/>
         </p:spPr>
         <p:style>
           <a:lnRef idx="1">
@@ -54599,7 +53359,6 @@
           <a:ln>
             <a:noFill/>
           </a:ln>
-          <a:effectLst/>
         </p:spPr>
         <p:style>
           <a:lnRef idx="1">
@@ -54735,7 +53494,6 @@
               <a:srgbClr val="D7E0E6"/>
             </a:solidFill>
           </a:ln>
-          <a:effectLst/>
         </p:spPr>
         <p:style>
           <a:lnRef idx="1">
@@ -54871,7 +53629,6 @@
               <a:srgbClr val="D7E0E6"/>
             </a:solidFill>
           </a:ln>
-          <a:effectLst/>
         </p:spPr>
         <p:style>
           <a:lnRef idx="1">
@@ -55007,7 +53764,6 @@
               <a:srgbClr val="D7E0E6"/>
             </a:solidFill>
           </a:ln>
-          <a:effectLst/>
         </p:spPr>
         <p:style>
           <a:lnRef idx="1">
@@ -55143,7 +53899,6 @@
               <a:srgbClr val="D7E0E6"/>
             </a:solidFill>
           </a:ln>
-          <a:effectLst/>
         </p:spPr>
         <p:style>
           <a:lnRef idx="1">
@@ -55279,7 +54034,6 @@
               <a:srgbClr val="D7E0E6"/>
             </a:solidFill>
           </a:ln>
-          <a:effectLst/>
         </p:spPr>
         <p:style>
           <a:lnRef idx="1">
@@ -55415,7 +54169,6 @@
               <a:srgbClr val="D7E0E6"/>
             </a:solidFill>
           </a:ln>
-          <a:effectLst/>
         </p:spPr>
         <p:style>
           <a:lnRef idx="1">
@@ -55551,7 +54304,6 @@
               <a:srgbClr val="D7E0E6"/>
             </a:solidFill>
           </a:ln>
-          <a:effectLst/>
         </p:spPr>
         <p:style>
           <a:lnRef idx="1">
@@ -55685,7 +54437,6 @@
           <a:ln>
             <a:noFill/>
           </a:ln>
-          <a:effectLst/>
         </p:spPr>
         <p:style>
           <a:lnRef idx="1">
@@ -55775,7 +54526,6 @@
           <a:ln>
             <a:noFill/>
           </a:ln>
-          <a:effectLst/>
         </p:spPr>
         <p:style>
           <a:lnRef idx="1">
@@ -55838,7 +54588,7 @@
                 <a:ea typeface="Microsoft JhengHei"/>
                 <a:cs typeface="Microsoft JhengHei"/>
               </a:rPr>
-              <a:t>別人把海象畫成圖 — 我們把海象變成「明天誰上哪艘船」</a:t>
+              <a:t>海象感知 × 人力資源 × 自動排班 — 從資料到決策的完整技術鏈</a:t>
             </a:r>
           </a:p>
         </p:txBody>
@@ -55976,7 +54726,6 @@
               <a:srgbClr val="C8922E"/>
             </a:solidFill>
           </a:ln>
-          <a:effectLst/>
         </p:spPr>
         <p:style>
           <a:lnRef idx="2">
@@ -56012,7 +54761,6 @@
               <a:srgbClr val="D7E0E6"/>
             </a:solidFill>
           </a:ln>
-          <a:effectLst/>
         </p:spPr>
         <p:style>
           <a:lnRef idx="2">
@@ -56141,13 +54889,6 @@
               <a:srgbClr val="D7E0E6"/>
             </a:solidFill>
           </a:ln>
-          <a:effectLst>
-            <a:outerShdw blurRad="88900" dist="44450" dir="5400000" rotWithShape="0">
-              <a:srgbClr val="1C3D5A">
-                <a:alpha val="20000"/>
-              </a:srgbClr>
-            </a:outerShdw>
-          </a:effectLst>
         </p:spPr>
         <p:style>
           <a:lnRef idx="1">
@@ -56191,7 +54932,6 @@
           <a:ln>
             <a:noFill/>
           </a:ln>
-          <a:effectLst/>
         </p:spPr>
         <p:style>
           <a:lnRef idx="1">
@@ -56371,13 +55111,6 @@
               <a:srgbClr val="D7E0E6"/>
             </a:solidFill>
           </a:ln>
-          <a:effectLst>
-            <a:outerShdw blurRad="88900" dist="44450" dir="5400000" rotWithShape="0">
-              <a:srgbClr val="1C3D5A">
-                <a:alpha val="20000"/>
-              </a:srgbClr>
-            </a:outerShdw>
-          </a:effectLst>
         </p:spPr>
         <p:style>
           <a:lnRef idx="1">
@@ -56421,7 +55154,6 @@
           <a:ln>
             <a:noFill/>
           </a:ln>
-          <a:effectLst/>
         </p:spPr>
         <p:style>
           <a:lnRef idx="1">
@@ -56601,13 +55333,6 @@
               <a:srgbClr val="D7E0E6"/>
             </a:solidFill>
           </a:ln>
-          <a:effectLst>
-            <a:outerShdw blurRad="88900" dist="44450" dir="5400000" rotWithShape="0">
-              <a:srgbClr val="1C3D5A">
-                <a:alpha val="20000"/>
-              </a:srgbClr>
-            </a:outerShdw>
-          </a:effectLst>
         </p:spPr>
         <p:style>
           <a:lnRef idx="1">
@@ -56651,7 +55376,6 @@
           <a:ln>
             <a:noFill/>
           </a:ln>
-          <a:effectLst/>
         </p:spPr>
         <p:style>
           <a:lnRef idx="1">
@@ -56940,7 +55664,6 @@
               <a:srgbClr val="C8922E"/>
             </a:solidFill>
           </a:ln>
-          <a:effectLst/>
         </p:spPr>
         <p:style>
           <a:lnRef idx="2">
@@ -56976,7 +55699,6 @@
               <a:srgbClr val="D7E0E6"/>
             </a:solidFill>
           </a:ln>
-          <a:effectLst/>
         </p:spPr>
         <p:style>
           <a:lnRef idx="2">
@@ -57105,13 +55827,6 @@
               <a:srgbClr val="D7E0E6"/>
             </a:solidFill>
           </a:ln>
-          <a:effectLst>
-            <a:outerShdw blurRad="88900" dist="44450" dir="5400000" rotWithShape="0">
-              <a:srgbClr val="1C3D5A">
-                <a:alpha val="20000"/>
-              </a:srgbClr>
-            </a:outerShdw>
-          </a:effectLst>
         </p:spPr>
         <p:style>
           <a:lnRef idx="1">
@@ -57155,7 +55870,6 @@
           <a:ln>
             <a:noFill/>
           </a:ln>
-          <a:effectLst/>
         </p:spPr>
         <p:style>
           <a:lnRef idx="1">
@@ -57286,7 +56000,6 @@
               <a:srgbClr val="D7E0E6"/>
             </a:solidFill>
           </a:ln>
-          <a:effectLst/>
         </p:spPr>
         <p:style>
           <a:lnRef idx="2">
@@ -57369,7 +56082,6 @@
           <a:ln>
             <a:noFill/>
           </a:ln>
-          <a:effectLst/>
         </p:spPr>
         <p:style>
           <a:lnRef idx="1">
@@ -57461,13 +56173,6 @@
               <a:srgbClr val="D7E0E6"/>
             </a:solidFill>
           </a:ln>
-          <a:effectLst>
-            <a:outerShdw blurRad="88900" dist="44450" dir="5400000" rotWithShape="0">
-              <a:srgbClr val="1C3D5A">
-                <a:alpha val="20000"/>
-              </a:srgbClr>
-            </a:outerShdw>
-          </a:effectLst>
         </p:spPr>
         <p:style>
           <a:lnRef idx="1">
@@ -57511,7 +56216,6 @@
           <a:ln>
             <a:noFill/>
           </a:ln>
-          <a:effectLst/>
         </p:spPr>
         <p:style>
           <a:lnRef idx="1">
@@ -57642,7 +56346,6 @@
               <a:srgbClr val="D7E0E6"/>
             </a:solidFill>
           </a:ln>
-          <a:effectLst/>
         </p:spPr>
         <p:style>
           <a:lnRef idx="2">
@@ -57725,7 +56428,6 @@
           <a:ln>
             <a:noFill/>
           </a:ln>
-          <a:effectLst/>
         </p:spPr>
         <p:style>
           <a:lnRef idx="1">
@@ -57817,13 +56519,6 @@
               <a:srgbClr val="D7E0E6"/>
             </a:solidFill>
           </a:ln>
-          <a:effectLst>
-            <a:outerShdw blurRad="88900" dist="44450" dir="5400000" rotWithShape="0">
-              <a:srgbClr val="1C3D5A">
-                <a:alpha val="20000"/>
-              </a:srgbClr>
-            </a:outerShdw>
-          </a:effectLst>
         </p:spPr>
         <p:style>
           <a:lnRef idx="1">
@@ -57867,7 +56562,6 @@
           <a:ln>
             <a:noFill/>
           </a:ln>
-          <a:effectLst/>
         </p:spPr>
         <p:style>
           <a:lnRef idx="1">
@@ -57998,7 +56692,6 @@
               <a:srgbClr val="D7E0E6"/>
             </a:solidFill>
           </a:ln>
-          <a:effectLst/>
         </p:spPr>
         <p:style>
           <a:lnRef idx="2">
@@ -58081,7 +56774,6 @@
           <a:ln>
             <a:noFill/>
           </a:ln>
-          <a:effectLst/>
         </p:spPr>
         <p:style>
           <a:lnRef idx="1">
@@ -58195,7 +56887,6 @@
           <a:ln>
             <a:noFill/>
           </a:ln>
-          <a:effectLst/>
         </p:spPr>
         <p:style>
           <a:lnRef idx="1">
@@ -58414,7 +57105,6 @@
               <a:srgbClr val="C8922E"/>
             </a:solidFill>
           </a:ln>
-          <a:effectLst/>
         </p:spPr>
         <p:style>
           <a:lnRef idx="2">
@@ -58494,7 +57184,6 @@
               <a:srgbClr val="D7E0E6"/>
             </a:solidFill>
           </a:ln>
-          <a:effectLst/>
         </p:spPr>
         <p:style>
           <a:lnRef idx="2">
@@ -58681,7 +57370,6 @@
               <a:srgbClr val="D7E0E6"/>
             </a:solidFill>
           </a:ln>
-          <a:effectLst/>
         </p:spPr>
         <p:style>
           <a:lnRef idx="2">
@@ -58875,7 +57563,6 @@
               <a:srgbClr val="C8922E"/>
             </a:solidFill>
           </a:ln>
-          <a:effectLst/>
         </p:spPr>
         <p:style>
           <a:lnRef idx="2">
@@ -58911,7 +57598,6 @@
               <a:srgbClr val="D7E0E6"/>
             </a:solidFill>
           </a:ln>
-          <a:effectLst/>
         </p:spPr>
         <p:style>
           <a:lnRef idx="2">
@@ -59043,13 +57729,6 @@
               <a:srgbClr val="C5D2DA"/>
             </a:solidFill>
           </a:ln>
-          <a:effectLst>
-            <a:outerShdw blurRad="114300" dist="50800" dir="5400000" rotWithShape="0">
-              <a:srgbClr val="1C3D5A">
-                <a:alpha val="16000"/>
-              </a:srgbClr>
-            </a:outerShdw>
-          </a:effectLst>
         </p:spPr>
       </p:pic>
       <p:sp>
@@ -59076,13 +57755,6 @@
               <a:srgbClr val="D7E0E6"/>
             </a:solidFill>
           </a:ln>
-          <a:effectLst>
-            <a:outerShdw blurRad="88900" dist="44450" dir="5400000" rotWithShape="0">
-              <a:srgbClr val="1C3D5A">
-                <a:alpha val="20000"/>
-              </a:srgbClr>
-            </a:outerShdw>
-          </a:effectLst>
         </p:spPr>
         <p:style>
           <a:lnRef idx="1">
@@ -59126,7 +57798,6 @@
           <a:ln>
             <a:noFill/>
           </a:ln>
-          <a:effectLst/>
         </p:spPr>
         <p:style>
           <a:lnRef idx="1">
@@ -59306,13 +57977,6 @@
               <a:srgbClr val="D7E0E6"/>
             </a:solidFill>
           </a:ln>
-          <a:effectLst>
-            <a:outerShdw blurRad="88900" dist="44450" dir="5400000" rotWithShape="0">
-              <a:srgbClr val="1C3D5A">
-                <a:alpha val="20000"/>
-              </a:srgbClr>
-            </a:outerShdw>
-          </a:effectLst>
         </p:spPr>
         <p:style>
           <a:lnRef idx="1">
@@ -59356,7 +58020,6 @@
           <a:ln>
             <a:noFill/>
           </a:ln>
-          <a:effectLst/>
         </p:spPr>
         <p:style>
           <a:lnRef idx="1">
@@ -59536,13 +58199,6 @@
               <a:srgbClr val="D7E0E6"/>
             </a:solidFill>
           </a:ln>
-          <a:effectLst>
-            <a:outerShdw blurRad="88900" dist="44450" dir="5400000" rotWithShape="0">
-              <a:srgbClr val="1C3D5A">
-                <a:alpha val="20000"/>
-              </a:srgbClr>
-            </a:outerShdw>
-          </a:effectLst>
         </p:spPr>
         <p:style>
           <a:lnRef idx="1">
@@ -59586,7 +58242,6 @@
           <a:ln>
             <a:noFill/>
           </a:ln>
-          <a:effectLst/>
         </p:spPr>
         <p:style>
           <a:lnRef idx="1">
@@ -59764,7 +58419,6 @@
           <a:ln>
             <a:noFill/>
           </a:ln>
-          <a:effectLst/>
         </p:spPr>
         <p:style>
           <a:lnRef idx="1">
@@ -59808,7 +58462,6 @@
           <a:ln>
             <a:noFill/>
           </a:ln>
-          <a:effectLst/>
         </p:spPr>
         <p:style>
           <a:lnRef idx="1">

--- a/docs/slides/第2組_海勤決策系統_期末簡報.pptx
+++ b/docs/slides/第2組_海勤決策系統_期末簡報.pptx
@@ -55989,8 +55989,8 @@
         </p:nvCxnSpPr>
         <p:spPr>
           <a:xfrm>
-            <a:off x="868680.0" y="3108960"/>
-            <a:ext cx="2966618.3333333335" cy="0"/>
+            <a:off x="868680" y="3108960"/>
+            <a:ext cx="2966618" cy="0"/>
           </a:xfrm>
           <a:prstGeom prst="bentConnector3">
             <a:avLst/>
@@ -56335,8 +56335,8 @@
         </p:nvCxnSpPr>
         <p:spPr>
           <a:xfrm>
-            <a:off x="4612538.333333334" y="3108960"/>
-            <a:ext cx="2966618.333333334" cy="0"/>
+            <a:off x="4612538" y="3108960"/>
+            <a:ext cx="2966618" cy="0"/>
           </a:xfrm>
           <a:prstGeom prst="bentConnector3">
             <a:avLst/>
@@ -56681,8 +56681,8 @@
         </p:nvCxnSpPr>
         <p:spPr>
           <a:xfrm>
-            <a:off x="8356396.666666667" y="3108960"/>
-            <a:ext cx="2966618.333333333" cy="0"/>
+            <a:off x="8356396" y="3108960"/>
+            <a:ext cx="2966618" cy="0"/>
           </a:xfrm>
           <a:prstGeom prst="bentConnector3">
             <a:avLst/>

--- a/docs/slides/第2組_海勤決策系統_期末簡報.pptx
+++ b/docs/slides/第2組_海勤決策系統_期末簡報.pptx
@@ -3986,7 +3986,7 @@
               </a:spcAft>
             </a:pPr>
             <a:r>
-              <a:rPr sz="1050" b="0" i="0">
+              <a:rPr sz="1150" b="0" i="0">
                 <a:solidFill>
                   <a:srgbClr val="7C8B97"/>
                 </a:solidFill>
@@ -4214,7 +4214,7 @@
               </a:spcAft>
             </a:pPr>
             <a:r>
-              <a:rPr sz="950" b="0" i="0">
+              <a:rPr sz="1000" b="0" i="0">
                 <a:solidFill>
                   <a:srgbClr val="7C8B97"/>
                 </a:solidFill>
@@ -4258,7 +4258,7 @@
               </a:spcAft>
             </a:pPr>
             <a:r>
-              <a:rPr sz="950" b="0" i="0">
+              <a:rPr sz="1000" b="0" i="0">
                 <a:solidFill>
                   <a:srgbClr val="7C8B97"/>
                 </a:solidFill>
@@ -6365,7 +6365,7 @@
               </a:spcAft>
             </a:pPr>
             <a:r>
-              <a:rPr sz="950" b="0" i="0">
+              <a:rPr sz="1000" b="0" i="0">
                 <a:solidFill>
                   <a:srgbClr val="7C8B97"/>
                 </a:solidFill>
@@ -6409,7 +6409,7 @@
               </a:spcAft>
             </a:pPr>
             <a:r>
-              <a:rPr sz="950" b="0" i="0">
+              <a:rPr sz="1000" b="0" i="0">
                 <a:solidFill>
                   <a:srgbClr val="7C8B97"/>
                 </a:solidFill>
@@ -8023,7 +8023,7 @@
               </a:spcAft>
             </a:pPr>
             <a:r>
-              <a:rPr sz="950" b="0" i="0">
+              <a:rPr sz="1000" b="0" i="0">
                 <a:solidFill>
                   <a:srgbClr val="7C8B97"/>
                 </a:solidFill>
@@ -8067,7 +8067,7 @@
               </a:spcAft>
             </a:pPr>
             <a:r>
-              <a:rPr sz="950" b="0" i="0">
+              <a:rPr sz="1000" b="0" i="0">
                 <a:solidFill>
                   <a:srgbClr val="7C8B97"/>
                 </a:solidFill>
@@ -8861,7 +8861,7 @@
               </a:spcAft>
             </a:pPr>
             <a:r>
-              <a:rPr sz="950" b="0" i="0">
+              <a:rPr sz="1000" b="0" i="0">
                 <a:solidFill>
                   <a:srgbClr val="7C8B97"/>
                 </a:solidFill>
@@ -9089,7 +9089,7 @@
               </a:spcAft>
             </a:pPr>
             <a:r>
-              <a:rPr sz="950" b="0" i="0">
+              <a:rPr sz="1000" b="0" i="0">
                 <a:solidFill>
                   <a:srgbClr val="7C8B97"/>
                 </a:solidFill>
@@ -9133,7 +9133,7 @@
               </a:spcAft>
             </a:pPr>
             <a:r>
-              <a:rPr sz="950" b="0" i="0">
+              <a:rPr sz="1000" b="0" i="0">
                 <a:solidFill>
                   <a:srgbClr val="7C8B97"/>
                 </a:solidFill>
@@ -9355,7 +9355,7 @@
               </a:spcAft>
             </a:pPr>
             <a:r>
-              <a:rPr sz="1000" b="0" i="0">
+              <a:rPr sz="1100" b="0" i="0">
                 <a:solidFill>
                   <a:srgbClr val="7C8B97"/>
                 </a:solidFill>
@@ -9577,7 +9577,7 @@
               </a:spcAft>
             </a:pPr>
             <a:r>
-              <a:rPr sz="1000" b="0" i="0">
+              <a:rPr sz="1100" b="0" i="0">
                 <a:solidFill>
                   <a:srgbClr val="7C8B97"/>
                 </a:solidFill>
@@ -9799,7 +9799,7 @@
               </a:spcAft>
             </a:pPr>
             <a:r>
-              <a:rPr sz="1000" b="0" i="0">
+              <a:rPr sz="1100" b="0" i="0">
                 <a:solidFill>
                   <a:srgbClr val="7C8B97"/>
                 </a:solidFill>
@@ -10021,7 +10021,7 @@
               </a:spcAft>
             </a:pPr>
             <a:r>
-              <a:rPr sz="1000" b="0" i="0">
+              <a:rPr sz="1100" b="0" i="0">
                 <a:solidFill>
                   <a:srgbClr val="7C8B97"/>
                 </a:solidFill>
@@ -10243,7 +10243,7 @@
               </a:spcAft>
             </a:pPr>
             <a:r>
-              <a:rPr sz="1000" b="0" i="0">
+              <a:rPr sz="1100" b="0" i="0">
                 <a:solidFill>
                   <a:srgbClr val="7C8B97"/>
                 </a:solidFill>
@@ -10465,7 +10465,7 @@
               </a:spcAft>
             </a:pPr>
             <a:r>
-              <a:rPr sz="1000" b="0" i="0">
+              <a:rPr sz="1100" b="0" i="0">
                 <a:solidFill>
                   <a:srgbClr val="7C8B97"/>
                 </a:solidFill>
@@ -10687,7 +10687,7 @@
               </a:spcAft>
             </a:pPr>
             <a:r>
-              <a:rPr sz="1000" b="0" i="0">
+              <a:rPr sz="1100" b="0" i="0">
                 <a:solidFill>
                   <a:srgbClr val="7C8B97"/>
                 </a:solidFill>
@@ -10909,7 +10909,7 @@
               </a:spcAft>
             </a:pPr>
             <a:r>
-              <a:rPr sz="1000" b="0" i="0">
+              <a:rPr sz="1100" b="0" i="0">
                 <a:solidFill>
                   <a:srgbClr val="7C8B97"/>
                 </a:solidFill>
@@ -11131,7 +11131,7 @@
               </a:spcAft>
             </a:pPr>
             <a:r>
-              <a:rPr sz="1000" b="0" i="0">
+              <a:rPr sz="1100" b="0" i="0">
                 <a:solidFill>
                   <a:srgbClr val="7C8B97"/>
                 </a:solidFill>
@@ -11353,7 +11353,7 @@
               </a:spcAft>
             </a:pPr>
             <a:r>
-              <a:rPr sz="1000" b="0" i="0">
+              <a:rPr sz="1100" b="0" i="0">
                 <a:solidFill>
                   <a:srgbClr val="7C8B97"/>
                 </a:solidFill>
@@ -11575,7 +11575,7 @@
               </a:spcAft>
             </a:pPr>
             <a:r>
-              <a:rPr sz="1000" b="0" i="0">
+              <a:rPr sz="1100" b="0" i="0">
                 <a:solidFill>
                   <a:srgbClr val="7C8B97"/>
                 </a:solidFill>
@@ -11797,7 +11797,7 @@
               </a:spcAft>
             </a:pPr>
             <a:r>
-              <a:rPr sz="1000" b="0" i="0">
+              <a:rPr sz="1100" b="0" i="0">
                 <a:solidFill>
                   <a:srgbClr val="7C8B97"/>
                 </a:solidFill>
@@ -12025,7 +12025,7 @@
               </a:spcAft>
             </a:pPr>
             <a:r>
-              <a:rPr sz="950" b="0" i="0">
+              <a:rPr sz="1000" b="0" i="0">
                 <a:solidFill>
                   <a:srgbClr val="7C8B97"/>
                 </a:solidFill>
@@ -12069,7 +12069,7 @@
               </a:spcAft>
             </a:pPr>
             <a:r>
-              <a:rPr sz="950" b="0" i="0">
+              <a:rPr sz="1000" b="0" i="0">
                 <a:solidFill>
                   <a:srgbClr val="7C8B97"/>
                 </a:solidFill>
@@ -12098,8 +12098,8 @@
         </p:blipFill>
         <p:spPr>
           <a:xfrm>
-            <a:off x="708660" y="1920240"/>
-            <a:ext cx="5349240" cy="3566160"/>
+            <a:off x="1120140" y="1920240"/>
+            <a:ext cx="4526280" cy="3017520"/>
           </a:xfrm>
           <a:prstGeom prst="rect">
             <a:avLst/>
@@ -12127,8 +12127,8 @@
         </p:blipFill>
         <p:spPr>
           <a:xfrm>
-            <a:off x="6400800" y="1920240"/>
-            <a:ext cx="5486400" cy="3526971"/>
+            <a:off x="6797040" y="1920240"/>
+            <a:ext cx="4693920" cy="3017520"/>
           </a:xfrm>
           <a:prstGeom prst="rect">
             <a:avLst/>
@@ -12148,7 +12148,7 @@
         </p:nvSpPr>
         <p:spPr>
           <a:xfrm>
-            <a:off x="640080" y="5532120"/>
+            <a:off x="640080" y="5029200"/>
             <a:ext cx="5486400" cy="274320"/>
           </a:xfrm>
           <a:prstGeom prst="rect">
@@ -12192,7 +12192,7 @@
         </p:nvSpPr>
         <p:spPr>
           <a:xfrm>
-            <a:off x="6400800" y="5532120"/>
+            <a:off x="6400800" y="5029200"/>
             <a:ext cx="5486400" cy="274320"/>
           </a:xfrm>
           <a:prstGeom prst="rect">
@@ -12619,7 +12619,7 @@
               </a:spcAft>
             </a:pPr>
             <a:r>
-              <a:rPr sz="950" b="0" i="0">
+              <a:rPr sz="1000" b="0" i="0">
                 <a:solidFill>
                   <a:srgbClr val="7C8B97"/>
                 </a:solidFill>
@@ -12663,7 +12663,7 @@
               </a:spcAft>
             </a:pPr>
             <a:r>
-              <a:rPr sz="950" b="0" i="0">
+              <a:rPr sz="1000" b="0" i="0">
                 <a:solidFill>
                   <a:srgbClr val="7C8B97"/>
                 </a:solidFill>
@@ -13671,7 +13671,7 @@
               </a:spcAft>
             </a:pPr>
             <a:r>
-              <a:rPr sz="950" b="0" i="0">
+              <a:rPr sz="1000" b="0" i="0">
                 <a:solidFill>
                   <a:srgbClr val="7C8B97"/>
                 </a:solidFill>
@@ -13899,7 +13899,7 @@
               </a:spcAft>
             </a:pPr>
             <a:r>
-              <a:rPr sz="950" b="0" i="0">
+              <a:rPr sz="1000" b="0" i="0">
                 <a:solidFill>
                   <a:srgbClr val="7C8B97"/>
                 </a:solidFill>
@@ -13943,7 +13943,7 @@
               </a:spcAft>
             </a:pPr>
             <a:r>
-              <a:rPr sz="950" b="0" i="0">
+              <a:rPr sz="1000" b="0" i="0">
                 <a:solidFill>
                   <a:srgbClr val="7C8B97"/>
                 </a:solidFill>
@@ -15059,7 +15059,7 @@
               </a:spcAft>
             </a:pPr>
             <a:r>
-              <a:rPr sz="950" b="0" i="0">
+              <a:rPr sz="1000" b="0" i="0">
                 <a:solidFill>
                   <a:srgbClr val="7C8B97"/>
                 </a:solidFill>
@@ -15103,7 +15103,7 @@
               </a:spcAft>
             </a:pPr>
             <a:r>
-              <a:rPr sz="950" b="0" i="0">
+              <a:rPr sz="1000" b="0" i="0">
                 <a:solidFill>
                   <a:srgbClr val="7C8B97"/>
                 </a:solidFill>
@@ -15287,7 +15287,7 @@
               </a:spcAft>
             </a:pPr>
             <a:r>
-              <a:rPr sz="1100" b="1" i="0">
+              <a:rPr sz="1150" b="1" i="0">
                 <a:solidFill>
                   <a:srgbClr val="C5D2DA"/>
                 </a:solidFill>
@@ -15298,7 +15298,7 @@
               <a:t>–  </a:t>
             </a:r>
             <a:r>
-              <a:rPr sz="1100" b="0" i="0">
+              <a:rPr sz="1150" b="0" i="0">
                 <a:solidFill>
                   <a:srgbClr val="7C8B97"/>
                 </a:solidFill>
@@ -15319,7 +15319,7 @@
               </a:spcAft>
             </a:pPr>
             <a:r>
-              <a:rPr sz="1100" b="1" i="0">
+              <a:rPr sz="1150" b="1" i="0">
                 <a:solidFill>
                   <a:srgbClr val="C5D2DA"/>
                 </a:solidFill>
@@ -15330,7 +15330,7 @@
               <a:t>–  </a:t>
             </a:r>
             <a:r>
-              <a:rPr sz="1100" b="0" i="0">
+              <a:rPr sz="1150" b="0" i="0">
                 <a:solidFill>
                   <a:srgbClr val="7C8B97"/>
                 </a:solidFill>
@@ -15351,7 +15351,7 @@
               </a:spcAft>
             </a:pPr>
             <a:r>
-              <a:rPr sz="1100" b="1" i="0">
+              <a:rPr sz="1150" b="1" i="0">
                 <a:solidFill>
                   <a:srgbClr val="C5D2DA"/>
                 </a:solidFill>
@@ -15362,7 +15362,7 @@
               <a:t>–  </a:t>
             </a:r>
             <a:r>
-              <a:rPr sz="1100" b="0" i="0">
+              <a:rPr sz="1150" b="0" i="0">
                 <a:solidFill>
                   <a:srgbClr val="7C8B97"/>
                 </a:solidFill>
@@ -15415,7 +15415,7 @@
               </a:spcAft>
             </a:pPr>
             <a:r>
-              <a:rPr sz="1100" b="1" i="0">
+              <a:rPr sz="1150" b="1" i="0">
                 <a:solidFill>
                   <a:srgbClr val="C5D2DA"/>
                 </a:solidFill>
@@ -15426,7 +15426,7 @@
               <a:t>–  </a:t>
             </a:r>
             <a:r>
-              <a:rPr sz="1100" b="0" i="0">
+              <a:rPr sz="1150" b="0" i="0">
                 <a:solidFill>
                   <a:srgbClr val="7C8B97"/>
                 </a:solidFill>
@@ -15447,7 +15447,7 @@
               </a:spcAft>
             </a:pPr>
             <a:r>
-              <a:rPr sz="1100" b="1" i="0">
+              <a:rPr sz="1150" b="1" i="0">
                 <a:solidFill>
                   <a:srgbClr val="C5D2DA"/>
                 </a:solidFill>
@@ -15458,7 +15458,7 @@
               <a:t>–  </a:t>
             </a:r>
             <a:r>
-              <a:rPr sz="1100" b="0" i="0">
+              <a:rPr sz="1150" b="0" i="0">
                 <a:solidFill>
                   <a:srgbClr val="7C8B97"/>
                 </a:solidFill>
@@ -15511,7 +15511,7 @@
               </a:spcAft>
             </a:pPr>
             <a:r>
-              <a:rPr sz="1100" b="1" i="0">
+              <a:rPr sz="1150" b="1" i="0">
                 <a:solidFill>
                   <a:srgbClr val="C5D2DA"/>
                 </a:solidFill>
@@ -15522,7 +15522,7 @@
               <a:t>–  </a:t>
             </a:r>
             <a:r>
-              <a:rPr sz="1100" b="0" i="0">
+              <a:rPr sz="1150" b="0" i="0">
                 <a:solidFill>
                   <a:srgbClr val="7C8B97"/>
                 </a:solidFill>
@@ -15750,7 +15750,7 @@
               </a:spcAft>
             </a:pPr>
             <a:r>
-              <a:rPr sz="950" b="0" i="0">
+              <a:rPr sz="1000" b="0" i="0">
                 <a:solidFill>
                   <a:srgbClr val="7C8B97"/>
                 </a:solidFill>
@@ -15794,7 +15794,7 @@
               </a:spcAft>
             </a:pPr>
             <a:r>
-              <a:rPr sz="950" b="0" i="0">
+              <a:rPr sz="1000" b="0" i="0">
                 <a:solidFill>
                   <a:srgbClr val="7C8B97"/>
                 </a:solidFill>
@@ -17141,7 +17141,7 @@
               </a:spcAft>
             </a:pPr>
             <a:r>
-              <a:rPr sz="950" b="0" i="0">
+              <a:rPr sz="1000" b="0" i="0">
                 <a:solidFill>
                   <a:srgbClr val="7C8B97"/>
                 </a:solidFill>
@@ -17185,7 +17185,7 @@
               </a:spcAft>
             </a:pPr>
             <a:r>
-              <a:rPr sz="950" b="0" i="0">
+              <a:rPr sz="1000" b="0" i="0">
                 <a:solidFill>
                   <a:srgbClr val="7C8B97"/>
                 </a:solidFill>
@@ -17618,7 +17618,7 @@
               </a:spcAft>
             </a:pPr>
             <a:r>
-              <a:rPr sz="950" b="0" i="0">
+              <a:rPr sz="1000" b="0" i="0">
                 <a:solidFill>
                   <a:srgbClr val="7C8B97"/>
                 </a:solidFill>
@@ -17662,7 +17662,7 @@
               </a:spcAft>
             </a:pPr>
             <a:r>
-              <a:rPr sz="950" b="0" i="0">
+              <a:rPr sz="1000" b="0" i="0">
                 <a:solidFill>
                   <a:srgbClr val="7C8B97"/>
                 </a:solidFill>
@@ -18785,7 +18785,7 @@
               </a:spcAft>
             </a:pPr>
             <a:r>
-              <a:rPr sz="950" b="0" i="0">
+              <a:rPr sz="1000" b="0" i="0">
                 <a:solidFill>
                   <a:srgbClr val="7C8B97"/>
                 </a:solidFill>
@@ -18829,7 +18829,7 @@
               </a:spcAft>
             </a:pPr>
             <a:r>
-              <a:rPr sz="950" b="0" i="0">
+              <a:rPr sz="1000" b="0" i="0">
                 <a:solidFill>
                   <a:srgbClr val="7C8B97"/>
                 </a:solidFill>
@@ -20281,7 +20281,7 @@
               </a:spcAft>
             </a:pPr>
             <a:r>
-              <a:rPr sz="950" b="0" i="0">
+              <a:rPr sz="1000" b="0" i="0">
                 <a:solidFill>
                   <a:srgbClr val="7C8B97"/>
                 </a:solidFill>
@@ -20325,7 +20325,7 @@
               </a:spcAft>
             </a:pPr>
             <a:r>
-              <a:rPr sz="950" b="0" i="0">
+              <a:rPr sz="1000" b="0" i="0">
                 <a:solidFill>
                   <a:srgbClr val="7C8B97"/>
                 </a:solidFill>
@@ -20465,8 +20465,8 @@
         </p:nvSpPr>
         <p:spPr>
           <a:xfrm>
-            <a:off x="8028432" y="2093975"/>
-            <a:ext cx="3358591" cy="603504"/>
+            <a:off x="8028432" y="1984247"/>
+            <a:ext cx="3358591" cy="365760"/>
           </a:xfrm>
           <a:prstGeom prst="rect">
             <a:avLst/>
@@ -20509,8 +20509,8 @@
         </p:nvSpPr>
         <p:spPr>
           <a:xfrm>
-            <a:off x="8028432" y="2093975"/>
-            <a:ext cx="3358591" cy="274320"/>
+            <a:off x="8028432" y="2368295"/>
+            <a:ext cx="3358591" cy="256032"/>
           </a:xfrm>
           <a:prstGeom prst="rect">
             <a:avLst/>
@@ -20643,8 +20643,8 @@
         </p:nvSpPr>
         <p:spPr>
           <a:xfrm>
-            <a:off x="8028432" y="3008375"/>
-            <a:ext cx="3358591" cy="603504"/>
+            <a:off x="8028432" y="2898647"/>
+            <a:ext cx="3358591" cy="365760"/>
           </a:xfrm>
           <a:prstGeom prst="rect">
             <a:avLst/>
@@ -20687,8 +20687,8 @@
         </p:nvSpPr>
         <p:spPr>
           <a:xfrm>
-            <a:off x="8028432" y="3008375"/>
-            <a:ext cx="3358591" cy="274320"/>
+            <a:off x="8028432" y="3282695"/>
+            <a:ext cx="3358591" cy="256032"/>
           </a:xfrm>
           <a:prstGeom prst="rect">
             <a:avLst/>
@@ -20821,8 +20821,8 @@
         </p:nvSpPr>
         <p:spPr>
           <a:xfrm>
-            <a:off x="8028432" y="3922775"/>
-            <a:ext cx="3358591" cy="603504"/>
+            <a:off x="8028432" y="3813047"/>
+            <a:ext cx="3358591" cy="365760"/>
           </a:xfrm>
           <a:prstGeom prst="rect">
             <a:avLst/>
@@ -20865,8 +20865,8 @@
         </p:nvSpPr>
         <p:spPr>
           <a:xfrm>
-            <a:off x="8028432" y="3922775"/>
-            <a:ext cx="3358591" cy="274320"/>
+            <a:off x="8028432" y="4197095"/>
+            <a:ext cx="3358591" cy="256032"/>
           </a:xfrm>
           <a:prstGeom prst="rect">
             <a:avLst/>
@@ -21228,7 +21228,7 @@
               </a:spcAft>
             </a:pPr>
             <a:r>
-              <a:rPr sz="950" b="0" i="0">
+              <a:rPr sz="1000" b="0" i="0">
                 <a:solidFill>
                   <a:srgbClr val="7C8B97"/>
                 </a:solidFill>
@@ -21272,7 +21272,7 @@
               </a:spcAft>
             </a:pPr>
             <a:r>
-              <a:rPr sz="950" b="0" i="0">
+              <a:rPr sz="1000" b="0" i="0">
                 <a:solidFill>
                   <a:srgbClr val="7C8B97"/>
                 </a:solidFill>
@@ -21383,8 +21383,8 @@
         </p:nvSpPr>
         <p:spPr>
           <a:xfrm>
-            <a:off x="850392" y="2048256"/>
-            <a:ext cx="2215819" cy="603504"/>
+            <a:off x="850392" y="1938528"/>
+            <a:ext cx="2215819" cy="539496"/>
           </a:xfrm>
           <a:prstGeom prst="rect">
             <a:avLst/>
@@ -21427,8 +21427,8 @@
         </p:nvSpPr>
         <p:spPr>
           <a:xfrm>
-            <a:off x="850392" y="2221992"/>
-            <a:ext cx="2215819" cy="274320"/>
+            <a:off x="850392" y="2496312"/>
+            <a:ext cx="2215819" cy="256032"/>
           </a:xfrm>
           <a:prstGeom prst="rect">
             <a:avLst/>
@@ -21561,8 +21561,8 @@
         </p:nvSpPr>
         <p:spPr>
           <a:xfrm>
-            <a:off x="3578275" y="2048256"/>
-            <a:ext cx="2215819" cy="603504"/>
+            <a:off x="3578275" y="1938528"/>
+            <a:ext cx="2215819" cy="539496"/>
           </a:xfrm>
           <a:prstGeom prst="rect">
             <a:avLst/>
@@ -21605,8 +21605,8 @@
         </p:nvSpPr>
         <p:spPr>
           <a:xfrm>
-            <a:off x="3578275" y="2221992"/>
-            <a:ext cx="2215819" cy="274320"/>
+            <a:off x="3578275" y="2496312"/>
+            <a:ext cx="2215819" cy="256032"/>
           </a:xfrm>
           <a:prstGeom prst="rect">
             <a:avLst/>
@@ -21739,8 +21739,8 @@
         </p:nvSpPr>
         <p:spPr>
           <a:xfrm>
-            <a:off x="6306159" y="2048256"/>
-            <a:ext cx="2215819" cy="603504"/>
+            <a:off x="6306159" y="1938528"/>
+            <a:ext cx="2215819" cy="539496"/>
           </a:xfrm>
           <a:prstGeom prst="rect">
             <a:avLst/>
@@ -21783,8 +21783,8 @@
         </p:nvSpPr>
         <p:spPr>
           <a:xfrm>
-            <a:off x="6306159" y="2221992"/>
-            <a:ext cx="2215819" cy="274320"/>
+            <a:off x="6306159" y="2496312"/>
+            <a:ext cx="2215819" cy="256032"/>
           </a:xfrm>
           <a:prstGeom prst="rect">
             <a:avLst/>
@@ -21917,8 +21917,8 @@
         </p:nvSpPr>
         <p:spPr>
           <a:xfrm>
-            <a:off x="9034043" y="2048256"/>
-            <a:ext cx="2215819" cy="603504"/>
+            <a:off x="9034043" y="1938528"/>
+            <a:ext cx="2215819" cy="539496"/>
           </a:xfrm>
           <a:prstGeom prst="rect">
             <a:avLst/>
@@ -21961,8 +21961,8 @@
         </p:nvSpPr>
         <p:spPr>
           <a:xfrm>
-            <a:off x="9034043" y="2221992"/>
-            <a:ext cx="2215819" cy="274320"/>
+            <a:off x="9034043" y="2496312"/>
+            <a:ext cx="2215819" cy="256032"/>
           </a:xfrm>
           <a:prstGeom prst="rect">
             <a:avLst/>
@@ -25156,7 +25156,7 @@
               </a:spcAft>
             </a:pPr>
             <a:r>
-              <a:rPr sz="950" b="0" i="0">
+              <a:rPr sz="1000" b="0" i="0">
                 <a:solidFill>
                   <a:srgbClr val="7C8B97"/>
                 </a:solidFill>
@@ -25384,7 +25384,7 @@
               </a:spcAft>
             </a:pPr>
             <a:r>
-              <a:rPr sz="950" b="0" i="0">
+              <a:rPr sz="1000" b="0" i="0">
                 <a:solidFill>
                   <a:srgbClr val="7C8B97"/>
                 </a:solidFill>
@@ -25428,7 +25428,7 @@
               </a:spcAft>
             </a:pPr>
             <a:r>
-              <a:rPr sz="950" b="0" i="0">
+              <a:rPr sz="1000" b="0" i="0">
                 <a:solidFill>
                   <a:srgbClr val="7C8B97"/>
                 </a:solidFill>
@@ -27350,7 +27350,7 @@
               </a:spcAft>
             </a:pPr>
             <a:r>
-              <a:rPr sz="950" b="0" i="0">
+              <a:rPr sz="1000" b="0" i="0">
                 <a:solidFill>
                   <a:srgbClr val="7C8B97"/>
                 </a:solidFill>
@@ -27394,7 +27394,7 @@
               </a:spcAft>
             </a:pPr>
             <a:r>
-              <a:rPr sz="950" b="0" i="0">
+              <a:rPr sz="1000" b="0" i="0">
                 <a:solidFill>
                   <a:srgbClr val="7C8B97"/>
                 </a:solidFill>
@@ -28059,7 +28059,7 @@
               </a:spcAft>
             </a:pPr>
             <a:r>
-              <a:rPr sz="1100" b="1" i="0">
+              <a:rPr sz="1150" b="1" i="0">
                 <a:solidFill>
                   <a:srgbClr val="C5D2DA"/>
                 </a:solidFill>
@@ -28070,7 +28070,7 @@
               <a:t>–  </a:t>
             </a:r>
             <a:r>
-              <a:rPr sz="1100" b="0" i="0">
+              <a:rPr sz="1150" b="0" i="0">
                 <a:solidFill>
                   <a:srgbClr val="7C8B97"/>
                 </a:solidFill>
@@ -28091,7 +28091,7 @@
               </a:spcAft>
             </a:pPr>
             <a:r>
-              <a:rPr sz="1100" b="1" i="0">
+              <a:rPr sz="1150" b="1" i="0">
                 <a:solidFill>
                   <a:srgbClr val="C5D2DA"/>
                 </a:solidFill>
@@ -28102,7 +28102,7 @@
               <a:t>–  </a:t>
             </a:r>
             <a:r>
-              <a:rPr sz="1100" b="0" i="0">
+              <a:rPr sz="1150" b="0" i="0">
                 <a:solidFill>
                   <a:srgbClr val="7C8B97"/>
                 </a:solidFill>
@@ -28155,7 +28155,7 @@
               </a:spcAft>
             </a:pPr>
             <a:r>
-              <a:rPr sz="1100" b="1" i="0">
+              <a:rPr sz="1150" b="1" i="0">
                 <a:solidFill>
                   <a:srgbClr val="C5D2DA"/>
                 </a:solidFill>
@@ -28166,7 +28166,7 @@
               <a:t>–  </a:t>
             </a:r>
             <a:r>
-              <a:rPr sz="1100" b="0" i="0">
+              <a:rPr sz="1150" b="0" i="0">
                 <a:solidFill>
                   <a:srgbClr val="7C8B97"/>
                 </a:solidFill>
@@ -28187,7 +28187,7 @@
               </a:spcAft>
             </a:pPr>
             <a:r>
-              <a:rPr sz="1100" b="1" i="0">
+              <a:rPr sz="1150" b="1" i="0">
                 <a:solidFill>
                   <a:srgbClr val="C5D2DA"/>
                 </a:solidFill>
@@ -28198,7 +28198,7 @@
               <a:t>–  </a:t>
             </a:r>
             <a:r>
-              <a:rPr sz="1100" b="0" i="0">
+              <a:rPr sz="1150" b="0" i="0">
                 <a:solidFill>
                   <a:srgbClr val="7C8B97"/>
                 </a:solidFill>
@@ -28219,7 +28219,7 @@
               </a:spcAft>
             </a:pPr>
             <a:r>
-              <a:rPr sz="1100" b="1" i="0">
+              <a:rPr sz="1150" b="1" i="0">
                 <a:solidFill>
                   <a:srgbClr val="C5D2DA"/>
                 </a:solidFill>
@@ -28230,7 +28230,7 @@
               <a:t>–  </a:t>
             </a:r>
             <a:r>
-              <a:rPr sz="1100" b="0" i="0">
+              <a:rPr sz="1150" b="0" i="0">
                 <a:solidFill>
                   <a:srgbClr val="7C8B97"/>
                 </a:solidFill>
@@ -28458,7 +28458,7 @@
               </a:spcAft>
             </a:pPr>
             <a:r>
-              <a:rPr sz="950" b="0" i="0">
+              <a:rPr sz="1000" b="0" i="0">
                 <a:solidFill>
                   <a:srgbClr val="7C8B97"/>
                 </a:solidFill>
@@ -28502,7 +28502,7 @@
               </a:spcAft>
             </a:pPr>
             <a:r>
-              <a:rPr sz="950" b="0" i="0">
+              <a:rPr sz="1000" b="0" i="0">
                 <a:solidFill>
                   <a:srgbClr val="7C8B97"/>
                 </a:solidFill>
@@ -29988,7 +29988,7 @@
               </a:spcAft>
             </a:pPr>
             <a:r>
-              <a:rPr sz="1100" b="1" i="0">
+              <a:rPr sz="1150" b="1" i="0">
                 <a:solidFill>
                   <a:srgbClr val="C5D2DA"/>
                 </a:solidFill>
@@ -29999,7 +29999,7 @@
               <a:t>–  </a:t>
             </a:r>
             <a:r>
-              <a:rPr sz="1100" b="0" i="0">
+              <a:rPr sz="1150" b="0" i="0">
                 <a:solidFill>
                   <a:srgbClr val="7C8B97"/>
                 </a:solidFill>
@@ -30435,7 +30435,7 @@
               </a:spcAft>
             </a:pPr>
             <a:r>
-              <a:rPr sz="950" b="0" i="0">
+              <a:rPr sz="1000" b="0" i="0">
                 <a:solidFill>
                   <a:srgbClr val="7C8B97"/>
                 </a:solidFill>
@@ -30479,7 +30479,7 @@
               </a:spcAft>
             </a:pPr>
             <a:r>
-              <a:rPr sz="950" b="0" i="0">
+              <a:rPr sz="1000" b="0" i="0">
                 <a:solidFill>
                   <a:srgbClr val="7C8B97"/>
                 </a:solidFill>
@@ -31640,7 +31640,7 @@
               </a:spcAft>
             </a:pPr>
             <a:r>
-              <a:rPr sz="950" b="0" i="0">
+              <a:rPr sz="1000" b="0" i="0">
                 <a:solidFill>
                   <a:srgbClr val="7C8B97"/>
                 </a:solidFill>
@@ -31684,7 +31684,7 @@
               </a:spcAft>
             </a:pPr>
             <a:r>
-              <a:rPr sz="950" b="0" i="0">
+              <a:rPr sz="1000" b="0" i="0">
                 <a:solidFill>
                   <a:srgbClr val="7C8B97"/>
                 </a:solidFill>
@@ -31863,7 +31863,7 @@
               </a:spcAft>
             </a:pPr>
             <a:r>
-              <a:rPr sz="1050" b="0" i="0">
+              <a:rPr sz="1150" b="0" i="0">
                 <a:solidFill>
                   <a:srgbClr val="7C8B97"/>
                 </a:solidFill>
@@ -32042,7 +32042,7 @@
               </a:spcAft>
             </a:pPr>
             <a:r>
-              <a:rPr sz="1050" b="0" i="0">
+              <a:rPr sz="1150" b="0" i="0">
                 <a:solidFill>
                   <a:srgbClr val="7C8B97"/>
                 </a:solidFill>
@@ -32221,7 +32221,7 @@
               </a:spcAft>
             </a:pPr>
             <a:r>
-              <a:rPr sz="1050" b="0" i="0">
+              <a:rPr sz="1150" b="0" i="0">
                 <a:solidFill>
                   <a:srgbClr val="7C8B97"/>
                 </a:solidFill>
@@ -32400,7 +32400,7 @@
               </a:spcAft>
             </a:pPr>
             <a:r>
-              <a:rPr sz="1050" b="0" i="0">
+              <a:rPr sz="1150" b="0" i="0">
                 <a:solidFill>
                   <a:srgbClr val="7C8B97"/>
                 </a:solidFill>
@@ -32579,7 +32579,7 @@
               </a:spcAft>
             </a:pPr>
             <a:r>
-              <a:rPr sz="1050" b="0" i="0">
+              <a:rPr sz="1150" b="0" i="0">
                 <a:solidFill>
                   <a:srgbClr val="7C8B97"/>
                 </a:solidFill>
@@ -32758,7 +32758,7 @@
               </a:spcAft>
             </a:pPr>
             <a:r>
-              <a:rPr sz="1050" b="0" i="0">
+              <a:rPr sz="1150" b="0" i="0">
                 <a:solidFill>
                   <a:srgbClr val="7C8B97"/>
                 </a:solidFill>
@@ -32937,7 +32937,7 @@
               </a:spcAft>
             </a:pPr>
             <a:r>
-              <a:rPr sz="1050" b="0" i="0">
+              <a:rPr sz="1150" b="0" i="0">
                 <a:solidFill>
                   <a:srgbClr val="7C8B97"/>
                 </a:solidFill>
@@ -33116,7 +33116,7 @@
               </a:spcAft>
             </a:pPr>
             <a:r>
-              <a:rPr sz="1050" b="0" i="0">
+              <a:rPr sz="1150" b="0" i="0">
                 <a:solidFill>
                   <a:srgbClr val="7C8B97"/>
                 </a:solidFill>
@@ -33295,7 +33295,7 @@
               </a:spcAft>
             </a:pPr>
             <a:r>
-              <a:rPr sz="1050" b="0" i="0">
+              <a:rPr sz="1150" b="0" i="0">
                 <a:solidFill>
                   <a:srgbClr val="7C8B97"/>
                 </a:solidFill>
@@ -33916,7 +33916,7 @@
               </a:spcAft>
             </a:pPr>
             <a:r>
-              <a:rPr sz="950" b="0" i="0">
+              <a:rPr sz="1000" b="0" i="0">
                 <a:solidFill>
                   <a:srgbClr val="7C8B97"/>
                 </a:solidFill>
@@ -34144,7 +34144,7 @@
               </a:spcAft>
             </a:pPr>
             <a:r>
-              <a:rPr sz="950" b="0" i="0">
+              <a:rPr sz="1000" b="0" i="0">
                 <a:solidFill>
                   <a:srgbClr val="7C8B97"/>
                 </a:solidFill>
@@ -34188,7 +34188,7 @@
               </a:spcAft>
             </a:pPr>
             <a:r>
-              <a:rPr sz="950" b="0" i="0">
+              <a:rPr sz="1000" b="0" i="0">
                 <a:solidFill>
                   <a:srgbClr val="7C8B97"/>
                 </a:solidFill>
@@ -35460,7 +35460,7 @@
               </a:spcAft>
             </a:pPr>
             <a:r>
-              <a:rPr sz="950" b="0" i="0">
+              <a:rPr sz="1000" b="0" i="0">
                 <a:solidFill>
                   <a:srgbClr val="7C8B97"/>
                 </a:solidFill>
@@ -35504,7 +35504,7 @@
               </a:spcAft>
             </a:pPr>
             <a:r>
-              <a:rPr sz="950" b="0" i="0">
+              <a:rPr sz="1000" b="0" i="0">
                 <a:solidFill>
                   <a:srgbClr val="7C8B97"/>
                 </a:solidFill>
@@ -35752,7 +35752,7 @@
               </a:spcAft>
             </a:pPr>
             <a:r>
-              <a:rPr sz="1100" b="1" i="0">
+              <a:rPr sz="1150" b="1" i="0">
                 <a:solidFill>
                   <a:srgbClr val="C5D2DA"/>
                 </a:solidFill>
@@ -35763,7 +35763,7 @@
               <a:t>–  </a:t>
             </a:r>
             <a:r>
-              <a:rPr sz="1100" b="0" i="0">
+              <a:rPr sz="1150" b="0" i="0">
                 <a:solidFill>
                   <a:srgbClr val="7C8B97"/>
                 </a:solidFill>
@@ -36087,7 +36087,7 @@
               </a:spcAft>
             </a:pPr>
             <a:r>
-              <a:rPr sz="950" b="0" i="0">
+              <a:rPr sz="1000" b="0" i="0">
                 <a:solidFill>
                   <a:srgbClr val="7C8B97"/>
                 </a:solidFill>
@@ -36131,7 +36131,7 @@
               </a:spcAft>
             </a:pPr>
             <a:r>
-              <a:rPr sz="950" b="0" i="0">
+              <a:rPr sz="1000" b="0" i="0">
                 <a:solidFill>
                   <a:srgbClr val="7C8B97"/>
                 </a:solidFill>
@@ -36443,7 +36443,7 @@
               </a:spcAft>
             </a:pPr>
             <a:r>
-              <a:rPr sz="1100" b="1" i="0">
+              <a:rPr sz="1150" b="1" i="0">
                 <a:solidFill>
                   <a:srgbClr val="C5D2DA"/>
                 </a:solidFill>
@@ -36454,7 +36454,7 @@
               <a:t>–  </a:t>
             </a:r>
             <a:r>
-              <a:rPr sz="1100" b="0" i="0">
+              <a:rPr sz="1150" b="0" i="0">
                 <a:solidFill>
                   <a:srgbClr val="7C8B97"/>
                 </a:solidFill>
@@ -36714,7 +36714,7 @@
               </a:spcAft>
             </a:pPr>
             <a:r>
-              <a:rPr sz="950" b="0" i="0">
+              <a:rPr sz="1000" b="0" i="0">
                 <a:solidFill>
                   <a:srgbClr val="7C8B97"/>
                 </a:solidFill>
@@ -36758,7 +36758,7 @@
               </a:spcAft>
             </a:pPr>
             <a:r>
-              <a:rPr sz="950" b="0" i="0">
+              <a:rPr sz="1000" b="0" i="0">
                 <a:solidFill>
                   <a:srgbClr val="7C8B97"/>
                 </a:solidFill>
@@ -37102,7 +37102,7 @@
               </a:spcAft>
             </a:pPr>
             <a:r>
-              <a:rPr sz="1100" b="1" i="0">
+              <a:rPr sz="1150" b="1" i="0">
                 <a:solidFill>
                   <a:srgbClr val="C5D2DA"/>
                 </a:solidFill>
@@ -37113,7 +37113,7 @@
               <a:t>–  </a:t>
             </a:r>
             <a:r>
-              <a:rPr sz="1100" b="0" i="0">
+              <a:rPr sz="1150" b="0" i="0">
                 <a:solidFill>
                   <a:srgbClr val="7C8B97"/>
                 </a:solidFill>
@@ -37341,7 +37341,7 @@
               </a:spcAft>
             </a:pPr>
             <a:r>
-              <a:rPr sz="950" b="0" i="0">
+              <a:rPr sz="1000" b="0" i="0">
                 <a:solidFill>
                   <a:srgbClr val="7C8B97"/>
                 </a:solidFill>
@@ -37385,7 +37385,7 @@
               </a:spcAft>
             </a:pPr>
             <a:r>
-              <a:rPr sz="950" b="0" i="0">
+              <a:rPr sz="1000" b="0" i="0">
                 <a:solidFill>
                   <a:srgbClr val="7C8B97"/>
                 </a:solidFill>
@@ -37729,7 +37729,7 @@
               </a:spcAft>
             </a:pPr>
             <a:r>
-              <a:rPr sz="1100" b="1" i="0">
+              <a:rPr sz="1150" b="1" i="0">
                 <a:solidFill>
                   <a:srgbClr val="C5D2DA"/>
                 </a:solidFill>
@@ -37740,7 +37740,7 @@
               <a:t>–  </a:t>
             </a:r>
             <a:r>
-              <a:rPr sz="1100" b="0" i="0">
+              <a:rPr sz="1150" b="0" i="0">
                 <a:solidFill>
                   <a:srgbClr val="7C8B97"/>
                 </a:solidFill>
@@ -38361,7 +38361,7 @@
               </a:spcAft>
             </a:pPr>
             <a:r>
-              <a:rPr sz="950" b="0" i="0">
+              <a:rPr sz="1000" b="0" i="0">
                 <a:solidFill>
                   <a:srgbClr val="7C8B97"/>
                 </a:solidFill>
@@ -38589,7 +38589,7 @@
               </a:spcAft>
             </a:pPr>
             <a:r>
-              <a:rPr sz="950" b="0" i="0">
+              <a:rPr sz="1000" b="0" i="0">
                 <a:solidFill>
                   <a:srgbClr val="7C8B97"/>
                 </a:solidFill>
@@ -38633,7 +38633,7 @@
               </a:spcAft>
             </a:pPr>
             <a:r>
-              <a:rPr sz="950" b="0" i="0">
+              <a:rPr sz="1000" b="0" i="0">
                 <a:solidFill>
                   <a:srgbClr val="7C8B97"/>
                 </a:solidFill>
@@ -38846,7 +38846,7 @@
               </a:spcAft>
             </a:pPr>
             <a:r>
-              <a:rPr sz="1050" b="1" i="0">
+              <a:rPr sz="1150" b="1" i="0">
                 <a:solidFill>
                   <a:srgbClr val="C5D2DA"/>
                 </a:solidFill>
@@ -38857,7 +38857,7 @@
               <a:t>–  </a:t>
             </a:r>
             <a:r>
-              <a:rPr sz="1050" b="0" i="0">
+              <a:rPr sz="1150" b="0" i="0">
                 <a:solidFill>
                   <a:srgbClr val="7C8B97"/>
                 </a:solidFill>
@@ -38878,7 +38878,7 @@
               </a:spcAft>
             </a:pPr>
             <a:r>
-              <a:rPr sz="1050" b="1" i="0">
+              <a:rPr sz="1150" b="1" i="0">
                 <a:solidFill>
                   <a:srgbClr val="C5D2DA"/>
                 </a:solidFill>
@@ -38889,7 +38889,7 @@
               <a:t>–  </a:t>
             </a:r>
             <a:r>
-              <a:rPr sz="1050" b="0" i="0">
+              <a:rPr sz="1150" b="0" i="0">
                 <a:solidFill>
                   <a:srgbClr val="7C8B97"/>
                 </a:solidFill>
@@ -38942,7 +38942,7 @@
               </a:spcAft>
             </a:pPr>
             <a:r>
-              <a:rPr sz="1050" b="1" i="0">
+              <a:rPr sz="1150" b="1" i="0">
                 <a:solidFill>
                   <a:srgbClr val="C5D2DA"/>
                 </a:solidFill>
@@ -38953,7 +38953,7 @@
               <a:t>–  </a:t>
             </a:r>
             <a:r>
-              <a:rPr sz="1050" b="0" i="0">
+              <a:rPr sz="1150" b="0" i="0">
                 <a:solidFill>
                   <a:srgbClr val="7C8B97"/>
                 </a:solidFill>
@@ -38974,7 +38974,7 @@
               </a:spcAft>
             </a:pPr>
             <a:r>
-              <a:rPr sz="1050" b="1" i="0">
+              <a:rPr sz="1150" b="1" i="0">
                 <a:solidFill>
                   <a:srgbClr val="C5D2DA"/>
                 </a:solidFill>
@@ -38985,7 +38985,7 @@
               <a:t>–  </a:t>
             </a:r>
             <a:r>
-              <a:rPr sz="1050" b="0" i="0">
+              <a:rPr sz="1150" b="0" i="0">
                 <a:solidFill>
                   <a:srgbClr val="7C8B97"/>
                 </a:solidFill>
@@ -39006,7 +39006,7 @@
               </a:spcAft>
             </a:pPr>
             <a:r>
-              <a:rPr sz="1050" b="1" i="0">
+              <a:rPr sz="1150" b="1" i="0">
                 <a:solidFill>
                   <a:srgbClr val="C5D2DA"/>
                 </a:solidFill>
@@ -39017,7 +39017,7 @@
               <a:t>–  </a:t>
             </a:r>
             <a:r>
-              <a:rPr sz="1050" b="0" i="0">
+              <a:rPr sz="1150" b="0" i="0">
                 <a:solidFill>
                   <a:srgbClr val="7C8B97"/>
                 </a:solidFill>
@@ -39070,7 +39070,7 @@
               </a:spcAft>
             </a:pPr>
             <a:r>
-              <a:rPr sz="1050" b="1" i="0">
+              <a:rPr sz="1150" b="1" i="0">
                 <a:solidFill>
                   <a:srgbClr val="C5D2DA"/>
                 </a:solidFill>
@@ -39081,7 +39081,7 @@
               <a:t>–  </a:t>
             </a:r>
             <a:r>
-              <a:rPr sz="1050" b="0" i="0">
+              <a:rPr sz="1150" b="0" i="0">
                 <a:solidFill>
                   <a:srgbClr val="7C8B97"/>
                 </a:solidFill>
@@ -39102,7 +39102,7 @@
               </a:spcAft>
             </a:pPr>
             <a:r>
-              <a:rPr sz="1050" b="1" i="0">
+              <a:rPr sz="1150" b="1" i="0">
                 <a:solidFill>
                   <a:srgbClr val="C5D2DA"/>
                 </a:solidFill>
@@ -39113,7 +39113,7 @@
               <a:t>–  </a:t>
             </a:r>
             <a:r>
-              <a:rPr sz="1050" b="0" i="0">
+              <a:rPr sz="1150" b="0" i="0">
                 <a:solidFill>
                   <a:srgbClr val="7C8B97"/>
                 </a:solidFill>
@@ -39341,7 +39341,7 @@
               </a:spcAft>
             </a:pPr>
             <a:r>
-              <a:rPr sz="950" b="0" i="0">
+              <a:rPr sz="1000" b="0" i="0">
                 <a:solidFill>
                   <a:srgbClr val="7C8B97"/>
                 </a:solidFill>
@@ -39385,7 +39385,7 @@
               </a:spcAft>
             </a:pPr>
             <a:r>
-              <a:rPr sz="950" b="0" i="0">
+              <a:rPr sz="1000" b="0" i="0">
                 <a:solidFill>
                   <a:srgbClr val="7C8B97"/>
                 </a:solidFill>
@@ -39569,7 +39569,7 @@
               </a:spcAft>
             </a:pPr>
             <a:r>
-              <a:rPr sz="1050" b="1" i="0">
+              <a:rPr sz="1150" b="1" i="0">
                 <a:solidFill>
                   <a:srgbClr val="C5D2DA"/>
                 </a:solidFill>
@@ -39580,7 +39580,7 @@
               <a:t>–  </a:t>
             </a:r>
             <a:r>
-              <a:rPr sz="1050" b="0" i="0">
+              <a:rPr sz="1150" b="0" i="0">
                 <a:solidFill>
                   <a:srgbClr val="7C8B97"/>
                 </a:solidFill>
@@ -39601,7 +39601,7 @@
               </a:spcAft>
             </a:pPr>
             <a:r>
-              <a:rPr sz="1050" b="1" i="0">
+              <a:rPr sz="1150" b="1" i="0">
                 <a:solidFill>
                   <a:srgbClr val="C5D2DA"/>
                 </a:solidFill>
@@ -39612,7 +39612,7 @@
               <a:t>–  </a:t>
             </a:r>
             <a:r>
-              <a:rPr sz="1050" b="0" i="0">
+              <a:rPr sz="1150" b="0" i="0">
                 <a:solidFill>
                   <a:srgbClr val="7C8B97"/>
                 </a:solidFill>
@@ -39633,7 +39633,7 @@
               </a:spcAft>
             </a:pPr>
             <a:r>
-              <a:rPr sz="1050" b="1" i="0">
+              <a:rPr sz="1150" b="1" i="0">
                 <a:solidFill>
                   <a:srgbClr val="C5D2DA"/>
                 </a:solidFill>
@@ -39644,7 +39644,7 @@
               <a:t>–  </a:t>
             </a:r>
             <a:r>
-              <a:rPr sz="1050" b="0" i="0">
+              <a:rPr sz="1150" b="0" i="0">
                 <a:solidFill>
                   <a:srgbClr val="7C8B97"/>
                 </a:solidFill>
@@ -39697,7 +39697,7 @@
               </a:spcAft>
             </a:pPr>
             <a:r>
-              <a:rPr sz="1050" b="1" i="0">
+              <a:rPr sz="1150" b="1" i="0">
                 <a:solidFill>
                   <a:srgbClr val="C5D2DA"/>
                 </a:solidFill>
@@ -39708,7 +39708,7 @@
               <a:t>–  </a:t>
             </a:r>
             <a:r>
-              <a:rPr sz="1050" b="0" i="0">
+              <a:rPr sz="1150" b="0" i="0">
                 <a:solidFill>
                   <a:srgbClr val="7C8B97"/>
                 </a:solidFill>
@@ -39729,7 +39729,7 @@
               </a:spcAft>
             </a:pPr>
             <a:r>
-              <a:rPr sz="1050" b="1" i="0">
+              <a:rPr sz="1150" b="1" i="0">
                 <a:solidFill>
                   <a:srgbClr val="C5D2DA"/>
                 </a:solidFill>
@@ -39740,7 +39740,7 @@
               <a:t>–  </a:t>
             </a:r>
             <a:r>
-              <a:rPr sz="1050" b="0" i="0">
+              <a:rPr sz="1150" b="0" i="0">
                 <a:solidFill>
                   <a:srgbClr val="7C8B97"/>
                 </a:solidFill>
@@ -39761,7 +39761,7 @@
               </a:spcAft>
             </a:pPr>
             <a:r>
-              <a:rPr sz="1050" b="1" i="0">
+              <a:rPr sz="1150" b="1" i="0">
                 <a:solidFill>
                   <a:srgbClr val="C5D2DA"/>
                 </a:solidFill>
@@ -39772,7 +39772,7 @@
               <a:t>–  </a:t>
             </a:r>
             <a:r>
-              <a:rPr sz="1050" b="0" i="0">
+              <a:rPr sz="1150" b="0" i="0">
                 <a:solidFill>
                   <a:srgbClr val="7C8B97"/>
                 </a:solidFill>
@@ -39825,7 +39825,7 @@
               </a:spcAft>
             </a:pPr>
             <a:r>
-              <a:rPr sz="1050" b="1" i="0">
+              <a:rPr sz="1150" b="1" i="0">
                 <a:solidFill>
                   <a:srgbClr val="C5D2DA"/>
                 </a:solidFill>
@@ -39836,7 +39836,7 @@
               <a:t>–  </a:t>
             </a:r>
             <a:r>
-              <a:rPr sz="1050" b="0" i="0">
+              <a:rPr sz="1150" b="0" i="0">
                 <a:solidFill>
                   <a:srgbClr val="7C8B97"/>
                 </a:solidFill>
@@ -40064,7 +40064,7 @@
               </a:spcAft>
             </a:pPr>
             <a:r>
-              <a:rPr sz="950" b="0" i="0">
+              <a:rPr sz="1000" b="0" i="0">
                 <a:solidFill>
                   <a:srgbClr val="7C8B97"/>
                 </a:solidFill>
@@ -40108,7 +40108,7 @@
               </a:spcAft>
             </a:pPr>
             <a:r>
-              <a:rPr sz="950" b="0" i="0">
+              <a:rPr sz="1000" b="0" i="0">
                 <a:solidFill>
                   <a:srgbClr val="7C8B97"/>
                 </a:solidFill>
@@ -40902,7 +40902,7 @@
               </a:spcAft>
             </a:pPr>
             <a:r>
-              <a:rPr sz="950" b="0" i="0">
+              <a:rPr sz="1000" b="0" i="0">
                 <a:solidFill>
                   <a:srgbClr val="7C8B97"/>
                 </a:solidFill>
@@ -41130,7 +41130,7 @@
               </a:spcAft>
             </a:pPr>
             <a:r>
-              <a:rPr sz="950" b="0" i="0">
+              <a:rPr sz="1000" b="0" i="0">
                 <a:solidFill>
                   <a:srgbClr val="7C8B97"/>
                 </a:solidFill>
@@ -41174,7 +41174,7 @@
               </a:spcAft>
             </a:pPr>
             <a:r>
-              <a:rPr sz="950" b="0" i="0">
+              <a:rPr sz="1000" b="0" i="0">
                 <a:solidFill>
                   <a:srgbClr val="7C8B97"/>
                 </a:solidFill>
@@ -41358,7 +41358,7 @@
               </a:spcAft>
             </a:pPr>
             <a:r>
-              <a:rPr sz="1050" b="1" i="0">
+              <a:rPr sz="1150" b="1" i="0">
                 <a:solidFill>
                   <a:srgbClr val="C5D2DA"/>
                 </a:solidFill>
@@ -41369,7 +41369,7 @@
               <a:t>–  </a:t>
             </a:r>
             <a:r>
-              <a:rPr sz="1050" b="0" i="0">
+              <a:rPr sz="1150" b="0" i="0">
                 <a:solidFill>
                   <a:srgbClr val="7C8B97"/>
                 </a:solidFill>
@@ -41390,7 +41390,7 @@
               </a:spcAft>
             </a:pPr>
             <a:r>
-              <a:rPr sz="1050" b="1" i="0">
+              <a:rPr sz="1150" b="1" i="0">
                 <a:solidFill>
                   <a:srgbClr val="C5D2DA"/>
                 </a:solidFill>
@@ -41401,7 +41401,7 @@
               <a:t>–  </a:t>
             </a:r>
             <a:r>
-              <a:rPr sz="1050" b="0" i="0">
+              <a:rPr sz="1150" b="0" i="0">
                 <a:solidFill>
                   <a:srgbClr val="7C8B97"/>
                 </a:solidFill>
@@ -41454,7 +41454,7 @@
               </a:spcAft>
             </a:pPr>
             <a:r>
-              <a:rPr sz="1050" b="1" i="0">
+              <a:rPr sz="1150" b="1" i="0">
                 <a:solidFill>
                   <a:srgbClr val="C5D2DA"/>
                 </a:solidFill>
@@ -41465,7 +41465,7 @@
               <a:t>–  </a:t>
             </a:r>
             <a:r>
-              <a:rPr sz="1050" b="0" i="0">
+              <a:rPr sz="1150" b="0" i="0">
                 <a:solidFill>
                   <a:srgbClr val="7C8B97"/>
                 </a:solidFill>
@@ -41486,7 +41486,7 @@
               </a:spcAft>
             </a:pPr>
             <a:r>
-              <a:rPr sz="1200" b="1" i="0">
+              <a:rPr sz="1250" b="1" i="0">
                 <a:solidFill>
                   <a:srgbClr val="C8922E"/>
                 </a:solidFill>
@@ -41497,7 +41497,7 @@
               <a:t>▪  </a:t>
             </a:r>
             <a:r>
-              <a:rPr sz="1200" b="0" i="0">
+              <a:rPr sz="1250" b="0" i="0">
                 <a:solidFill>
                   <a:srgbClr val="3D4D5A"/>
                 </a:solidFill>
@@ -41518,7 +41518,7 @@
               </a:spcAft>
             </a:pPr>
             <a:r>
-              <a:rPr sz="1050" b="1" i="0">
+              <a:rPr sz="1150" b="1" i="0">
                 <a:solidFill>
                   <a:srgbClr val="C5D2DA"/>
                 </a:solidFill>
@@ -41529,7 +41529,7 @@
               <a:t>–  </a:t>
             </a:r>
             <a:r>
-              <a:rPr sz="1050" b="0" i="0">
+              <a:rPr sz="1150" b="0" i="0">
                 <a:solidFill>
                   <a:srgbClr val="7C8B97"/>
                 </a:solidFill>
@@ -41582,7 +41582,7 @@
               </a:spcAft>
             </a:pPr>
             <a:r>
-              <a:rPr sz="1050" b="1" i="0">
+              <a:rPr sz="1150" b="1" i="0">
                 <a:solidFill>
                   <a:srgbClr val="C5D2DA"/>
                 </a:solidFill>
@@ -41593,7 +41593,7 @@
               <a:t>–  </a:t>
             </a:r>
             <a:r>
-              <a:rPr sz="1050" b="0" i="0">
+              <a:rPr sz="1150" b="0" i="0">
                 <a:solidFill>
                   <a:srgbClr val="7C8B97"/>
                 </a:solidFill>
@@ -41614,7 +41614,7 @@
               </a:spcAft>
             </a:pPr>
             <a:r>
-              <a:rPr sz="1050" b="1" i="0">
+              <a:rPr sz="1150" b="1" i="0">
                 <a:solidFill>
                   <a:srgbClr val="C5D2DA"/>
                 </a:solidFill>
@@ -41625,7 +41625,7 @@
               <a:t>–  </a:t>
             </a:r>
             <a:r>
-              <a:rPr sz="1050" b="0" i="0">
+              <a:rPr sz="1150" b="0" i="0">
                 <a:solidFill>
                   <a:srgbClr val="7C8B97"/>
                 </a:solidFill>
@@ -42214,7 +42214,7 @@
               </a:spcAft>
             </a:pPr>
             <a:r>
-              <a:rPr sz="950" b="0" i="0">
+              <a:rPr sz="1000" b="0" i="0">
                 <a:solidFill>
                   <a:srgbClr val="7C8B97"/>
                 </a:solidFill>
@@ -42442,7 +42442,7 @@
               </a:spcAft>
             </a:pPr>
             <a:r>
-              <a:rPr sz="950" b="0" i="0">
+              <a:rPr sz="1000" b="0" i="0">
                 <a:solidFill>
                   <a:srgbClr val="7C8B97"/>
                 </a:solidFill>
@@ -42486,7 +42486,7 @@
               </a:spcAft>
             </a:pPr>
             <a:r>
-              <a:rPr sz="950" b="0" i="0">
+              <a:rPr sz="1000" b="0" i="0">
                 <a:solidFill>
                   <a:srgbClr val="7C8B97"/>
                 </a:solidFill>
@@ -42670,7 +42670,7 @@
               </a:spcAft>
             </a:pPr>
             <a:r>
-              <a:rPr sz="1100" b="1" i="0">
+              <a:rPr sz="1150" b="1" i="0">
                 <a:solidFill>
                   <a:srgbClr val="C5D2DA"/>
                 </a:solidFill>
@@ -42681,7 +42681,7 @@
               <a:t>–  </a:t>
             </a:r>
             <a:r>
-              <a:rPr sz="1100" b="0" i="0">
+              <a:rPr sz="1150" b="0" i="0">
                 <a:solidFill>
                   <a:srgbClr val="7C8B97"/>
                 </a:solidFill>
@@ -42702,7 +42702,7 @@
               </a:spcAft>
             </a:pPr>
             <a:r>
-              <a:rPr sz="1100" b="1" i="0">
+              <a:rPr sz="1150" b="1" i="0">
                 <a:solidFill>
                   <a:srgbClr val="C5D2DA"/>
                 </a:solidFill>
@@ -42713,7 +42713,7 @@
               <a:t>–  </a:t>
             </a:r>
             <a:r>
-              <a:rPr sz="1100" b="0" i="0">
+              <a:rPr sz="1150" b="0" i="0">
                 <a:solidFill>
                   <a:srgbClr val="7C8B97"/>
                 </a:solidFill>
@@ -42734,7 +42734,7 @@
               </a:spcAft>
             </a:pPr>
             <a:r>
-              <a:rPr sz="1100" b="1" i="0">
+              <a:rPr sz="1150" b="1" i="0">
                 <a:solidFill>
                   <a:srgbClr val="C5D2DA"/>
                 </a:solidFill>
@@ -42745,7 +42745,7 @@
               <a:t>–  </a:t>
             </a:r>
             <a:r>
-              <a:rPr sz="1100" b="0" i="0">
+              <a:rPr sz="1150" b="0" i="0">
                 <a:solidFill>
                   <a:srgbClr val="7C8B97"/>
                 </a:solidFill>
@@ -42798,7 +42798,7 @@
               </a:spcAft>
             </a:pPr>
             <a:r>
-              <a:rPr sz="1100" b="1" i="0">
+              <a:rPr sz="1150" b="1" i="0">
                 <a:solidFill>
                   <a:srgbClr val="C5D2DA"/>
                 </a:solidFill>
@@ -42809,7 +42809,7 @@
               <a:t>–  </a:t>
             </a:r>
             <a:r>
-              <a:rPr sz="1100" b="0" i="0">
+              <a:rPr sz="1150" b="0" i="0">
                 <a:solidFill>
                   <a:srgbClr val="7C8B97"/>
                 </a:solidFill>
@@ -42830,7 +42830,7 @@
               </a:spcAft>
             </a:pPr>
             <a:r>
-              <a:rPr sz="1100" b="1" i="0">
+              <a:rPr sz="1150" b="1" i="0">
                 <a:solidFill>
                   <a:srgbClr val="C5D2DA"/>
                 </a:solidFill>
@@ -42841,7 +42841,7 @@
               <a:t>–  </a:t>
             </a:r>
             <a:r>
-              <a:rPr sz="1100" b="0" i="0">
+              <a:rPr sz="1150" b="0" i="0">
                 <a:solidFill>
                   <a:srgbClr val="7C8B97"/>
                 </a:solidFill>
@@ -42862,7 +42862,7 @@
               </a:spcAft>
             </a:pPr>
             <a:r>
-              <a:rPr sz="1100" b="1" i="0">
+              <a:rPr sz="1150" b="1" i="0">
                 <a:solidFill>
                   <a:srgbClr val="C5D2DA"/>
                 </a:solidFill>
@@ -42873,7 +42873,7 @@
               <a:t>–  </a:t>
             </a:r>
             <a:r>
-              <a:rPr sz="1100" b="0" i="0">
+              <a:rPr sz="1150" b="0" i="0">
                 <a:solidFill>
                   <a:srgbClr val="7C8B97"/>
                 </a:solidFill>
@@ -43133,7 +43133,7 @@
               </a:spcAft>
             </a:pPr>
             <a:r>
-              <a:rPr sz="950" b="0" i="0">
+              <a:rPr sz="1000" b="0" i="0">
                 <a:solidFill>
                   <a:srgbClr val="7C8B97"/>
                 </a:solidFill>
@@ -43177,7 +43177,7 @@
               </a:spcAft>
             </a:pPr>
             <a:r>
-              <a:rPr sz="950" b="0" i="0">
+              <a:rPr sz="1000" b="0" i="0">
                 <a:solidFill>
                   <a:srgbClr val="7C8B97"/>
                 </a:solidFill>
@@ -43329,7 +43329,7 @@
               </a:spcAft>
             </a:pPr>
             <a:r>
-              <a:rPr sz="1200" b="1" i="0">
+              <a:rPr sz="1250" b="1" i="0">
                 <a:solidFill>
                   <a:srgbClr val="C8922E"/>
                 </a:solidFill>
@@ -43340,7 +43340,7 @@
               <a:t>▪  </a:t>
             </a:r>
             <a:r>
-              <a:rPr sz="1200" b="0" i="0">
+              <a:rPr sz="1250" b="0" i="0">
                 <a:solidFill>
                   <a:srgbClr val="3D4D5A"/>
                 </a:solidFill>
@@ -43361,7 +43361,7 @@
               </a:spcAft>
             </a:pPr>
             <a:r>
-              <a:rPr sz="1200" b="1" i="0">
+              <a:rPr sz="1250" b="1" i="0">
                 <a:solidFill>
                   <a:srgbClr val="C8922E"/>
                 </a:solidFill>
@@ -43372,7 +43372,7 @@
               <a:t>▪  </a:t>
             </a:r>
             <a:r>
-              <a:rPr sz="1200" b="0" i="0">
+              <a:rPr sz="1250" b="0" i="0">
                 <a:solidFill>
                   <a:srgbClr val="3D4D5A"/>
                 </a:solidFill>
@@ -43393,7 +43393,7 @@
               </a:spcAft>
             </a:pPr>
             <a:r>
-              <a:rPr sz="1200" b="1" i="0">
+              <a:rPr sz="1250" b="1" i="0">
                 <a:solidFill>
                   <a:srgbClr val="C8922E"/>
                 </a:solidFill>
@@ -43404,7 +43404,7 @@
               <a:t>▪  </a:t>
             </a:r>
             <a:r>
-              <a:rPr sz="1200" b="0" i="0">
+              <a:rPr sz="1250" b="0" i="0">
                 <a:solidFill>
                   <a:srgbClr val="3D4D5A"/>
                 </a:solidFill>
@@ -43425,7 +43425,7 @@
               </a:spcAft>
             </a:pPr>
             <a:r>
-              <a:rPr sz="1200" b="1" i="0">
+              <a:rPr sz="1250" b="1" i="0">
                 <a:solidFill>
                   <a:srgbClr val="C8922E"/>
                 </a:solidFill>
@@ -43436,7 +43436,7 @@
               <a:t>▪  </a:t>
             </a:r>
             <a:r>
-              <a:rPr sz="1200" b="0" i="0">
+              <a:rPr sz="1250" b="0" i="0">
                 <a:solidFill>
                   <a:srgbClr val="3D4D5A"/>
                 </a:solidFill>
@@ -43489,7 +43489,7 @@
               </a:spcAft>
             </a:pPr>
             <a:r>
-              <a:rPr sz="1050" b="1" i="0">
+              <a:rPr sz="1150" b="1" i="0">
                 <a:solidFill>
                   <a:srgbClr val="C5D2DA"/>
                 </a:solidFill>
@@ -43500,7 +43500,7 @@
               <a:t>–  </a:t>
             </a:r>
             <a:r>
-              <a:rPr sz="1050" b="0" i="0">
+              <a:rPr sz="1150" b="0" i="0">
                 <a:solidFill>
                   <a:srgbClr val="7C8B97"/>
                 </a:solidFill>
@@ -43521,7 +43521,7 @@
               </a:spcAft>
             </a:pPr>
             <a:r>
-              <a:rPr sz="1050" b="1" i="0">
+              <a:rPr sz="1150" b="1" i="0">
                 <a:solidFill>
                   <a:srgbClr val="C5D2DA"/>
                 </a:solidFill>
@@ -43532,7 +43532,7 @@
               <a:t>–  </a:t>
             </a:r>
             <a:r>
-              <a:rPr sz="1050" b="0" i="0">
+              <a:rPr sz="1150" b="0" i="0">
                 <a:solidFill>
                   <a:srgbClr val="7C8B97"/>
                 </a:solidFill>
@@ -43553,7 +43553,7 @@
               </a:spcAft>
             </a:pPr>
             <a:r>
-              <a:rPr sz="1200" b="1" i="0">
+              <a:rPr sz="1250" b="1" i="0">
                 <a:solidFill>
                   <a:srgbClr val="C8922E"/>
                 </a:solidFill>
@@ -43564,7 +43564,7 @@
               <a:t>▪  </a:t>
             </a:r>
             <a:r>
-              <a:rPr sz="1200" b="0" i="0">
+              <a:rPr sz="1250" b="0" i="0">
                 <a:solidFill>
                   <a:srgbClr val="3D4D5A"/>
                 </a:solidFill>
@@ -43585,7 +43585,7 @@
               </a:spcAft>
             </a:pPr>
             <a:r>
-              <a:rPr sz="1200" b="1" i="0">
+              <a:rPr sz="1250" b="1" i="0">
                 <a:solidFill>
                   <a:srgbClr val="C8922E"/>
                 </a:solidFill>
@@ -43596,7 +43596,7 @@
               <a:t>▪  </a:t>
             </a:r>
             <a:r>
-              <a:rPr sz="1200" b="0" i="0">
+              <a:rPr sz="1250" b="0" i="0">
                 <a:solidFill>
                   <a:srgbClr val="3D4D5A"/>
                 </a:solidFill>
@@ -43824,7 +43824,7 @@
               </a:spcAft>
             </a:pPr>
             <a:r>
-              <a:rPr sz="950" b="0" i="0">
+              <a:rPr sz="1000" b="0" i="0">
                 <a:solidFill>
                   <a:srgbClr val="7C8B97"/>
                 </a:solidFill>
@@ -43868,7 +43868,7 @@
               </a:spcAft>
             </a:pPr>
             <a:r>
-              <a:rPr sz="950" b="0" i="0">
+              <a:rPr sz="1000" b="0" i="0">
                 <a:solidFill>
                   <a:srgbClr val="7C8B97"/>
                 </a:solidFill>
@@ -44419,7 +44419,7 @@
               </a:spcAft>
             </a:pPr>
             <a:r>
-              <a:rPr sz="950" b="0" i="0">
+              <a:rPr sz="1000" b="0" i="0">
                 <a:solidFill>
                   <a:srgbClr val="7C8B97"/>
                 </a:solidFill>
@@ -44463,7 +44463,7 @@
               </a:spcAft>
             </a:pPr>
             <a:r>
-              <a:rPr sz="950" b="0" i="0">
+              <a:rPr sz="1000" b="0" i="0">
                 <a:solidFill>
                   <a:srgbClr val="7C8B97"/>
                 </a:solidFill>
@@ -44615,7 +44615,7 @@
               </a:spcAft>
             </a:pPr>
             <a:r>
-              <a:rPr sz="1200" b="1" i="0">
+              <a:rPr sz="1250" b="1" i="0">
                 <a:solidFill>
                   <a:srgbClr val="C8922E"/>
                 </a:solidFill>
@@ -44626,7 +44626,7 @@
               <a:t>▪  </a:t>
             </a:r>
             <a:r>
-              <a:rPr sz="1200" b="0" i="0">
+              <a:rPr sz="1250" b="0" i="0">
                 <a:solidFill>
                   <a:srgbClr val="3D4D5A"/>
                 </a:solidFill>
@@ -44647,7 +44647,7 @@
               </a:spcAft>
             </a:pPr>
             <a:r>
-              <a:rPr sz="1200" b="1" i="0">
+              <a:rPr sz="1250" b="1" i="0">
                 <a:solidFill>
                   <a:srgbClr val="C8922E"/>
                 </a:solidFill>
@@ -44658,7 +44658,7 @@
               <a:t>▪  </a:t>
             </a:r>
             <a:r>
-              <a:rPr sz="1200" b="0" i="0">
+              <a:rPr sz="1250" b="0" i="0">
                 <a:solidFill>
                   <a:srgbClr val="3D4D5A"/>
                 </a:solidFill>
@@ -44679,7 +44679,7 @@
               </a:spcAft>
             </a:pPr>
             <a:r>
-              <a:rPr sz="1200" b="1" i="0">
+              <a:rPr sz="1250" b="1" i="0">
                 <a:solidFill>
                   <a:srgbClr val="C8922E"/>
                 </a:solidFill>
@@ -44690,7 +44690,7 @@
               <a:t>▪  </a:t>
             </a:r>
             <a:r>
-              <a:rPr sz="1200" b="0" i="0">
+              <a:rPr sz="1250" b="0" i="0">
                 <a:solidFill>
                   <a:srgbClr val="3D4D5A"/>
                 </a:solidFill>
@@ -44743,7 +44743,7 @@
               </a:spcAft>
             </a:pPr>
             <a:r>
-              <a:rPr sz="1050" b="1" i="0">
+              <a:rPr sz="1150" b="1" i="0">
                 <a:solidFill>
                   <a:srgbClr val="C5D2DA"/>
                 </a:solidFill>
@@ -44754,7 +44754,7 @@
               <a:t>–  </a:t>
             </a:r>
             <a:r>
-              <a:rPr sz="1050" b="0" i="0">
+              <a:rPr sz="1150" b="0" i="0">
                 <a:solidFill>
                   <a:srgbClr val="7C8B97"/>
                 </a:solidFill>
@@ -44775,7 +44775,7 @@
               </a:spcAft>
             </a:pPr>
             <a:r>
-              <a:rPr sz="1050" b="1" i="0">
+              <a:rPr sz="1150" b="1" i="0">
                 <a:solidFill>
                   <a:srgbClr val="C5D2DA"/>
                 </a:solidFill>
@@ -44786,7 +44786,7 @@
               <a:t>–  </a:t>
             </a:r>
             <a:r>
-              <a:rPr sz="1050" b="0" i="0">
+              <a:rPr sz="1150" b="0" i="0">
                 <a:solidFill>
                   <a:srgbClr val="7C8B97"/>
                 </a:solidFill>
@@ -44807,7 +44807,7 @@
               </a:spcAft>
             </a:pPr>
             <a:r>
-              <a:rPr sz="1050" b="1" i="0">
+              <a:rPr sz="1150" b="1" i="0">
                 <a:solidFill>
                   <a:srgbClr val="C5D2DA"/>
                 </a:solidFill>
@@ -44818,7 +44818,7 @@
               <a:t>–  </a:t>
             </a:r>
             <a:r>
-              <a:rPr sz="1050" b="0" i="0">
+              <a:rPr sz="1150" b="0" i="0">
                 <a:solidFill>
                   <a:srgbClr val="7C8B97"/>
                 </a:solidFill>
@@ -44839,7 +44839,7 @@
               </a:spcAft>
             </a:pPr>
             <a:r>
-              <a:rPr sz="1200" b="1" i="0">
+              <a:rPr sz="1250" b="1" i="0">
                 <a:solidFill>
                   <a:srgbClr val="C8922E"/>
                 </a:solidFill>
@@ -44850,7 +44850,7 @@
               <a:t>▪  </a:t>
             </a:r>
             <a:r>
-              <a:rPr sz="1200" b="0" i="0">
+              <a:rPr sz="1250" b="0" i="0">
                 <a:solidFill>
                   <a:srgbClr val="3D4D5A"/>
                 </a:solidFill>
@@ -45439,7 +45439,7 @@
               </a:spcAft>
             </a:pPr>
             <a:r>
-              <a:rPr sz="950" b="0" i="0">
+              <a:rPr sz="1000" b="0" i="0">
                 <a:solidFill>
                   <a:srgbClr val="7C8B97"/>
                 </a:solidFill>
@@ -45667,7 +45667,7 @@
               </a:spcAft>
             </a:pPr>
             <a:r>
-              <a:rPr sz="950" b="0" i="0">
+              <a:rPr sz="1000" b="0" i="0">
                 <a:solidFill>
                   <a:srgbClr val="7C8B97"/>
                 </a:solidFill>
@@ -45711,7 +45711,7 @@
               </a:spcAft>
             </a:pPr>
             <a:r>
-              <a:rPr sz="950" b="0" i="0">
+              <a:rPr sz="1000" b="0" i="0">
                 <a:solidFill>
                   <a:srgbClr val="7C8B97"/>
                 </a:solidFill>
@@ -47361,7 +47361,7 @@
               </a:spcAft>
             </a:pPr>
             <a:r>
-              <a:rPr sz="950" b="0" i="0">
+              <a:rPr sz="1000" b="0" i="0">
                 <a:solidFill>
                   <a:srgbClr val="7C8B97"/>
                 </a:solidFill>
@@ -47405,7 +47405,7 @@
               </a:spcAft>
             </a:pPr>
             <a:r>
-              <a:rPr sz="950" b="0" i="0">
+              <a:rPr sz="1000" b="0" i="0">
                 <a:solidFill>
                   <a:srgbClr val="7C8B97"/>
                 </a:solidFill>
@@ -47956,7 +47956,7 @@
               </a:spcAft>
             </a:pPr>
             <a:r>
-              <a:rPr sz="950" b="0" i="0">
+              <a:rPr sz="1000" b="0" i="0">
                 <a:solidFill>
                   <a:srgbClr val="7C8B97"/>
                 </a:solidFill>
@@ -48000,7 +48000,7 @@
               </a:spcAft>
             </a:pPr>
             <a:r>
-              <a:rPr sz="950" b="0" i="0">
+              <a:rPr sz="1000" b="0" i="0">
                 <a:solidFill>
                   <a:srgbClr val="7C8B97"/>
                 </a:solidFill>
@@ -49974,7 +49974,7 @@
               </a:spcAft>
             </a:pPr>
             <a:r>
-              <a:rPr sz="950" b="0" i="0">
+              <a:rPr sz="1000" b="0" i="0">
                 <a:solidFill>
                   <a:srgbClr val="7C8B97"/>
                 </a:solidFill>
@@ -50018,7 +50018,7 @@
               </a:spcAft>
             </a:pPr>
             <a:r>
-              <a:rPr sz="950" b="0" i="0">
+              <a:rPr sz="1000" b="0" i="0">
                 <a:solidFill>
                   <a:srgbClr val="7C8B97"/>
                 </a:solidFill>
@@ -51133,7 +51133,7 @@
               </a:spcAft>
             </a:pPr>
             <a:r>
-              <a:rPr sz="950" b="0" i="0">
+              <a:rPr sz="1000" b="0" i="0">
                 <a:solidFill>
                   <a:srgbClr val="7C8B97"/>
                 </a:solidFill>
@@ -51177,7 +51177,7 @@
               </a:spcAft>
             </a:pPr>
             <a:r>
-              <a:rPr sz="950" b="0" i="0">
+              <a:rPr sz="1000" b="0" i="0">
                 <a:solidFill>
                   <a:srgbClr val="7C8B97"/>
                 </a:solidFill>
@@ -51397,7 +51397,7 @@
         </p:nvSpPr>
         <p:spPr>
           <a:xfrm>
-            <a:off x="1143000" y="2706624"/>
+            <a:off x="1143000" y="2724912"/>
             <a:ext cx="2783738" cy="219456"/>
           </a:xfrm>
           <a:prstGeom prst="rect">
@@ -51420,7 +51420,7 @@
               </a:spcAft>
             </a:pPr>
             <a:r>
-              <a:rPr sz="1000" b="0" i="0">
+              <a:rPr sz="1100" b="0" i="0">
                 <a:solidFill>
                   <a:srgbClr val="7C8B97"/>
                 </a:solidFill>
@@ -51506,7 +51506,7 @@
         </p:nvSpPr>
         <p:spPr>
           <a:xfrm>
-            <a:off x="1143000" y="3163824"/>
+            <a:off x="1143000" y="3182112"/>
             <a:ext cx="2783738" cy="219456"/>
           </a:xfrm>
           <a:prstGeom prst="rect">
@@ -51529,7 +51529,7 @@
               </a:spcAft>
             </a:pPr>
             <a:r>
-              <a:rPr sz="1000" b="0" i="0">
+              <a:rPr sz="1100" b="0" i="0">
                 <a:solidFill>
                   <a:srgbClr val="7C8B97"/>
                 </a:solidFill>
@@ -51615,7 +51615,7 @@
         </p:nvSpPr>
         <p:spPr>
           <a:xfrm>
-            <a:off x="1143000" y="3621024"/>
+            <a:off x="1143000" y="3639312"/>
             <a:ext cx="2783738" cy="219456"/>
           </a:xfrm>
           <a:prstGeom prst="rect">
@@ -51638,7 +51638,7 @@
               </a:spcAft>
             </a:pPr>
             <a:r>
-              <a:rPr sz="1000" b="0" i="0">
+              <a:rPr sz="1100" b="0" i="0">
                 <a:solidFill>
                   <a:srgbClr val="7C8B97"/>
                 </a:solidFill>
@@ -51724,7 +51724,7 @@
         </p:nvSpPr>
         <p:spPr>
           <a:xfrm>
-            <a:off x="1143000" y="4078224"/>
+            <a:off x="1143000" y="4096512"/>
             <a:ext cx="2783738" cy="219456"/>
           </a:xfrm>
           <a:prstGeom prst="rect">
@@ -51747,7 +51747,7 @@
               </a:spcAft>
             </a:pPr>
             <a:r>
-              <a:rPr sz="1000" b="0" i="0">
+              <a:rPr sz="1100" b="0" i="0">
                 <a:solidFill>
                   <a:srgbClr val="7C8B97"/>
                 </a:solidFill>
@@ -51967,7 +51967,7 @@
         </p:nvSpPr>
         <p:spPr>
           <a:xfrm>
-            <a:off x="4886858" y="2706624"/>
+            <a:off x="4886858" y="2724912"/>
             <a:ext cx="2783738" cy="219456"/>
           </a:xfrm>
           <a:prstGeom prst="rect">
@@ -51990,7 +51990,7 @@
               </a:spcAft>
             </a:pPr>
             <a:r>
-              <a:rPr sz="1000" b="0" i="0">
+              <a:rPr sz="1100" b="0" i="0">
                 <a:solidFill>
                   <a:srgbClr val="7C8B97"/>
                 </a:solidFill>
@@ -52076,7 +52076,7 @@
         </p:nvSpPr>
         <p:spPr>
           <a:xfrm>
-            <a:off x="4886858" y="3163824"/>
+            <a:off x="4886858" y="3182112"/>
             <a:ext cx="2783738" cy="219456"/>
           </a:xfrm>
           <a:prstGeom prst="rect">
@@ -52099,7 +52099,7 @@
               </a:spcAft>
             </a:pPr>
             <a:r>
-              <a:rPr sz="1000" b="0" i="0">
+              <a:rPr sz="1100" b="0" i="0">
                 <a:solidFill>
                   <a:srgbClr val="7C8B97"/>
                 </a:solidFill>
@@ -52185,7 +52185,7 @@
         </p:nvSpPr>
         <p:spPr>
           <a:xfrm>
-            <a:off x="4886858" y="3621024"/>
+            <a:off x="4886858" y="3639312"/>
             <a:ext cx="2783738" cy="219456"/>
           </a:xfrm>
           <a:prstGeom prst="rect">
@@ -52208,7 +52208,7 @@
               </a:spcAft>
             </a:pPr>
             <a:r>
-              <a:rPr sz="1000" b="0" i="0">
+              <a:rPr sz="1100" b="0" i="0">
                 <a:solidFill>
                   <a:srgbClr val="7C8B97"/>
                 </a:solidFill>
@@ -52294,7 +52294,7 @@
         </p:nvSpPr>
         <p:spPr>
           <a:xfrm>
-            <a:off x="4886858" y="4078224"/>
+            <a:off x="4886858" y="4096512"/>
             <a:ext cx="2783738" cy="219456"/>
           </a:xfrm>
           <a:prstGeom prst="rect">
@@ -52317,7 +52317,7 @@
               </a:spcAft>
             </a:pPr>
             <a:r>
-              <a:rPr sz="1000" b="0" i="0">
+              <a:rPr sz="1100" b="0" i="0">
                 <a:solidFill>
                   <a:srgbClr val="7C8B97"/>
                 </a:solidFill>
@@ -52403,7 +52403,7 @@
         </p:nvSpPr>
         <p:spPr>
           <a:xfrm>
-            <a:off x="4886858" y="4535424"/>
+            <a:off x="4886858" y="4553712"/>
             <a:ext cx="2783738" cy="219456"/>
           </a:xfrm>
           <a:prstGeom prst="rect">
@@ -52426,7 +52426,7 @@
               </a:spcAft>
             </a:pPr>
             <a:r>
-              <a:rPr sz="1000" b="0" i="0">
+              <a:rPr sz="1100" b="0" i="0">
                 <a:solidFill>
                   <a:srgbClr val="7C8B97"/>
                 </a:solidFill>
@@ -52512,7 +52512,7 @@
         </p:nvSpPr>
         <p:spPr>
           <a:xfrm>
-            <a:off x="4886858" y="4992624"/>
+            <a:off x="4886858" y="5010912"/>
             <a:ext cx="2783738" cy="219456"/>
           </a:xfrm>
           <a:prstGeom prst="rect">
@@ -52535,7 +52535,7 @@
               </a:spcAft>
             </a:pPr>
             <a:r>
-              <a:rPr sz="1000" b="0" i="0">
+              <a:rPr sz="1100" b="0" i="0">
                 <a:solidFill>
                   <a:srgbClr val="7C8B97"/>
                 </a:solidFill>
@@ -52621,7 +52621,7 @@
         </p:nvSpPr>
         <p:spPr>
           <a:xfrm>
-            <a:off x="4886858" y="5449824"/>
+            <a:off x="4886858" y="5468112"/>
             <a:ext cx="2783738" cy="219456"/>
           </a:xfrm>
           <a:prstGeom prst="rect">
@@ -52644,7 +52644,7 @@
               </a:spcAft>
             </a:pPr>
             <a:r>
-              <a:rPr sz="1000" b="0" i="0">
+              <a:rPr sz="1100" b="0" i="0">
                 <a:solidFill>
                   <a:srgbClr val="7C8B97"/>
                 </a:solidFill>
@@ -52864,7 +52864,7 @@
         </p:nvSpPr>
         <p:spPr>
           <a:xfrm>
-            <a:off x="8630716" y="2706624"/>
+            <a:off x="8630716" y="2724912"/>
             <a:ext cx="2783738" cy="219456"/>
           </a:xfrm>
           <a:prstGeom prst="rect">
@@ -52887,7 +52887,7 @@
               </a:spcAft>
             </a:pPr>
             <a:r>
-              <a:rPr sz="1000" b="0" i="0">
+              <a:rPr sz="1100" b="0" i="0">
                 <a:solidFill>
                   <a:srgbClr val="7C8B97"/>
                 </a:solidFill>
@@ -52973,7 +52973,7 @@
         </p:nvSpPr>
         <p:spPr>
           <a:xfrm>
-            <a:off x="8630716" y="3163824"/>
+            <a:off x="8630716" y="3182112"/>
             <a:ext cx="2783738" cy="219456"/>
           </a:xfrm>
           <a:prstGeom prst="rect">
@@ -52996,7 +52996,7 @@
               </a:spcAft>
             </a:pPr>
             <a:r>
-              <a:rPr sz="1000" b="0" i="0">
+              <a:rPr sz="1100" b="0" i="0">
                 <a:solidFill>
                   <a:srgbClr val="7C8B97"/>
                 </a:solidFill>
@@ -53082,7 +53082,7 @@
         </p:nvSpPr>
         <p:spPr>
           <a:xfrm>
-            <a:off x="8630716" y="3621024"/>
+            <a:off x="8630716" y="3639312"/>
             <a:ext cx="2783738" cy="219456"/>
           </a:xfrm>
           <a:prstGeom prst="rect">
@@ -53105,7 +53105,7 @@
               </a:spcAft>
             </a:pPr>
             <a:r>
-              <a:rPr sz="1000" b="0" i="0">
+              <a:rPr sz="1100" b="0" i="0">
                 <a:solidFill>
                   <a:srgbClr val="7C8B97"/>
                 </a:solidFill>
@@ -53191,7 +53191,7 @@
         </p:nvSpPr>
         <p:spPr>
           <a:xfrm>
-            <a:off x="8630716" y="4078224"/>
+            <a:off x="8630716" y="4096512"/>
             <a:ext cx="2783738" cy="219456"/>
           </a:xfrm>
           <a:prstGeom prst="rect">
@@ -53214,7 +53214,7 @@
               </a:spcAft>
             </a:pPr>
             <a:r>
-              <a:rPr sz="1000" b="0" i="0">
+              <a:rPr sz="1100" b="0" i="0">
                 <a:solidFill>
                   <a:srgbClr val="7C8B97"/>
                 </a:solidFill>
@@ -54808,7 +54808,7 @@
               </a:spcAft>
             </a:pPr>
             <a:r>
-              <a:rPr sz="950" b="0" i="0">
+              <a:rPr sz="1000" b="0" i="0">
                 <a:solidFill>
                   <a:srgbClr val="7C8B97"/>
                 </a:solidFill>
@@ -54852,7 +54852,7 @@
               </a:spcAft>
             </a:pPr>
             <a:r>
-              <a:rPr sz="950" b="0" i="0">
+              <a:rPr sz="1000" b="0" i="0">
                 <a:solidFill>
                   <a:srgbClr val="7C8B97"/>
                 </a:solidFill>
@@ -55746,7 +55746,7 @@
               </a:spcAft>
             </a:pPr>
             <a:r>
-              <a:rPr sz="950" b="0" i="0">
+              <a:rPr sz="1000" b="0" i="0">
                 <a:solidFill>
                   <a:srgbClr val="7C8B97"/>
                 </a:solidFill>
@@ -55790,7 +55790,7 @@
               </a:spcAft>
             </a:pPr>
             <a:r>
-              <a:rPr sz="950" b="0" i="0">
+              <a:rPr sz="1000" b="0" i="0">
                 <a:solidFill>
                   <a:srgbClr val="7C8B97"/>
                 </a:solidFill>
@@ -57417,7 +57417,7 @@
               </a:spcAft>
             </a:pPr>
             <a:r>
-              <a:rPr sz="950" b="0" i="0">
+              <a:rPr sz="1000" b="0" i="0">
                 <a:solidFill>
                   <a:srgbClr val="7C8B97"/>
                 </a:solidFill>
@@ -57645,7 +57645,7 @@
               </a:spcAft>
             </a:pPr>
             <a:r>
-              <a:rPr sz="950" b="0" i="0">
+              <a:rPr sz="1000" b="0" i="0">
                 <a:solidFill>
                   <a:srgbClr val="7C8B97"/>
                 </a:solidFill>
@@ -57689,7 +57689,7 @@
               </a:spcAft>
             </a:pPr>
             <a:r>
-              <a:rPr sz="950" b="0" i="0">
+              <a:rPr sz="1000" b="0" i="0">
                 <a:solidFill>
                   <a:srgbClr val="7C8B97"/>
                 </a:solidFill>

--- a/docs/slides/第2組_海勤決策系統_期末簡報.pptx
+++ b/docs/slides/第2組_海勤決策系統_期末簡報.pptx
@@ -51332,8 +51332,8 @@
         </p:nvSpPr>
         <p:spPr>
           <a:xfrm>
-            <a:off x="841248" y="2487168"/>
-            <a:ext cx="3058058" cy="274320"/>
+            <a:off x="777240" y="2450592"/>
+            <a:ext cx="3149498" cy="475488"/>
           </a:xfrm>
           <a:prstGeom prst="rect">
             <a:avLst/>
@@ -51348,14 +51348,14 @@
           <a:p>
             <a:pPr algn="l">
               <a:lnSpc>
-                <a:spcPct val="112000"/>
-              </a:lnSpc>
-              <a:spcAft>
-                <a:spcPts val="500"/>
-              </a:spcAft>
-            </a:pPr>
-            <a:r>
-              <a:rPr sz="1200" b="1" i="0">
+                <a:spcPct val="105000"/>
+              </a:lnSpc>
+              <a:spcAft>
+                <a:spcPts val="100"/>
+              </a:spcAft>
+            </a:pPr>
+            <a:r>
+              <a:rPr sz="1250" b="1" i="0">
                 <a:solidFill>
                   <a:srgbClr val="1C3D5A"/>
                 </a:solidFill>
@@ -51363,18 +51363,8 @@
                 <a:ea typeface="Microsoft JhengHei"/>
                 <a:cs typeface="Microsoft JhengHei"/>
               </a:rPr>
-              <a:t>✓ </a:t>
-            </a:r>
-          </a:p>
-          <a:p>
-            <a:pPr algn="l">
-              <a:lnSpc>
-                <a:spcPct val="112000"/>
-              </a:lnSpc>
-              <a:spcAft>
-                <a:spcPts val="500"/>
-              </a:spcAft>
-            </a:pPr>
+              <a:t>✓  </a:t>
+            </a:r>
             <a:r>
               <a:rPr sz="1250" b="1" i="0">
                 <a:solidFill>
@@ -51387,6 +51377,27 @@
               <a:t>Python + Pandas</a:t>
             </a:r>
           </a:p>
+          <a:p>
+            <a:pPr algn="l">
+              <a:lnSpc>
+                <a:spcPct val="105000"/>
+              </a:lnSpc>
+              <a:spcAft>
+                <a:spcPts val="100"/>
+              </a:spcAft>
+            </a:pPr>
+            <a:r>
+              <a:rPr sz="1050" b="0" i="0">
+                <a:solidFill>
+                  <a:srgbClr val="7C8B97"/>
+                </a:solidFill>
+                <a:latin typeface="Microsoft JhengHei"/>
+                <a:ea typeface="Microsoft JhengHei"/>
+                <a:cs typeface="Microsoft JhengHei"/>
+              </a:rPr>
+              <a:t>清洗 / 統計 / 排班</a:t>
+            </a:r>
+          </a:p>
         </p:txBody>
       </p:sp>
       <p:sp>
@@ -51397,8 +51408,8 @@
         </p:nvSpPr>
         <p:spPr>
           <a:xfrm>
-            <a:off x="1143000" y="2724912"/>
-            <a:ext cx="2783738" cy="219456"/>
+            <a:off x="777240" y="2926080"/>
+            <a:ext cx="3149498" cy="475488"/>
           </a:xfrm>
           <a:prstGeom prst="rect">
             <a:avLst/>
@@ -51413,14 +51424,46 @@
           <a:p>
             <a:pPr algn="l">
               <a:lnSpc>
-                <a:spcPct val="112000"/>
-              </a:lnSpc>
-              <a:spcAft>
-                <a:spcPts val="500"/>
-              </a:spcAft>
-            </a:pPr>
-            <a:r>
-              <a:rPr sz="1100" b="0" i="0">
+                <a:spcPct val="105000"/>
+              </a:lnSpc>
+              <a:spcAft>
+                <a:spcPts val="100"/>
+              </a:spcAft>
+            </a:pPr>
+            <a:r>
+              <a:rPr sz="1250" b="1" i="0">
+                <a:solidFill>
+                  <a:srgbClr val="1C3D5A"/>
+                </a:solidFill>
+                <a:latin typeface="Microsoft JhengHei"/>
+                <a:ea typeface="Microsoft JhengHei"/>
+                <a:cs typeface="Microsoft JhengHei"/>
+              </a:rPr>
+              <a:t>✓  </a:t>
+            </a:r>
+            <a:r>
+              <a:rPr sz="1250" b="1" i="0">
+                <a:solidFill>
+                  <a:srgbClr val="1C3D5A"/>
+                </a:solidFill>
+                <a:latin typeface="Microsoft JhengHei"/>
+                <a:ea typeface="Microsoft JhengHei"/>
+                <a:cs typeface="Microsoft JhengHei"/>
+              </a:rPr>
+              <a:t>Matplotlib / Seaborn</a:t>
+            </a:r>
+          </a:p>
+          <a:p>
+            <a:pPr algn="l">
+              <a:lnSpc>
+                <a:spcPct val="105000"/>
+              </a:lnSpc>
+              <a:spcAft>
+                <a:spcPts val="100"/>
+              </a:spcAft>
+            </a:pPr>
+            <a:r>
+              <a:rPr sz="1050" b="0" i="0">
                 <a:solidFill>
                   <a:srgbClr val="7C8B97"/>
                 </a:solidFill>
@@ -51428,7 +51471,7 @@
                 <a:ea typeface="Microsoft JhengHei"/>
                 <a:cs typeface="Microsoft JhengHei"/>
               </a:rPr>
-              <a:t>清洗 / 統計 / 排班</a:t>
+              <a:t>25 張圖表</a:t>
             </a:r>
           </a:p>
         </p:txBody>
@@ -51441,8 +51484,8 @@
         </p:nvSpPr>
         <p:spPr>
           <a:xfrm>
-            <a:off x="841248" y="2944368"/>
-            <a:ext cx="3058058" cy="274320"/>
+            <a:off x="777240" y="3401568"/>
+            <a:ext cx="3149498" cy="475488"/>
           </a:xfrm>
           <a:prstGeom prst="rect">
             <a:avLst/>
@@ -51457,14 +51500,14 @@
           <a:p>
             <a:pPr algn="l">
               <a:lnSpc>
-                <a:spcPct val="112000"/>
-              </a:lnSpc>
-              <a:spcAft>
-                <a:spcPts val="500"/>
-              </a:spcAft>
-            </a:pPr>
-            <a:r>
-              <a:rPr sz="1200" b="1" i="0">
+                <a:spcPct val="105000"/>
+              </a:lnSpc>
+              <a:spcAft>
+                <a:spcPts val="100"/>
+              </a:spcAft>
+            </a:pPr>
+            <a:r>
+              <a:rPr sz="1250" b="1" i="0">
                 <a:solidFill>
                   <a:srgbClr val="1C3D5A"/>
                 </a:solidFill>
@@ -51472,18 +51515,8 @@
                 <a:ea typeface="Microsoft JhengHei"/>
                 <a:cs typeface="Microsoft JhengHei"/>
               </a:rPr>
-              <a:t>✓ </a:t>
-            </a:r>
-          </a:p>
-          <a:p>
-            <a:pPr algn="l">
-              <a:lnSpc>
-                <a:spcPct val="112000"/>
-              </a:lnSpc>
-              <a:spcAft>
-                <a:spcPts val="500"/>
-              </a:spcAft>
-            </a:pPr>
+              <a:t>✓  </a:t>
+            </a:r>
             <a:r>
               <a:rPr sz="1250" b="1" i="0">
                 <a:solidFill>
@@ -51493,7 +51526,28 @@
                 <a:ea typeface="Microsoft JhengHei"/>
                 <a:cs typeface="Microsoft JhengHei"/>
               </a:rPr>
-              <a:t>Matplotlib / Seaborn</a:t>
+              <a:t>Docker Compose</a:t>
+            </a:r>
+          </a:p>
+          <a:p>
+            <a:pPr algn="l">
+              <a:lnSpc>
+                <a:spcPct val="105000"/>
+              </a:lnSpc>
+              <a:spcAft>
+                <a:spcPts val="100"/>
+              </a:spcAft>
+            </a:pPr>
+            <a:r>
+              <a:rPr sz="1050" b="0" i="0">
+                <a:solidFill>
+                  <a:srgbClr val="7C8B97"/>
+                </a:solidFill>
+                <a:latin typeface="Microsoft JhengHei"/>
+                <a:ea typeface="Microsoft JhengHei"/>
+                <a:cs typeface="Microsoft JhengHei"/>
+              </a:rPr>
+              <a:t>三容器一鍵部署</a:t>
             </a:r>
           </a:p>
         </p:txBody>
@@ -51506,8 +51560,8 @@
         </p:nvSpPr>
         <p:spPr>
           <a:xfrm>
-            <a:off x="1143000" y="3182112"/>
-            <a:ext cx="2783738" cy="219456"/>
+            <a:off x="777240" y="3877056"/>
+            <a:ext cx="3149498" cy="475488"/>
           </a:xfrm>
           <a:prstGeom prst="rect">
             <a:avLst/>
@@ -51522,14 +51576,46 @@
           <a:p>
             <a:pPr algn="l">
               <a:lnSpc>
-                <a:spcPct val="112000"/>
-              </a:lnSpc>
-              <a:spcAft>
-                <a:spcPts val="500"/>
-              </a:spcAft>
-            </a:pPr>
-            <a:r>
-              <a:rPr sz="1100" b="0" i="0">
+                <a:spcPct val="105000"/>
+              </a:lnSpc>
+              <a:spcAft>
+                <a:spcPts val="100"/>
+              </a:spcAft>
+            </a:pPr>
+            <a:r>
+              <a:rPr sz="1250" b="1" i="0">
+                <a:solidFill>
+                  <a:srgbClr val="1C3D5A"/>
+                </a:solidFill>
+                <a:latin typeface="Microsoft JhengHei"/>
+                <a:ea typeface="Microsoft JhengHei"/>
+                <a:cs typeface="Microsoft JhengHei"/>
+              </a:rPr>
+              <a:t>✓  </a:t>
+            </a:r>
+            <a:r>
+              <a:rPr sz="1250" b="1" i="0">
+                <a:solidFill>
+                  <a:srgbClr val="1C3D5A"/>
+                </a:solidFill>
+                <a:latin typeface="Microsoft JhengHei"/>
+                <a:ea typeface="Microsoft JhengHei"/>
+                <a:cs typeface="Microsoft JhengHei"/>
+              </a:rPr>
+              <a:t>Git / GitHub</a:t>
+            </a:r>
+          </a:p>
+          <a:p>
+            <a:pPr algn="l">
+              <a:lnSpc>
+                <a:spcPct val="105000"/>
+              </a:lnSpc>
+              <a:spcAft>
+                <a:spcPts val="100"/>
+              </a:spcAft>
+            </a:pPr>
+            <a:r>
+              <a:rPr sz="1050" b="0" i="0">
                 <a:solidFill>
                   <a:srgbClr val="7C8B97"/>
                 </a:solidFill>
@@ -51537,224 +51623,6 @@
                 <a:ea typeface="Microsoft JhengHei"/>
                 <a:cs typeface="Microsoft JhengHei"/>
               </a:rPr>
-              <a:t>25 張圖表</a:t>
-            </a:r>
-          </a:p>
-        </p:txBody>
-      </p:sp>
-      <p:sp>
-        <p:nvSpPr>
-          <p:cNvPr id="15" name="TextBox 14"/>
-          <p:cNvSpPr txBox="1"/>
-          <p:nvPr/>
-        </p:nvSpPr>
-        <p:spPr>
-          <a:xfrm>
-            <a:off x="841248" y="3401568"/>
-            <a:ext cx="3058058" cy="274320"/>
-          </a:xfrm>
-          <a:prstGeom prst="rect">
-            <a:avLst/>
-          </a:prstGeom>
-          <a:noFill/>
-        </p:spPr>
-        <p:txBody>
-          <a:bodyPr wrap="square" anchor="t" lIns="0" rIns="0" tIns="0" bIns="0">
-            <a:spAutoFit/>
-          </a:bodyPr>
-          <a:lstStyle/>
-          <a:p>
-            <a:pPr algn="l">
-              <a:lnSpc>
-                <a:spcPct val="112000"/>
-              </a:lnSpc>
-              <a:spcAft>
-                <a:spcPts val="500"/>
-              </a:spcAft>
-            </a:pPr>
-            <a:r>
-              <a:rPr sz="1200" b="1" i="0">
-                <a:solidFill>
-                  <a:srgbClr val="1C3D5A"/>
-                </a:solidFill>
-                <a:latin typeface="Microsoft JhengHei"/>
-                <a:ea typeface="Microsoft JhengHei"/>
-                <a:cs typeface="Microsoft JhengHei"/>
-              </a:rPr>
-              <a:t>✓ </a:t>
-            </a:r>
-          </a:p>
-          <a:p>
-            <a:pPr algn="l">
-              <a:lnSpc>
-                <a:spcPct val="112000"/>
-              </a:lnSpc>
-              <a:spcAft>
-                <a:spcPts val="500"/>
-              </a:spcAft>
-            </a:pPr>
-            <a:r>
-              <a:rPr sz="1250" b="1" i="0">
-                <a:solidFill>
-                  <a:srgbClr val="1C3D5A"/>
-                </a:solidFill>
-                <a:latin typeface="Microsoft JhengHei"/>
-                <a:ea typeface="Microsoft JhengHei"/>
-                <a:cs typeface="Microsoft JhengHei"/>
-              </a:rPr>
-              <a:t>Docker Compose</a:t>
-            </a:r>
-          </a:p>
-        </p:txBody>
-      </p:sp>
-      <p:sp>
-        <p:nvSpPr>
-          <p:cNvPr id="16" name="TextBox 15"/>
-          <p:cNvSpPr txBox="1"/>
-          <p:nvPr/>
-        </p:nvSpPr>
-        <p:spPr>
-          <a:xfrm>
-            <a:off x="1143000" y="3639312"/>
-            <a:ext cx="2783738" cy="219456"/>
-          </a:xfrm>
-          <a:prstGeom prst="rect">
-            <a:avLst/>
-          </a:prstGeom>
-          <a:noFill/>
-        </p:spPr>
-        <p:txBody>
-          <a:bodyPr wrap="square" anchor="t" lIns="0" rIns="0" tIns="0" bIns="0">
-            <a:spAutoFit/>
-          </a:bodyPr>
-          <a:lstStyle/>
-          <a:p>
-            <a:pPr algn="l">
-              <a:lnSpc>
-                <a:spcPct val="112000"/>
-              </a:lnSpc>
-              <a:spcAft>
-                <a:spcPts val="500"/>
-              </a:spcAft>
-            </a:pPr>
-            <a:r>
-              <a:rPr sz="1100" b="0" i="0">
-                <a:solidFill>
-                  <a:srgbClr val="7C8B97"/>
-                </a:solidFill>
-                <a:latin typeface="Microsoft JhengHei"/>
-                <a:ea typeface="Microsoft JhengHei"/>
-                <a:cs typeface="Microsoft JhengHei"/>
-              </a:rPr>
-              <a:t>三容器一鍵部署</a:t>
-            </a:r>
-          </a:p>
-        </p:txBody>
-      </p:sp>
-      <p:sp>
-        <p:nvSpPr>
-          <p:cNvPr id="17" name="TextBox 16"/>
-          <p:cNvSpPr txBox="1"/>
-          <p:nvPr/>
-        </p:nvSpPr>
-        <p:spPr>
-          <a:xfrm>
-            <a:off x="841248" y="3858768"/>
-            <a:ext cx="3058058" cy="274320"/>
-          </a:xfrm>
-          <a:prstGeom prst="rect">
-            <a:avLst/>
-          </a:prstGeom>
-          <a:noFill/>
-        </p:spPr>
-        <p:txBody>
-          <a:bodyPr wrap="square" anchor="t" lIns="0" rIns="0" tIns="0" bIns="0">
-            <a:spAutoFit/>
-          </a:bodyPr>
-          <a:lstStyle/>
-          <a:p>
-            <a:pPr algn="l">
-              <a:lnSpc>
-                <a:spcPct val="112000"/>
-              </a:lnSpc>
-              <a:spcAft>
-                <a:spcPts val="500"/>
-              </a:spcAft>
-            </a:pPr>
-            <a:r>
-              <a:rPr sz="1200" b="1" i="0">
-                <a:solidFill>
-                  <a:srgbClr val="1C3D5A"/>
-                </a:solidFill>
-                <a:latin typeface="Microsoft JhengHei"/>
-                <a:ea typeface="Microsoft JhengHei"/>
-                <a:cs typeface="Microsoft JhengHei"/>
-              </a:rPr>
-              <a:t>✓ </a:t>
-            </a:r>
-          </a:p>
-          <a:p>
-            <a:pPr algn="l">
-              <a:lnSpc>
-                <a:spcPct val="112000"/>
-              </a:lnSpc>
-              <a:spcAft>
-                <a:spcPts val="500"/>
-              </a:spcAft>
-            </a:pPr>
-            <a:r>
-              <a:rPr sz="1250" b="1" i="0">
-                <a:solidFill>
-                  <a:srgbClr val="1C3D5A"/>
-                </a:solidFill>
-                <a:latin typeface="Microsoft JhengHei"/>
-                <a:ea typeface="Microsoft JhengHei"/>
-                <a:cs typeface="Microsoft JhengHei"/>
-              </a:rPr>
-              <a:t>Git / GitHub</a:t>
-            </a:r>
-          </a:p>
-        </p:txBody>
-      </p:sp>
-      <p:sp>
-        <p:nvSpPr>
-          <p:cNvPr id="18" name="TextBox 17"/>
-          <p:cNvSpPr txBox="1"/>
-          <p:nvPr/>
-        </p:nvSpPr>
-        <p:spPr>
-          <a:xfrm>
-            <a:off x="1143000" y="4096512"/>
-            <a:ext cx="2783738" cy="219456"/>
-          </a:xfrm>
-          <a:prstGeom prst="rect">
-            <a:avLst/>
-          </a:prstGeom>
-          <a:noFill/>
-        </p:spPr>
-        <p:txBody>
-          <a:bodyPr wrap="square" anchor="t" lIns="0" rIns="0" tIns="0" bIns="0">
-            <a:spAutoFit/>
-          </a:bodyPr>
-          <a:lstStyle/>
-          <a:p>
-            <a:pPr algn="l">
-              <a:lnSpc>
-                <a:spcPct val="112000"/>
-              </a:lnSpc>
-              <a:spcAft>
-                <a:spcPts val="500"/>
-              </a:spcAft>
-            </a:pPr>
-            <a:r>
-              <a:rPr sz="1100" b="0" i="0">
-                <a:solidFill>
-                  <a:srgbClr val="7C8B97"/>
-                </a:solidFill>
-                <a:latin typeface="Microsoft JhengHei"/>
-                <a:ea typeface="Microsoft JhengHei"/>
-                <a:cs typeface="Microsoft JhengHei"/>
-              </a:rPr>
               <a:t>CI 45 tests</a:t>
             </a:r>
           </a:p>
@@ -51762,7 +51630,7 @@
       </p:sp>
       <p:sp>
         <p:nvSpPr>
-          <p:cNvPr id="19" name="Rounded Rectangle 18"/>
+          <p:cNvPr id="15" name="Rounded Rectangle 14"/>
           <p:cNvSpPr/>
           <p:nvPr/>
         </p:nvSpPr>
@@ -51809,7 +51677,7 @@
       </p:sp>
       <p:sp>
         <p:nvSpPr>
-          <p:cNvPr id="20" name="Rectangle 19"/>
+          <p:cNvPr id="16" name="Rectangle 15"/>
           <p:cNvSpPr/>
           <p:nvPr/>
         </p:nvSpPr>
@@ -51852,7 +51720,7 @@
       </p:sp>
       <p:sp>
         <p:nvSpPr>
-          <p:cNvPr id="21" name="TextBox 20"/>
+          <p:cNvPr id="17" name="TextBox 16"/>
           <p:cNvSpPr txBox="1"/>
           <p:nvPr/>
         </p:nvSpPr>
@@ -51896,14 +51764,318 @@
       </p:sp>
       <p:sp>
         <p:nvSpPr>
+          <p:cNvPr id="18" name="TextBox 17"/>
+          <p:cNvSpPr txBox="1"/>
+          <p:nvPr/>
+        </p:nvSpPr>
+        <p:spPr>
+          <a:xfrm>
+            <a:off x="4521098" y="2450592"/>
+            <a:ext cx="3149498" cy="475488"/>
+          </a:xfrm>
+          <a:prstGeom prst="rect">
+            <a:avLst/>
+          </a:prstGeom>
+          <a:noFill/>
+        </p:spPr>
+        <p:txBody>
+          <a:bodyPr wrap="square" anchor="t" lIns="0" rIns="0" tIns="0" bIns="0">
+            <a:spAutoFit/>
+          </a:bodyPr>
+          <a:lstStyle/>
+          <a:p>
+            <a:pPr algn="l">
+              <a:lnSpc>
+                <a:spcPct val="105000"/>
+              </a:lnSpc>
+              <a:spcAft>
+                <a:spcPts val="100"/>
+              </a:spcAft>
+            </a:pPr>
+            <a:r>
+              <a:rPr sz="1250" b="1" i="0">
+                <a:solidFill>
+                  <a:srgbClr val="34506A"/>
+                </a:solidFill>
+                <a:latin typeface="Microsoft JhengHei"/>
+                <a:ea typeface="Microsoft JhengHei"/>
+                <a:cs typeface="Microsoft JhengHei"/>
+              </a:rPr>
+              <a:t>✓  </a:t>
+            </a:r>
+            <a:r>
+              <a:rPr sz="1250" b="1" i="0">
+                <a:solidFill>
+                  <a:srgbClr val="1C3D5A"/>
+                </a:solidFill>
+                <a:latin typeface="Microsoft JhengHei"/>
+                <a:ea typeface="Microsoft JhengHei"/>
+                <a:cs typeface="Microsoft JhengHei"/>
+              </a:rPr>
+              <a:t>MySQL 8.0</a:t>
+            </a:r>
+          </a:p>
+          <a:p>
+            <a:pPr algn="l">
+              <a:lnSpc>
+                <a:spcPct val="105000"/>
+              </a:lnSpc>
+              <a:spcAft>
+                <a:spcPts val="100"/>
+              </a:spcAft>
+            </a:pPr>
+            <a:r>
+              <a:rPr sz="1050" b="0" i="0">
+                <a:solidFill>
+                  <a:srgbClr val="7C8B97"/>
+                </a:solidFill>
+                <a:latin typeface="Microsoft JhengHei"/>
+                <a:ea typeface="Microsoft JhengHei"/>
+                <a:cs typeface="Microsoft JhengHei"/>
+              </a:rPr>
+              <a:t>四張資料表</a:t>
+            </a:r>
+          </a:p>
+        </p:txBody>
+      </p:sp>
+      <p:sp>
+        <p:nvSpPr>
+          <p:cNvPr id="19" name="TextBox 18"/>
+          <p:cNvSpPr txBox="1"/>
+          <p:nvPr/>
+        </p:nvSpPr>
+        <p:spPr>
+          <a:xfrm>
+            <a:off x="4521098" y="2926080"/>
+            <a:ext cx="3149498" cy="475488"/>
+          </a:xfrm>
+          <a:prstGeom prst="rect">
+            <a:avLst/>
+          </a:prstGeom>
+          <a:noFill/>
+        </p:spPr>
+        <p:txBody>
+          <a:bodyPr wrap="square" anchor="t" lIns="0" rIns="0" tIns="0" bIns="0">
+            <a:spAutoFit/>
+          </a:bodyPr>
+          <a:lstStyle/>
+          <a:p>
+            <a:pPr algn="l">
+              <a:lnSpc>
+                <a:spcPct val="105000"/>
+              </a:lnSpc>
+              <a:spcAft>
+                <a:spcPts val="100"/>
+              </a:spcAft>
+            </a:pPr>
+            <a:r>
+              <a:rPr sz="1250" b="1" i="0">
+                <a:solidFill>
+                  <a:srgbClr val="34506A"/>
+                </a:solidFill>
+                <a:latin typeface="Microsoft JhengHei"/>
+                <a:ea typeface="Microsoft JhengHei"/>
+                <a:cs typeface="Microsoft JhengHei"/>
+              </a:rPr>
+              <a:t>✓  </a:t>
+            </a:r>
+            <a:r>
+              <a:rPr sz="1250" b="1" i="0">
+                <a:solidFill>
+                  <a:srgbClr val="1C3D5A"/>
+                </a:solidFill>
+                <a:latin typeface="Microsoft JhengHei"/>
+                <a:ea typeface="Microsoft JhengHei"/>
+                <a:cs typeface="Microsoft JhengHei"/>
+              </a:rPr>
+              <a:t>Apache + PHP</a:t>
+            </a:r>
+          </a:p>
+          <a:p>
+            <a:pPr algn="l">
+              <a:lnSpc>
+                <a:spcPct val="105000"/>
+              </a:lnSpc>
+              <a:spcAft>
+                <a:spcPts val="100"/>
+              </a:spcAft>
+            </a:pPr>
+            <a:r>
+              <a:rPr sz="1050" b="0" i="0">
+                <a:solidFill>
+                  <a:srgbClr val="7C8B97"/>
+                </a:solidFill>
+                <a:latin typeface="Microsoft JhengHei"/>
+                <a:ea typeface="Microsoft JhengHei"/>
+                <a:cs typeface="Microsoft JhengHei"/>
+              </a:rPr>
+              <a:t>完整業務系統</a:t>
+            </a:r>
+          </a:p>
+        </p:txBody>
+      </p:sp>
+      <p:sp>
+        <p:nvSpPr>
+          <p:cNvPr id="20" name="TextBox 19"/>
+          <p:cNvSpPr txBox="1"/>
+          <p:nvPr/>
+        </p:nvSpPr>
+        <p:spPr>
+          <a:xfrm>
+            <a:off x="4521098" y="3401568"/>
+            <a:ext cx="3149498" cy="475488"/>
+          </a:xfrm>
+          <a:prstGeom prst="rect">
+            <a:avLst/>
+          </a:prstGeom>
+          <a:noFill/>
+        </p:spPr>
+        <p:txBody>
+          <a:bodyPr wrap="square" anchor="t" lIns="0" rIns="0" tIns="0" bIns="0">
+            <a:spAutoFit/>
+          </a:bodyPr>
+          <a:lstStyle/>
+          <a:p>
+            <a:pPr algn="l">
+              <a:lnSpc>
+                <a:spcPct val="105000"/>
+              </a:lnSpc>
+              <a:spcAft>
+                <a:spcPts val="100"/>
+              </a:spcAft>
+            </a:pPr>
+            <a:r>
+              <a:rPr sz="1250" b="1" i="0">
+                <a:solidFill>
+                  <a:srgbClr val="34506A"/>
+                </a:solidFill>
+                <a:latin typeface="Microsoft JhengHei"/>
+                <a:ea typeface="Microsoft JhengHei"/>
+                <a:cs typeface="Microsoft JhengHei"/>
+              </a:rPr>
+              <a:t>✓  </a:t>
+            </a:r>
+            <a:r>
+              <a:rPr sz="1250" b="1" i="0">
+                <a:solidFill>
+                  <a:srgbClr val="1C3D5A"/>
+                </a:solidFill>
+                <a:latin typeface="Microsoft JhengHei"/>
+                <a:ea typeface="Microsoft JhengHei"/>
+                <a:cs typeface="Microsoft JhengHei"/>
+              </a:rPr>
+              <a:t>scikit-learn</a:t>
+            </a:r>
+          </a:p>
+          <a:p>
+            <a:pPr algn="l">
+              <a:lnSpc>
+                <a:spcPct val="105000"/>
+              </a:lnSpc>
+              <a:spcAft>
+                <a:spcPts val="100"/>
+              </a:spcAft>
+            </a:pPr>
+            <a:r>
+              <a:rPr sz="1050" b="0" i="0">
+                <a:solidFill>
+                  <a:srgbClr val="7C8B97"/>
+                </a:solidFill>
+                <a:latin typeface="Microsoft JhengHei"/>
+                <a:ea typeface="Microsoft JhengHei"/>
+                <a:cs typeface="Microsoft JhengHei"/>
+              </a:rPr>
+              <a:t>RF + IsoForest + GridSearch</a:t>
+            </a:r>
+          </a:p>
+        </p:txBody>
+      </p:sp>
+      <p:sp>
+        <p:nvSpPr>
+          <p:cNvPr id="21" name="TextBox 20"/>
+          <p:cNvSpPr txBox="1"/>
+          <p:nvPr/>
+        </p:nvSpPr>
+        <p:spPr>
+          <a:xfrm>
+            <a:off x="4521098" y="3877056"/>
+            <a:ext cx="3149498" cy="475488"/>
+          </a:xfrm>
+          <a:prstGeom prst="rect">
+            <a:avLst/>
+          </a:prstGeom>
+          <a:noFill/>
+        </p:spPr>
+        <p:txBody>
+          <a:bodyPr wrap="square" anchor="t" lIns="0" rIns="0" tIns="0" bIns="0">
+            <a:spAutoFit/>
+          </a:bodyPr>
+          <a:lstStyle/>
+          <a:p>
+            <a:pPr algn="l">
+              <a:lnSpc>
+                <a:spcPct val="105000"/>
+              </a:lnSpc>
+              <a:spcAft>
+                <a:spcPts val="100"/>
+              </a:spcAft>
+            </a:pPr>
+            <a:r>
+              <a:rPr sz="1250" b="1" i="0">
+                <a:solidFill>
+                  <a:srgbClr val="34506A"/>
+                </a:solidFill>
+                <a:latin typeface="Microsoft JhengHei"/>
+                <a:ea typeface="Microsoft JhengHei"/>
+                <a:cs typeface="Microsoft JhengHei"/>
+              </a:rPr>
+              <a:t>✓  </a:t>
+            </a:r>
+            <a:r>
+              <a:rPr sz="1250" b="1" i="0">
+                <a:solidFill>
+                  <a:srgbClr val="1C3D5A"/>
+                </a:solidFill>
+                <a:latin typeface="Microsoft JhengHei"/>
+                <a:ea typeface="Microsoft JhengHei"/>
+                <a:cs typeface="Microsoft JhengHei"/>
+              </a:rPr>
+              <a:t>Folium</a:t>
+            </a:r>
+          </a:p>
+          <a:p>
+            <a:pPr algn="l">
+              <a:lnSpc>
+                <a:spcPct val="105000"/>
+              </a:lnSpc>
+              <a:spcAft>
+                <a:spcPts val="100"/>
+              </a:spcAft>
+            </a:pPr>
+            <a:r>
+              <a:rPr sz="1050" b="0" i="0">
+                <a:solidFill>
+                  <a:srgbClr val="7C8B97"/>
+                </a:solidFill>
+                <a:latin typeface="Microsoft JhengHei"/>
+                <a:ea typeface="Microsoft JhengHei"/>
+                <a:cs typeface="Microsoft JhengHei"/>
+              </a:rPr>
+              <a:t>互動海域地圖</a:t>
+            </a:r>
+          </a:p>
+        </p:txBody>
+      </p:sp>
+      <p:sp>
+        <p:nvSpPr>
           <p:cNvPr id="22" name="TextBox 21"/>
           <p:cNvSpPr txBox="1"/>
           <p:nvPr/>
         </p:nvSpPr>
         <p:spPr>
           <a:xfrm>
-            <a:off x="4585106" y="2487168"/>
-            <a:ext cx="3058058" cy="274320"/>
+            <a:off x="4521098" y="4352544"/>
+            <a:ext cx="3149498" cy="475488"/>
           </a:xfrm>
           <a:prstGeom prst="rect">
             <a:avLst/>
@@ -51918,14 +52090,14 @@
           <a:p>
             <a:pPr algn="l">
               <a:lnSpc>
-                <a:spcPct val="112000"/>
-              </a:lnSpc>
-              <a:spcAft>
-                <a:spcPts val="500"/>
-              </a:spcAft>
-            </a:pPr>
-            <a:r>
-              <a:rPr sz="1200" b="1" i="0">
+                <a:spcPct val="105000"/>
+              </a:lnSpc>
+              <a:spcAft>
+                <a:spcPts val="100"/>
+              </a:spcAft>
+            </a:pPr>
+            <a:r>
+              <a:rPr sz="1250" b="1" i="0">
                 <a:solidFill>
                   <a:srgbClr val="34506A"/>
                 </a:solidFill>
@@ -51933,18 +52105,8 @@
                 <a:ea typeface="Microsoft JhengHei"/>
                 <a:cs typeface="Microsoft JhengHei"/>
               </a:rPr>
-              <a:t>✓ </a:t>
-            </a:r>
-          </a:p>
-          <a:p>
-            <a:pPr algn="l">
-              <a:lnSpc>
-                <a:spcPct val="112000"/>
-              </a:lnSpc>
-              <a:spcAft>
-                <a:spcPts val="500"/>
-              </a:spcAft>
-            </a:pPr>
+              <a:t>✓  </a:t>
+            </a:r>
             <a:r>
               <a:rPr sz="1250" b="1" i="0">
                 <a:solidFill>
@@ -51954,7 +52116,28 @@
                 <a:ea typeface="Microsoft JhengHei"/>
                 <a:cs typeface="Microsoft JhengHei"/>
               </a:rPr>
-              <a:t>MySQL 8.0</a:t>
+              <a:t>Gradio</a:t>
+            </a:r>
+          </a:p>
+          <a:p>
+            <a:pPr algn="l">
+              <a:lnSpc>
+                <a:spcPct val="105000"/>
+              </a:lnSpc>
+              <a:spcAft>
+                <a:spcPts val="100"/>
+              </a:spcAft>
+            </a:pPr>
+            <a:r>
+              <a:rPr sz="1050" b="0" i="0">
+                <a:solidFill>
+                  <a:srgbClr val="7C8B97"/>
+                </a:solidFill>
+                <a:latin typeface="Microsoft JhengHei"/>
+                <a:ea typeface="Microsoft JhengHei"/>
+                <a:cs typeface="Microsoft JhengHei"/>
+              </a:rPr>
+              <a:t>互動分析</a:t>
             </a:r>
           </a:p>
         </p:txBody>
@@ -51967,8 +52150,8 @@
         </p:nvSpPr>
         <p:spPr>
           <a:xfrm>
-            <a:off x="4886858" y="2724912"/>
-            <a:ext cx="2783738" cy="219456"/>
+            <a:off x="4521098" y="4828032"/>
+            <a:ext cx="3149498" cy="475488"/>
           </a:xfrm>
           <a:prstGeom prst="rect">
             <a:avLst/>
@@ -51983,14 +52166,46 @@
           <a:p>
             <a:pPr algn="l">
               <a:lnSpc>
-                <a:spcPct val="112000"/>
-              </a:lnSpc>
-              <a:spcAft>
-                <a:spcPts val="500"/>
-              </a:spcAft>
-            </a:pPr>
-            <a:r>
-              <a:rPr sz="1100" b="0" i="0">
+                <a:spcPct val="105000"/>
+              </a:lnSpc>
+              <a:spcAft>
+                <a:spcPts val="100"/>
+              </a:spcAft>
+            </a:pPr>
+            <a:r>
+              <a:rPr sz="1250" b="1" i="0">
+                <a:solidFill>
+                  <a:srgbClr val="34506A"/>
+                </a:solidFill>
+                <a:latin typeface="Microsoft JhengHei"/>
+                <a:ea typeface="Microsoft JhengHei"/>
+                <a:cs typeface="Microsoft JhengHei"/>
+              </a:rPr>
+              <a:t>✓  </a:t>
+            </a:r>
+            <a:r>
+              <a:rPr sz="1250" b="1" i="0">
+                <a:solidFill>
+                  <a:srgbClr val="1C3D5A"/>
+                </a:solidFill>
+                <a:latin typeface="Microsoft JhengHei"/>
+                <a:ea typeface="Microsoft JhengHei"/>
+                <a:cs typeface="Microsoft JhengHei"/>
+              </a:rPr>
+              <a:t>CWA 開放資料</a:t>
+            </a:r>
+          </a:p>
+          <a:p>
+            <a:pPr algn="l">
+              <a:lnSpc>
+                <a:spcPct val="105000"/>
+              </a:lnSpc>
+              <a:spcAft>
+                <a:spcPts val="100"/>
+              </a:spcAft>
+            </a:pPr>
+            <a:r>
+              <a:rPr sz="1050" b="0" i="0">
                 <a:solidFill>
                   <a:srgbClr val="7C8B97"/>
                 </a:solidFill>
@@ -51998,7 +52213,7 @@
                 <a:ea typeface="Microsoft JhengHei"/>
                 <a:cs typeface="Microsoft JhengHei"/>
               </a:rPr>
-              <a:t>四張資料表</a:t>
+              <a:t>浮標海象</a:t>
             </a:r>
           </a:p>
         </p:txBody>
@@ -52011,8 +52226,8 @@
         </p:nvSpPr>
         <p:spPr>
           <a:xfrm>
-            <a:off x="4585106" y="2944368"/>
-            <a:ext cx="3058058" cy="274320"/>
+            <a:off x="4521098" y="5303520"/>
+            <a:ext cx="3149498" cy="475488"/>
           </a:xfrm>
           <a:prstGeom prst="rect">
             <a:avLst/>
@@ -52027,14 +52242,14 @@
           <a:p>
             <a:pPr algn="l">
               <a:lnSpc>
-                <a:spcPct val="112000"/>
-              </a:lnSpc>
-              <a:spcAft>
-                <a:spcPts val="500"/>
-              </a:spcAft>
-            </a:pPr>
-            <a:r>
-              <a:rPr sz="1200" b="1" i="0">
+                <a:spcPct val="105000"/>
+              </a:lnSpc>
+              <a:spcAft>
+                <a:spcPts val="100"/>
+              </a:spcAft>
+            </a:pPr>
+            <a:r>
+              <a:rPr sz="1250" b="1" i="0">
                 <a:solidFill>
                   <a:srgbClr val="34506A"/>
                 </a:solidFill>
@@ -52042,18 +52257,8 @@
                 <a:ea typeface="Microsoft JhengHei"/>
                 <a:cs typeface="Microsoft JhengHei"/>
               </a:rPr>
-              <a:t>✓ </a:t>
-            </a:r>
-          </a:p>
-          <a:p>
-            <a:pPr algn="l">
-              <a:lnSpc>
-                <a:spcPct val="112000"/>
-              </a:lnSpc>
-              <a:spcAft>
-                <a:spcPts val="500"/>
-              </a:spcAft>
-            </a:pPr>
+              <a:t>✓  </a:t>
+            </a:r>
             <a:r>
               <a:rPr sz="1250" b="1" i="0">
                 <a:solidFill>
@@ -52063,43 +52268,20 @@
                 <a:ea typeface="Microsoft JhengHei"/>
                 <a:cs typeface="Microsoft JhengHei"/>
               </a:rPr>
-              <a:t>Apache + PHP</a:t>
-            </a:r>
-          </a:p>
-        </p:txBody>
-      </p:sp>
-      <p:sp>
-        <p:nvSpPr>
-          <p:cNvPr id="25" name="TextBox 24"/>
-          <p:cNvSpPr txBox="1"/>
-          <p:nvPr/>
-        </p:nvSpPr>
-        <p:spPr>
-          <a:xfrm>
-            <a:off x="4886858" y="3182112"/>
-            <a:ext cx="2783738" cy="219456"/>
-          </a:xfrm>
-          <a:prstGeom prst="rect">
-            <a:avLst/>
-          </a:prstGeom>
-          <a:noFill/>
-        </p:spPr>
-        <p:txBody>
-          <a:bodyPr wrap="square" anchor="t" lIns="0" rIns="0" tIns="0" bIns="0">
-            <a:spAutoFit/>
-          </a:bodyPr>
-          <a:lstStyle/>
-          <a:p>
-            <a:pPr algn="l">
-              <a:lnSpc>
-                <a:spcPct val="112000"/>
-              </a:lnSpc>
-              <a:spcAft>
-                <a:spcPts val="500"/>
-              </a:spcAft>
-            </a:pPr>
-            <a:r>
-              <a:rPr sz="1100" b="0" i="0">
+              <a:t>Jupyter</a:t>
+            </a:r>
+          </a:p>
+          <a:p>
+            <a:pPr algn="l">
+              <a:lnSpc>
+                <a:spcPct val="105000"/>
+              </a:lnSpc>
+              <a:spcAft>
+                <a:spcPts val="100"/>
+              </a:spcAft>
+            </a:pPr>
+            <a:r>
+              <a:rPr sz="1050" b="0" i="0">
                 <a:solidFill>
                   <a:srgbClr val="7C8B97"/>
                 </a:solidFill>
@@ -52107,551 +52289,6 @@
                 <a:ea typeface="Microsoft JhengHei"/>
                 <a:cs typeface="Microsoft JhengHei"/>
               </a:rPr>
-              <a:t>完整業務系統</a:t>
-            </a:r>
-          </a:p>
-        </p:txBody>
-      </p:sp>
-      <p:sp>
-        <p:nvSpPr>
-          <p:cNvPr id="26" name="TextBox 25"/>
-          <p:cNvSpPr txBox="1"/>
-          <p:nvPr/>
-        </p:nvSpPr>
-        <p:spPr>
-          <a:xfrm>
-            <a:off x="4585106" y="3401568"/>
-            <a:ext cx="3058058" cy="274320"/>
-          </a:xfrm>
-          <a:prstGeom prst="rect">
-            <a:avLst/>
-          </a:prstGeom>
-          <a:noFill/>
-        </p:spPr>
-        <p:txBody>
-          <a:bodyPr wrap="square" anchor="t" lIns="0" rIns="0" tIns="0" bIns="0">
-            <a:spAutoFit/>
-          </a:bodyPr>
-          <a:lstStyle/>
-          <a:p>
-            <a:pPr algn="l">
-              <a:lnSpc>
-                <a:spcPct val="112000"/>
-              </a:lnSpc>
-              <a:spcAft>
-                <a:spcPts val="500"/>
-              </a:spcAft>
-            </a:pPr>
-            <a:r>
-              <a:rPr sz="1200" b="1" i="0">
-                <a:solidFill>
-                  <a:srgbClr val="34506A"/>
-                </a:solidFill>
-                <a:latin typeface="Microsoft JhengHei"/>
-                <a:ea typeface="Microsoft JhengHei"/>
-                <a:cs typeface="Microsoft JhengHei"/>
-              </a:rPr>
-              <a:t>✓ </a:t>
-            </a:r>
-          </a:p>
-          <a:p>
-            <a:pPr algn="l">
-              <a:lnSpc>
-                <a:spcPct val="112000"/>
-              </a:lnSpc>
-              <a:spcAft>
-                <a:spcPts val="500"/>
-              </a:spcAft>
-            </a:pPr>
-            <a:r>
-              <a:rPr sz="1250" b="1" i="0">
-                <a:solidFill>
-                  <a:srgbClr val="1C3D5A"/>
-                </a:solidFill>
-                <a:latin typeface="Microsoft JhengHei"/>
-                <a:ea typeface="Microsoft JhengHei"/>
-                <a:cs typeface="Microsoft JhengHei"/>
-              </a:rPr>
-              <a:t>scikit-learn</a:t>
-            </a:r>
-          </a:p>
-        </p:txBody>
-      </p:sp>
-      <p:sp>
-        <p:nvSpPr>
-          <p:cNvPr id="27" name="TextBox 26"/>
-          <p:cNvSpPr txBox="1"/>
-          <p:nvPr/>
-        </p:nvSpPr>
-        <p:spPr>
-          <a:xfrm>
-            <a:off x="4886858" y="3639312"/>
-            <a:ext cx="2783738" cy="219456"/>
-          </a:xfrm>
-          <a:prstGeom prst="rect">
-            <a:avLst/>
-          </a:prstGeom>
-          <a:noFill/>
-        </p:spPr>
-        <p:txBody>
-          <a:bodyPr wrap="square" anchor="t" lIns="0" rIns="0" tIns="0" bIns="0">
-            <a:spAutoFit/>
-          </a:bodyPr>
-          <a:lstStyle/>
-          <a:p>
-            <a:pPr algn="l">
-              <a:lnSpc>
-                <a:spcPct val="112000"/>
-              </a:lnSpc>
-              <a:spcAft>
-                <a:spcPts val="500"/>
-              </a:spcAft>
-            </a:pPr>
-            <a:r>
-              <a:rPr sz="1100" b="0" i="0">
-                <a:solidFill>
-                  <a:srgbClr val="7C8B97"/>
-                </a:solidFill>
-                <a:latin typeface="Microsoft JhengHei"/>
-                <a:ea typeface="Microsoft JhengHei"/>
-                <a:cs typeface="Microsoft JhengHei"/>
-              </a:rPr>
-              <a:t>RF + IsoForest + GridSearch</a:t>
-            </a:r>
-          </a:p>
-        </p:txBody>
-      </p:sp>
-      <p:sp>
-        <p:nvSpPr>
-          <p:cNvPr id="28" name="TextBox 27"/>
-          <p:cNvSpPr txBox="1"/>
-          <p:nvPr/>
-        </p:nvSpPr>
-        <p:spPr>
-          <a:xfrm>
-            <a:off x="4585106" y="3858768"/>
-            <a:ext cx="3058058" cy="274320"/>
-          </a:xfrm>
-          <a:prstGeom prst="rect">
-            <a:avLst/>
-          </a:prstGeom>
-          <a:noFill/>
-        </p:spPr>
-        <p:txBody>
-          <a:bodyPr wrap="square" anchor="t" lIns="0" rIns="0" tIns="0" bIns="0">
-            <a:spAutoFit/>
-          </a:bodyPr>
-          <a:lstStyle/>
-          <a:p>
-            <a:pPr algn="l">
-              <a:lnSpc>
-                <a:spcPct val="112000"/>
-              </a:lnSpc>
-              <a:spcAft>
-                <a:spcPts val="500"/>
-              </a:spcAft>
-            </a:pPr>
-            <a:r>
-              <a:rPr sz="1200" b="1" i="0">
-                <a:solidFill>
-                  <a:srgbClr val="34506A"/>
-                </a:solidFill>
-                <a:latin typeface="Microsoft JhengHei"/>
-                <a:ea typeface="Microsoft JhengHei"/>
-                <a:cs typeface="Microsoft JhengHei"/>
-              </a:rPr>
-              <a:t>✓ </a:t>
-            </a:r>
-          </a:p>
-          <a:p>
-            <a:pPr algn="l">
-              <a:lnSpc>
-                <a:spcPct val="112000"/>
-              </a:lnSpc>
-              <a:spcAft>
-                <a:spcPts val="500"/>
-              </a:spcAft>
-            </a:pPr>
-            <a:r>
-              <a:rPr sz="1250" b="1" i="0">
-                <a:solidFill>
-                  <a:srgbClr val="1C3D5A"/>
-                </a:solidFill>
-                <a:latin typeface="Microsoft JhengHei"/>
-                <a:ea typeface="Microsoft JhengHei"/>
-                <a:cs typeface="Microsoft JhengHei"/>
-              </a:rPr>
-              <a:t>Folium</a:t>
-            </a:r>
-          </a:p>
-        </p:txBody>
-      </p:sp>
-      <p:sp>
-        <p:nvSpPr>
-          <p:cNvPr id="29" name="TextBox 28"/>
-          <p:cNvSpPr txBox="1"/>
-          <p:nvPr/>
-        </p:nvSpPr>
-        <p:spPr>
-          <a:xfrm>
-            <a:off x="4886858" y="4096512"/>
-            <a:ext cx="2783738" cy="219456"/>
-          </a:xfrm>
-          <a:prstGeom prst="rect">
-            <a:avLst/>
-          </a:prstGeom>
-          <a:noFill/>
-        </p:spPr>
-        <p:txBody>
-          <a:bodyPr wrap="square" anchor="t" lIns="0" rIns="0" tIns="0" bIns="0">
-            <a:spAutoFit/>
-          </a:bodyPr>
-          <a:lstStyle/>
-          <a:p>
-            <a:pPr algn="l">
-              <a:lnSpc>
-                <a:spcPct val="112000"/>
-              </a:lnSpc>
-              <a:spcAft>
-                <a:spcPts val="500"/>
-              </a:spcAft>
-            </a:pPr>
-            <a:r>
-              <a:rPr sz="1100" b="0" i="0">
-                <a:solidFill>
-                  <a:srgbClr val="7C8B97"/>
-                </a:solidFill>
-                <a:latin typeface="Microsoft JhengHei"/>
-                <a:ea typeface="Microsoft JhengHei"/>
-                <a:cs typeface="Microsoft JhengHei"/>
-              </a:rPr>
-              <a:t>互動海域地圖</a:t>
-            </a:r>
-          </a:p>
-        </p:txBody>
-      </p:sp>
-      <p:sp>
-        <p:nvSpPr>
-          <p:cNvPr id="30" name="TextBox 29"/>
-          <p:cNvSpPr txBox="1"/>
-          <p:nvPr/>
-        </p:nvSpPr>
-        <p:spPr>
-          <a:xfrm>
-            <a:off x="4585106" y="4315968"/>
-            <a:ext cx="3058058" cy="274320"/>
-          </a:xfrm>
-          <a:prstGeom prst="rect">
-            <a:avLst/>
-          </a:prstGeom>
-          <a:noFill/>
-        </p:spPr>
-        <p:txBody>
-          <a:bodyPr wrap="square" anchor="t" lIns="0" rIns="0" tIns="0" bIns="0">
-            <a:spAutoFit/>
-          </a:bodyPr>
-          <a:lstStyle/>
-          <a:p>
-            <a:pPr algn="l">
-              <a:lnSpc>
-                <a:spcPct val="112000"/>
-              </a:lnSpc>
-              <a:spcAft>
-                <a:spcPts val="500"/>
-              </a:spcAft>
-            </a:pPr>
-            <a:r>
-              <a:rPr sz="1200" b="1" i="0">
-                <a:solidFill>
-                  <a:srgbClr val="34506A"/>
-                </a:solidFill>
-                <a:latin typeface="Microsoft JhengHei"/>
-                <a:ea typeface="Microsoft JhengHei"/>
-                <a:cs typeface="Microsoft JhengHei"/>
-              </a:rPr>
-              <a:t>✓ </a:t>
-            </a:r>
-          </a:p>
-          <a:p>
-            <a:pPr algn="l">
-              <a:lnSpc>
-                <a:spcPct val="112000"/>
-              </a:lnSpc>
-              <a:spcAft>
-                <a:spcPts val="500"/>
-              </a:spcAft>
-            </a:pPr>
-            <a:r>
-              <a:rPr sz="1250" b="1" i="0">
-                <a:solidFill>
-                  <a:srgbClr val="1C3D5A"/>
-                </a:solidFill>
-                <a:latin typeface="Microsoft JhengHei"/>
-                <a:ea typeface="Microsoft JhengHei"/>
-                <a:cs typeface="Microsoft JhengHei"/>
-              </a:rPr>
-              <a:t>Gradio</a:t>
-            </a:r>
-          </a:p>
-        </p:txBody>
-      </p:sp>
-      <p:sp>
-        <p:nvSpPr>
-          <p:cNvPr id="31" name="TextBox 30"/>
-          <p:cNvSpPr txBox="1"/>
-          <p:nvPr/>
-        </p:nvSpPr>
-        <p:spPr>
-          <a:xfrm>
-            <a:off x="4886858" y="4553712"/>
-            <a:ext cx="2783738" cy="219456"/>
-          </a:xfrm>
-          <a:prstGeom prst="rect">
-            <a:avLst/>
-          </a:prstGeom>
-          <a:noFill/>
-        </p:spPr>
-        <p:txBody>
-          <a:bodyPr wrap="square" anchor="t" lIns="0" rIns="0" tIns="0" bIns="0">
-            <a:spAutoFit/>
-          </a:bodyPr>
-          <a:lstStyle/>
-          <a:p>
-            <a:pPr algn="l">
-              <a:lnSpc>
-                <a:spcPct val="112000"/>
-              </a:lnSpc>
-              <a:spcAft>
-                <a:spcPts val="500"/>
-              </a:spcAft>
-            </a:pPr>
-            <a:r>
-              <a:rPr sz="1100" b="0" i="0">
-                <a:solidFill>
-                  <a:srgbClr val="7C8B97"/>
-                </a:solidFill>
-                <a:latin typeface="Microsoft JhengHei"/>
-                <a:ea typeface="Microsoft JhengHei"/>
-                <a:cs typeface="Microsoft JhengHei"/>
-              </a:rPr>
-              <a:t>互動分析</a:t>
-            </a:r>
-          </a:p>
-        </p:txBody>
-      </p:sp>
-      <p:sp>
-        <p:nvSpPr>
-          <p:cNvPr id="32" name="TextBox 31"/>
-          <p:cNvSpPr txBox="1"/>
-          <p:nvPr/>
-        </p:nvSpPr>
-        <p:spPr>
-          <a:xfrm>
-            <a:off x="4585106" y="4773168"/>
-            <a:ext cx="3058058" cy="274320"/>
-          </a:xfrm>
-          <a:prstGeom prst="rect">
-            <a:avLst/>
-          </a:prstGeom>
-          <a:noFill/>
-        </p:spPr>
-        <p:txBody>
-          <a:bodyPr wrap="square" anchor="t" lIns="0" rIns="0" tIns="0" bIns="0">
-            <a:spAutoFit/>
-          </a:bodyPr>
-          <a:lstStyle/>
-          <a:p>
-            <a:pPr algn="l">
-              <a:lnSpc>
-                <a:spcPct val="112000"/>
-              </a:lnSpc>
-              <a:spcAft>
-                <a:spcPts val="500"/>
-              </a:spcAft>
-            </a:pPr>
-            <a:r>
-              <a:rPr sz="1200" b="1" i="0">
-                <a:solidFill>
-                  <a:srgbClr val="34506A"/>
-                </a:solidFill>
-                <a:latin typeface="Microsoft JhengHei"/>
-                <a:ea typeface="Microsoft JhengHei"/>
-                <a:cs typeface="Microsoft JhengHei"/>
-              </a:rPr>
-              <a:t>✓ </a:t>
-            </a:r>
-          </a:p>
-          <a:p>
-            <a:pPr algn="l">
-              <a:lnSpc>
-                <a:spcPct val="112000"/>
-              </a:lnSpc>
-              <a:spcAft>
-                <a:spcPts val="500"/>
-              </a:spcAft>
-            </a:pPr>
-            <a:r>
-              <a:rPr sz="1250" b="1" i="0">
-                <a:solidFill>
-                  <a:srgbClr val="1C3D5A"/>
-                </a:solidFill>
-                <a:latin typeface="Microsoft JhengHei"/>
-                <a:ea typeface="Microsoft JhengHei"/>
-                <a:cs typeface="Microsoft JhengHei"/>
-              </a:rPr>
-              <a:t>CWA 開放資料</a:t>
-            </a:r>
-          </a:p>
-        </p:txBody>
-      </p:sp>
-      <p:sp>
-        <p:nvSpPr>
-          <p:cNvPr id="33" name="TextBox 32"/>
-          <p:cNvSpPr txBox="1"/>
-          <p:nvPr/>
-        </p:nvSpPr>
-        <p:spPr>
-          <a:xfrm>
-            <a:off x="4886858" y="5010912"/>
-            <a:ext cx="2783738" cy="219456"/>
-          </a:xfrm>
-          <a:prstGeom prst="rect">
-            <a:avLst/>
-          </a:prstGeom>
-          <a:noFill/>
-        </p:spPr>
-        <p:txBody>
-          <a:bodyPr wrap="square" anchor="t" lIns="0" rIns="0" tIns="0" bIns="0">
-            <a:spAutoFit/>
-          </a:bodyPr>
-          <a:lstStyle/>
-          <a:p>
-            <a:pPr algn="l">
-              <a:lnSpc>
-                <a:spcPct val="112000"/>
-              </a:lnSpc>
-              <a:spcAft>
-                <a:spcPts val="500"/>
-              </a:spcAft>
-            </a:pPr>
-            <a:r>
-              <a:rPr sz="1100" b="0" i="0">
-                <a:solidFill>
-                  <a:srgbClr val="7C8B97"/>
-                </a:solidFill>
-                <a:latin typeface="Microsoft JhengHei"/>
-                <a:ea typeface="Microsoft JhengHei"/>
-                <a:cs typeface="Microsoft JhengHei"/>
-              </a:rPr>
-              <a:t>浮標海象</a:t>
-            </a:r>
-          </a:p>
-        </p:txBody>
-      </p:sp>
-      <p:sp>
-        <p:nvSpPr>
-          <p:cNvPr id="34" name="TextBox 33"/>
-          <p:cNvSpPr txBox="1"/>
-          <p:nvPr/>
-        </p:nvSpPr>
-        <p:spPr>
-          <a:xfrm>
-            <a:off x="4585106" y="5230368"/>
-            <a:ext cx="3058058" cy="274320"/>
-          </a:xfrm>
-          <a:prstGeom prst="rect">
-            <a:avLst/>
-          </a:prstGeom>
-          <a:noFill/>
-        </p:spPr>
-        <p:txBody>
-          <a:bodyPr wrap="square" anchor="t" lIns="0" rIns="0" tIns="0" bIns="0">
-            <a:spAutoFit/>
-          </a:bodyPr>
-          <a:lstStyle/>
-          <a:p>
-            <a:pPr algn="l">
-              <a:lnSpc>
-                <a:spcPct val="112000"/>
-              </a:lnSpc>
-              <a:spcAft>
-                <a:spcPts val="500"/>
-              </a:spcAft>
-            </a:pPr>
-            <a:r>
-              <a:rPr sz="1200" b="1" i="0">
-                <a:solidFill>
-                  <a:srgbClr val="34506A"/>
-                </a:solidFill>
-                <a:latin typeface="Microsoft JhengHei"/>
-                <a:ea typeface="Microsoft JhengHei"/>
-                <a:cs typeface="Microsoft JhengHei"/>
-              </a:rPr>
-              <a:t>✓ </a:t>
-            </a:r>
-          </a:p>
-          <a:p>
-            <a:pPr algn="l">
-              <a:lnSpc>
-                <a:spcPct val="112000"/>
-              </a:lnSpc>
-              <a:spcAft>
-                <a:spcPts val="500"/>
-              </a:spcAft>
-            </a:pPr>
-            <a:r>
-              <a:rPr sz="1250" b="1" i="0">
-                <a:solidFill>
-                  <a:srgbClr val="1C3D5A"/>
-                </a:solidFill>
-                <a:latin typeface="Microsoft JhengHei"/>
-                <a:ea typeface="Microsoft JhengHei"/>
-                <a:cs typeface="Microsoft JhengHei"/>
-              </a:rPr>
-              <a:t>Jupyter</a:t>
-            </a:r>
-          </a:p>
-        </p:txBody>
-      </p:sp>
-      <p:sp>
-        <p:nvSpPr>
-          <p:cNvPr id="35" name="TextBox 34"/>
-          <p:cNvSpPr txBox="1"/>
-          <p:nvPr/>
-        </p:nvSpPr>
-        <p:spPr>
-          <a:xfrm>
-            <a:off x="4886858" y="5468112"/>
-            <a:ext cx="2783738" cy="219456"/>
-          </a:xfrm>
-          <a:prstGeom prst="rect">
-            <a:avLst/>
-          </a:prstGeom>
-          <a:noFill/>
-        </p:spPr>
-        <p:txBody>
-          <a:bodyPr wrap="square" anchor="t" lIns="0" rIns="0" tIns="0" bIns="0">
-            <a:spAutoFit/>
-          </a:bodyPr>
-          <a:lstStyle/>
-          <a:p>
-            <a:pPr algn="l">
-              <a:lnSpc>
-                <a:spcPct val="112000"/>
-              </a:lnSpc>
-              <a:spcAft>
-                <a:spcPts val="500"/>
-              </a:spcAft>
-            </a:pPr>
-            <a:r>
-              <a:rPr sz="1100" b="0" i="0">
-                <a:solidFill>
-                  <a:srgbClr val="7C8B97"/>
-                </a:solidFill>
-                <a:latin typeface="Microsoft JhengHei"/>
-                <a:ea typeface="Microsoft JhengHei"/>
-                <a:cs typeface="Microsoft JhengHei"/>
-              </a:rPr>
               <a:t>EDA 紀錄</a:t>
             </a:r>
           </a:p>
@@ -52659,7 +52296,7 @@
       </p:sp>
       <p:sp>
         <p:nvSpPr>
-          <p:cNvPr id="36" name="Rounded Rectangle 35"/>
+          <p:cNvPr id="25" name="Rounded Rectangle 24"/>
           <p:cNvSpPr/>
           <p:nvPr/>
         </p:nvSpPr>
@@ -52706,7 +52343,7 @@
       </p:sp>
       <p:sp>
         <p:nvSpPr>
-          <p:cNvPr id="37" name="Rectangle 36"/>
+          <p:cNvPr id="26" name="Rectangle 25"/>
           <p:cNvSpPr/>
           <p:nvPr/>
         </p:nvSpPr>
@@ -52749,7 +52386,7 @@
       </p:sp>
       <p:sp>
         <p:nvSpPr>
-          <p:cNvPr id="38" name="TextBox 37"/>
+          <p:cNvPr id="27" name="TextBox 26"/>
           <p:cNvSpPr txBox="1"/>
           <p:nvPr/>
         </p:nvSpPr>
@@ -52793,14 +52430,14 @@
       </p:sp>
       <p:sp>
         <p:nvSpPr>
-          <p:cNvPr id="39" name="TextBox 38"/>
-          <p:cNvSpPr txBox="1"/>
-          <p:nvPr/>
-        </p:nvSpPr>
-        <p:spPr>
-          <a:xfrm>
-            <a:off x="8328964" y="2487168"/>
-            <a:ext cx="3058058" cy="274320"/>
+          <p:cNvPr id="28" name="TextBox 27"/>
+          <p:cNvSpPr txBox="1"/>
+          <p:nvPr/>
+        </p:nvSpPr>
+        <p:spPr>
+          <a:xfrm>
+            <a:off x="8264956" y="2450592"/>
+            <a:ext cx="3149498" cy="475488"/>
           </a:xfrm>
           <a:prstGeom prst="rect">
             <a:avLst/>
@@ -52815,14 +52452,14 @@
           <a:p>
             <a:pPr algn="l">
               <a:lnSpc>
-                <a:spcPct val="112000"/>
-              </a:lnSpc>
-              <a:spcAft>
-                <a:spcPts val="500"/>
-              </a:spcAft>
-            </a:pPr>
-            <a:r>
-              <a:rPr sz="1200" b="1" i="0">
+                <a:spcPct val="105000"/>
+              </a:lnSpc>
+              <a:spcAft>
+                <a:spcPts val="100"/>
+              </a:spcAft>
+            </a:pPr>
+            <a:r>
+              <a:rPr sz="1250" b="1" i="0">
                 <a:solidFill>
                   <a:srgbClr val="C8922E"/>
                 </a:solidFill>
@@ -52830,18 +52467,8 @@
                 <a:ea typeface="Microsoft JhengHei"/>
                 <a:cs typeface="Microsoft JhengHei"/>
               </a:rPr>
-              <a:t>✓ </a:t>
-            </a:r>
-          </a:p>
-          <a:p>
-            <a:pPr algn="l">
-              <a:lnSpc>
-                <a:spcPct val="112000"/>
-              </a:lnSpc>
-              <a:spcAft>
-                <a:spcPts val="500"/>
-              </a:spcAft>
-            </a:pPr>
+              <a:t>✓  </a:t>
+            </a:r>
             <a:r>
               <a:rPr sz="1250" b="1" i="0">
                 <a:solidFill>
@@ -52854,18 +52481,39 @@
               <a:t>MILP (HiGHS)</a:t>
             </a:r>
           </a:p>
-        </p:txBody>
-      </p:sp>
-      <p:sp>
-        <p:nvSpPr>
-          <p:cNvPr id="40" name="TextBox 39"/>
-          <p:cNvSpPr txBox="1"/>
-          <p:nvPr/>
-        </p:nvSpPr>
-        <p:spPr>
-          <a:xfrm>
-            <a:off x="8630716" y="2724912"/>
-            <a:ext cx="2783738" cy="219456"/>
+          <a:p>
+            <a:pPr algn="l">
+              <a:lnSpc>
+                <a:spcPct val="105000"/>
+              </a:lnSpc>
+              <a:spcAft>
+                <a:spcPts val="100"/>
+              </a:spcAft>
+            </a:pPr>
+            <a:r>
+              <a:rPr sz="1050" b="0" i="0">
+                <a:solidFill>
+                  <a:srgbClr val="7C8B97"/>
+                </a:solidFill>
+                <a:latin typeface="Microsoft JhengHei"/>
+                <a:ea typeface="Microsoft JhengHei"/>
+                <a:cs typeface="Microsoft JhengHei"/>
+              </a:rPr>
+              <a:t>排班全域最佳化</a:t>
+            </a:r>
+          </a:p>
+        </p:txBody>
+      </p:sp>
+      <p:sp>
+        <p:nvSpPr>
+          <p:cNvPr id="29" name="TextBox 28"/>
+          <p:cNvSpPr txBox="1"/>
+          <p:nvPr/>
+        </p:nvSpPr>
+        <p:spPr>
+          <a:xfrm>
+            <a:off x="8264956" y="2926080"/>
+            <a:ext cx="3149498" cy="475488"/>
           </a:xfrm>
           <a:prstGeom prst="rect">
             <a:avLst/>
@@ -52880,14 +52528,46 @@
           <a:p>
             <a:pPr algn="l">
               <a:lnSpc>
-                <a:spcPct val="112000"/>
-              </a:lnSpc>
-              <a:spcAft>
-                <a:spcPts val="500"/>
-              </a:spcAft>
-            </a:pPr>
-            <a:r>
-              <a:rPr sz="1100" b="0" i="0">
+                <a:spcPct val="105000"/>
+              </a:lnSpc>
+              <a:spcAft>
+                <a:spcPts val="100"/>
+              </a:spcAft>
+            </a:pPr>
+            <a:r>
+              <a:rPr sz="1250" b="1" i="0">
+                <a:solidFill>
+                  <a:srgbClr val="C8922E"/>
+                </a:solidFill>
+                <a:latin typeface="Microsoft JhengHei"/>
+                <a:ea typeface="Microsoft JhengHei"/>
+                <a:cs typeface="Microsoft JhengHei"/>
+              </a:rPr>
+              <a:t>✓  </a:t>
+            </a:r>
+            <a:r>
+              <a:rPr sz="1250" b="1" i="0">
+                <a:solidFill>
+                  <a:srgbClr val="1C3D5A"/>
+                </a:solidFill>
+                <a:latin typeface="Microsoft JhengHei"/>
+                <a:ea typeface="Microsoft JhengHei"/>
+                <a:cs typeface="Microsoft JhengHei"/>
+              </a:rPr>
+              <a:t>Isolation Forest</a:t>
+            </a:r>
+          </a:p>
+          <a:p>
+            <a:pPr algn="l">
+              <a:lnSpc>
+                <a:spcPct val="105000"/>
+              </a:lnSpc>
+              <a:spcAft>
+                <a:spcPts val="100"/>
+              </a:spcAft>
+            </a:pPr>
+            <a:r>
+              <a:rPr sz="1050" b="0" i="0">
                 <a:solidFill>
                   <a:srgbClr val="7C8B97"/>
                 </a:solidFill>
@@ -52895,21 +52575,21 @@
                 <a:ea typeface="Microsoft JhengHei"/>
                 <a:cs typeface="Microsoft JhengHei"/>
               </a:rPr>
-              <a:t>排班全域最佳化</a:t>
-            </a:r>
-          </a:p>
-        </p:txBody>
-      </p:sp>
-      <p:sp>
-        <p:nvSpPr>
-          <p:cNvPr id="41" name="TextBox 40"/>
-          <p:cNvSpPr txBox="1"/>
-          <p:nvPr/>
-        </p:nvSpPr>
-        <p:spPr>
-          <a:xfrm>
-            <a:off x="8328964" y="2944368"/>
-            <a:ext cx="3058058" cy="274320"/>
+              <a:t>5 維異常偵測</a:t>
+            </a:r>
+          </a:p>
+        </p:txBody>
+      </p:sp>
+      <p:sp>
+        <p:nvSpPr>
+          <p:cNvPr id="30" name="TextBox 29"/>
+          <p:cNvSpPr txBox="1"/>
+          <p:nvPr/>
+        </p:nvSpPr>
+        <p:spPr>
+          <a:xfrm>
+            <a:off x="8264956" y="3401568"/>
+            <a:ext cx="3149498" cy="475488"/>
           </a:xfrm>
           <a:prstGeom prst="rect">
             <a:avLst/>
@@ -52924,14 +52604,14 @@
           <a:p>
             <a:pPr algn="l">
               <a:lnSpc>
-                <a:spcPct val="112000"/>
-              </a:lnSpc>
-              <a:spcAft>
-                <a:spcPts val="500"/>
-              </a:spcAft>
-            </a:pPr>
-            <a:r>
-              <a:rPr sz="1200" b="1" i="0">
+                <a:spcPct val="105000"/>
+              </a:lnSpc>
+              <a:spcAft>
+                <a:spcPts val="100"/>
+              </a:spcAft>
+            </a:pPr>
+            <a:r>
+              <a:rPr sz="1250" b="1" i="0">
                 <a:solidFill>
                   <a:srgbClr val="C8922E"/>
                 </a:solidFill>
@@ -52939,18 +52619,8 @@
                 <a:ea typeface="Microsoft JhengHei"/>
                 <a:cs typeface="Microsoft JhengHei"/>
               </a:rPr>
-              <a:t>✓ </a:t>
-            </a:r>
-          </a:p>
-          <a:p>
-            <a:pPr algn="l">
-              <a:lnSpc>
-                <a:spcPct val="112000"/>
-              </a:lnSpc>
-              <a:spcAft>
-                <a:spcPts val="500"/>
-              </a:spcAft>
-            </a:pPr>
+              <a:t>✓  </a:t>
+            </a:r>
             <a:r>
               <a:rPr sz="1250" b="1" i="0">
                 <a:solidFill>
@@ -52960,21 +52630,42 @@
                 <a:ea typeface="Microsoft JhengHei"/>
                 <a:cs typeface="Microsoft JhengHei"/>
               </a:rPr>
-              <a:t>Isolation Forest</a:t>
-            </a:r>
-          </a:p>
-        </p:txBody>
-      </p:sp>
-      <p:sp>
-        <p:nvSpPr>
-          <p:cNvPr id="42" name="TextBox 41"/>
-          <p:cNvSpPr txBox="1"/>
-          <p:nvPr/>
-        </p:nvSpPr>
-        <p:spPr>
-          <a:xfrm>
-            <a:off x="8630716" y="3182112"/>
-            <a:ext cx="2783738" cy="219456"/>
+              <a:t>Holt 平滑</a:t>
+            </a:r>
+          </a:p>
+          <a:p>
+            <a:pPr algn="l">
+              <a:lnSpc>
+                <a:spcPct val="105000"/>
+              </a:lnSpc>
+              <a:spcAft>
+                <a:spcPts val="100"/>
+              </a:spcAft>
+            </a:pPr>
+            <a:r>
+              <a:rPr sz="1050" b="0" i="0">
+                <a:solidFill>
+                  <a:srgbClr val="7C8B97"/>
+                </a:solidFill>
+                <a:latin typeface="Microsoft JhengHei"/>
+                <a:ea typeface="Microsoft JhengHei"/>
+                <a:cs typeface="Microsoft JhengHei"/>
+              </a:rPr>
+              <a:t>純 NumPy 趨勢預測</a:t>
+            </a:r>
+          </a:p>
+        </p:txBody>
+      </p:sp>
+      <p:sp>
+        <p:nvSpPr>
+          <p:cNvPr id="31" name="TextBox 30"/>
+          <p:cNvSpPr txBox="1"/>
+          <p:nvPr/>
+        </p:nvSpPr>
+        <p:spPr>
+          <a:xfrm>
+            <a:off x="8264956" y="3877056"/>
+            <a:ext cx="3149498" cy="475488"/>
           </a:xfrm>
           <a:prstGeom prst="rect">
             <a:avLst/>
@@ -52989,58 +52680,14 @@
           <a:p>
             <a:pPr algn="l">
               <a:lnSpc>
-                <a:spcPct val="112000"/>
-              </a:lnSpc>
-              <a:spcAft>
-                <a:spcPts val="500"/>
-              </a:spcAft>
-            </a:pPr>
-            <a:r>
-              <a:rPr sz="1100" b="0" i="0">
-                <a:solidFill>
-                  <a:srgbClr val="7C8B97"/>
-                </a:solidFill>
-                <a:latin typeface="Microsoft JhengHei"/>
-                <a:ea typeface="Microsoft JhengHei"/>
-                <a:cs typeface="Microsoft JhengHei"/>
-              </a:rPr>
-              <a:t>5 維異常偵測</a:t>
-            </a:r>
-          </a:p>
-        </p:txBody>
-      </p:sp>
-      <p:sp>
-        <p:nvSpPr>
-          <p:cNvPr id="43" name="TextBox 42"/>
-          <p:cNvSpPr txBox="1"/>
-          <p:nvPr/>
-        </p:nvSpPr>
-        <p:spPr>
-          <a:xfrm>
-            <a:off x="8328964" y="3401568"/>
-            <a:ext cx="3058058" cy="274320"/>
-          </a:xfrm>
-          <a:prstGeom prst="rect">
-            <a:avLst/>
-          </a:prstGeom>
-          <a:noFill/>
-        </p:spPr>
-        <p:txBody>
-          <a:bodyPr wrap="square" anchor="t" lIns="0" rIns="0" tIns="0" bIns="0">
-            <a:spAutoFit/>
-          </a:bodyPr>
-          <a:lstStyle/>
-          <a:p>
-            <a:pPr algn="l">
-              <a:lnSpc>
-                <a:spcPct val="112000"/>
-              </a:lnSpc>
-              <a:spcAft>
-                <a:spcPts val="500"/>
-              </a:spcAft>
-            </a:pPr>
-            <a:r>
-              <a:rPr sz="1200" b="1" i="0">
+                <a:spcPct val="105000"/>
+              </a:lnSpc>
+              <a:spcAft>
+                <a:spcPts val="100"/>
+              </a:spcAft>
+            </a:pPr>
+            <a:r>
+              <a:rPr sz="1250" b="1" i="0">
                 <a:solidFill>
                   <a:srgbClr val="C8922E"/>
                 </a:solidFill>
@@ -53048,18 +52695,8 @@
                 <a:ea typeface="Microsoft JhengHei"/>
                 <a:cs typeface="Microsoft JhengHei"/>
               </a:rPr>
-              <a:t>✓ </a:t>
-            </a:r>
-          </a:p>
-          <a:p>
-            <a:pPr algn="l">
-              <a:lnSpc>
-                <a:spcPct val="112000"/>
-              </a:lnSpc>
-              <a:spcAft>
-                <a:spcPts val="500"/>
-              </a:spcAft>
-            </a:pPr>
+              <a:t>✓  </a:t>
+            </a:r>
             <a:r>
               <a:rPr sz="1250" b="1" i="0">
                 <a:solidFill>
@@ -53069,152 +52706,20 @@
                 <a:ea typeface="Microsoft JhengHei"/>
                 <a:cs typeface="Microsoft JhengHei"/>
               </a:rPr>
-              <a:t>Holt 平滑</a:t>
-            </a:r>
-          </a:p>
-        </p:txBody>
-      </p:sp>
-      <p:sp>
-        <p:nvSpPr>
-          <p:cNvPr id="44" name="TextBox 43"/>
-          <p:cNvSpPr txBox="1"/>
-          <p:nvPr/>
-        </p:nvSpPr>
-        <p:spPr>
-          <a:xfrm>
-            <a:off x="8630716" y="3639312"/>
-            <a:ext cx="2783738" cy="219456"/>
-          </a:xfrm>
-          <a:prstGeom prst="rect">
-            <a:avLst/>
-          </a:prstGeom>
-          <a:noFill/>
-        </p:spPr>
-        <p:txBody>
-          <a:bodyPr wrap="square" anchor="t" lIns="0" rIns="0" tIns="0" bIns="0">
-            <a:spAutoFit/>
-          </a:bodyPr>
-          <a:lstStyle/>
-          <a:p>
-            <a:pPr algn="l">
-              <a:lnSpc>
-                <a:spcPct val="112000"/>
-              </a:lnSpc>
-              <a:spcAft>
-                <a:spcPts val="500"/>
-              </a:spcAft>
-            </a:pPr>
-            <a:r>
-              <a:rPr sz="1100" b="0" i="0">
-                <a:solidFill>
-                  <a:srgbClr val="7C8B97"/>
-                </a:solidFill>
-                <a:latin typeface="Microsoft JhengHei"/>
-                <a:ea typeface="Microsoft JhengHei"/>
-                <a:cs typeface="Microsoft JhengHei"/>
-              </a:rPr>
-              <a:t>純 NumPy 趨勢預測</a:t>
-            </a:r>
-          </a:p>
-        </p:txBody>
-      </p:sp>
-      <p:sp>
-        <p:nvSpPr>
-          <p:cNvPr id="45" name="TextBox 44"/>
-          <p:cNvSpPr txBox="1"/>
-          <p:nvPr/>
-        </p:nvSpPr>
-        <p:spPr>
-          <a:xfrm>
-            <a:off x="8328964" y="3858768"/>
-            <a:ext cx="3058058" cy="274320"/>
-          </a:xfrm>
-          <a:prstGeom prst="rect">
-            <a:avLst/>
-          </a:prstGeom>
-          <a:noFill/>
-        </p:spPr>
-        <p:txBody>
-          <a:bodyPr wrap="square" anchor="t" lIns="0" rIns="0" tIns="0" bIns="0">
-            <a:spAutoFit/>
-          </a:bodyPr>
-          <a:lstStyle/>
-          <a:p>
-            <a:pPr algn="l">
-              <a:lnSpc>
-                <a:spcPct val="112000"/>
-              </a:lnSpc>
-              <a:spcAft>
-                <a:spcPts val="500"/>
-              </a:spcAft>
-            </a:pPr>
-            <a:r>
-              <a:rPr sz="1200" b="1" i="0">
-                <a:solidFill>
-                  <a:srgbClr val="C8922E"/>
-                </a:solidFill>
-                <a:latin typeface="Microsoft JhengHei"/>
-                <a:ea typeface="Microsoft JhengHei"/>
-                <a:cs typeface="Microsoft JhengHei"/>
-              </a:rPr>
-              <a:t>✓ </a:t>
-            </a:r>
-          </a:p>
-          <a:p>
-            <a:pPr algn="l">
-              <a:lnSpc>
-                <a:spcPct val="112000"/>
-              </a:lnSpc>
-              <a:spcAft>
-                <a:spcPts val="500"/>
-              </a:spcAft>
-            </a:pPr>
-            <a:r>
-              <a:rPr sz="1250" b="1" i="0">
-                <a:solidFill>
-                  <a:srgbClr val="1C3D5A"/>
-                </a:solidFill>
-                <a:latin typeface="Microsoft JhengHei"/>
-                <a:ea typeface="Microsoft JhengHei"/>
-                <a:cs typeface="Microsoft JhengHei"/>
-              </a:rPr>
               <a:t>人員雷達圖</a:t>
             </a:r>
           </a:p>
-        </p:txBody>
-      </p:sp>
-      <p:sp>
-        <p:nvSpPr>
-          <p:cNvPr id="46" name="TextBox 45"/>
-          <p:cNvSpPr txBox="1"/>
-          <p:nvPr/>
-        </p:nvSpPr>
-        <p:spPr>
-          <a:xfrm>
-            <a:off x="8630716" y="4096512"/>
-            <a:ext cx="2783738" cy="219456"/>
-          </a:xfrm>
-          <a:prstGeom prst="rect">
-            <a:avLst/>
-          </a:prstGeom>
-          <a:noFill/>
-        </p:spPr>
-        <p:txBody>
-          <a:bodyPr wrap="square" anchor="t" lIns="0" rIns="0" tIns="0" bIns="0">
-            <a:spAutoFit/>
-          </a:bodyPr>
-          <a:lstStyle/>
-          <a:p>
-            <a:pPr algn="l">
-              <a:lnSpc>
-                <a:spcPct val="112000"/>
-              </a:lnSpc>
-              <a:spcAft>
-                <a:spcPts val="500"/>
-              </a:spcAft>
-            </a:pPr>
-            <a:r>
-              <a:rPr sz="1100" b="0" i="0">
+          <a:p>
+            <a:pPr algn="l">
+              <a:lnSpc>
+                <a:spcPct val="105000"/>
+              </a:lnSpc>
+              <a:spcAft>
+                <a:spcPts val="100"/>
+              </a:spcAft>
+            </a:pPr>
+            <a:r>
+              <a:rPr sz="1050" b="0" i="0">
                 <a:solidFill>
                   <a:srgbClr val="7C8B97"/>
                 </a:solidFill>

--- a/docs/slides/第2組_海勤決策系統_期末簡報.pptx
+++ b/docs/slides/第2組_海勤決策系統_期末簡報.pptx
@@ -56,6 +56,7 @@
     <p:sldId id="304" r:id="rId55"/>
     <p:sldId id="305" r:id="rId56"/>
     <p:sldId id="306" r:id="rId57"/>
+    <p:sldId id="307" r:id="rId58"/>
   </p:sldIdLst>
   <p:sldSz cx="12191695" cy="6858000" type="screen4x3"/>
   <p:notesSz cx="6858000" cy="9144000"/>
@@ -3748,7 +3749,7 @@
                 <a:ea typeface="Microsoft JhengHei"/>
                 <a:cs typeface="Consolas"/>
               </a:rPr>
-              <a:t>0.811</a:t>
+              <a:t>0.703</a:t>
             </a:r>
           </a:p>
         </p:txBody>
@@ -6691,16 +6692,16 @@
         </p:nvSpPr>
         <p:spPr>
           <a:xfrm>
-            <a:off x="914400" y="2441447"/>
-            <a:ext cx="6400800" cy="274320"/>
-          </a:xfrm>
-          <a:prstGeom prst="rect">
-            <a:avLst/>
-          </a:prstGeom>
-          <a:noFill/>
-        </p:spPr>
-        <p:txBody>
-          <a:bodyPr wrap="none" anchor="t" lIns="0" rIns="0" tIns="0" bIns="0">
+            <a:off x="1051560" y="2441447"/>
+            <a:ext cx="6217920" cy="274320"/>
+          </a:xfrm>
+          <a:prstGeom prst="rect">
+            <a:avLst/>
+          </a:prstGeom>
+          <a:noFill/>
+        </p:spPr>
+        <p:txBody>
+          <a:bodyPr wrap="square" anchor="t" lIns="0" rIns="0" tIns="0" bIns="0">
             <a:spAutoFit/>
           </a:bodyPr>
           <a:lstStyle/>
@@ -6724,16 +6725,6 @@
               </a:rPr>
               <a:t>$ </a:t>
             </a:r>
-          </a:p>
-          <a:p>
-            <a:pPr algn="l">
-              <a:lnSpc>
-                <a:spcPct val="112000"/>
-              </a:lnSpc>
-              <a:spcAft>
-                <a:spcPts val="500"/>
-              </a:spcAft>
-            </a:pPr>
             <a:r>
               <a:rPr sz="1200" b="0" i="0">
                 <a:solidFill>
@@ -6756,16 +6747,16 @@
         </p:nvSpPr>
         <p:spPr>
           <a:xfrm>
-            <a:off x="914400" y="2766059"/>
-            <a:ext cx="6400800" cy="274320"/>
-          </a:xfrm>
-          <a:prstGeom prst="rect">
-            <a:avLst/>
-          </a:prstGeom>
-          <a:noFill/>
-        </p:spPr>
-        <p:txBody>
-          <a:bodyPr wrap="none" anchor="t" lIns="0" rIns="0" tIns="0" bIns="0">
+            <a:off x="1051560" y="2766059"/>
+            <a:ext cx="6217920" cy="274320"/>
+          </a:xfrm>
+          <a:prstGeom prst="rect">
+            <a:avLst/>
+          </a:prstGeom>
+          <a:noFill/>
+        </p:spPr>
+        <p:txBody>
+          <a:bodyPr wrap="square" anchor="t" lIns="0" rIns="0" tIns="0" bIns="0">
             <a:spAutoFit/>
           </a:bodyPr>
           <a:lstStyle/>
@@ -6789,16 +6780,6 @@
               </a:rPr>
               <a:t>$ </a:t>
             </a:r>
-          </a:p>
-          <a:p>
-            <a:pPr algn="l">
-              <a:lnSpc>
-                <a:spcPct val="112000"/>
-              </a:lnSpc>
-              <a:spcAft>
-                <a:spcPts val="500"/>
-              </a:spcAft>
-            </a:pPr>
             <a:r>
               <a:rPr sz="1200" b="0" i="0">
                 <a:solidFill>
@@ -6821,16 +6802,16 @@
         </p:nvSpPr>
         <p:spPr>
           <a:xfrm>
-            <a:off x="914400" y="3255263"/>
-            <a:ext cx="6400800" cy="274320"/>
-          </a:xfrm>
-          <a:prstGeom prst="rect">
-            <a:avLst/>
-          </a:prstGeom>
-          <a:noFill/>
-        </p:spPr>
-        <p:txBody>
-          <a:bodyPr wrap="none" anchor="t" lIns="0" rIns="0" tIns="0" bIns="0">
+            <a:off x="1051560" y="3255263"/>
+            <a:ext cx="6217920" cy="274320"/>
+          </a:xfrm>
+          <a:prstGeom prst="rect">
+            <a:avLst/>
+          </a:prstGeom>
+          <a:noFill/>
+        </p:spPr>
+        <p:txBody>
+          <a:bodyPr wrap="square" anchor="t" lIns="0" rIns="0" tIns="0" bIns="0">
             <a:spAutoFit/>
           </a:bodyPr>
           <a:lstStyle/>
@@ -6854,16 +6835,6 @@
               </a:rPr>
               <a:t>✓ </a:t>
             </a:r>
-          </a:p>
-          <a:p>
-            <a:pPr algn="l">
-              <a:lnSpc>
-                <a:spcPct val="112000"/>
-              </a:lnSpc>
-              <a:spcAft>
-                <a:spcPts val="500"/>
-              </a:spcAft>
-            </a:pPr>
             <a:r>
               <a:rPr sz="1200" b="0" i="0">
                 <a:solidFill>
@@ -6886,16 +6857,16 @@
         </p:nvSpPr>
         <p:spPr>
           <a:xfrm>
-            <a:off x="914400" y="3579875"/>
-            <a:ext cx="6400800" cy="274320"/>
-          </a:xfrm>
-          <a:prstGeom prst="rect">
-            <a:avLst/>
-          </a:prstGeom>
-          <a:noFill/>
-        </p:spPr>
-        <p:txBody>
-          <a:bodyPr wrap="none" anchor="t" lIns="0" rIns="0" tIns="0" bIns="0">
+            <a:off x="1051560" y="3579875"/>
+            <a:ext cx="6217920" cy="274320"/>
+          </a:xfrm>
+          <a:prstGeom prst="rect">
+            <a:avLst/>
+          </a:prstGeom>
+          <a:noFill/>
+        </p:spPr>
+        <p:txBody>
+          <a:bodyPr wrap="square" anchor="t" lIns="0" rIns="0" tIns="0" bIns="0">
             <a:spAutoFit/>
           </a:bodyPr>
           <a:lstStyle/>
@@ -6919,16 +6890,6 @@
               </a:rPr>
               <a:t>✓ </a:t>
             </a:r>
-          </a:p>
-          <a:p>
-            <a:pPr algn="l">
-              <a:lnSpc>
-                <a:spcPct val="112000"/>
-              </a:lnSpc>
-              <a:spcAft>
-                <a:spcPts val="500"/>
-              </a:spcAft>
-            </a:pPr>
             <a:r>
               <a:rPr sz="1200" b="0" i="0">
                 <a:solidFill>
@@ -6951,16 +6912,16 @@
         </p:nvSpPr>
         <p:spPr>
           <a:xfrm>
-            <a:off x="914400" y="3904487"/>
-            <a:ext cx="6400800" cy="274320"/>
-          </a:xfrm>
-          <a:prstGeom prst="rect">
-            <a:avLst/>
-          </a:prstGeom>
-          <a:noFill/>
-        </p:spPr>
-        <p:txBody>
-          <a:bodyPr wrap="none" anchor="t" lIns="0" rIns="0" tIns="0" bIns="0">
+            <a:off x="1051560" y="3904487"/>
+            <a:ext cx="6217920" cy="274320"/>
+          </a:xfrm>
+          <a:prstGeom prst="rect">
+            <a:avLst/>
+          </a:prstGeom>
+          <a:noFill/>
+        </p:spPr>
+        <p:txBody>
+          <a:bodyPr wrap="square" anchor="t" lIns="0" rIns="0" tIns="0" bIns="0">
             <a:spAutoFit/>
           </a:bodyPr>
           <a:lstStyle/>
@@ -6984,16 +6945,6 @@
               </a:rPr>
               <a:t>✓ </a:t>
             </a:r>
-          </a:p>
-          <a:p>
-            <a:pPr algn="l">
-              <a:lnSpc>
-                <a:spcPct val="112000"/>
-              </a:lnSpc>
-              <a:spcAft>
-                <a:spcPts val="500"/>
-              </a:spcAft>
-            </a:pPr>
             <a:r>
               <a:rPr sz="1200" b="0" i="0">
                 <a:solidFill>
@@ -7016,16 +6967,16 @@
         </p:nvSpPr>
         <p:spPr>
           <a:xfrm>
-            <a:off x="914400" y="4229099"/>
-            <a:ext cx="6400800" cy="274320"/>
-          </a:xfrm>
-          <a:prstGeom prst="rect">
-            <a:avLst/>
-          </a:prstGeom>
-          <a:noFill/>
-        </p:spPr>
-        <p:txBody>
-          <a:bodyPr wrap="none" anchor="t" lIns="0" rIns="0" tIns="0" bIns="0">
+            <a:off x="1051560" y="4229099"/>
+            <a:ext cx="6217920" cy="274320"/>
+          </a:xfrm>
+          <a:prstGeom prst="rect">
+            <a:avLst/>
+          </a:prstGeom>
+          <a:noFill/>
+        </p:spPr>
+        <p:txBody>
+          <a:bodyPr wrap="square" anchor="t" lIns="0" rIns="0" tIns="0" bIns="0">
             <a:spAutoFit/>
           </a:bodyPr>
           <a:lstStyle/>
@@ -7049,16 +7000,6 @@
               </a:rPr>
               <a:t>✓ </a:t>
             </a:r>
-          </a:p>
-          <a:p>
-            <a:pPr algn="l">
-              <a:lnSpc>
-                <a:spcPct val="112000"/>
-              </a:lnSpc>
-              <a:spcAft>
-                <a:spcPts val="500"/>
-              </a:spcAft>
-            </a:pPr>
             <a:r>
               <a:rPr sz="1200" b="0" i="0">
                 <a:solidFill>
@@ -7081,16 +7022,16 @@
         </p:nvSpPr>
         <p:spPr>
           <a:xfrm>
-            <a:off x="914400" y="4553711"/>
-            <a:ext cx="6400800" cy="274320"/>
-          </a:xfrm>
-          <a:prstGeom prst="rect">
-            <a:avLst/>
-          </a:prstGeom>
-          <a:noFill/>
-        </p:spPr>
-        <p:txBody>
-          <a:bodyPr wrap="none" anchor="t" lIns="0" rIns="0" tIns="0" bIns="0">
+            <a:off x="1051560" y="4553711"/>
+            <a:ext cx="6217920" cy="274320"/>
+          </a:xfrm>
+          <a:prstGeom prst="rect">
+            <a:avLst/>
+          </a:prstGeom>
+          <a:noFill/>
+        </p:spPr>
+        <p:txBody>
+          <a:bodyPr wrap="square" anchor="t" lIns="0" rIns="0" tIns="0" bIns="0">
             <a:spAutoFit/>
           </a:bodyPr>
           <a:lstStyle/>
@@ -7114,16 +7055,6 @@
               </a:rPr>
               <a:t>✓ </a:t>
             </a:r>
-          </a:p>
-          <a:p>
-            <a:pPr algn="l">
-              <a:lnSpc>
-                <a:spcPct val="112000"/>
-              </a:lnSpc>
-              <a:spcAft>
-                <a:spcPts val="500"/>
-              </a:spcAft>
-            </a:pPr>
             <a:r>
               <a:rPr sz="1200" b="0" i="0">
                 <a:solidFill>
@@ -7146,16 +7077,16 @@
         </p:nvSpPr>
         <p:spPr>
           <a:xfrm>
-            <a:off x="914400" y="5042915"/>
-            <a:ext cx="6400800" cy="274320"/>
-          </a:xfrm>
-          <a:prstGeom prst="rect">
-            <a:avLst/>
-          </a:prstGeom>
-          <a:noFill/>
-        </p:spPr>
-        <p:txBody>
-          <a:bodyPr wrap="none" anchor="t" lIns="0" rIns="0" tIns="0" bIns="0">
+            <a:off x="1051560" y="5042915"/>
+            <a:ext cx="6217920" cy="274320"/>
+          </a:xfrm>
+          <a:prstGeom prst="rect">
+            <a:avLst/>
+          </a:prstGeom>
+          <a:noFill/>
+        </p:spPr>
+        <p:txBody>
+          <a:bodyPr wrap="square" anchor="t" lIns="0" rIns="0" tIns="0" bIns="0">
             <a:spAutoFit/>
           </a:bodyPr>
           <a:lstStyle/>
@@ -7179,16 +7110,6 @@
               </a:rPr>
               <a:t>➜ </a:t>
             </a:r>
-          </a:p>
-          <a:p>
-            <a:pPr algn="l">
-              <a:lnSpc>
-                <a:spcPct val="112000"/>
-              </a:lnSpc>
-              <a:spcAft>
-                <a:spcPts val="500"/>
-              </a:spcAft>
-            </a:pPr>
             <a:r>
               <a:rPr sz="1200" b="0" i="0">
                 <a:solidFill>
@@ -7211,16 +7132,16 @@
         </p:nvSpPr>
         <p:spPr>
           <a:xfrm>
-            <a:off x="914400" y="5367527"/>
-            <a:ext cx="6400800" cy="274320"/>
-          </a:xfrm>
-          <a:prstGeom prst="rect">
-            <a:avLst/>
-          </a:prstGeom>
-          <a:noFill/>
-        </p:spPr>
-        <p:txBody>
-          <a:bodyPr wrap="none" anchor="t" lIns="0" rIns="0" tIns="0" bIns="0">
+            <a:off x="1051560" y="5367527"/>
+            <a:ext cx="6217920" cy="274320"/>
+          </a:xfrm>
+          <a:prstGeom prst="rect">
+            <a:avLst/>
+          </a:prstGeom>
+          <a:noFill/>
+        </p:spPr>
+        <p:txBody>
+          <a:bodyPr wrap="square" anchor="t" lIns="0" rIns="0" tIns="0" bIns="0">
             <a:spAutoFit/>
           </a:bodyPr>
           <a:lstStyle/>
@@ -7244,16 +7165,6 @@
               </a:rPr>
               <a:t>➜ </a:t>
             </a:r>
-          </a:p>
-          <a:p>
-            <a:pPr algn="l">
-              <a:lnSpc>
-                <a:spcPct val="112000"/>
-              </a:lnSpc>
-              <a:spcAft>
-                <a:spcPts val="500"/>
-              </a:spcAft>
-            </a:pPr>
             <a:r>
               <a:rPr sz="1200" b="0" i="0">
                 <a:solidFill>
@@ -8096,8 +8007,8 @@
         </p:blipFill>
         <p:spPr>
           <a:xfrm>
-            <a:off x="1982341" y="2011680"/>
-            <a:ext cx="8227012" cy="3108960"/>
+            <a:off x="1989673" y="2011680"/>
+            <a:ext cx="8212347" cy="3108960"/>
           </a:xfrm>
           <a:prstGeom prst="rect">
             <a:avLst/>
@@ -13965,7 +13876,7 @@
         <p:spPr>
           <a:xfrm>
             <a:off x="640080" y="1920240"/>
-            <a:ext cx="5669280" cy="1371600"/>
+            <a:ext cx="5318607" cy="1371600"/>
           </a:xfrm>
           <a:prstGeom prst="roundRect">
             <a:avLst>
@@ -14055,7 +13966,7 @@
         <p:spPr>
           <a:xfrm>
             <a:off x="896112" y="2084832"/>
-            <a:ext cx="5212080" cy="347472"/>
+            <a:ext cx="4861407" cy="347472"/>
           </a:xfrm>
           <a:prstGeom prst="rect">
             <a:avLst/>
@@ -14099,7 +14010,7 @@
         <p:spPr>
           <a:xfrm>
             <a:off x="896112" y="2487168"/>
-            <a:ext cx="5212080" cy="731520"/>
+            <a:ext cx="4861407" cy="731520"/>
           </a:xfrm>
           <a:prstGeom prst="rect">
             <a:avLst/>
@@ -14142,8 +14053,8 @@
         </p:nvSpPr>
         <p:spPr>
           <a:xfrm>
-            <a:off x="6583680" y="1920240"/>
-            <a:ext cx="5669280" cy="1371600"/>
+            <a:off x="6233007" y="1920240"/>
+            <a:ext cx="5318607" cy="1371600"/>
           </a:xfrm>
           <a:prstGeom prst="roundRect">
             <a:avLst>
@@ -14189,7 +14100,7 @@
         </p:nvSpPr>
         <p:spPr>
           <a:xfrm>
-            <a:off x="6583680" y="1920240"/>
+            <a:off x="6233007" y="1920240"/>
             <a:ext cx="73152" cy="1371600"/>
           </a:xfrm>
           <a:prstGeom prst="rect">
@@ -14232,8 +14143,8 @@
         </p:nvSpPr>
         <p:spPr>
           <a:xfrm>
-            <a:off x="6839712" y="2084832"/>
-            <a:ext cx="5212080" cy="347472"/>
+            <a:off x="6489039" y="2084832"/>
+            <a:ext cx="4861407" cy="347472"/>
           </a:xfrm>
           <a:prstGeom prst="rect">
             <a:avLst/>
@@ -14276,8 +14187,8 @@
         </p:nvSpPr>
         <p:spPr>
           <a:xfrm>
-            <a:off x="6839712" y="2487168"/>
-            <a:ext cx="5212080" cy="731520"/>
+            <a:off x="6489039" y="2487168"/>
+            <a:ext cx="4861407" cy="731520"/>
           </a:xfrm>
           <a:prstGeom prst="rect">
             <a:avLst/>
@@ -14321,7 +14232,7 @@
         <p:spPr>
           <a:xfrm>
             <a:off x="640080" y="3474720"/>
-            <a:ext cx="5669280" cy="1371600"/>
+            <a:ext cx="5318607" cy="1371600"/>
           </a:xfrm>
           <a:prstGeom prst="roundRect">
             <a:avLst>
@@ -14411,7 +14322,7 @@
         <p:spPr>
           <a:xfrm>
             <a:off x="896112" y="3639312"/>
-            <a:ext cx="5212080" cy="347472"/>
+            <a:ext cx="4861407" cy="347472"/>
           </a:xfrm>
           <a:prstGeom prst="rect">
             <a:avLst/>
@@ -14455,7 +14366,7 @@
         <p:spPr>
           <a:xfrm>
             <a:off x="896112" y="4041648"/>
-            <a:ext cx="5212080" cy="731520"/>
+            <a:ext cx="4861407" cy="731520"/>
           </a:xfrm>
           <a:prstGeom prst="rect">
             <a:avLst/>
@@ -14485,7 +14396,7 @@
                 <a:ea typeface="Microsoft JhengHei"/>
                 <a:cs typeface="Microsoft JhengHei"/>
               </a:rPr>
-              <a:t>Lorenz 曲線量化人員工時分配均等度，Gini = 0.042，確保排班公平可追溯。</a:t>
+              <a:t>Lorenz 曲線量化人員工時分配均等度，Gini = 0.031，確保排班公平可追溯。</a:t>
             </a:r>
           </a:p>
         </p:txBody>
@@ -14498,8 +14409,8 @@
         </p:nvSpPr>
         <p:spPr>
           <a:xfrm>
-            <a:off x="6583680" y="3474720"/>
-            <a:ext cx="5669280" cy="1371600"/>
+            <a:off x="6233007" y="3474720"/>
+            <a:ext cx="5318607" cy="1371600"/>
           </a:xfrm>
           <a:prstGeom prst="roundRect">
             <a:avLst>
@@ -14545,7 +14456,7 @@
         </p:nvSpPr>
         <p:spPr>
           <a:xfrm>
-            <a:off x="6583680" y="3474720"/>
+            <a:off x="6233007" y="3474720"/>
             <a:ext cx="73152" cy="1371600"/>
           </a:xfrm>
           <a:prstGeom prst="rect">
@@ -14588,8 +14499,8 @@
         </p:nvSpPr>
         <p:spPr>
           <a:xfrm>
-            <a:off x="6839712" y="3639312"/>
-            <a:ext cx="5212080" cy="347472"/>
+            <a:off x="6489039" y="3639312"/>
+            <a:ext cx="4861407" cy="347472"/>
           </a:xfrm>
           <a:prstGeom prst="rect">
             <a:avLst/>
@@ -14632,8 +14543,8 @@
         </p:nvSpPr>
         <p:spPr>
           <a:xfrm>
-            <a:off x="6839712" y="4041648"/>
-            <a:ext cx="5212080" cy="731520"/>
+            <a:off x="6489039" y="4041648"/>
+            <a:ext cx="4861407" cy="731520"/>
           </a:xfrm>
           <a:prstGeom prst="rect">
             <a:avLst/>
@@ -14663,7 +14574,7 @@
                 <a:ea typeface="Microsoft JhengHei"/>
                 <a:cs typeface="Microsoft JhengHei"/>
               </a:rPr>
-              <a:t>依累計趟次推估維護需求，可用度 &lt; 30% 自動排除於排班候選池。</a:t>
+              <a:t>依累計趟次推估維護需求，可用度 ≤ 15% 自動排除於排班候選池。</a:t>
             </a:r>
           </a:p>
         </p:txBody>
@@ -17684,7 +17595,7 @@
         <p:spPr>
           <a:xfrm>
             <a:off x="640080" y="1920240"/>
-            <a:ext cx="5669280" cy="1115568"/>
+            <a:ext cx="5318607" cy="1115568"/>
           </a:xfrm>
           <a:prstGeom prst="roundRect">
             <a:avLst>
@@ -17775,7 +17686,7 @@
         <p:spPr>
           <a:xfrm>
             <a:off x="1645920" y="2048256"/>
-            <a:ext cx="4480560" cy="320040"/>
+            <a:ext cx="4129887" cy="320040"/>
           </a:xfrm>
           <a:prstGeom prst="rect">
             <a:avLst/>
@@ -17819,7 +17730,7 @@
         <p:spPr>
           <a:xfrm>
             <a:off x="1645920" y="2414016"/>
-            <a:ext cx="4480560" cy="548640"/>
+            <a:ext cx="4129887" cy="548640"/>
           </a:xfrm>
           <a:prstGeom prst="rect">
             <a:avLst/>
@@ -17862,8 +17773,8 @@
         </p:nvSpPr>
         <p:spPr>
           <a:xfrm>
-            <a:off x="6583680" y="1920240"/>
-            <a:ext cx="5669280" cy="1115568"/>
+            <a:off x="6233007" y="1920240"/>
+            <a:ext cx="5318607" cy="1115568"/>
           </a:xfrm>
           <a:prstGeom prst="roundRect">
             <a:avLst>
@@ -17909,7 +17820,7 @@
         </p:nvSpPr>
         <p:spPr>
           <a:xfrm>
-            <a:off x="6766560" y="2029968"/>
+            <a:off x="6415887" y="2029968"/>
             <a:ext cx="822960" cy="548640"/>
           </a:xfrm>
           <a:prstGeom prst="rect">
@@ -17953,8 +17864,8 @@
         </p:nvSpPr>
         <p:spPr>
           <a:xfrm>
-            <a:off x="7589520" y="2048256"/>
-            <a:ext cx="4480560" cy="320040"/>
+            <a:off x="7238847" y="2048256"/>
+            <a:ext cx="4129887" cy="320040"/>
           </a:xfrm>
           <a:prstGeom prst="rect">
             <a:avLst/>
@@ -17997,8 +17908,8 @@
         </p:nvSpPr>
         <p:spPr>
           <a:xfrm>
-            <a:off x="7589520" y="2414016"/>
-            <a:ext cx="4480560" cy="548640"/>
+            <a:off x="7238847" y="2414016"/>
+            <a:ext cx="4129887" cy="548640"/>
           </a:xfrm>
           <a:prstGeom prst="rect">
             <a:avLst/>
@@ -18042,7 +17953,7 @@
         <p:spPr>
           <a:xfrm>
             <a:off x="640080" y="3200400"/>
-            <a:ext cx="5669280" cy="1115568"/>
+            <a:ext cx="5318607" cy="1115568"/>
           </a:xfrm>
           <a:prstGeom prst="roundRect">
             <a:avLst>
@@ -18133,7 +18044,7 @@
         <p:spPr>
           <a:xfrm>
             <a:off x="1645920" y="3328416"/>
-            <a:ext cx="4480560" cy="320040"/>
+            <a:ext cx="4129887" cy="320040"/>
           </a:xfrm>
           <a:prstGeom prst="rect">
             <a:avLst/>
@@ -18177,7 +18088,7 @@
         <p:spPr>
           <a:xfrm>
             <a:off x="1645920" y="3694176"/>
-            <a:ext cx="4480560" cy="548640"/>
+            <a:ext cx="4129887" cy="548640"/>
           </a:xfrm>
           <a:prstGeom prst="rect">
             <a:avLst/>
@@ -18220,8 +18131,8 @@
         </p:nvSpPr>
         <p:spPr>
           <a:xfrm>
-            <a:off x="6583680" y="3200400"/>
-            <a:ext cx="5669280" cy="1115568"/>
+            <a:off x="6233007" y="3200400"/>
+            <a:ext cx="5318607" cy="1115568"/>
           </a:xfrm>
           <a:prstGeom prst="roundRect">
             <a:avLst>
@@ -18267,7 +18178,7 @@
         </p:nvSpPr>
         <p:spPr>
           <a:xfrm>
-            <a:off x="6766560" y="3310128"/>
+            <a:off x="6415887" y="3310128"/>
             <a:ext cx="822960" cy="548640"/>
           </a:xfrm>
           <a:prstGeom prst="rect">
@@ -18311,8 +18222,8 @@
         </p:nvSpPr>
         <p:spPr>
           <a:xfrm>
-            <a:off x="7589520" y="3328416"/>
-            <a:ext cx="4480560" cy="320040"/>
+            <a:off x="7238847" y="3328416"/>
+            <a:ext cx="4129887" cy="320040"/>
           </a:xfrm>
           <a:prstGeom prst="rect">
             <a:avLst/>
@@ -18355,8 +18266,8 @@
         </p:nvSpPr>
         <p:spPr>
           <a:xfrm>
-            <a:off x="7589520" y="3694176"/>
-            <a:ext cx="4480560" cy="548640"/>
+            <a:off x="7238847" y="3694176"/>
+            <a:ext cx="4129887" cy="548640"/>
           </a:xfrm>
           <a:prstGeom prst="rect">
             <a:avLst/>
@@ -18386,7 +18297,7 @@
                 <a:ea typeface="Microsoft JhengHei"/>
                 <a:cs typeface="Microsoft JhengHei"/>
               </a:rPr>
-              <a:t>可用度 &lt; 30% 標記需維護，不進入候選池；每艦僅一組人員。</a:t>
+              <a:t>可用度 ≤ 15% 標記需維護，不進入候選池；每艦僅一組人員。</a:t>
             </a:r>
           </a:p>
         </p:txBody>
@@ -21078,7 +20989,7 @@
                 <a:ea typeface="Microsoft JhengHei"/>
                 <a:cs typeface="Microsoft JhengHei"/>
               </a:rPr>
-              <a:t>排班引擎 · 實機輸出</a:t>
+              <a:t>排班引擎 · 實機輸出 · 2026-06-07</a:t>
             </a:r>
           </a:p>
         </p:txBody>
@@ -21122,7 +21033,7 @@
                 <a:ea typeface="Microsoft JhengHei"/>
                 <a:cs typeface="Microsoft JhengHei"/>
               </a:rPr>
-              <a:t>今日實際執行：明日（2026-06-16）惡劣海況 59.2% → 外海縮減至 1 人</a:t>
+              <a:t>明日惡劣海況 38.5%，引擎自動配置外海 2 人</a:t>
             </a:r>
           </a:p>
         </p:txBody>
@@ -21770,7 +21681,7 @@
                 <a:ea typeface="Microsoft JhengHei"/>
                 <a:cs typeface="Consolas"/>
               </a:rPr>
-              <a:t>59.2%</a:t>
+              <a:t>38.5%</a:t>
             </a:r>
           </a:p>
         </p:txBody>
@@ -21948,7 +21859,7 @@
                 <a:ea typeface="Microsoft JhengHei"/>
                 <a:cs typeface="Consolas"/>
               </a:rPr>
-              <a:t>1</a:t>
+              <a:t>2</a:t>
             </a:r>
           </a:p>
         </p:txBody>
@@ -22005,8 +21916,8 @@
         </p:nvSpPr>
         <p:spPr>
           <a:xfrm>
-            <a:off x="640080" y="3017520"/>
-            <a:ext cx="1188720" cy="420624"/>
+            <a:off x="640080" y="2907792"/>
+            <a:ext cx="1188720" cy="384048"/>
           </a:xfrm>
           <a:prstGeom prst="rect">
             <a:avLst/>
@@ -22048,8 +21959,8 @@
         </p:nvSpPr>
         <p:spPr>
           <a:xfrm>
-            <a:off x="749808" y="3017520"/>
-            <a:ext cx="1005840" cy="420624"/>
+            <a:off x="749808" y="2907792"/>
+            <a:ext cx="1005840" cy="384048"/>
           </a:xfrm>
           <a:prstGeom prst="rect">
             <a:avLst/>
@@ -22092,8 +22003,8 @@
         </p:nvSpPr>
         <p:spPr>
           <a:xfrm>
-            <a:off x="1828800" y="3017520"/>
-            <a:ext cx="1828800" cy="420624"/>
+            <a:off x="1828800" y="2907792"/>
+            <a:ext cx="1828800" cy="384048"/>
           </a:xfrm>
           <a:prstGeom prst="rect">
             <a:avLst/>
@@ -22135,8 +22046,8 @@
         </p:nvSpPr>
         <p:spPr>
           <a:xfrm>
-            <a:off x="1938528" y="3017520"/>
-            <a:ext cx="1645920" cy="420624"/>
+            <a:off x="1938528" y="2907792"/>
+            <a:ext cx="1645920" cy="384048"/>
           </a:xfrm>
           <a:prstGeom prst="rect">
             <a:avLst/>
@@ -22179,8 +22090,8 @@
         </p:nvSpPr>
         <p:spPr>
           <a:xfrm>
-            <a:off x="3657600" y="3017520"/>
-            <a:ext cx="1828800" cy="420624"/>
+            <a:off x="3657600" y="2907792"/>
+            <a:ext cx="1828800" cy="384048"/>
           </a:xfrm>
           <a:prstGeom prst="rect">
             <a:avLst/>
@@ -22222,8 +22133,8 @@
         </p:nvSpPr>
         <p:spPr>
           <a:xfrm>
-            <a:off x="3767328" y="3017520"/>
-            <a:ext cx="1645920" cy="420624"/>
+            <a:off x="3767328" y="2907792"/>
+            <a:ext cx="1645920" cy="384048"/>
           </a:xfrm>
           <a:prstGeom prst="rect">
             <a:avLst/>
@@ -22266,8 +22177,8 @@
         </p:nvSpPr>
         <p:spPr>
           <a:xfrm>
-            <a:off x="5486400" y="3017520"/>
-            <a:ext cx="1188720" cy="420624"/>
+            <a:off x="5486400" y="2907792"/>
+            <a:ext cx="1188720" cy="384048"/>
           </a:xfrm>
           <a:prstGeom prst="rect">
             <a:avLst/>
@@ -22309,8 +22220,8 @@
         </p:nvSpPr>
         <p:spPr>
           <a:xfrm>
-            <a:off x="5596128" y="3017520"/>
-            <a:ext cx="1005840" cy="420624"/>
+            <a:off x="5596128" y="2907792"/>
+            <a:ext cx="1005840" cy="384048"/>
           </a:xfrm>
           <a:prstGeom prst="rect">
             <a:avLst/>
@@ -22353,8 +22264,8 @@
         </p:nvSpPr>
         <p:spPr>
           <a:xfrm>
-            <a:off x="6675120" y="3017520"/>
-            <a:ext cx="1554480" cy="420624"/>
+            <a:off x="6675120" y="2907792"/>
+            <a:ext cx="1554480" cy="384048"/>
           </a:xfrm>
           <a:prstGeom prst="rect">
             <a:avLst/>
@@ -22396,8 +22307,8 @@
         </p:nvSpPr>
         <p:spPr>
           <a:xfrm>
-            <a:off x="6784848" y="3017520"/>
-            <a:ext cx="1371600" cy="420624"/>
+            <a:off x="6784848" y="2907792"/>
+            <a:ext cx="1371600" cy="384048"/>
           </a:xfrm>
           <a:prstGeom prst="rect">
             <a:avLst/>
@@ -22440,8 +22351,8 @@
         </p:nvSpPr>
         <p:spPr>
           <a:xfrm>
-            <a:off x="8229600" y="3017520"/>
-            <a:ext cx="3322015" cy="420624"/>
+            <a:off x="8229600" y="2907792"/>
+            <a:ext cx="3322015" cy="384048"/>
           </a:xfrm>
           <a:prstGeom prst="rect">
             <a:avLst/>
@@ -22483,8 +22394,8 @@
         </p:nvSpPr>
         <p:spPr>
           <a:xfrm>
-            <a:off x="8339328" y="3017520"/>
-            <a:ext cx="3139135" cy="420624"/>
+            <a:off x="8339328" y="2907792"/>
+            <a:ext cx="3139135" cy="384048"/>
           </a:xfrm>
           <a:prstGeom prst="rect">
             <a:avLst/>
@@ -22527,8 +22438,8 @@
         </p:nvSpPr>
         <p:spPr>
           <a:xfrm>
-            <a:off x="640080" y="3438144"/>
-            <a:ext cx="10911535" cy="365760"/>
+            <a:off x="640080" y="3291840"/>
+            <a:ext cx="10911535" cy="301752"/>
           </a:xfrm>
           <a:prstGeom prst="rect">
             <a:avLst/>
@@ -22570,8 +22481,8 @@
         </p:nvSpPr>
         <p:spPr>
           <a:xfrm>
-            <a:off x="749808" y="3438144"/>
-            <a:ext cx="1005840" cy="365760"/>
+            <a:off x="749808" y="3291840"/>
+            <a:ext cx="1005840" cy="301752"/>
           </a:xfrm>
           <a:prstGeom prst="rect">
             <a:avLst/>
@@ -22614,8 +22525,8 @@
         </p:nvSpPr>
         <p:spPr>
           <a:xfrm>
-            <a:off x="1938528" y="3438144"/>
-            <a:ext cx="1645920" cy="365760"/>
+            <a:off x="1938528" y="3291840"/>
+            <a:ext cx="1645920" cy="301752"/>
           </a:xfrm>
           <a:prstGeom prst="rect">
             <a:avLst/>
@@ -22645,7 +22556,7 @@
                 <a:ea typeface="Microsoft JhengHei"/>
                 <a:cs typeface="Microsoft JhengHei"/>
               </a:rPr>
-              <a:t>Employee</a:t>
+              <a:t>林佳</a:t>
             </a:r>
           </a:p>
         </p:txBody>
@@ -22658,8 +22569,8 @@
         </p:nvSpPr>
         <p:spPr>
           <a:xfrm>
-            <a:off x="3767328" y="3438144"/>
-            <a:ext cx="1645920" cy="365760"/>
+            <a:off x="3767328" y="3291840"/>
+            <a:ext cx="1645920" cy="301752"/>
           </a:xfrm>
           <a:prstGeom prst="rect">
             <a:avLst/>
@@ -22689,7 +22600,7 @@
                 <a:ea typeface="Microsoft JhengHei"/>
                 <a:cs typeface="Consolas"/>
               </a:rPr>
-              <a:t>MAR-008</a:t>
+              <a:t>MAR-006</a:t>
             </a:r>
           </a:p>
         </p:txBody>
@@ -22702,8 +22613,8 @@
         </p:nvSpPr>
         <p:spPr>
           <a:xfrm>
-            <a:off x="5596128" y="3438144"/>
-            <a:ext cx="1005840" cy="365760"/>
+            <a:off x="5596128" y="3291840"/>
+            <a:ext cx="1005840" cy="301752"/>
           </a:xfrm>
           <a:prstGeom prst="rect">
             <a:avLst/>
@@ -22746,8 +22657,8 @@
         </p:nvSpPr>
         <p:spPr>
           <a:xfrm>
-            <a:off x="6784848" y="3438144"/>
-            <a:ext cx="1371600" cy="365760"/>
+            <a:off x="6784848" y="3291840"/>
+            <a:ext cx="1371600" cy="301752"/>
           </a:xfrm>
           <a:prstGeom prst="rect">
             <a:avLst/>
@@ -22777,7 +22688,7 @@
                 <a:ea typeface="Microsoft JhengHei"/>
                 <a:cs typeface="Microsoft JhengHei"/>
               </a:rPr>
-              <a:t>11.1%</a:t>
+              <a:t>8.3%</a:t>
             </a:r>
           </a:p>
         </p:txBody>
@@ -22790,8 +22701,8 @@
         </p:nvSpPr>
         <p:spPr>
           <a:xfrm>
-            <a:off x="8339328" y="3438144"/>
-            <a:ext cx="3139135" cy="365760"/>
+            <a:off x="8339328" y="3291840"/>
+            <a:ext cx="3139135" cy="301752"/>
           </a:xfrm>
           <a:prstGeom prst="rect">
             <a:avLst/>
@@ -22834,8 +22745,8 @@
         </p:nvSpPr>
         <p:spPr>
           <a:xfrm>
-            <a:off x="640080" y="3803904"/>
-            <a:ext cx="10911535" cy="365760"/>
+            <a:off x="640080" y="3593592"/>
+            <a:ext cx="10911535" cy="301752"/>
           </a:xfrm>
           <a:prstGeom prst="rect">
             <a:avLst/>
@@ -22877,8 +22788,8 @@
         </p:nvSpPr>
         <p:spPr>
           <a:xfrm>
-            <a:off x="749808" y="3803904"/>
-            <a:ext cx="1005840" cy="365760"/>
+            <a:off x="749808" y="3593592"/>
+            <a:ext cx="1005840" cy="301752"/>
           </a:xfrm>
           <a:prstGeom prst="rect">
             <a:avLst/>
@@ -22902,13 +22813,13 @@
             <a:r>
               <a:rPr sz="1150" b="1" i="0">
                 <a:solidFill>
-                  <a:srgbClr val="34506A"/>
-                </a:solidFill>
-                <a:latin typeface="Microsoft JhengHei"/>
-                <a:ea typeface="Microsoft JhengHei"/>
-                <a:cs typeface="Microsoft JhengHei"/>
-              </a:rPr>
-              <a:t>近海</a:t>
+                  <a:srgbClr val="BC5B41"/>
+                </a:solidFill>
+                <a:latin typeface="Microsoft JhengHei"/>
+                <a:ea typeface="Microsoft JhengHei"/>
+                <a:cs typeface="Microsoft JhengHei"/>
+              </a:rPr>
+              <a:t>外海</a:t>
             </a:r>
           </a:p>
         </p:txBody>
@@ -22921,8 +22832,8 @@
         </p:nvSpPr>
         <p:spPr>
           <a:xfrm>
-            <a:off x="1938528" y="3803904"/>
-            <a:ext cx="1645920" cy="365760"/>
+            <a:off x="1938528" y="3593592"/>
+            <a:ext cx="1645920" cy="301752"/>
           </a:xfrm>
           <a:prstGeom prst="rect">
             <a:avLst/>
@@ -22952,7 +22863,7 @@
                 <a:ea typeface="Microsoft JhengHei"/>
                 <a:cs typeface="Microsoft JhengHei"/>
               </a:rPr>
-              <a:t>林佳</a:t>
+              <a:t>劉燕</a:t>
             </a:r>
           </a:p>
         </p:txBody>
@@ -22965,8 +22876,8 @@
         </p:nvSpPr>
         <p:spPr>
           <a:xfrm>
-            <a:off x="3767328" y="3803904"/>
-            <a:ext cx="1645920" cy="365760"/>
+            <a:off x="3767328" y="3593592"/>
+            <a:ext cx="1645920" cy="301752"/>
           </a:xfrm>
           <a:prstGeom prst="rect">
             <a:avLst/>
@@ -22996,7 +22907,7 @@
                 <a:ea typeface="Microsoft JhengHei"/>
                 <a:cs typeface="Consolas"/>
               </a:rPr>
-              <a:t>MAR-003</a:t>
+              <a:t>MAR-007</a:t>
             </a:r>
           </a:p>
         </p:txBody>
@@ -23009,8 +22920,8 @@
         </p:nvSpPr>
         <p:spPr>
           <a:xfrm>
-            <a:off x="5596128" y="3803904"/>
-            <a:ext cx="1005840" cy="365760"/>
+            <a:off x="5596128" y="3593592"/>
+            <a:ext cx="1005840" cy="301752"/>
           </a:xfrm>
           <a:prstGeom prst="rect">
             <a:avLst/>
@@ -23040,7 +22951,7 @@
                 <a:ea typeface="Microsoft JhengHei"/>
                 <a:cs typeface="Microsoft JhengHei"/>
               </a:rPr>
-              <a:t>17</a:t>
+              <a:t>21</a:t>
             </a:r>
           </a:p>
         </p:txBody>
@@ -23053,8 +22964,8 @@
         </p:nvSpPr>
         <p:spPr>
           <a:xfrm>
-            <a:off x="6784848" y="3803904"/>
-            <a:ext cx="1371600" cy="365760"/>
+            <a:off x="6784848" y="3593592"/>
+            <a:ext cx="1371600" cy="301752"/>
           </a:xfrm>
           <a:prstGeom prst="rect">
             <a:avLst/>
@@ -23084,7 +22995,7 @@
                 <a:ea typeface="Microsoft JhengHei"/>
                 <a:cs typeface="Microsoft JhengHei"/>
               </a:rPr>
-              <a:t>29.4%</a:t>
+              <a:t>7.7%</a:t>
             </a:r>
           </a:p>
         </p:txBody>
@@ -23097,8 +23008,8 @@
         </p:nvSpPr>
         <p:spPr>
           <a:xfrm>
-            <a:off x="8339328" y="3803904"/>
-            <a:ext cx="3139135" cy="365760"/>
+            <a:off x="8339328" y="3593592"/>
+            <a:ext cx="3139135" cy="301752"/>
           </a:xfrm>
           <a:prstGeom prst="rect">
             <a:avLst/>
@@ -23128,7 +23039,7 @@
                 <a:ea typeface="Microsoft JhengHei"/>
                 <a:cs typeface="Microsoft JhengHei"/>
               </a:rPr>
-              <a:t>疲勞適中，配置近海任務</a:t>
+              <a:t>低疲勞且外海暴露低，適合輪派外海</a:t>
             </a:r>
           </a:p>
         </p:txBody>
@@ -23141,8 +23052,8 @@
         </p:nvSpPr>
         <p:spPr>
           <a:xfrm>
-            <a:off x="640080" y="4169664"/>
-            <a:ext cx="10911535" cy="365760"/>
+            <a:off x="640080" y="3895344"/>
+            <a:ext cx="10911535" cy="301752"/>
           </a:xfrm>
           <a:prstGeom prst="rect">
             <a:avLst/>
@@ -23184,8 +23095,8 @@
         </p:nvSpPr>
         <p:spPr>
           <a:xfrm>
-            <a:off x="749808" y="4169664"/>
-            <a:ext cx="1005840" cy="365760"/>
+            <a:off x="749808" y="3895344"/>
+            <a:ext cx="1005840" cy="301752"/>
           </a:xfrm>
           <a:prstGeom prst="rect">
             <a:avLst/>
@@ -23228,8 +23139,8 @@
         </p:nvSpPr>
         <p:spPr>
           <a:xfrm>
-            <a:off x="1938528" y="4169664"/>
-            <a:ext cx="1645920" cy="365760"/>
+            <a:off x="1938528" y="3895344"/>
+            <a:ext cx="1645920" cy="301752"/>
           </a:xfrm>
           <a:prstGeom prst="rect">
             <a:avLst/>
@@ -23259,7 +23170,7 @@
                 <a:ea typeface="Microsoft JhengHei"/>
                 <a:cs typeface="Microsoft JhengHei"/>
               </a:rPr>
-              <a:t>黃峻</a:t>
+              <a:t>鄭宇</a:t>
             </a:r>
           </a:p>
         </p:txBody>
@@ -23272,8 +23183,8 @@
         </p:nvSpPr>
         <p:spPr>
           <a:xfrm>
-            <a:off x="3767328" y="4169664"/>
-            <a:ext cx="1645920" cy="365760"/>
+            <a:off x="3767328" y="3895344"/>
+            <a:ext cx="1645920" cy="301752"/>
           </a:xfrm>
           <a:prstGeom prst="rect">
             <a:avLst/>
@@ -23303,7 +23214,7 @@
                 <a:ea typeface="Microsoft JhengHei"/>
                 <a:cs typeface="Consolas"/>
               </a:rPr>
-              <a:t>MAR-004</a:t>
+              <a:t>MAR-003</a:t>
             </a:r>
           </a:p>
         </p:txBody>
@@ -23316,8 +23227,8 @@
         </p:nvSpPr>
         <p:spPr>
           <a:xfrm>
-            <a:off x="5596128" y="4169664"/>
-            <a:ext cx="1005840" cy="365760"/>
+            <a:off x="5596128" y="3895344"/>
+            <a:ext cx="1005840" cy="301752"/>
           </a:xfrm>
           <a:prstGeom prst="rect">
             <a:avLst/>
@@ -23360,8 +23271,8 @@
         </p:nvSpPr>
         <p:spPr>
           <a:xfrm>
-            <a:off x="6784848" y="4169664"/>
-            <a:ext cx="1371600" cy="365760"/>
+            <a:off x="6784848" y="3895344"/>
+            <a:ext cx="1371600" cy="301752"/>
           </a:xfrm>
           <a:prstGeom prst="rect">
             <a:avLst/>
@@ -23391,7 +23302,7 @@
                 <a:ea typeface="Microsoft JhengHei"/>
                 <a:cs typeface="Microsoft JhengHei"/>
               </a:rPr>
-              <a:t>35.3%</a:t>
+              <a:t>20.0%</a:t>
             </a:r>
           </a:p>
         </p:txBody>
@@ -23404,8 +23315,8 @@
         </p:nvSpPr>
         <p:spPr>
           <a:xfrm>
-            <a:off x="8339328" y="4169664"/>
-            <a:ext cx="3139135" cy="365760"/>
+            <a:off x="8339328" y="3895344"/>
+            <a:ext cx="3139135" cy="301752"/>
           </a:xfrm>
           <a:prstGeom prst="rect">
             <a:avLst/>
@@ -23448,8 +23359,8 @@
         </p:nvSpPr>
         <p:spPr>
           <a:xfrm>
-            <a:off x="640080" y="4535424"/>
-            <a:ext cx="10911535" cy="365760"/>
+            <a:off x="640080" y="4197096"/>
+            <a:ext cx="10911535" cy="301752"/>
           </a:xfrm>
           <a:prstGeom prst="rect">
             <a:avLst/>
@@ -23491,8 +23402,8 @@
         </p:nvSpPr>
         <p:spPr>
           <a:xfrm>
-            <a:off x="749808" y="4535424"/>
-            <a:ext cx="1005840" cy="365760"/>
+            <a:off x="749808" y="4197096"/>
+            <a:ext cx="1005840" cy="301752"/>
           </a:xfrm>
           <a:prstGeom prst="rect">
             <a:avLst/>
@@ -23535,8 +23446,8 @@
         </p:nvSpPr>
         <p:spPr>
           <a:xfrm>
-            <a:off x="1938528" y="4535424"/>
-            <a:ext cx="1645920" cy="365760"/>
+            <a:off x="1938528" y="4197096"/>
+            <a:ext cx="1645920" cy="301752"/>
           </a:xfrm>
           <a:prstGeom prst="rect">
             <a:avLst/>
@@ -23566,7 +23477,7 @@
                 <a:ea typeface="Microsoft JhengHei"/>
                 <a:cs typeface="Microsoft JhengHei"/>
               </a:rPr>
-              <a:t>Admin</a:t>
+              <a:t>孫芳</a:t>
             </a:r>
           </a:p>
         </p:txBody>
@@ -23579,8 +23490,8 @@
         </p:nvSpPr>
         <p:spPr>
           <a:xfrm>
-            <a:off x="3767328" y="4535424"/>
-            <a:ext cx="1645920" cy="365760"/>
+            <a:off x="3767328" y="4197096"/>
+            <a:ext cx="1645920" cy="301752"/>
           </a:xfrm>
           <a:prstGeom prst="rect">
             <a:avLst/>
@@ -23610,7 +23521,7 @@
                 <a:ea typeface="Microsoft JhengHei"/>
                 <a:cs typeface="Consolas"/>
               </a:rPr>
-              <a:t>MAR-005</a:t>
+              <a:t>MAR-004</a:t>
             </a:r>
           </a:p>
         </p:txBody>
@@ -23623,8 +23534,8 @@
         </p:nvSpPr>
         <p:spPr>
           <a:xfrm>
-            <a:off x="5596128" y="4535424"/>
-            <a:ext cx="1005840" cy="365760"/>
+            <a:off x="5596128" y="4197096"/>
+            <a:ext cx="1005840" cy="301752"/>
           </a:xfrm>
           <a:prstGeom prst="rect">
             <a:avLst/>
@@ -23654,7 +23565,7 @@
                 <a:ea typeface="Microsoft JhengHei"/>
                 <a:cs typeface="Microsoft JhengHei"/>
               </a:rPr>
-              <a:t>20</a:t>
+              <a:t>18</a:t>
             </a:r>
           </a:p>
         </p:txBody>
@@ -23667,8 +23578,8 @@
         </p:nvSpPr>
         <p:spPr>
           <a:xfrm>
-            <a:off x="6784848" y="4535424"/>
-            <a:ext cx="1371600" cy="365760"/>
+            <a:off x="6784848" y="4197096"/>
+            <a:ext cx="1371600" cy="301752"/>
           </a:xfrm>
           <a:prstGeom prst="rect">
             <a:avLst/>
@@ -23698,7 +23609,7 @@
                 <a:ea typeface="Microsoft JhengHei"/>
                 <a:cs typeface="Microsoft JhengHei"/>
               </a:rPr>
-              <a:t>30.0%</a:t>
+              <a:t>33.3%</a:t>
             </a:r>
           </a:p>
         </p:txBody>
@@ -23711,8 +23622,8 @@
         </p:nvSpPr>
         <p:spPr>
           <a:xfrm>
-            <a:off x="8339328" y="4535424"/>
-            <a:ext cx="3139135" cy="365760"/>
+            <a:off x="8339328" y="4197096"/>
+            <a:ext cx="3139135" cy="301752"/>
           </a:xfrm>
           <a:prstGeom prst="rect">
             <a:avLst/>
@@ -23755,8 +23666,8 @@
         </p:nvSpPr>
         <p:spPr>
           <a:xfrm>
-            <a:off x="640080" y="4901184"/>
-            <a:ext cx="10911535" cy="365760"/>
+            <a:off x="640080" y="4498848"/>
+            <a:ext cx="10911535" cy="301752"/>
           </a:xfrm>
           <a:prstGeom prst="rect">
             <a:avLst/>
@@ -23798,8 +23709,8 @@
         </p:nvSpPr>
         <p:spPr>
           <a:xfrm>
-            <a:off x="749808" y="4901184"/>
-            <a:ext cx="1005840" cy="365760"/>
+            <a:off x="749808" y="4498848"/>
+            <a:ext cx="1005840" cy="301752"/>
           </a:xfrm>
           <a:prstGeom prst="rect">
             <a:avLst/>
@@ -23823,13 +23734,13 @@
             <a:r>
               <a:rPr sz="1150" b="1" i="0">
                 <a:solidFill>
-                  <a:srgbClr val="4E8C8A"/>
-                </a:solidFill>
-                <a:latin typeface="Microsoft JhengHei"/>
-                <a:ea typeface="Microsoft JhengHei"/>
-                <a:cs typeface="Microsoft JhengHei"/>
-              </a:rPr>
-              <a:t>港口</a:t>
+                  <a:srgbClr val="34506A"/>
+                </a:solidFill>
+                <a:latin typeface="Microsoft JhengHei"/>
+                <a:ea typeface="Microsoft JhengHei"/>
+                <a:cs typeface="Microsoft JhengHei"/>
+              </a:rPr>
+              <a:t>近海</a:t>
             </a:r>
           </a:p>
         </p:txBody>
@@ -23842,8 +23753,8 @@
         </p:nvSpPr>
         <p:spPr>
           <a:xfrm>
-            <a:off x="1938528" y="4901184"/>
-            <a:ext cx="1645920" cy="365760"/>
+            <a:off x="1938528" y="4498848"/>
+            <a:ext cx="1645920" cy="301752"/>
           </a:xfrm>
           <a:prstGeom prst="rect">
             <a:avLst/>
@@ -23873,7 +23784,7 @@
                 <a:ea typeface="Microsoft JhengHei"/>
                 <a:cs typeface="Microsoft JhengHei"/>
               </a:rPr>
-              <a:t>陳偉</a:t>
+              <a:t>吳超</a:t>
             </a:r>
           </a:p>
         </p:txBody>
@@ -23886,8 +23797,8 @@
         </p:nvSpPr>
         <p:spPr>
           <a:xfrm>
-            <a:off x="3767328" y="4901184"/>
-            <a:ext cx="1645920" cy="365760"/>
+            <a:off x="3767328" y="4498848"/>
+            <a:ext cx="1645920" cy="301752"/>
           </a:xfrm>
           <a:prstGeom prst="rect">
             <a:avLst/>
@@ -23917,7 +23828,7 @@
                 <a:ea typeface="Microsoft JhengHei"/>
                 <a:cs typeface="Consolas"/>
               </a:rPr>
-              <a:t>MAR-001</a:t>
+              <a:t>MAR-005</a:t>
             </a:r>
           </a:p>
         </p:txBody>
@@ -23930,8 +23841,8 @@
         </p:nvSpPr>
         <p:spPr>
           <a:xfrm>
-            <a:off x="5596128" y="4901184"/>
-            <a:ext cx="1005840" cy="365760"/>
+            <a:off x="5596128" y="4498848"/>
+            <a:ext cx="1005840" cy="301752"/>
           </a:xfrm>
           <a:prstGeom prst="rect">
             <a:avLst/>
@@ -23961,7 +23872,7 @@
                 <a:ea typeface="Microsoft JhengHei"/>
                 <a:cs typeface="Microsoft JhengHei"/>
               </a:rPr>
-              <a:t>26</a:t>
+              <a:t>16</a:t>
             </a:r>
           </a:p>
         </p:txBody>
@@ -23974,8 +23885,8 @@
         </p:nvSpPr>
         <p:spPr>
           <a:xfrm>
-            <a:off x="6784848" y="4901184"/>
-            <a:ext cx="1371600" cy="365760"/>
+            <a:off x="6784848" y="4498848"/>
+            <a:ext cx="1371600" cy="301752"/>
           </a:xfrm>
           <a:prstGeom prst="rect">
             <a:avLst/>
@@ -24005,7 +23916,7 @@
                 <a:ea typeface="Microsoft JhengHei"/>
                 <a:cs typeface="Microsoft JhengHei"/>
               </a:rPr>
-              <a:t>11.1%</a:t>
+              <a:t>25.0%</a:t>
             </a:r>
           </a:p>
         </p:txBody>
@@ -24018,8 +23929,8 @@
         </p:nvSpPr>
         <p:spPr>
           <a:xfrm>
-            <a:off x="8339328" y="4901184"/>
-            <a:ext cx="3139135" cy="365760"/>
+            <a:off x="8339328" y="4498848"/>
+            <a:ext cx="3139135" cy="301752"/>
           </a:xfrm>
           <a:prstGeom prst="rect">
             <a:avLst/>
@@ -24049,7 +23960,7 @@
                 <a:ea typeface="Microsoft JhengHei"/>
                 <a:cs typeface="Microsoft JhengHei"/>
               </a:rPr>
-              <a:t>配置港口值守</a:t>
+              <a:t>疲勞適中，配置近海任務</a:t>
             </a:r>
           </a:p>
         </p:txBody>
@@ -24062,8 +23973,8 @@
         </p:nvSpPr>
         <p:spPr>
           <a:xfrm>
-            <a:off x="640080" y="5266944"/>
-            <a:ext cx="10911535" cy="365760"/>
+            <a:off x="640080" y="4800600"/>
+            <a:ext cx="10911535" cy="301752"/>
           </a:xfrm>
           <a:prstGeom prst="rect">
             <a:avLst/>
@@ -24105,8 +24016,8 @@
         </p:nvSpPr>
         <p:spPr>
           <a:xfrm>
-            <a:off x="749808" y="5266944"/>
-            <a:ext cx="1005840" cy="365760"/>
+            <a:off x="749808" y="4800600"/>
+            <a:ext cx="1005840" cy="301752"/>
           </a:xfrm>
           <a:prstGeom prst="rect">
             <a:avLst/>
@@ -24149,8 +24060,8 @@
         </p:nvSpPr>
         <p:spPr>
           <a:xfrm>
-            <a:off x="1938528" y="5266944"/>
-            <a:ext cx="1645920" cy="365760"/>
+            <a:off x="1938528" y="4800600"/>
+            <a:ext cx="1645920" cy="301752"/>
           </a:xfrm>
           <a:prstGeom prst="rect">
             <a:avLst/>
@@ -24180,7 +24091,7 @@
                 <a:ea typeface="Microsoft JhengHei"/>
                 <a:cs typeface="Microsoft JhengHei"/>
               </a:rPr>
-              <a:t>孫芳</a:t>
+              <a:t>陳偉</a:t>
             </a:r>
           </a:p>
         </p:txBody>
@@ -24193,8 +24104,8 @@
         </p:nvSpPr>
         <p:spPr>
           <a:xfrm>
-            <a:off x="3767328" y="5266944"/>
-            <a:ext cx="1645920" cy="365760"/>
+            <a:off x="3767328" y="4800600"/>
+            <a:ext cx="1645920" cy="301752"/>
           </a:xfrm>
           <a:prstGeom prst="rect">
             <a:avLst/>
@@ -24224,7 +24135,7 @@
                 <a:ea typeface="Microsoft JhengHei"/>
                 <a:cs typeface="Consolas"/>
               </a:rPr>
-              <a:t>MAR-002</a:t>
+              <a:t>MAR-001</a:t>
             </a:r>
           </a:p>
         </p:txBody>
@@ -24237,8 +24148,8 @@
         </p:nvSpPr>
         <p:spPr>
           <a:xfrm>
-            <a:off x="5596128" y="5266944"/>
-            <a:ext cx="1005840" cy="365760"/>
+            <a:off x="5596128" y="4800600"/>
+            <a:ext cx="1005840" cy="301752"/>
           </a:xfrm>
           <a:prstGeom prst="rect">
             <a:avLst/>
@@ -24268,7 +24179,7 @@
                 <a:ea typeface="Microsoft JhengHei"/>
                 <a:cs typeface="Microsoft JhengHei"/>
               </a:rPr>
-              <a:t>27</a:t>
+              <a:t>53</a:t>
             </a:r>
           </a:p>
         </p:txBody>
@@ -24281,8 +24192,8 @@
         </p:nvSpPr>
         <p:spPr>
           <a:xfrm>
-            <a:off x="6784848" y="5266944"/>
-            <a:ext cx="1371600" cy="365760"/>
+            <a:off x="6784848" y="4800600"/>
+            <a:ext cx="1371600" cy="301752"/>
           </a:xfrm>
           <a:prstGeom prst="rect">
             <a:avLst/>
@@ -24312,7 +24223,7 @@
                 <a:ea typeface="Microsoft JhengHei"/>
                 <a:cs typeface="Microsoft JhengHei"/>
               </a:rPr>
-              <a:t>30.8%</a:t>
+              <a:t>26.7%</a:t>
             </a:r>
           </a:p>
         </p:txBody>
@@ -24325,8 +24236,8 @@
         </p:nvSpPr>
         <p:spPr>
           <a:xfrm>
-            <a:off x="8339328" y="5266944"/>
-            <a:ext cx="3139135" cy="365760"/>
+            <a:off x="8339328" y="4800600"/>
+            <a:ext cx="3139135" cy="301752"/>
           </a:xfrm>
           <a:prstGeom prst="rect">
             <a:avLst/>
@@ -24356,7 +24267,7 @@
                 <a:ea typeface="Microsoft JhengHei"/>
                 <a:cs typeface="Microsoft JhengHei"/>
               </a:rPr>
-              <a:t>配置港口值守</a:t>
+              <a:t>疲勞偏高，配置港口輕負荷</a:t>
             </a:r>
           </a:p>
         </p:txBody>
@@ -24369,8 +24280,315 @@
         </p:nvSpPr>
         <p:spPr>
           <a:xfrm>
-            <a:off x="640080" y="3017520"/>
-            <a:ext cx="10911535" cy="2615184"/>
+            <a:off x="640080" y="5102352"/>
+            <a:ext cx="10911535" cy="301752"/>
+          </a:xfrm>
+          <a:prstGeom prst="rect">
+            <a:avLst/>
+          </a:prstGeom>
+          <a:solidFill>
+            <a:srgbClr val="FFFFFF"/>
+          </a:solidFill>
+          <a:ln>
+            <a:noFill/>
+          </a:ln>
+        </p:spPr>
+        <p:style>
+          <a:lnRef idx="1">
+            <a:schemeClr val="accent1"/>
+          </a:lnRef>
+          <a:fillRef idx="3">
+            <a:schemeClr val="accent1"/>
+          </a:fillRef>
+          <a:effectRef idx="2">
+            <a:schemeClr val="accent1"/>
+          </a:effectRef>
+          <a:fontRef idx="minor">
+            <a:schemeClr val="lt1"/>
+          </a:fontRef>
+        </p:style>
+        <p:txBody>
+          <a:bodyPr rtlCol="0" anchor="ctr"/>
+          <a:lstStyle/>
+          <a:p>
+            <a:pPr algn="ctr"/>
+          </a:p>
+        </p:txBody>
+      </p:sp>
+      <p:sp>
+        <p:nvSpPr>
+          <p:cNvPr id="79" name="TextBox 78"/>
+          <p:cNvSpPr txBox="1"/>
+          <p:nvPr/>
+        </p:nvSpPr>
+        <p:spPr>
+          <a:xfrm>
+            <a:off x="749808" y="5102352"/>
+            <a:ext cx="1005840" cy="301752"/>
+          </a:xfrm>
+          <a:prstGeom prst="rect">
+            <a:avLst/>
+          </a:prstGeom>
+          <a:noFill/>
+        </p:spPr>
+        <p:txBody>
+          <a:bodyPr wrap="square" anchor="ctr" lIns="0" rIns="0" tIns="0" bIns="0">
+            <a:spAutoFit/>
+          </a:bodyPr>
+          <a:lstStyle/>
+          <a:p>
+            <a:pPr algn="l">
+              <a:lnSpc>
+                <a:spcPct val="112000"/>
+              </a:lnSpc>
+              <a:spcAft>
+                <a:spcPts val="500"/>
+              </a:spcAft>
+            </a:pPr>
+            <a:r>
+              <a:rPr sz="1150" b="1" i="0">
+                <a:solidFill>
+                  <a:srgbClr val="4E8C8A"/>
+                </a:solidFill>
+                <a:latin typeface="Microsoft JhengHei"/>
+                <a:ea typeface="Microsoft JhengHei"/>
+                <a:cs typeface="Microsoft JhengHei"/>
+              </a:rPr>
+              <a:t>港口</a:t>
+            </a:r>
+          </a:p>
+        </p:txBody>
+      </p:sp>
+      <p:sp>
+        <p:nvSpPr>
+          <p:cNvPr id="80" name="TextBox 79"/>
+          <p:cNvSpPr txBox="1"/>
+          <p:nvPr/>
+        </p:nvSpPr>
+        <p:spPr>
+          <a:xfrm>
+            <a:off x="1938528" y="5102352"/>
+            <a:ext cx="1645920" cy="301752"/>
+          </a:xfrm>
+          <a:prstGeom prst="rect">
+            <a:avLst/>
+          </a:prstGeom>
+          <a:noFill/>
+        </p:spPr>
+        <p:txBody>
+          <a:bodyPr wrap="square" anchor="ctr" lIns="0" rIns="0" tIns="0" bIns="0">
+            <a:spAutoFit/>
+          </a:bodyPr>
+          <a:lstStyle/>
+          <a:p>
+            <a:pPr algn="l">
+              <a:lnSpc>
+                <a:spcPct val="112000"/>
+              </a:lnSpc>
+              <a:spcAft>
+                <a:spcPts val="500"/>
+              </a:spcAft>
+            </a:pPr>
+            <a:r>
+              <a:rPr sz="1150" b="0" i="0">
+                <a:solidFill>
+                  <a:srgbClr val="3D4D5A"/>
+                </a:solidFill>
+                <a:latin typeface="Microsoft JhengHei"/>
+                <a:ea typeface="Microsoft JhengHei"/>
+                <a:cs typeface="Microsoft JhengHei"/>
+              </a:rPr>
+              <a:t>黃峻</a:t>
+            </a:r>
+          </a:p>
+        </p:txBody>
+      </p:sp>
+      <p:sp>
+        <p:nvSpPr>
+          <p:cNvPr id="81" name="TextBox 80"/>
+          <p:cNvSpPr txBox="1"/>
+          <p:nvPr/>
+        </p:nvSpPr>
+        <p:spPr>
+          <a:xfrm>
+            <a:off x="3767328" y="5102352"/>
+            <a:ext cx="1645920" cy="301752"/>
+          </a:xfrm>
+          <a:prstGeom prst="rect">
+            <a:avLst/>
+          </a:prstGeom>
+          <a:noFill/>
+        </p:spPr>
+        <p:txBody>
+          <a:bodyPr wrap="square" anchor="ctr" lIns="0" rIns="0" tIns="0" bIns="0">
+            <a:spAutoFit/>
+          </a:bodyPr>
+          <a:lstStyle/>
+          <a:p>
+            <a:pPr algn="l">
+              <a:lnSpc>
+                <a:spcPct val="112000"/>
+              </a:lnSpc>
+              <a:spcAft>
+                <a:spcPts val="500"/>
+              </a:spcAft>
+            </a:pPr>
+            <a:r>
+              <a:rPr sz="1150" b="0" i="0">
+                <a:solidFill>
+                  <a:srgbClr val="3D4D5A"/>
+                </a:solidFill>
+                <a:latin typeface="Consolas"/>
+                <a:ea typeface="Microsoft JhengHei"/>
+                <a:cs typeface="Consolas"/>
+              </a:rPr>
+              <a:t>MAR-002</a:t>
+            </a:r>
+          </a:p>
+        </p:txBody>
+      </p:sp>
+      <p:sp>
+        <p:nvSpPr>
+          <p:cNvPr id="82" name="TextBox 81"/>
+          <p:cNvSpPr txBox="1"/>
+          <p:nvPr/>
+        </p:nvSpPr>
+        <p:spPr>
+          <a:xfrm>
+            <a:off x="5596128" y="5102352"/>
+            <a:ext cx="1005840" cy="301752"/>
+          </a:xfrm>
+          <a:prstGeom prst="rect">
+            <a:avLst/>
+          </a:prstGeom>
+          <a:noFill/>
+        </p:spPr>
+        <p:txBody>
+          <a:bodyPr wrap="square" anchor="ctr" lIns="0" rIns="0" tIns="0" bIns="0">
+            <a:spAutoFit/>
+          </a:bodyPr>
+          <a:lstStyle/>
+          <a:p>
+            <a:pPr algn="ctr">
+              <a:lnSpc>
+                <a:spcPct val="112000"/>
+              </a:lnSpc>
+              <a:spcAft>
+                <a:spcPts val="500"/>
+              </a:spcAft>
+            </a:pPr>
+            <a:r>
+              <a:rPr sz="1150" b="0" i="0">
+                <a:solidFill>
+                  <a:srgbClr val="3D4D5A"/>
+                </a:solidFill>
+                <a:latin typeface="Microsoft JhengHei"/>
+                <a:ea typeface="Microsoft JhengHei"/>
+                <a:cs typeface="Microsoft JhengHei"/>
+              </a:rPr>
+              <a:t>66</a:t>
+            </a:r>
+          </a:p>
+        </p:txBody>
+      </p:sp>
+      <p:sp>
+        <p:nvSpPr>
+          <p:cNvPr id="83" name="TextBox 82"/>
+          <p:cNvSpPr txBox="1"/>
+          <p:nvPr/>
+        </p:nvSpPr>
+        <p:spPr>
+          <a:xfrm>
+            <a:off x="6784848" y="5102352"/>
+            <a:ext cx="1371600" cy="301752"/>
+          </a:xfrm>
+          <a:prstGeom prst="rect">
+            <a:avLst/>
+          </a:prstGeom>
+          <a:noFill/>
+        </p:spPr>
+        <p:txBody>
+          <a:bodyPr wrap="square" anchor="ctr" lIns="0" rIns="0" tIns="0" bIns="0">
+            <a:spAutoFit/>
+          </a:bodyPr>
+          <a:lstStyle/>
+          <a:p>
+            <a:pPr algn="ctr">
+              <a:lnSpc>
+                <a:spcPct val="112000"/>
+              </a:lnSpc>
+              <a:spcAft>
+                <a:spcPts val="500"/>
+              </a:spcAft>
+            </a:pPr>
+            <a:r>
+              <a:rPr sz="1150" b="0" i="0">
+                <a:solidFill>
+                  <a:srgbClr val="3D4D5A"/>
+                </a:solidFill>
+                <a:latin typeface="Microsoft JhengHei"/>
+                <a:ea typeface="Microsoft JhengHei"/>
+                <a:cs typeface="Microsoft JhengHei"/>
+              </a:rPr>
+              <a:t>12.5%</a:t>
+            </a:r>
+          </a:p>
+        </p:txBody>
+      </p:sp>
+      <p:sp>
+        <p:nvSpPr>
+          <p:cNvPr id="84" name="TextBox 83"/>
+          <p:cNvSpPr txBox="1"/>
+          <p:nvPr/>
+        </p:nvSpPr>
+        <p:spPr>
+          <a:xfrm>
+            <a:off x="8339328" y="5102352"/>
+            <a:ext cx="3139135" cy="301752"/>
+          </a:xfrm>
+          <a:prstGeom prst="rect">
+            <a:avLst/>
+          </a:prstGeom>
+          <a:noFill/>
+        </p:spPr>
+        <p:txBody>
+          <a:bodyPr wrap="square" anchor="ctr" lIns="0" rIns="0" tIns="0" bIns="0">
+            <a:spAutoFit/>
+          </a:bodyPr>
+          <a:lstStyle/>
+          <a:p>
+            <a:pPr algn="l">
+              <a:lnSpc>
+                <a:spcPct val="112000"/>
+              </a:lnSpc>
+              <a:spcAft>
+                <a:spcPts val="500"/>
+              </a:spcAft>
+            </a:pPr>
+            <a:r>
+              <a:rPr sz="1150" b="0" i="0">
+                <a:solidFill>
+                  <a:srgbClr val="7C8B97"/>
+                </a:solidFill>
+                <a:latin typeface="Microsoft JhengHei"/>
+                <a:ea typeface="Microsoft JhengHei"/>
+                <a:cs typeface="Microsoft JhengHei"/>
+              </a:rPr>
+              <a:t>疲勞偏高，配置港口輕負荷</a:t>
+            </a:r>
+          </a:p>
+        </p:txBody>
+      </p:sp>
+      <p:sp>
+        <p:nvSpPr>
+          <p:cNvPr id="85" name="Rectangle 84"/>
+          <p:cNvSpPr/>
+          <p:nvPr/>
+        </p:nvSpPr>
+        <p:spPr>
+          <a:xfrm>
+            <a:off x="640080" y="2907792"/>
+            <a:ext cx="10911535" cy="2496312"/>
           </a:xfrm>
           <a:prstGeom prst="rect">
             <a:avLst/>
@@ -24406,7 +24624,7 @@
       </p:sp>
       <p:sp>
         <p:nvSpPr>
-          <p:cNvPr id="79" name="Rounded Rectangle 78"/>
+          <p:cNvPr id="86" name="Rounded Rectangle 85"/>
           <p:cNvSpPr/>
           <p:nvPr/>
         </p:nvSpPr>
@@ -24451,7 +24669,7 @@
       </p:sp>
       <p:sp>
         <p:nvSpPr>
-          <p:cNvPr id="80" name="Rectangle 79"/>
+          <p:cNvPr id="87" name="Rectangle 86"/>
           <p:cNvSpPr/>
           <p:nvPr/>
         </p:nvSpPr>
@@ -24494,7 +24712,7 @@
       </p:sp>
       <p:sp>
         <p:nvSpPr>
-          <p:cNvPr id="81" name="TextBox 80"/>
+          <p:cNvPr id="88" name="TextBox 87"/>
           <p:cNvSpPr txBox="1"/>
           <p:nvPr/>
         </p:nvSpPr>
@@ -24538,7 +24756,7 @@
       </p:sp>
       <p:sp>
         <p:nvSpPr>
-          <p:cNvPr id="82" name="TextBox 81"/>
+          <p:cNvPr id="89" name="TextBox 88"/>
           <p:cNvSpPr txBox="1"/>
           <p:nvPr/>
         </p:nvSpPr>
@@ -24575,7 +24793,7 @@
                 <a:ea typeface="Microsoft JhengHei"/>
                 <a:cs typeface="Microsoft JhengHei"/>
               </a:rPr>
-              <a:t>系統自動將最低暴露者派外海、把高疲勞的「鄭宇」列入輪休 — 一次完成安全與公平兩個目標。</a:t>
+              <a:t>系統自動將最低暴露者派外海、本次無人達輪休門檻、人力配置均衡 — 一次完成安全與公平兩個目標。</a:t>
             </a:r>
           </a:p>
         </p:txBody>
@@ -26722,7 +26940,7 @@
         </p:nvSpPr>
         <p:spPr>
           <a:xfrm>
-            <a:off x="7360920" y="2395728"/>
+            <a:off x="7360920" y="2432304"/>
             <a:ext cx="4007815" cy="310896"/>
           </a:xfrm>
           <a:prstGeom prst="rect">
@@ -26755,16 +26973,6 @@
               </a:rPr>
               <a:t>users</a:t>
             </a:r>
-          </a:p>
-          <a:p>
-            <a:pPr algn="l">
-              <a:lnSpc>
-                <a:spcPct val="112000"/>
-              </a:lnSpc>
-              <a:spcAft>
-                <a:spcPts val="500"/>
-              </a:spcAft>
-            </a:pPr>
             <a:r>
               <a:rPr sz="1300" b="1" i="0">
                 <a:solidFill>
@@ -26774,7 +26982,7 @@
                 <a:ea typeface="Microsoft JhengHei"/>
                 <a:cs typeface="Microsoft JhengHei"/>
               </a:rPr>
-              <a:t>   13 筆</a:t>
+              <a:t>    13 筆</a:t>
             </a:r>
           </a:p>
         </p:txBody>
@@ -26787,8 +26995,8 @@
         </p:nvSpPr>
         <p:spPr>
           <a:xfrm>
-            <a:off x="7360920" y="2788920"/>
-            <a:ext cx="4007815" cy="411480"/>
+            <a:off x="7360920" y="2852928"/>
+            <a:ext cx="4007815" cy="365760"/>
           </a:xfrm>
           <a:prstGeom prst="rect">
             <a:avLst/>
@@ -26878,7 +27086,7 @@
         </p:nvSpPr>
         <p:spPr>
           <a:xfrm>
-            <a:off x="7360920" y="3584448"/>
+            <a:off x="7360920" y="3621024"/>
             <a:ext cx="4007815" cy="310896"/>
           </a:xfrm>
           <a:prstGeom prst="rect">
@@ -26911,16 +27119,6 @@
               </a:rPr>
               <a:t>leaves</a:t>
             </a:r>
-          </a:p>
-          <a:p>
-            <a:pPr algn="l">
-              <a:lnSpc>
-                <a:spcPct val="112000"/>
-              </a:lnSpc>
-              <a:spcAft>
-                <a:spcPts val="500"/>
-              </a:spcAft>
-            </a:pPr>
             <a:r>
               <a:rPr sz="1300" b="1" i="0">
                 <a:solidFill>
@@ -26930,7 +27128,7 @@
                 <a:ea typeface="Microsoft JhengHei"/>
                 <a:cs typeface="Microsoft JhengHei"/>
               </a:rPr>
-              <a:t>   60 筆</a:t>
+              <a:t>    60 筆</a:t>
             </a:r>
           </a:p>
         </p:txBody>
@@ -26943,8 +27141,8 @@
         </p:nvSpPr>
         <p:spPr>
           <a:xfrm>
-            <a:off x="7360920" y="3977640"/>
-            <a:ext cx="4007815" cy="411480"/>
+            <a:off x="7360920" y="4041648"/>
+            <a:ext cx="4007815" cy="365760"/>
           </a:xfrm>
           <a:prstGeom prst="rect">
             <a:avLst/>
@@ -27034,7 +27232,7 @@
         </p:nvSpPr>
         <p:spPr>
           <a:xfrm>
-            <a:off x="7360920" y="4773168"/>
+            <a:off x="7360920" y="4809744"/>
             <a:ext cx="4007815" cy="310896"/>
           </a:xfrm>
           <a:prstGeom prst="rect">
@@ -27067,16 +27265,6 @@
               </a:rPr>
               <a:t>sea_observations</a:t>
             </a:r>
-          </a:p>
-          <a:p>
-            <a:pPr algn="l">
-              <a:lnSpc>
-                <a:spcPct val="112000"/>
-              </a:lnSpc>
-              <a:spcAft>
-                <a:spcPts val="500"/>
-              </a:spcAft>
-            </a:pPr>
             <a:r>
               <a:rPr sz="1300" b="1" i="0">
                 <a:solidFill>
@@ -27086,7 +27274,7 @@
                 <a:ea typeface="Microsoft JhengHei"/>
                 <a:cs typeface="Microsoft JhengHei"/>
               </a:rPr>
-              <a:t>   736 筆</a:t>
+              <a:t>    736 筆</a:t>
             </a:r>
           </a:p>
         </p:txBody>
@@ -27099,8 +27287,8 @@
         </p:nvSpPr>
         <p:spPr>
           <a:xfrm>
-            <a:off x="7360920" y="5166360"/>
-            <a:ext cx="4007815" cy="411480"/>
+            <a:off x="7360920" y="5230368"/>
+            <a:ext cx="4007815" cy="365760"/>
           </a:xfrm>
           <a:prstGeom prst="rect">
             <a:avLst/>
@@ -27880,7 +28068,7 @@
                 <a:ea typeface="Microsoft JhengHei"/>
                 <a:cs typeface="Microsoft JhengHei"/>
               </a:rPr>
-              <a:t>RandomForest 海況預測 AUC = 0.811（有時序訊號可學習）</a:t>
+              <a:t>RandomForest 海況預測 AUC = 0.703（有時序訊號可學習）</a:t>
             </a:r>
           </a:p>
         </p:txBody>
@@ -34330,7 +34518,7 @@
                 <a:ea typeface="Microsoft JhengHei"/>
                 <a:cs typeface="Consolas"/>
               </a:rPr>
-              <a:t>F = 181.4</a:t>
+              <a:t>F = 249.1</a:t>
             </a:r>
           </a:p>
         </p:txBody>
@@ -34552,7 +34740,7 @@
                 <a:ea typeface="Microsoft JhengHei"/>
                 <a:cs typeface="Consolas"/>
               </a:rPr>
-              <a:t>χ² = 349.6</a:t>
+              <a:t>χ² = 232.8</a:t>
             </a:r>
           </a:p>
         </p:txBody>
@@ -34774,7 +34962,7 @@
                 <a:ea typeface="Microsoft JhengHei"/>
                 <a:cs typeface="Consolas"/>
               </a:rPr>
-              <a:t>R² = 0.784</a:t>
+              <a:t>R² = 0.801</a:t>
             </a:r>
           </a:p>
         </p:txBody>
@@ -34862,7 +35050,7 @@
                 <a:ea typeface="Microsoft JhengHei"/>
                 <a:cs typeface="Microsoft JhengHei"/>
               </a:rPr>
-              <a:t>4 特徵解釋 78.4% 工時變異</a:t>
+              <a:t>4 特徵解釋 80.1% 工時變異</a:t>
             </a:r>
           </a:p>
         </p:txBody>
@@ -34996,7 +35184,7 @@
                 <a:ea typeface="Microsoft JhengHei"/>
                 <a:cs typeface="Consolas"/>
               </a:rPr>
-              <a:t>Gini = 0.042</a:t>
+              <a:t>Gini = 0.031</a:t>
             </a:r>
           </a:p>
         </p:txBody>
@@ -35240,7 +35428,7 @@
                 <a:ea typeface="Microsoft JhengHei"/>
                 <a:cs typeface="Microsoft JhengHei"/>
               </a:rPr>
-              <a:t>工時受海況 / 海域 / 星期 / 打卡時刻共同決定，解釋力 78.4%，遠高於任何單維度模型。</a:t>
+              <a:t>工時受海況 / 海域 / 星期 / 打卡時刻共同決定，解釋力 80.1%，遠高於任何單維度模型。</a:t>
             </a:r>
           </a:p>
         </p:txBody>
@@ -35354,7 +35542,7 @@
                 <a:ea typeface="Microsoft JhengHei"/>
                 <a:cs typeface="Microsoft JhengHei"/>
               </a:rPr>
-              <a:t>海況等級越高，值勤工時越短（F = 181.4, p &lt; 0.0001）</a:t>
+              <a:t>海況等級越高，值勤工時越短（F = 249.1, p &lt; 0.0001）</a:t>
             </a:r>
           </a:p>
         </p:txBody>
@@ -35707,7 +35895,7 @@
                 <a:ea typeface="Microsoft JhengHei"/>
                 <a:cs typeface="Microsoft JhengHei"/>
               </a:rPr>
-              <a:t>檢定量 F = 181.433</a:t>
+              <a:t>檢定量 F = 249.104</a:t>
             </a:r>
           </a:p>
           <a:p>
@@ -36334,7 +36522,7 @@
                 <a:ea typeface="Microsoft JhengHei"/>
                 <a:cs typeface="Microsoft JhengHei"/>
               </a:rPr>
-              <a:t>檢定量 χ² = 349.634，df = 6</a:t>
+              <a:t>檢定量 χ² = 232.811，df = 6</a:t>
             </a:r>
           </a:p>
           <a:p>
@@ -36787,8 +36975,8 @@
         </p:blipFill>
         <p:spPr>
           <a:xfrm>
-            <a:off x="640080" y="2002895"/>
-            <a:ext cx="6766560" cy="3766607"/>
+            <a:off x="640080" y="2010288"/>
+            <a:ext cx="6766560" cy="3751821"/>
           </a:xfrm>
           <a:prstGeom prst="rect">
             <a:avLst/>
@@ -36961,7 +37149,7 @@
                 <a:ea typeface="Microsoft JhengHei"/>
                 <a:cs typeface="Microsoft JhengHei"/>
               </a:rPr>
-              <a:t>R² = 0.784（解釋 78.4% 變異）</a:t>
+              <a:t>R² = 0.801（解釋 80.1% 變異）</a:t>
             </a:r>
           </a:p>
           <a:p>
@@ -36993,7 +37181,7 @@
                 <a:ea typeface="Microsoft JhengHei"/>
                 <a:cs typeface="Microsoft JhengHei"/>
               </a:rPr>
-              <a:t>上工時刻 β = −0.569（最強）</a:t>
+              <a:t>上工時刻 β = −0.554（最強）</a:t>
             </a:r>
           </a:p>
           <a:p>
@@ -37025,7 +37213,7 @@
                 <a:ea typeface="Microsoft JhengHei"/>
                 <a:cs typeface="Microsoft JhengHei"/>
               </a:rPr>
-              <a:t>海況等級 β = −0.435（次強）</a:t>
+              <a:t>海況等級 β = −0.530（次強）</a:t>
             </a:r>
           </a:p>
           <a:p>
@@ -37089,7 +37277,7 @@
                 <a:ea typeface="Microsoft JhengHei"/>
                 <a:cs typeface="Microsoft JhengHei"/>
               </a:rPr>
-              <a:t>星期 β = +0.014（可忽略）</a:t>
+              <a:t>星期 β = −0.018（可忽略）</a:t>
             </a:r>
           </a:p>
           <a:p>
@@ -37652,7 +37840,7 @@
                 <a:ea typeface="Microsoft JhengHei"/>
                 <a:cs typeface="Microsoft JhengHei"/>
               </a:rPr>
-              <a:t>工時 ↔ 上工時刻：r ≈ −0.52</a:t>
+              <a:t>工時 ↔ 上工時刻：r ≈ −0.65</a:t>
             </a:r>
           </a:p>
           <a:p>
@@ -37684,7 +37872,7 @@
                 <a:ea typeface="Microsoft JhengHei"/>
                 <a:cs typeface="Microsoft JhengHei"/>
               </a:rPr>
-              <a:t>工時 ↔ 海況等級：r ≈ −0.44</a:t>
+              <a:t>工時 ↔ 海況等級：r ≈ −0.56</a:t>
             </a:r>
           </a:p>
           <a:p>
@@ -37716,7 +37904,7 @@
                 <a:ea typeface="Microsoft JhengHei"/>
                 <a:cs typeface="Microsoft JhengHei"/>
               </a:rPr>
-              <a:t>海況 ↔ 海域：r ≈ +0.35</a:t>
+              <a:t>海況 ↔ 海域：r ≈ +0.43</a:t>
             </a:r>
           </a:p>
           <a:p>
@@ -39235,7 +39423,7 @@
                 <a:ea typeface="Microsoft JhengHei"/>
                 <a:cs typeface="Microsoft JhengHei"/>
               </a:rPr>
-              <a:t>AUC = 0.811：用 TimeSeriesSplit 避免未來洩漏</a:t>
+              <a:t>AUC = 0.703：用 TimeSeriesSplit 避免未來洩漏</a:t>
             </a:r>
           </a:p>
         </p:txBody>
@@ -39414,8 +39602,8 @@
         </p:blipFill>
         <p:spPr>
           <a:xfrm>
-            <a:off x="640080" y="2008445"/>
-            <a:ext cx="6766560" cy="3755507"/>
+            <a:off x="640080" y="2019447"/>
+            <a:ext cx="6766560" cy="3733502"/>
           </a:xfrm>
           <a:prstGeom prst="rect">
             <a:avLst/>
@@ -39844,7 +40032,7 @@
                 <a:ea typeface="Microsoft JhengHei"/>
                 <a:cs typeface="Microsoft JhengHei"/>
               </a:rPr>
-              <a:t>測試集 acc 0.949 / AUC 0.811</a:t>
+              <a:t>測試集 acc 0.692 / AUC 0.703</a:t>
             </a:r>
           </a:p>
         </p:txBody>
@@ -40321,7 +40509,7 @@
                 <a:ea typeface="Microsoft JhengHei"/>
                 <a:cs typeface="Microsoft JhengHei"/>
               </a:rPr>
-              <a:t>純 NumPy 矩陣連乘外推 7 天；本次大浪期望機率 7.1%，超過 15% 即自動觸發排班預警。</a:t>
+              <a:t>純 NumPy 矩陣連乘外推 7 天；本次大浪期望機率 13.6%，超過 15% 即自動觸發排班預警。</a:t>
             </a:r>
           </a:p>
         </p:txBody>
@@ -43027,7 +43215,7 @@
                 <a:ea typeface="Microsoft JhengHei"/>
                 <a:cs typeface="Microsoft JhengHei"/>
               </a:rPr>
-              <a:t>Gini = 0.042：工時分配近乎完全均等</a:t>
+              <a:t>Gini = 0.031：工時分配近乎完全均等</a:t>
             </a:r>
           </a:p>
         </p:txBody>
@@ -43412,7 +43600,7 @@
                 <a:ea typeface="Microsoft JhengHei"/>
                 <a:cs typeface="Microsoft JhengHei"/>
               </a:rPr>
-              <a:t>本系統 Gini = 0.042 → 高度均等</a:t>
+              <a:t>本系統 Gini = 0.031 → 高度均等</a:t>
             </a:r>
           </a:p>
           <a:p>
@@ -44103,7 +44291,7 @@
                 <a:ea typeface="Microsoft JhengHei"/>
                 <a:cs typeface="Microsoft JhengHei"/>
               </a:rPr>
-              <a:t>可用度 &lt; 30% → 標記「需維護」</a:t>
+              <a:t>可用度 ≤ 15% → 標記「需維護」</a:t>
             </a:r>
           </a:p>
           <a:p>
@@ -45733,7 +45921,7 @@
         <p:spPr>
           <a:xfrm>
             <a:off x="640080" y="1874519"/>
-            <a:ext cx="5669280" cy="749808"/>
+            <a:ext cx="5318607" cy="749808"/>
           </a:xfrm>
           <a:prstGeom prst="roundRect">
             <a:avLst>
@@ -45823,7 +46011,7 @@
         <p:spPr>
           <a:xfrm>
             <a:off x="914400" y="1965959"/>
-            <a:ext cx="5212080" cy="310896"/>
+            <a:ext cx="4861407" cy="310896"/>
           </a:xfrm>
           <a:prstGeom prst="rect">
             <a:avLst/>
@@ -45867,7 +46055,7 @@
         <p:spPr>
           <a:xfrm>
             <a:off x="914400" y="2295143"/>
-            <a:ext cx="5212080" cy="274320"/>
+            <a:ext cx="4861407" cy="274320"/>
           </a:xfrm>
           <a:prstGeom prst="rect">
             <a:avLst/>
@@ -45910,8 +46098,8 @@
         </p:nvSpPr>
         <p:spPr>
           <a:xfrm>
-            <a:off x="6583680" y="1874519"/>
-            <a:ext cx="5669280" cy="749808"/>
+            <a:off x="6233007" y="1874519"/>
+            <a:ext cx="5318607" cy="749808"/>
           </a:xfrm>
           <a:prstGeom prst="roundRect">
             <a:avLst>
@@ -45957,7 +46145,7 @@
         </p:nvSpPr>
         <p:spPr>
           <a:xfrm>
-            <a:off x="6583680" y="1874519"/>
+            <a:off x="6233007" y="1874519"/>
             <a:ext cx="82296" cy="749808"/>
           </a:xfrm>
           <a:prstGeom prst="rect">
@@ -46000,8 +46188,8 @@
         </p:nvSpPr>
         <p:spPr>
           <a:xfrm>
-            <a:off x="6858000" y="1965959"/>
-            <a:ext cx="5212080" cy="310896"/>
+            <a:off x="6507327" y="1965959"/>
+            <a:ext cx="4861407" cy="310896"/>
           </a:xfrm>
           <a:prstGeom prst="rect">
             <a:avLst/>
@@ -46044,8 +46232,8 @@
         </p:nvSpPr>
         <p:spPr>
           <a:xfrm>
-            <a:off x="6858000" y="2295143"/>
-            <a:ext cx="5212080" cy="274320"/>
+            <a:off x="6507327" y="2295143"/>
+            <a:ext cx="4861407" cy="274320"/>
           </a:xfrm>
           <a:prstGeom prst="rect">
             <a:avLst/>
@@ -46089,7 +46277,7 @@
         <p:spPr>
           <a:xfrm>
             <a:off x="640080" y="2770631"/>
-            <a:ext cx="5669280" cy="749808"/>
+            <a:ext cx="5318607" cy="749808"/>
           </a:xfrm>
           <a:prstGeom prst="roundRect">
             <a:avLst>
@@ -46179,7 +46367,7 @@
         <p:spPr>
           <a:xfrm>
             <a:off x="914400" y="2862071"/>
-            <a:ext cx="5212080" cy="310896"/>
+            <a:ext cx="4861407" cy="310896"/>
           </a:xfrm>
           <a:prstGeom prst="rect">
             <a:avLst/>
@@ -46223,7 +46411,7 @@
         <p:spPr>
           <a:xfrm>
             <a:off x="914400" y="3191255"/>
-            <a:ext cx="5212080" cy="274320"/>
+            <a:ext cx="4861407" cy="274320"/>
           </a:xfrm>
           <a:prstGeom prst="rect">
             <a:avLst/>
@@ -46266,8 +46454,8 @@
         </p:nvSpPr>
         <p:spPr>
           <a:xfrm>
-            <a:off x="6583680" y="2770631"/>
-            <a:ext cx="5669280" cy="749808"/>
+            <a:off x="6233007" y="2770631"/>
+            <a:ext cx="5318607" cy="749808"/>
           </a:xfrm>
           <a:prstGeom prst="roundRect">
             <a:avLst>
@@ -46313,7 +46501,7 @@
         </p:nvSpPr>
         <p:spPr>
           <a:xfrm>
-            <a:off x="6583680" y="2770631"/>
+            <a:off x="6233007" y="2770631"/>
             <a:ext cx="82296" cy="749808"/>
           </a:xfrm>
           <a:prstGeom prst="rect">
@@ -46356,8 +46544,8 @@
         </p:nvSpPr>
         <p:spPr>
           <a:xfrm>
-            <a:off x="6858000" y="2862071"/>
-            <a:ext cx="5212080" cy="310896"/>
+            <a:off x="6507327" y="2862071"/>
+            <a:ext cx="4861407" cy="310896"/>
           </a:xfrm>
           <a:prstGeom prst="rect">
             <a:avLst/>
@@ -46400,8 +46588,8 @@
         </p:nvSpPr>
         <p:spPr>
           <a:xfrm>
-            <a:off x="6858000" y="3191255"/>
-            <a:ext cx="5212080" cy="274320"/>
+            <a:off x="6507327" y="3191255"/>
+            <a:ext cx="4861407" cy="274320"/>
           </a:xfrm>
           <a:prstGeom prst="rect">
             <a:avLst/>
@@ -46445,7 +46633,7 @@
         <p:spPr>
           <a:xfrm>
             <a:off x="640080" y="3666743"/>
-            <a:ext cx="5669280" cy="749808"/>
+            <a:ext cx="5318607" cy="749808"/>
           </a:xfrm>
           <a:prstGeom prst="roundRect">
             <a:avLst>
@@ -46535,7 +46723,7 @@
         <p:spPr>
           <a:xfrm>
             <a:off x="914400" y="3758183"/>
-            <a:ext cx="5212080" cy="310896"/>
+            <a:ext cx="4861407" cy="310896"/>
           </a:xfrm>
           <a:prstGeom prst="rect">
             <a:avLst/>
@@ -46579,7 +46767,7 @@
         <p:spPr>
           <a:xfrm>
             <a:off x="914400" y="4087367"/>
-            <a:ext cx="5212080" cy="274320"/>
+            <a:ext cx="4861407" cy="274320"/>
           </a:xfrm>
           <a:prstGeom prst="rect">
             <a:avLst/>
@@ -46622,8 +46810,8 @@
         </p:nvSpPr>
         <p:spPr>
           <a:xfrm>
-            <a:off x="6583680" y="3666743"/>
-            <a:ext cx="5669280" cy="749808"/>
+            <a:off x="6233007" y="3666743"/>
+            <a:ext cx="5318607" cy="749808"/>
           </a:xfrm>
           <a:prstGeom prst="roundRect">
             <a:avLst>
@@ -46669,7 +46857,7 @@
         </p:nvSpPr>
         <p:spPr>
           <a:xfrm>
-            <a:off x="6583680" y="3666743"/>
+            <a:off x="6233007" y="3666743"/>
             <a:ext cx="82296" cy="749808"/>
           </a:xfrm>
           <a:prstGeom prst="rect">
@@ -46712,8 +46900,8 @@
         </p:nvSpPr>
         <p:spPr>
           <a:xfrm>
-            <a:off x="6858000" y="3758183"/>
-            <a:ext cx="5212080" cy="310896"/>
+            <a:off x="6507327" y="3758183"/>
+            <a:ext cx="4861407" cy="310896"/>
           </a:xfrm>
           <a:prstGeom prst="rect">
             <a:avLst/>
@@ -46756,8 +46944,8 @@
         </p:nvSpPr>
         <p:spPr>
           <a:xfrm>
-            <a:off x="6858000" y="4087367"/>
-            <a:ext cx="5212080" cy="274320"/>
+            <a:off x="6507327" y="4087367"/>
+            <a:ext cx="4861407" cy="274320"/>
           </a:xfrm>
           <a:prstGeom prst="rect">
             <a:avLst/>
@@ -51387,7 +51575,7 @@
               </a:spcAft>
             </a:pPr>
             <a:r>
-              <a:rPr sz="1050" b="0" i="0">
+              <a:rPr sz="1100" b="0" i="0">
                 <a:solidFill>
                   <a:srgbClr val="7C8B97"/>
                 </a:solidFill>
@@ -51463,7 +51651,7 @@
               </a:spcAft>
             </a:pPr>
             <a:r>
-              <a:rPr sz="1050" b="0" i="0">
+              <a:rPr sz="1100" b="0" i="0">
                 <a:solidFill>
                   <a:srgbClr val="7C8B97"/>
                 </a:solidFill>
@@ -51539,7 +51727,7 @@
               </a:spcAft>
             </a:pPr>
             <a:r>
-              <a:rPr sz="1050" b="0" i="0">
+              <a:rPr sz="1100" b="0" i="0">
                 <a:solidFill>
                   <a:srgbClr val="7C8B97"/>
                 </a:solidFill>
@@ -51615,7 +51803,7 @@
               </a:spcAft>
             </a:pPr>
             <a:r>
-              <a:rPr sz="1050" b="0" i="0">
+              <a:rPr sz="1100" b="0" i="0">
                 <a:solidFill>
                   <a:srgbClr val="7C8B97"/>
                 </a:solidFill>
@@ -51825,7 +52013,7 @@
               </a:spcAft>
             </a:pPr>
             <a:r>
-              <a:rPr sz="1050" b="0" i="0">
+              <a:rPr sz="1100" b="0" i="0">
                 <a:solidFill>
                   <a:srgbClr val="7C8B97"/>
                 </a:solidFill>
@@ -51901,7 +52089,7 @@
               </a:spcAft>
             </a:pPr>
             <a:r>
-              <a:rPr sz="1050" b="0" i="0">
+              <a:rPr sz="1100" b="0" i="0">
                 <a:solidFill>
                   <a:srgbClr val="7C8B97"/>
                 </a:solidFill>
@@ -51977,7 +52165,7 @@
               </a:spcAft>
             </a:pPr>
             <a:r>
-              <a:rPr sz="1050" b="0" i="0">
+              <a:rPr sz="1100" b="0" i="0">
                 <a:solidFill>
                   <a:srgbClr val="7C8B97"/>
                 </a:solidFill>
@@ -52053,7 +52241,7 @@
               </a:spcAft>
             </a:pPr>
             <a:r>
-              <a:rPr sz="1050" b="0" i="0">
+              <a:rPr sz="1100" b="0" i="0">
                 <a:solidFill>
                   <a:srgbClr val="7C8B97"/>
                 </a:solidFill>
@@ -52129,7 +52317,7 @@
               </a:spcAft>
             </a:pPr>
             <a:r>
-              <a:rPr sz="1050" b="0" i="0">
+              <a:rPr sz="1100" b="0" i="0">
                 <a:solidFill>
                   <a:srgbClr val="7C8B97"/>
                 </a:solidFill>
@@ -52205,7 +52393,7 @@
               </a:spcAft>
             </a:pPr>
             <a:r>
-              <a:rPr sz="1050" b="0" i="0">
+              <a:rPr sz="1100" b="0" i="0">
                 <a:solidFill>
                   <a:srgbClr val="7C8B97"/>
                 </a:solidFill>
@@ -52281,7 +52469,7 @@
               </a:spcAft>
             </a:pPr>
             <a:r>
-              <a:rPr sz="1050" b="0" i="0">
+              <a:rPr sz="1100" b="0" i="0">
                 <a:solidFill>
                   <a:srgbClr val="7C8B97"/>
                 </a:solidFill>
@@ -52491,7 +52679,7 @@
               </a:spcAft>
             </a:pPr>
             <a:r>
-              <a:rPr sz="1050" b="0" i="0">
+              <a:rPr sz="1100" b="0" i="0">
                 <a:solidFill>
                   <a:srgbClr val="7C8B97"/>
                 </a:solidFill>
@@ -52567,7 +52755,7 @@
               </a:spcAft>
             </a:pPr>
             <a:r>
-              <a:rPr sz="1050" b="0" i="0">
+              <a:rPr sz="1100" b="0" i="0">
                 <a:solidFill>
                   <a:srgbClr val="7C8B97"/>
                 </a:solidFill>
@@ -52643,7 +52831,7 @@
               </a:spcAft>
             </a:pPr>
             <a:r>
-              <a:rPr sz="1050" b="0" i="0">
+              <a:rPr sz="1100" b="0" i="0">
                 <a:solidFill>
                   <a:srgbClr val="7C8B97"/>
                 </a:solidFill>
@@ -52719,7 +52907,7 @@
               </a:spcAft>
             </a:pPr>
             <a:r>
-              <a:rPr sz="1050" b="0" i="0">
+              <a:rPr sz="1100" b="0" i="0">
                 <a:solidFill>
                   <a:srgbClr val="7C8B97"/>
                 </a:solidFill>
@@ -52760,6 +52948,1632 @@
       <p:grpSpPr/>
       <p:sp>
         <p:nvSpPr>
+          <p:cNvPr id="2" name="TextBox 1"/>
+          <p:cNvSpPr txBox="1"/>
+          <p:nvPr/>
+        </p:nvSpPr>
+        <p:spPr>
+          <a:xfrm>
+            <a:off x="640080" y="420624"/>
+            <a:ext cx="10911535" cy="274320"/>
+          </a:xfrm>
+          <a:prstGeom prst="rect">
+            <a:avLst/>
+          </a:prstGeom>
+          <a:noFill/>
+        </p:spPr>
+        <p:txBody>
+          <a:bodyPr wrap="square" anchor="t" lIns="0" rIns="0" tIns="0" bIns="0">
+            <a:spAutoFit/>
+          </a:bodyPr>
+          <a:lstStyle/>
+          <a:p>
+            <a:pPr algn="l">
+              <a:lnSpc>
+                <a:spcPct val="112000"/>
+              </a:lnSpc>
+              <a:spcAft>
+                <a:spcPts val="500"/>
+              </a:spcAft>
+            </a:pPr>
+            <a:r>
+              <a:rPr sz="1200" b="1" i="0">
+                <a:solidFill>
+                  <a:srgbClr val="C8922E"/>
+                </a:solidFill>
+                <a:latin typeface="Microsoft JhengHei"/>
+                <a:ea typeface="Microsoft JhengHei"/>
+                <a:cs typeface="Microsoft JhengHei"/>
+              </a:rPr>
+              <a:t>專題管理 · 團隊分工</a:t>
+            </a:r>
+          </a:p>
+        </p:txBody>
+      </p:sp>
+      <p:sp>
+        <p:nvSpPr>
+          <p:cNvPr id="3" name="TextBox 2"/>
+          <p:cNvSpPr txBox="1"/>
+          <p:nvPr/>
+        </p:nvSpPr>
+        <p:spPr>
+          <a:xfrm>
+            <a:off x="640080" y="676656"/>
+            <a:ext cx="10911535" cy="658368"/>
+          </a:xfrm>
+          <a:prstGeom prst="rect">
+            <a:avLst/>
+          </a:prstGeom>
+          <a:noFill/>
+        </p:spPr>
+        <p:txBody>
+          <a:bodyPr wrap="square" anchor="t" lIns="0" rIns="0" tIns="0" bIns="0">
+            <a:spAutoFit/>
+          </a:bodyPr>
+          <a:lstStyle/>
+          <a:p>
+            <a:pPr algn="l">
+              <a:lnSpc>
+                <a:spcPct val="112000"/>
+              </a:lnSpc>
+              <a:spcAft>
+                <a:spcPts val="500"/>
+              </a:spcAft>
+            </a:pPr>
+            <a:r>
+              <a:rPr sz="2500" b="1" i="0">
+                <a:solidFill>
+                  <a:srgbClr val="1C3D5A"/>
+                </a:solidFill>
+                <a:latin typeface="Microsoft JhengHei"/>
+                <a:ea typeface="Microsoft JhengHei"/>
+                <a:cs typeface="Microsoft JhengHei"/>
+              </a:rPr>
+              <a:t>技術實作集中於組長，組員各司支援角色</a:t>
+            </a:r>
+          </a:p>
+        </p:txBody>
+      </p:sp>
+      <p:cxnSp>
+        <p:nvCxnSpPr>
+          <p:cNvPr id="4" name="Connector 3"/>
+          <p:cNvCxnSpPr/>
+          <p:nvPr/>
+        </p:nvCxnSpPr>
+        <p:spPr>
+          <a:xfrm>
+            <a:off x="640080" y="1417320"/>
+            <a:ext cx="566928" cy="0"/>
+          </a:xfrm>
+          <a:prstGeom prst="bentConnector3">
+            <a:avLst/>
+          </a:prstGeom>
+          <a:ln w="30480">
+            <a:solidFill>
+              <a:srgbClr val="C8922E"/>
+            </a:solidFill>
+          </a:ln>
+        </p:spPr>
+        <p:style>
+          <a:lnRef idx="2">
+            <a:schemeClr val="accent1"/>
+          </a:lnRef>
+          <a:fillRef idx="0">
+            <a:schemeClr val="accent1"/>
+          </a:fillRef>
+          <a:effectRef idx="1">
+            <a:schemeClr val="accent1"/>
+          </a:effectRef>
+          <a:fontRef idx="minor">
+            <a:schemeClr val="tx1"/>
+          </a:fontRef>
+        </p:style>
+      </p:cxnSp>
+      <p:cxnSp>
+        <p:nvCxnSpPr>
+          <p:cNvPr id="5" name="Connector 4"/>
+          <p:cNvCxnSpPr/>
+          <p:nvPr/>
+        </p:nvCxnSpPr>
+        <p:spPr>
+          <a:xfrm>
+            <a:off x="640080" y="6455664"/>
+            <a:ext cx="10911535" cy="0"/>
+          </a:xfrm>
+          <a:prstGeom prst="bentConnector3">
+            <a:avLst/>
+          </a:prstGeom>
+          <a:ln w="9525">
+            <a:solidFill>
+              <a:srgbClr val="D7E0E6"/>
+            </a:solidFill>
+          </a:ln>
+        </p:spPr>
+        <p:style>
+          <a:lnRef idx="2">
+            <a:schemeClr val="accent1"/>
+          </a:lnRef>
+          <a:fillRef idx="0">
+            <a:schemeClr val="accent1"/>
+          </a:fillRef>
+          <a:effectRef idx="1">
+            <a:schemeClr val="accent1"/>
+          </a:effectRef>
+          <a:fontRef idx="minor">
+            <a:schemeClr val="tx1"/>
+          </a:fontRef>
+        </p:style>
+      </p:cxnSp>
+      <p:sp>
+        <p:nvSpPr>
+          <p:cNvPr id="6" name="TextBox 5"/>
+          <p:cNvSpPr txBox="1"/>
+          <p:nvPr/>
+        </p:nvSpPr>
+        <p:spPr>
+          <a:xfrm>
+            <a:off x="640080" y="6510528"/>
+            <a:ext cx="8229600" cy="274320"/>
+          </a:xfrm>
+          <a:prstGeom prst="rect">
+            <a:avLst/>
+          </a:prstGeom>
+          <a:noFill/>
+        </p:spPr>
+        <p:txBody>
+          <a:bodyPr wrap="square" anchor="t" lIns="0" rIns="0" tIns="0" bIns="0">
+            <a:spAutoFit/>
+          </a:bodyPr>
+          <a:lstStyle/>
+          <a:p>
+            <a:pPr algn="l">
+              <a:lnSpc>
+                <a:spcPct val="112000"/>
+              </a:lnSpc>
+              <a:spcAft>
+                <a:spcPts val="500"/>
+              </a:spcAft>
+            </a:pPr>
+            <a:r>
+              <a:rPr sz="1000" b="0" i="0">
+                <a:solidFill>
+                  <a:srgbClr val="7C8B97"/>
+                </a:solidFill>
+                <a:latin typeface="Microsoft JhengHei"/>
+                <a:ea typeface="Microsoft JhengHei"/>
+                <a:cs typeface="Microsoft JhengHei"/>
+              </a:rPr>
+              <a:t>海勤人力資源與作業安全決策系統  ·  114-2 巨量資料與雲端運算  第 2 組</a:t>
+            </a:r>
+          </a:p>
+        </p:txBody>
+      </p:sp>
+      <p:sp>
+        <p:nvSpPr>
+          <p:cNvPr id="7" name="TextBox 6"/>
+          <p:cNvSpPr txBox="1"/>
+          <p:nvPr/>
+        </p:nvSpPr>
+        <p:spPr>
+          <a:xfrm>
+            <a:off x="10454335" y="6510528"/>
+            <a:ext cx="1097280" cy="274320"/>
+          </a:xfrm>
+          <a:prstGeom prst="rect">
+            <a:avLst/>
+          </a:prstGeom>
+          <a:noFill/>
+        </p:spPr>
+        <p:txBody>
+          <a:bodyPr wrap="square" anchor="t" lIns="0" rIns="0" tIns="0" bIns="0">
+            <a:spAutoFit/>
+          </a:bodyPr>
+          <a:lstStyle/>
+          <a:p>
+            <a:pPr algn="r">
+              <a:lnSpc>
+                <a:spcPct val="112000"/>
+              </a:lnSpc>
+              <a:spcAft>
+                <a:spcPts val="500"/>
+              </a:spcAft>
+            </a:pPr>
+            <a:r>
+              <a:rPr sz="1000" b="0" i="0">
+                <a:solidFill>
+                  <a:srgbClr val="7C8B97"/>
+                </a:solidFill>
+                <a:latin typeface="Consolas"/>
+                <a:ea typeface="Microsoft JhengHei"/>
+                <a:cs typeface="Consolas"/>
+              </a:rPr>
+              <a:t>41</a:t>
+            </a:r>
+          </a:p>
+        </p:txBody>
+      </p:sp>
+      <p:sp>
+        <p:nvSpPr>
+          <p:cNvPr id="8" name="Rounded Rectangle 7"/>
+          <p:cNvSpPr/>
+          <p:nvPr/>
+        </p:nvSpPr>
+        <p:spPr>
+          <a:xfrm>
+            <a:off x="640080" y="1874519"/>
+            <a:ext cx="10911535" cy="1965960"/>
+          </a:xfrm>
+          <a:prstGeom prst="roundRect">
+            <a:avLst>
+              <a:gd name="adj" fmla="val 5000"/>
+            </a:avLst>
+          </a:prstGeom>
+          <a:solidFill>
+            <a:srgbClr val="FBF4E6"/>
+          </a:solidFill>
+          <a:ln w="9525">
+            <a:solidFill>
+              <a:srgbClr val="C8922E"/>
+            </a:solidFill>
+          </a:ln>
+        </p:spPr>
+        <p:style>
+          <a:lnRef idx="1">
+            <a:schemeClr val="accent1"/>
+          </a:lnRef>
+          <a:fillRef idx="3">
+            <a:schemeClr val="accent1"/>
+          </a:fillRef>
+          <a:effectRef idx="2">
+            <a:schemeClr val="accent1"/>
+          </a:effectRef>
+          <a:fontRef idx="minor">
+            <a:schemeClr val="lt1"/>
+          </a:fontRef>
+        </p:style>
+        <p:txBody>
+          <a:bodyPr rtlCol="0" anchor="ctr"/>
+          <a:lstStyle/>
+          <a:p>
+            <a:pPr algn="ctr"/>
+          </a:p>
+        </p:txBody>
+      </p:sp>
+      <p:sp>
+        <p:nvSpPr>
+          <p:cNvPr id="9" name="Rectangle 8"/>
+          <p:cNvSpPr/>
+          <p:nvPr/>
+        </p:nvSpPr>
+        <p:spPr>
+          <a:xfrm>
+            <a:off x="640080" y="1874519"/>
+            <a:ext cx="91440" cy="1965960"/>
+          </a:xfrm>
+          <a:prstGeom prst="rect">
+            <a:avLst/>
+          </a:prstGeom>
+          <a:solidFill>
+            <a:srgbClr val="C8922E"/>
+          </a:solidFill>
+          <a:ln>
+            <a:noFill/>
+          </a:ln>
+        </p:spPr>
+        <p:style>
+          <a:lnRef idx="1">
+            <a:schemeClr val="accent1"/>
+          </a:lnRef>
+          <a:fillRef idx="3">
+            <a:schemeClr val="accent1"/>
+          </a:fillRef>
+          <a:effectRef idx="2">
+            <a:schemeClr val="accent1"/>
+          </a:effectRef>
+          <a:fontRef idx="minor">
+            <a:schemeClr val="lt1"/>
+          </a:fontRef>
+        </p:style>
+        <p:txBody>
+          <a:bodyPr rtlCol="0" anchor="ctr"/>
+          <a:lstStyle/>
+          <a:p>
+            <a:pPr algn="ctr"/>
+          </a:p>
+        </p:txBody>
+      </p:sp>
+      <p:sp>
+        <p:nvSpPr>
+          <p:cNvPr id="10" name="TextBox 9"/>
+          <p:cNvSpPr txBox="1"/>
+          <p:nvPr/>
+        </p:nvSpPr>
+        <p:spPr>
+          <a:xfrm>
+            <a:off x="932688" y="2011680"/>
+            <a:ext cx="10362895" cy="365760"/>
+          </a:xfrm>
+          <a:prstGeom prst="rect">
+            <a:avLst/>
+          </a:prstGeom>
+          <a:noFill/>
+        </p:spPr>
+        <p:txBody>
+          <a:bodyPr wrap="square" anchor="t" lIns="0" rIns="0" tIns="0" bIns="0">
+            <a:spAutoFit/>
+          </a:bodyPr>
+          <a:lstStyle/>
+          <a:p>
+            <a:pPr algn="l">
+              <a:lnSpc>
+                <a:spcPct val="112000"/>
+              </a:lnSpc>
+              <a:spcAft>
+                <a:spcPts val="500"/>
+              </a:spcAft>
+            </a:pPr>
+            <a:r>
+              <a:rPr sz="1600" b="1" i="0">
+                <a:solidFill>
+                  <a:srgbClr val="1C3D5A"/>
+                </a:solidFill>
+                <a:latin typeface="Microsoft JhengHei"/>
+                <a:ea typeface="Microsoft JhengHei"/>
+                <a:cs typeface="Microsoft JhengHei"/>
+              </a:rPr>
+              <a:t>黃宇平（組長）</a:t>
+            </a:r>
+            <a:r>
+              <a:rPr sz="1300" b="1" i="0">
+                <a:solidFill>
+                  <a:srgbClr val="C8922E"/>
+                </a:solidFill>
+                <a:latin typeface="Microsoft JhengHei"/>
+                <a:ea typeface="Microsoft JhengHei"/>
+                <a:cs typeface="Microsoft JhengHei"/>
+              </a:rPr>
+              <a:t>　·　系統全棧技術實作</a:t>
+            </a:r>
+          </a:p>
+        </p:txBody>
+      </p:sp>
+      <p:cxnSp>
+        <p:nvCxnSpPr>
+          <p:cNvPr id="11" name="Connector 10"/>
+          <p:cNvCxnSpPr/>
+          <p:nvPr/>
+        </p:nvCxnSpPr>
+        <p:spPr>
+          <a:xfrm>
+            <a:off x="932688" y="2432304"/>
+            <a:ext cx="10326319" cy="0"/>
+          </a:xfrm>
+          <a:prstGeom prst="bentConnector3">
+            <a:avLst/>
+          </a:prstGeom>
+          <a:ln w="12700">
+            <a:solidFill>
+              <a:srgbClr val="D4A24E"/>
+            </a:solidFill>
+          </a:ln>
+        </p:spPr>
+        <p:style>
+          <a:lnRef idx="2">
+            <a:schemeClr val="accent1"/>
+          </a:lnRef>
+          <a:fillRef idx="0">
+            <a:schemeClr val="accent1"/>
+          </a:fillRef>
+          <a:effectRef idx="1">
+            <a:schemeClr val="accent1"/>
+          </a:effectRef>
+          <a:fontRef idx="minor">
+            <a:schemeClr val="tx1"/>
+          </a:fontRef>
+        </p:style>
+      </p:cxnSp>
+      <p:sp>
+        <p:nvSpPr>
+          <p:cNvPr id="12" name="TextBox 11"/>
+          <p:cNvSpPr txBox="1"/>
+          <p:nvPr/>
+        </p:nvSpPr>
+        <p:spPr>
+          <a:xfrm>
+            <a:off x="987552" y="2578608"/>
+            <a:ext cx="4952847" cy="1371600"/>
+          </a:xfrm>
+          <a:prstGeom prst="rect">
+            <a:avLst/>
+          </a:prstGeom>
+          <a:noFill/>
+        </p:spPr>
+        <p:txBody>
+          <a:bodyPr wrap="square" anchor="t" lIns="0" rIns="0" tIns="0" bIns="0">
+            <a:spAutoFit/>
+          </a:bodyPr>
+          <a:lstStyle/>
+          <a:p>
+            <a:pPr algn="l">
+              <a:lnSpc>
+                <a:spcPct val="112000"/>
+              </a:lnSpc>
+              <a:spcAft>
+                <a:spcPts val="800"/>
+              </a:spcAft>
+            </a:pPr>
+            <a:r>
+              <a:rPr sz="1200" b="1" i="0">
+                <a:solidFill>
+                  <a:srgbClr val="C8922E"/>
+                </a:solidFill>
+                <a:latin typeface="Microsoft JhengHei"/>
+                <a:ea typeface="Microsoft JhengHei"/>
+                <a:cs typeface="Microsoft JhengHei"/>
+              </a:rPr>
+              <a:t>▪  </a:t>
+            </a:r>
+            <a:r>
+              <a:rPr sz="1200" b="0" i="0">
+                <a:solidFill>
+                  <a:srgbClr val="3D4D5A"/>
+                </a:solidFill>
+                <a:latin typeface="Microsoft JhengHei"/>
+                <a:ea typeface="Microsoft JhengHei"/>
+                <a:cs typeface="Microsoft JhengHei"/>
+              </a:rPr>
+              <a:t>Docker 三容器建置與一鍵部署</a:t>
+            </a:r>
+          </a:p>
+          <a:p>
+            <a:pPr algn="l">
+              <a:lnSpc>
+                <a:spcPct val="112000"/>
+              </a:lnSpc>
+              <a:spcAft>
+                <a:spcPts val="800"/>
+              </a:spcAft>
+            </a:pPr>
+            <a:r>
+              <a:rPr sz="1200" b="1" i="0">
+                <a:solidFill>
+                  <a:srgbClr val="C8922E"/>
+                </a:solidFill>
+                <a:latin typeface="Microsoft JhengHei"/>
+                <a:ea typeface="Microsoft JhengHei"/>
+                <a:cs typeface="Microsoft JhengHei"/>
+              </a:rPr>
+              <a:t>▪  </a:t>
+            </a:r>
+            <a:r>
+              <a:rPr sz="1200" b="0" i="0">
+                <a:solidFill>
+                  <a:srgbClr val="3D4D5A"/>
+                </a:solidFill>
+                <a:latin typeface="Microsoft JhengHei"/>
+                <a:ea typeface="Microsoft JhengHei"/>
+                <a:cs typeface="Microsoft JhengHei"/>
+              </a:rPr>
+              <a:t>PHP 22 檔 Linux 化 + 排班決策頁</a:t>
+            </a:r>
+          </a:p>
+          <a:p>
+            <a:pPr algn="l">
+              <a:lnSpc>
+                <a:spcPct val="112000"/>
+              </a:lnSpc>
+              <a:spcAft>
+                <a:spcPts val="800"/>
+              </a:spcAft>
+            </a:pPr>
+            <a:r>
+              <a:rPr sz="1200" b="1" i="0">
+                <a:solidFill>
+                  <a:srgbClr val="C8922E"/>
+                </a:solidFill>
+                <a:latin typeface="Microsoft JhengHei"/>
+                <a:ea typeface="Microsoft JhengHei"/>
+                <a:cs typeface="Microsoft JhengHei"/>
+              </a:rPr>
+              <a:t>▪  </a:t>
+            </a:r>
+            <a:r>
+              <a:rPr sz="1200" b="0" i="0">
+                <a:solidFill>
+                  <a:srgbClr val="3D4D5A"/>
+                </a:solidFill>
+                <a:latin typeface="Microsoft JhengHei"/>
+                <a:ea typeface="Microsoft JhengHei"/>
+                <a:cs typeface="Microsoft JhengHei"/>
+              </a:rPr>
+              <a:t>MySQL Schema 擴充 + 1,200 筆模擬資料</a:t>
+            </a:r>
+          </a:p>
+          <a:p>
+            <a:pPr algn="l">
+              <a:lnSpc>
+                <a:spcPct val="112000"/>
+              </a:lnSpc>
+              <a:spcAft>
+                <a:spcPts val="800"/>
+              </a:spcAft>
+            </a:pPr>
+            <a:r>
+              <a:rPr sz="1200" b="1" i="0">
+                <a:solidFill>
+                  <a:srgbClr val="C8922E"/>
+                </a:solidFill>
+                <a:latin typeface="Microsoft JhengHei"/>
+                <a:ea typeface="Microsoft JhengHei"/>
+                <a:cs typeface="Microsoft JhengHei"/>
+              </a:rPr>
+              <a:t>▪  </a:t>
+            </a:r>
+            <a:r>
+              <a:rPr sz="1200" b="0" i="0">
+                <a:solidFill>
+                  <a:srgbClr val="3D4D5A"/>
+                </a:solidFill>
+                <a:latin typeface="Microsoft JhengHei"/>
+                <a:ea typeface="Microsoft JhengHei"/>
+                <a:cs typeface="Microsoft JhengHei"/>
+              </a:rPr>
+              <a:t>CWA 浮標海象資料管線整合</a:t>
+            </a:r>
+          </a:p>
+        </p:txBody>
+      </p:sp>
+      <p:sp>
+        <p:nvSpPr>
+          <p:cNvPr id="13" name="TextBox 12"/>
+          <p:cNvSpPr txBox="1"/>
+          <p:nvPr/>
+        </p:nvSpPr>
+        <p:spPr>
+          <a:xfrm>
+            <a:off x="6123279" y="2578608"/>
+            <a:ext cx="4952847" cy="1371600"/>
+          </a:xfrm>
+          <a:prstGeom prst="rect">
+            <a:avLst/>
+          </a:prstGeom>
+          <a:noFill/>
+        </p:spPr>
+        <p:txBody>
+          <a:bodyPr wrap="square" anchor="t" lIns="0" rIns="0" tIns="0" bIns="0">
+            <a:spAutoFit/>
+          </a:bodyPr>
+          <a:lstStyle/>
+          <a:p>
+            <a:pPr algn="l">
+              <a:lnSpc>
+                <a:spcPct val="112000"/>
+              </a:lnSpc>
+              <a:spcAft>
+                <a:spcPts val="800"/>
+              </a:spcAft>
+            </a:pPr>
+            <a:r>
+              <a:rPr sz="1200" b="1" i="0">
+                <a:solidFill>
+                  <a:srgbClr val="C8922E"/>
+                </a:solidFill>
+                <a:latin typeface="Microsoft JhengHei"/>
+                <a:ea typeface="Microsoft JhengHei"/>
+                <a:cs typeface="Microsoft JhengHei"/>
+              </a:rPr>
+              <a:t>▪  </a:t>
+            </a:r>
+            <a:r>
+              <a:rPr sz="1200" b="0" i="0">
+                <a:solidFill>
+                  <a:srgbClr val="3D4D5A"/>
+                </a:solidFill>
+                <a:latin typeface="Microsoft JhengHei"/>
+                <a:ea typeface="Microsoft JhengHei"/>
+                <a:cs typeface="Microsoft JhengHei"/>
+              </a:rPr>
+              <a:t>Pandas 清洗 + 統計檢定 + 25 張圖表</a:t>
+            </a:r>
+          </a:p>
+          <a:p>
+            <a:pPr algn="l">
+              <a:lnSpc>
+                <a:spcPct val="112000"/>
+              </a:lnSpc>
+              <a:spcAft>
+                <a:spcPts val="800"/>
+              </a:spcAft>
+            </a:pPr>
+            <a:r>
+              <a:rPr sz="1200" b="1" i="0">
+                <a:solidFill>
+                  <a:srgbClr val="C8922E"/>
+                </a:solidFill>
+                <a:latin typeface="Microsoft JhengHei"/>
+                <a:ea typeface="Microsoft JhengHei"/>
+                <a:cs typeface="Microsoft JhengHei"/>
+              </a:rPr>
+              <a:t>▪  </a:t>
+            </a:r>
+            <a:r>
+              <a:rPr sz="1200" b="0" i="0">
+                <a:solidFill>
+                  <a:srgbClr val="3D4D5A"/>
+                </a:solidFill>
+                <a:latin typeface="Microsoft JhengHei"/>
+                <a:ea typeface="Microsoft JhengHei"/>
+                <a:cs typeface="Microsoft JhengHei"/>
+              </a:rPr>
+              <a:t>RandomForest 預測 + MILP 排班引擎</a:t>
+            </a:r>
+          </a:p>
+          <a:p>
+            <a:pPr algn="l">
+              <a:lnSpc>
+                <a:spcPct val="112000"/>
+              </a:lnSpc>
+              <a:spcAft>
+                <a:spcPts val="800"/>
+              </a:spcAft>
+            </a:pPr>
+            <a:r>
+              <a:rPr sz="1200" b="1" i="0">
+                <a:solidFill>
+                  <a:srgbClr val="C8922E"/>
+                </a:solidFill>
+                <a:latin typeface="Microsoft JhengHei"/>
+                <a:ea typeface="Microsoft JhengHei"/>
+                <a:cs typeface="Microsoft JhengHei"/>
+              </a:rPr>
+              <a:t>▪  </a:t>
+            </a:r>
+            <a:r>
+              <a:rPr sz="1200" b="0" i="0">
+                <a:solidFill>
+                  <a:srgbClr val="3D4D5A"/>
+                </a:solidFill>
+                <a:latin typeface="Microsoft JhengHei"/>
+                <a:ea typeface="Microsoft JhengHei"/>
+                <a:cs typeface="Microsoft JhengHei"/>
+              </a:rPr>
+              <a:t>Gradio 儀表板 + Folium 互動地圖</a:t>
+            </a:r>
+          </a:p>
+          <a:p>
+            <a:pPr algn="l">
+              <a:lnSpc>
+                <a:spcPct val="112000"/>
+              </a:lnSpc>
+              <a:spcAft>
+                <a:spcPts val="800"/>
+              </a:spcAft>
+            </a:pPr>
+            <a:r>
+              <a:rPr sz="1200" b="1" i="0">
+                <a:solidFill>
+                  <a:srgbClr val="C8922E"/>
+                </a:solidFill>
+                <a:latin typeface="Microsoft JhengHei"/>
+                <a:ea typeface="Microsoft JhengHei"/>
+                <a:cs typeface="Microsoft JhengHei"/>
+              </a:rPr>
+              <a:t>▪  </a:t>
+            </a:r>
+            <a:r>
+              <a:rPr sz="1200" b="0" i="0">
+                <a:solidFill>
+                  <a:srgbClr val="3D4D5A"/>
+                </a:solidFill>
+                <a:latin typeface="Microsoft JhengHei"/>
+                <a:ea typeface="Microsoft JhengHei"/>
+                <a:cs typeface="Microsoft JhengHei"/>
+              </a:rPr>
+              <a:t>GitHub Actions CI + 期末報告與簡報製作</a:t>
+            </a:r>
+          </a:p>
+        </p:txBody>
+      </p:sp>
+      <p:sp>
+        <p:nvSpPr>
+          <p:cNvPr id="14" name="Rectangle 13"/>
+          <p:cNvSpPr/>
+          <p:nvPr/>
+        </p:nvSpPr>
+        <p:spPr>
+          <a:xfrm>
+            <a:off x="640080" y="4114800"/>
+            <a:ext cx="2011680" cy="384048"/>
+          </a:xfrm>
+          <a:prstGeom prst="rect">
+            <a:avLst/>
+          </a:prstGeom>
+          <a:solidFill>
+            <a:srgbClr val="1C3D5A"/>
+          </a:solidFill>
+          <a:ln>
+            <a:noFill/>
+          </a:ln>
+        </p:spPr>
+        <p:style>
+          <a:lnRef idx="1">
+            <a:schemeClr val="accent1"/>
+          </a:lnRef>
+          <a:fillRef idx="3">
+            <a:schemeClr val="accent1"/>
+          </a:fillRef>
+          <a:effectRef idx="2">
+            <a:schemeClr val="accent1"/>
+          </a:effectRef>
+          <a:fontRef idx="minor">
+            <a:schemeClr val="lt1"/>
+          </a:fontRef>
+        </p:style>
+        <p:txBody>
+          <a:bodyPr rtlCol="0" anchor="ctr"/>
+          <a:lstStyle/>
+          <a:p>
+            <a:pPr algn="ctr"/>
+          </a:p>
+        </p:txBody>
+      </p:sp>
+      <p:sp>
+        <p:nvSpPr>
+          <p:cNvPr id="15" name="TextBox 14"/>
+          <p:cNvSpPr txBox="1"/>
+          <p:nvPr/>
+        </p:nvSpPr>
+        <p:spPr>
+          <a:xfrm>
+            <a:off x="749808" y="4114800"/>
+            <a:ext cx="1828800" cy="384048"/>
+          </a:xfrm>
+          <a:prstGeom prst="rect">
+            <a:avLst/>
+          </a:prstGeom>
+          <a:noFill/>
+        </p:spPr>
+        <p:txBody>
+          <a:bodyPr wrap="square" anchor="ctr" lIns="0" rIns="0" tIns="0" bIns="0">
+            <a:spAutoFit/>
+          </a:bodyPr>
+          <a:lstStyle/>
+          <a:p>
+            <a:pPr algn="l">
+              <a:lnSpc>
+                <a:spcPct val="112000"/>
+              </a:lnSpc>
+              <a:spcAft>
+                <a:spcPts val="500"/>
+              </a:spcAft>
+            </a:pPr>
+            <a:r>
+              <a:rPr sz="1250" b="1" i="0">
+                <a:solidFill>
+                  <a:srgbClr val="FFFFFF"/>
+                </a:solidFill>
+                <a:latin typeface="Microsoft JhengHei"/>
+                <a:ea typeface="Microsoft JhengHei"/>
+                <a:cs typeface="Microsoft JhengHei"/>
+              </a:rPr>
+              <a:t>組員</a:t>
+            </a:r>
+          </a:p>
+        </p:txBody>
+      </p:sp>
+      <p:sp>
+        <p:nvSpPr>
+          <p:cNvPr id="16" name="Rectangle 15"/>
+          <p:cNvSpPr/>
+          <p:nvPr/>
+        </p:nvSpPr>
+        <p:spPr>
+          <a:xfrm>
+            <a:off x="2651760" y="4114800"/>
+            <a:ext cx="8899855" cy="384048"/>
+          </a:xfrm>
+          <a:prstGeom prst="rect">
+            <a:avLst/>
+          </a:prstGeom>
+          <a:solidFill>
+            <a:srgbClr val="1C3D5A"/>
+          </a:solidFill>
+          <a:ln>
+            <a:noFill/>
+          </a:ln>
+        </p:spPr>
+        <p:style>
+          <a:lnRef idx="1">
+            <a:schemeClr val="accent1"/>
+          </a:lnRef>
+          <a:fillRef idx="3">
+            <a:schemeClr val="accent1"/>
+          </a:fillRef>
+          <a:effectRef idx="2">
+            <a:schemeClr val="accent1"/>
+          </a:effectRef>
+          <a:fontRef idx="minor">
+            <a:schemeClr val="lt1"/>
+          </a:fontRef>
+        </p:style>
+        <p:txBody>
+          <a:bodyPr rtlCol="0" anchor="ctr"/>
+          <a:lstStyle/>
+          <a:p>
+            <a:pPr algn="ctr"/>
+          </a:p>
+        </p:txBody>
+      </p:sp>
+      <p:sp>
+        <p:nvSpPr>
+          <p:cNvPr id="17" name="TextBox 16"/>
+          <p:cNvSpPr txBox="1"/>
+          <p:nvPr/>
+        </p:nvSpPr>
+        <p:spPr>
+          <a:xfrm>
+            <a:off x="2761488" y="4114800"/>
+            <a:ext cx="8716975" cy="384048"/>
+          </a:xfrm>
+          <a:prstGeom prst="rect">
+            <a:avLst/>
+          </a:prstGeom>
+          <a:noFill/>
+        </p:spPr>
+        <p:txBody>
+          <a:bodyPr wrap="square" anchor="ctr" lIns="0" rIns="0" tIns="0" bIns="0">
+            <a:spAutoFit/>
+          </a:bodyPr>
+          <a:lstStyle/>
+          <a:p>
+            <a:pPr algn="l">
+              <a:lnSpc>
+                <a:spcPct val="112000"/>
+              </a:lnSpc>
+              <a:spcAft>
+                <a:spcPts val="500"/>
+              </a:spcAft>
+            </a:pPr>
+            <a:r>
+              <a:rPr sz="1250" b="1" i="0">
+                <a:solidFill>
+                  <a:srgbClr val="FFFFFF"/>
+                </a:solidFill>
+                <a:latin typeface="Microsoft JhengHei"/>
+                <a:ea typeface="Microsoft JhengHei"/>
+                <a:cs typeface="Microsoft JhengHei"/>
+              </a:rPr>
+              <a:t>負責項目</a:t>
+            </a:r>
+          </a:p>
+        </p:txBody>
+      </p:sp>
+      <p:sp>
+        <p:nvSpPr>
+          <p:cNvPr id="18" name="Rectangle 17"/>
+          <p:cNvSpPr/>
+          <p:nvPr/>
+        </p:nvSpPr>
+        <p:spPr>
+          <a:xfrm>
+            <a:off x="640080" y="4498848"/>
+            <a:ext cx="10911535" cy="365760"/>
+          </a:xfrm>
+          <a:prstGeom prst="rect">
+            <a:avLst/>
+          </a:prstGeom>
+          <a:solidFill>
+            <a:srgbClr val="FFFFFF"/>
+          </a:solidFill>
+          <a:ln>
+            <a:noFill/>
+          </a:ln>
+        </p:spPr>
+        <p:style>
+          <a:lnRef idx="1">
+            <a:schemeClr val="accent1"/>
+          </a:lnRef>
+          <a:fillRef idx="3">
+            <a:schemeClr val="accent1"/>
+          </a:fillRef>
+          <a:effectRef idx="2">
+            <a:schemeClr val="accent1"/>
+          </a:effectRef>
+          <a:fontRef idx="minor">
+            <a:schemeClr val="lt1"/>
+          </a:fontRef>
+        </p:style>
+        <p:txBody>
+          <a:bodyPr rtlCol="0" anchor="ctr"/>
+          <a:lstStyle/>
+          <a:p>
+            <a:pPr algn="ctr"/>
+          </a:p>
+        </p:txBody>
+      </p:sp>
+      <p:sp>
+        <p:nvSpPr>
+          <p:cNvPr id="19" name="TextBox 18"/>
+          <p:cNvSpPr txBox="1"/>
+          <p:nvPr/>
+        </p:nvSpPr>
+        <p:spPr>
+          <a:xfrm>
+            <a:off x="749808" y="4498848"/>
+            <a:ext cx="1828800" cy="365760"/>
+          </a:xfrm>
+          <a:prstGeom prst="rect">
+            <a:avLst/>
+          </a:prstGeom>
+          <a:noFill/>
+        </p:spPr>
+        <p:txBody>
+          <a:bodyPr wrap="square" anchor="ctr" lIns="0" rIns="0" tIns="0" bIns="0">
+            <a:spAutoFit/>
+          </a:bodyPr>
+          <a:lstStyle/>
+          <a:p>
+            <a:pPr algn="l">
+              <a:lnSpc>
+                <a:spcPct val="112000"/>
+              </a:lnSpc>
+              <a:spcAft>
+                <a:spcPts val="500"/>
+              </a:spcAft>
+            </a:pPr>
+            <a:r>
+              <a:rPr sz="1250" b="1" i="0">
+                <a:solidFill>
+                  <a:srgbClr val="1C3D5A"/>
+                </a:solidFill>
+                <a:latin typeface="Microsoft JhengHei"/>
+                <a:ea typeface="Microsoft JhengHei"/>
+                <a:cs typeface="Microsoft JhengHei"/>
+              </a:rPr>
+              <a:t>傅瀚鋌</a:t>
+            </a:r>
+          </a:p>
+        </p:txBody>
+      </p:sp>
+      <p:sp>
+        <p:nvSpPr>
+          <p:cNvPr id="20" name="TextBox 19"/>
+          <p:cNvSpPr txBox="1"/>
+          <p:nvPr/>
+        </p:nvSpPr>
+        <p:spPr>
+          <a:xfrm>
+            <a:off x="2761488" y="4498848"/>
+            <a:ext cx="8716975" cy="365760"/>
+          </a:xfrm>
+          <a:prstGeom prst="rect">
+            <a:avLst/>
+          </a:prstGeom>
+          <a:noFill/>
+        </p:spPr>
+        <p:txBody>
+          <a:bodyPr wrap="square" anchor="ctr" lIns="0" rIns="0" tIns="0" bIns="0">
+            <a:spAutoFit/>
+          </a:bodyPr>
+          <a:lstStyle/>
+          <a:p>
+            <a:pPr algn="l">
+              <a:lnSpc>
+                <a:spcPct val="112000"/>
+              </a:lnSpc>
+              <a:spcAft>
+                <a:spcPts val="500"/>
+              </a:spcAft>
+            </a:pPr>
+            <a:r>
+              <a:rPr sz="1250" b="0" i="0">
+                <a:solidFill>
+                  <a:srgbClr val="3D4D5A"/>
+                </a:solidFill>
+                <a:latin typeface="Microsoft JhengHei"/>
+                <a:ea typeface="Microsoft JhengHei"/>
+                <a:cs typeface="Microsoft JhengHei"/>
+              </a:rPr>
+              <a:t>作業工具支援</a:t>
+            </a:r>
+          </a:p>
+        </p:txBody>
+      </p:sp>
+      <p:sp>
+        <p:nvSpPr>
+          <p:cNvPr id="21" name="Rectangle 20"/>
+          <p:cNvSpPr/>
+          <p:nvPr/>
+        </p:nvSpPr>
+        <p:spPr>
+          <a:xfrm>
+            <a:off x="640080" y="4864608"/>
+            <a:ext cx="10911535" cy="365760"/>
+          </a:xfrm>
+          <a:prstGeom prst="rect">
+            <a:avLst/>
+          </a:prstGeom>
+          <a:solidFill>
+            <a:srgbClr val="F3F7F9"/>
+          </a:solidFill>
+          <a:ln>
+            <a:noFill/>
+          </a:ln>
+        </p:spPr>
+        <p:style>
+          <a:lnRef idx="1">
+            <a:schemeClr val="accent1"/>
+          </a:lnRef>
+          <a:fillRef idx="3">
+            <a:schemeClr val="accent1"/>
+          </a:fillRef>
+          <a:effectRef idx="2">
+            <a:schemeClr val="accent1"/>
+          </a:effectRef>
+          <a:fontRef idx="minor">
+            <a:schemeClr val="lt1"/>
+          </a:fontRef>
+        </p:style>
+        <p:txBody>
+          <a:bodyPr rtlCol="0" anchor="ctr"/>
+          <a:lstStyle/>
+          <a:p>
+            <a:pPr algn="ctr"/>
+          </a:p>
+        </p:txBody>
+      </p:sp>
+      <p:sp>
+        <p:nvSpPr>
+          <p:cNvPr id="22" name="TextBox 21"/>
+          <p:cNvSpPr txBox="1"/>
+          <p:nvPr/>
+        </p:nvSpPr>
+        <p:spPr>
+          <a:xfrm>
+            <a:off x="749808" y="4864608"/>
+            <a:ext cx="1828800" cy="365760"/>
+          </a:xfrm>
+          <a:prstGeom prst="rect">
+            <a:avLst/>
+          </a:prstGeom>
+          <a:noFill/>
+        </p:spPr>
+        <p:txBody>
+          <a:bodyPr wrap="square" anchor="ctr" lIns="0" rIns="0" tIns="0" bIns="0">
+            <a:spAutoFit/>
+          </a:bodyPr>
+          <a:lstStyle/>
+          <a:p>
+            <a:pPr algn="l">
+              <a:lnSpc>
+                <a:spcPct val="112000"/>
+              </a:lnSpc>
+              <a:spcAft>
+                <a:spcPts val="500"/>
+              </a:spcAft>
+            </a:pPr>
+            <a:r>
+              <a:rPr sz="1250" b="1" i="0">
+                <a:solidFill>
+                  <a:srgbClr val="1C3D5A"/>
+                </a:solidFill>
+                <a:latin typeface="Microsoft JhengHei"/>
+                <a:ea typeface="Microsoft JhengHei"/>
+                <a:cs typeface="Microsoft JhengHei"/>
+              </a:rPr>
+              <a:t>曾紹喆</a:t>
+            </a:r>
+          </a:p>
+        </p:txBody>
+      </p:sp>
+      <p:sp>
+        <p:nvSpPr>
+          <p:cNvPr id="23" name="TextBox 22"/>
+          <p:cNvSpPr txBox="1"/>
+          <p:nvPr/>
+        </p:nvSpPr>
+        <p:spPr>
+          <a:xfrm>
+            <a:off x="2761488" y="4864608"/>
+            <a:ext cx="8716975" cy="365760"/>
+          </a:xfrm>
+          <a:prstGeom prst="rect">
+            <a:avLst/>
+          </a:prstGeom>
+          <a:noFill/>
+        </p:spPr>
+        <p:txBody>
+          <a:bodyPr wrap="square" anchor="ctr" lIns="0" rIns="0" tIns="0" bIns="0">
+            <a:spAutoFit/>
+          </a:bodyPr>
+          <a:lstStyle/>
+          <a:p>
+            <a:pPr algn="l">
+              <a:lnSpc>
+                <a:spcPct val="112000"/>
+              </a:lnSpc>
+              <a:spcAft>
+                <a:spcPts val="500"/>
+              </a:spcAft>
+            </a:pPr>
+            <a:r>
+              <a:rPr sz="1250" b="0" i="0">
+                <a:solidFill>
+                  <a:srgbClr val="3D4D5A"/>
+                </a:solidFill>
+                <a:latin typeface="Microsoft JhengHei"/>
+                <a:ea typeface="Microsoft JhengHei"/>
+                <a:cs typeface="Microsoft JhengHei"/>
+              </a:rPr>
+              <a:t>題目設定討論</a:t>
+            </a:r>
+          </a:p>
+        </p:txBody>
+      </p:sp>
+      <p:sp>
+        <p:nvSpPr>
+          <p:cNvPr id="24" name="Rectangle 23"/>
+          <p:cNvSpPr/>
+          <p:nvPr/>
+        </p:nvSpPr>
+        <p:spPr>
+          <a:xfrm>
+            <a:off x="640080" y="5230368"/>
+            <a:ext cx="10911535" cy="365760"/>
+          </a:xfrm>
+          <a:prstGeom prst="rect">
+            <a:avLst/>
+          </a:prstGeom>
+          <a:solidFill>
+            <a:srgbClr val="FFFFFF"/>
+          </a:solidFill>
+          <a:ln>
+            <a:noFill/>
+          </a:ln>
+        </p:spPr>
+        <p:style>
+          <a:lnRef idx="1">
+            <a:schemeClr val="accent1"/>
+          </a:lnRef>
+          <a:fillRef idx="3">
+            <a:schemeClr val="accent1"/>
+          </a:fillRef>
+          <a:effectRef idx="2">
+            <a:schemeClr val="accent1"/>
+          </a:effectRef>
+          <a:fontRef idx="minor">
+            <a:schemeClr val="lt1"/>
+          </a:fontRef>
+        </p:style>
+        <p:txBody>
+          <a:bodyPr rtlCol="0" anchor="ctr"/>
+          <a:lstStyle/>
+          <a:p>
+            <a:pPr algn="ctr"/>
+          </a:p>
+        </p:txBody>
+      </p:sp>
+      <p:sp>
+        <p:nvSpPr>
+          <p:cNvPr id="25" name="TextBox 24"/>
+          <p:cNvSpPr txBox="1"/>
+          <p:nvPr/>
+        </p:nvSpPr>
+        <p:spPr>
+          <a:xfrm>
+            <a:off x="749808" y="5230368"/>
+            <a:ext cx="1828800" cy="365760"/>
+          </a:xfrm>
+          <a:prstGeom prst="rect">
+            <a:avLst/>
+          </a:prstGeom>
+          <a:noFill/>
+        </p:spPr>
+        <p:txBody>
+          <a:bodyPr wrap="square" anchor="ctr" lIns="0" rIns="0" tIns="0" bIns="0">
+            <a:spAutoFit/>
+          </a:bodyPr>
+          <a:lstStyle/>
+          <a:p>
+            <a:pPr algn="l">
+              <a:lnSpc>
+                <a:spcPct val="112000"/>
+              </a:lnSpc>
+              <a:spcAft>
+                <a:spcPts val="500"/>
+              </a:spcAft>
+            </a:pPr>
+            <a:r>
+              <a:rPr sz="1250" b="1" i="0">
+                <a:solidFill>
+                  <a:srgbClr val="1C3D5A"/>
+                </a:solidFill>
+                <a:latin typeface="Microsoft JhengHei"/>
+                <a:ea typeface="Microsoft JhengHei"/>
+                <a:cs typeface="Microsoft JhengHei"/>
+              </a:rPr>
+              <a:t>劉家样</a:t>
+            </a:r>
+          </a:p>
+        </p:txBody>
+      </p:sp>
+      <p:sp>
+        <p:nvSpPr>
+          <p:cNvPr id="26" name="TextBox 25"/>
+          <p:cNvSpPr txBox="1"/>
+          <p:nvPr/>
+        </p:nvSpPr>
+        <p:spPr>
+          <a:xfrm>
+            <a:off x="2761488" y="5230368"/>
+            <a:ext cx="8716975" cy="365760"/>
+          </a:xfrm>
+          <a:prstGeom prst="rect">
+            <a:avLst/>
+          </a:prstGeom>
+          <a:noFill/>
+        </p:spPr>
+        <p:txBody>
+          <a:bodyPr wrap="square" anchor="ctr" lIns="0" rIns="0" tIns="0" bIns="0">
+            <a:spAutoFit/>
+          </a:bodyPr>
+          <a:lstStyle/>
+          <a:p>
+            <a:pPr algn="l">
+              <a:lnSpc>
+                <a:spcPct val="112000"/>
+              </a:lnSpc>
+              <a:spcAft>
+                <a:spcPts val="500"/>
+              </a:spcAft>
+            </a:pPr>
+            <a:r>
+              <a:rPr sz="1250" b="0" i="0">
+                <a:solidFill>
+                  <a:srgbClr val="3D4D5A"/>
+                </a:solidFill>
+                <a:latin typeface="Microsoft JhengHei"/>
+                <a:ea typeface="Microsoft JhengHei"/>
+                <a:cs typeface="Microsoft JhengHei"/>
+              </a:rPr>
+              <a:t>輔助驗收功能</a:t>
+            </a:r>
+          </a:p>
+        </p:txBody>
+      </p:sp>
+      <p:sp>
+        <p:nvSpPr>
+          <p:cNvPr id="27" name="Rectangle 26"/>
+          <p:cNvSpPr/>
+          <p:nvPr/>
+        </p:nvSpPr>
+        <p:spPr>
+          <a:xfrm>
+            <a:off x="640080" y="5596128"/>
+            <a:ext cx="10911535" cy="365760"/>
+          </a:xfrm>
+          <a:prstGeom prst="rect">
+            <a:avLst/>
+          </a:prstGeom>
+          <a:solidFill>
+            <a:srgbClr val="F3F7F9"/>
+          </a:solidFill>
+          <a:ln>
+            <a:noFill/>
+          </a:ln>
+        </p:spPr>
+        <p:style>
+          <a:lnRef idx="1">
+            <a:schemeClr val="accent1"/>
+          </a:lnRef>
+          <a:fillRef idx="3">
+            <a:schemeClr val="accent1"/>
+          </a:fillRef>
+          <a:effectRef idx="2">
+            <a:schemeClr val="accent1"/>
+          </a:effectRef>
+          <a:fontRef idx="minor">
+            <a:schemeClr val="lt1"/>
+          </a:fontRef>
+        </p:style>
+        <p:txBody>
+          <a:bodyPr rtlCol="0" anchor="ctr"/>
+          <a:lstStyle/>
+          <a:p>
+            <a:pPr algn="ctr"/>
+          </a:p>
+        </p:txBody>
+      </p:sp>
+      <p:sp>
+        <p:nvSpPr>
+          <p:cNvPr id="28" name="TextBox 27"/>
+          <p:cNvSpPr txBox="1"/>
+          <p:nvPr/>
+        </p:nvSpPr>
+        <p:spPr>
+          <a:xfrm>
+            <a:off x="749808" y="5596128"/>
+            <a:ext cx="1828800" cy="365760"/>
+          </a:xfrm>
+          <a:prstGeom prst="rect">
+            <a:avLst/>
+          </a:prstGeom>
+          <a:noFill/>
+        </p:spPr>
+        <p:txBody>
+          <a:bodyPr wrap="square" anchor="ctr" lIns="0" rIns="0" tIns="0" bIns="0">
+            <a:spAutoFit/>
+          </a:bodyPr>
+          <a:lstStyle/>
+          <a:p>
+            <a:pPr algn="l">
+              <a:lnSpc>
+                <a:spcPct val="112000"/>
+              </a:lnSpc>
+              <a:spcAft>
+                <a:spcPts val="500"/>
+              </a:spcAft>
+            </a:pPr>
+            <a:r>
+              <a:rPr sz="1250" b="1" i="0">
+                <a:solidFill>
+                  <a:srgbClr val="1C3D5A"/>
+                </a:solidFill>
+                <a:latin typeface="Microsoft JhengHei"/>
+                <a:ea typeface="Microsoft JhengHei"/>
+                <a:cs typeface="Microsoft JhengHei"/>
+              </a:rPr>
+              <a:t>李翊丞</a:t>
+            </a:r>
+          </a:p>
+        </p:txBody>
+      </p:sp>
+      <p:sp>
+        <p:nvSpPr>
+          <p:cNvPr id="29" name="TextBox 28"/>
+          <p:cNvSpPr txBox="1"/>
+          <p:nvPr/>
+        </p:nvSpPr>
+        <p:spPr>
+          <a:xfrm>
+            <a:off x="2761488" y="5596128"/>
+            <a:ext cx="8716975" cy="365760"/>
+          </a:xfrm>
+          <a:prstGeom prst="rect">
+            <a:avLst/>
+          </a:prstGeom>
+          <a:noFill/>
+        </p:spPr>
+        <p:txBody>
+          <a:bodyPr wrap="square" anchor="ctr" lIns="0" rIns="0" tIns="0" bIns="0">
+            <a:spAutoFit/>
+          </a:bodyPr>
+          <a:lstStyle/>
+          <a:p>
+            <a:pPr algn="l">
+              <a:lnSpc>
+                <a:spcPct val="112000"/>
+              </a:lnSpc>
+              <a:spcAft>
+                <a:spcPts val="500"/>
+              </a:spcAft>
+            </a:pPr>
+            <a:r>
+              <a:rPr sz="1250" b="0" i="0">
+                <a:solidFill>
+                  <a:srgbClr val="3D4D5A"/>
+                </a:solidFill>
+                <a:latin typeface="Microsoft JhengHei"/>
+                <a:ea typeface="Microsoft JhengHei"/>
+                <a:cs typeface="Microsoft JhengHei"/>
+              </a:rPr>
+              <a:t>題目程式碼解決輔助</a:t>
+            </a:r>
+          </a:p>
+        </p:txBody>
+      </p:sp>
+      <p:sp>
+        <p:nvSpPr>
+          <p:cNvPr id="30" name="Rectangle 29"/>
+          <p:cNvSpPr/>
+          <p:nvPr/>
+        </p:nvSpPr>
+        <p:spPr>
+          <a:xfrm>
+            <a:off x="640080" y="5961888"/>
+            <a:ext cx="10911535" cy="365760"/>
+          </a:xfrm>
+          <a:prstGeom prst="rect">
+            <a:avLst/>
+          </a:prstGeom>
+          <a:solidFill>
+            <a:srgbClr val="FFFFFF"/>
+          </a:solidFill>
+          <a:ln>
+            <a:noFill/>
+          </a:ln>
+        </p:spPr>
+        <p:style>
+          <a:lnRef idx="1">
+            <a:schemeClr val="accent1"/>
+          </a:lnRef>
+          <a:fillRef idx="3">
+            <a:schemeClr val="accent1"/>
+          </a:fillRef>
+          <a:effectRef idx="2">
+            <a:schemeClr val="accent1"/>
+          </a:effectRef>
+          <a:fontRef idx="minor">
+            <a:schemeClr val="lt1"/>
+          </a:fontRef>
+        </p:style>
+        <p:txBody>
+          <a:bodyPr rtlCol="0" anchor="ctr"/>
+          <a:lstStyle/>
+          <a:p>
+            <a:pPr algn="ctr"/>
+          </a:p>
+        </p:txBody>
+      </p:sp>
+      <p:sp>
+        <p:nvSpPr>
+          <p:cNvPr id="31" name="TextBox 30"/>
+          <p:cNvSpPr txBox="1"/>
+          <p:nvPr/>
+        </p:nvSpPr>
+        <p:spPr>
+          <a:xfrm>
+            <a:off x="749808" y="5961888"/>
+            <a:ext cx="1828800" cy="365760"/>
+          </a:xfrm>
+          <a:prstGeom prst="rect">
+            <a:avLst/>
+          </a:prstGeom>
+          <a:noFill/>
+        </p:spPr>
+        <p:txBody>
+          <a:bodyPr wrap="square" anchor="ctr" lIns="0" rIns="0" tIns="0" bIns="0">
+            <a:spAutoFit/>
+          </a:bodyPr>
+          <a:lstStyle/>
+          <a:p>
+            <a:pPr algn="l">
+              <a:lnSpc>
+                <a:spcPct val="112000"/>
+              </a:lnSpc>
+              <a:spcAft>
+                <a:spcPts val="500"/>
+              </a:spcAft>
+            </a:pPr>
+            <a:r>
+              <a:rPr sz="1250" b="1" i="0">
+                <a:solidFill>
+                  <a:srgbClr val="1C3D5A"/>
+                </a:solidFill>
+                <a:latin typeface="Microsoft JhengHei"/>
+                <a:ea typeface="Microsoft JhengHei"/>
+                <a:cs typeface="Microsoft JhengHei"/>
+              </a:rPr>
+              <a:t>林秉賢</a:t>
+            </a:r>
+          </a:p>
+        </p:txBody>
+      </p:sp>
+      <p:sp>
+        <p:nvSpPr>
+          <p:cNvPr id="32" name="TextBox 31"/>
+          <p:cNvSpPr txBox="1"/>
+          <p:nvPr/>
+        </p:nvSpPr>
+        <p:spPr>
+          <a:xfrm>
+            <a:off x="2761488" y="5961888"/>
+            <a:ext cx="8716975" cy="365760"/>
+          </a:xfrm>
+          <a:prstGeom prst="rect">
+            <a:avLst/>
+          </a:prstGeom>
+          <a:noFill/>
+        </p:spPr>
+        <p:txBody>
+          <a:bodyPr wrap="square" anchor="ctr" lIns="0" rIns="0" tIns="0" bIns="0">
+            <a:spAutoFit/>
+          </a:bodyPr>
+          <a:lstStyle/>
+          <a:p>
+            <a:pPr algn="l">
+              <a:lnSpc>
+                <a:spcPct val="112000"/>
+              </a:lnSpc>
+              <a:spcAft>
+                <a:spcPts val="500"/>
+              </a:spcAft>
+            </a:pPr>
+            <a:r>
+              <a:rPr sz="1250" b="0" i="0">
+                <a:solidFill>
+                  <a:srgbClr val="3D4D5A"/>
+                </a:solidFill>
+                <a:latin typeface="Microsoft JhengHei"/>
+                <a:ea typeface="Microsoft JhengHei"/>
+                <a:cs typeface="Microsoft JhengHei"/>
+              </a:rPr>
+              <a:t>專題虛擬環境程式碼解決輔助</a:t>
+            </a:r>
+          </a:p>
+        </p:txBody>
+      </p:sp>
+      <p:sp>
+        <p:nvSpPr>
+          <p:cNvPr id="33" name="Rectangle 32"/>
+          <p:cNvSpPr/>
+          <p:nvPr/>
+        </p:nvSpPr>
+        <p:spPr>
+          <a:xfrm>
+            <a:off x="640080" y="4114800"/>
+            <a:ext cx="10911535" cy="2212848"/>
+          </a:xfrm>
+          <a:prstGeom prst="rect">
+            <a:avLst/>
+          </a:prstGeom>
+          <a:noFill/>
+          <a:ln w="9525">
+            <a:solidFill>
+              <a:srgbClr val="D7E0E6"/>
+            </a:solidFill>
+          </a:ln>
+        </p:spPr>
+        <p:style>
+          <a:lnRef idx="1">
+            <a:schemeClr val="accent1"/>
+          </a:lnRef>
+          <a:fillRef idx="3">
+            <a:schemeClr val="accent1"/>
+          </a:fillRef>
+          <a:effectRef idx="2">
+            <a:schemeClr val="accent1"/>
+          </a:effectRef>
+          <a:fontRef idx="minor">
+            <a:schemeClr val="lt1"/>
+          </a:fontRef>
+        </p:style>
+        <p:txBody>
+          <a:bodyPr rtlCol="0" anchor="ctr"/>
+          <a:lstStyle/>
+          <a:p>
+            <a:pPr algn="ctr"/>
+          </a:p>
+        </p:txBody>
+      </p:sp>
+    </p:spTree>
+  </p:cSld>
+  <p:clrMapOvr>
+    <a:masterClrMapping/>
+  </p:clrMapOvr>
+</p:sld>
+</file>
+
+<file path=ppt/slides/slide52.xml><?xml version="1.0" encoding="utf-8"?>
+<p:sld xmlns:a="http://schemas.openxmlformats.org/drawingml/2006/main" xmlns:p="http://schemas.openxmlformats.org/presentationml/2006/main" xmlns:r="http://schemas.openxmlformats.org/officeDocument/2006/relationships">
+  <p:cSld>
+    <p:bg>
+      <p:bgPr>
+        <a:solidFill>
+          <a:srgbClr val="FFFFFF"/>
+        </a:solidFill>
+        <a:effectLst/>
+      </p:bgPr>
+    </p:bg>
+    <p:spTree>
+      <p:nvGrpSpPr>
+        <p:cNvPr id="1" name=""/>
+        <p:cNvGrpSpPr/>
+        <p:nvPr/>
+      </p:nvGrpSpPr>
+      <p:grpSpPr/>
+      <p:sp>
+        <p:nvSpPr>
           <p:cNvPr id="2" name="Rectangle 1"/>
           <p:cNvSpPr/>
           <p:nvPr/>
@@ -53375,7 +55189,7 @@
                 <a:ea typeface="Microsoft JhengHei"/>
                 <a:cs typeface="Microsoft JhengHei"/>
               </a:rPr>
-              <a:t>RandomForest（acc 0.949 / AUC 0.811）+ Markov 雙模型海況預測</a:t>
+              <a:t>RandomForest（acc 0.692 / AUC 0.703）+ Markov 雙模型海況預測</a:t>
             </a:r>
           </a:p>
         </p:txBody>
@@ -53780,7 +55594,7 @@
                 <a:ea typeface="Microsoft JhengHei"/>
                 <a:cs typeface="Microsoft JhengHei"/>
               </a:rPr>
-              <a:t>人員雷達圖 · 疲勞指數 · Gini 0.042 · 船艦可用性四項人力決策</a:t>
+              <a:t>人員雷達圖 · 疲勞指數 · Gini 0.031 · 船艦可用性四項人力決策</a:t>
             </a:r>
           </a:p>
         </p:txBody>
@@ -53915,7 +55729,7 @@
                 <a:ea typeface="Microsoft JhengHei"/>
                 <a:cs typeface="Microsoft JhengHei"/>
               </a:rPr>
-              <a:t>25 張圖表 · 45 項 CI 全綠 · F=181.4 · χ²=349.6 · R²=0.784</a:t>
+              <a:t>25 張圖表 · 45 項 CI 全綠 · F=249.1 · χ²=232.8 · R²=0.801</a:t>
             </a:r>
           </a:p>
         </p:txBody>
